--- a/docs/Pratyaya-Synchrony-Hackathon.pptx
+++ b/docs/Pratyaya-Synchrony-Hackathon.pptx
@@ -25,9 +25,11 @@
     <p:sldId id="273" r:id="rId19"/>
     <p:sldId id="274" r:id="rId20"/>
     <p:sldId id="275" r:id="rId21"/>
+    <p:sldId id="276" r:id="rId22"/>
+    <p:sldId id="277" r:id="rId23"/>
   </p:sldIdLst>
   <p:notesMasterIdLst>
-    <p:notesMasterId r:id="rId22"/>
+    <p:notesMasterId r:id="rId24"/>
   </p:notesMasterIdLst>
   <p:sldSz cx="12192000" cy="6858000"/>
   <p:notesSz cx="6858000" cy="12192000"/>
@@ -1049,7 +1051,7 @@
           <a:p>
             <a:r>
               <a:rPr lang="en-US" dirty="0"/>
-              <a:t>Detection is defence in depth. The real guarantee is that the sensitive data is never in the room.</a:t>
+              <a:t>Point at the two bracketed citations and the two rupee figures. The citations come from retrieval; the figures come from counterfactual search. The language model supplied only the sentences around them.</a:t>
             </a:r>
             <a:endParaRPr lang="en-US" dirty="0"/>
           </a:p>
@@ -1137,7 +1139,7 @@
           <a:p>
             <a:r>
               <a:rPr lang="en-US" dirty="0"/>
-              <a:t>Volunteer the caveat before anyone asks. A candidate who marks their own homework and says so is more trustworthy than one reporting a perfect score.</a:t>
+              <a:t>Detection is defence in depth. The real guarantee is that the sensitive data is never in the room.</a:t>
             </a:r>
             <a:endParaRPr lang="en-US" dirty="0"/>
           </a:p>
@@ -1225,7 +1227,7 @@
           <a:p>
             <a:r>
               <a:rPr lang="en-US" dirty="0"/>
-              <a:t>The 0.34 ms number is the one to say out loud. It kills the assumption that a lender trades latency for explainability.</a:t>
+              <a:t>Scenario 2 is the interesting one. Data minimisation is the primary defence and the guardrail is the backstop. Say that we found this by testing rather than by assuming.</a:t>
             </a:r>
             <a:endParaRPr lang="en-US" dirty="0"/>
           </a:p>
@@ -1313,7 +1315,7 @@
           <a:p>
             <a:r>
               <a:rPr lang="en-US" dirty="0"/>
-              <a:t>Each of these is a trade-off with a reason attached. That is what separates a considered build from a generated one.</a:t>
+              <a:t>Volunteer the caveat before anyone asks. A candidate who marks their own homework and says so is more trustworthy than one reporting a perfect score.</a:t>
             </a:r>
             <a:endParaRPr lang="en-US" dirty="0"/>
           </a:p>
@@ -1401,7 +1403,7 @@
           <a:p>
             <a:r>
               <a:rPr lang="en-US" dirty="0"/>
-              <a:t>Saying this out loud is a strength. Every limitation here is one a reviewer would find in ten minutes anyway.</a:t>
+              <a:t>The 0.34 ms number is the one to say out loud. It kills the assumption that a lender trades latency for explainability.</a:t>
             </a:r>
             <a:endParaRPr lang="en-US" dirty="0"/>
           </a:p>
@@ -1577,7 +1579,7 @@
           <a:p>
             <a:r>
               <a:rPr lang="en-US" dirty="0"/>
-              <a:t>Close on the three chips. They are the promise of the system in nine words.</a:t>
+              <a:t>Each of these is a trade-off with a reason attached. That is what separates a considered build from a generated one.</a:t>
             </a:r>
             <a:endParaRPr lang="en-US" dirty="0"/>
           </a:p>
@@ -1601,6 +1603,182 @@
             <a:fld id="{F7021451-1387-4CA6-816F-3879F97B5CBC}" type="slidenum">
               <a:rPr lang="en-US"/>
               <a:t>20</a:t>
+            </a:fld>
+            <a:endParaRPr lang="en-US"/>
+          </a:p>
+        </p:txBody>
+      </p:sp>
+    </p:spTree>
+    <p:extLst>
+      <p:ext uri="{BB962C8B-B14F-4D97-AF65-F5344CB8AC3E}">
+        <p14:creationId xmlns:p14="http://schemas.microsoft.com/office/powerpoint/2010/main" val="1024086991"/>
+      </p:ext>
+    </p:extLst>
+  </p:cSld>
+  <p:clrMapOvr>
+    <a:masterClrMapping/>
+  </p:clrMapOvr>
+</p:notes>
+</file>
+
+<file path=ppt/notesSlides/notesSlide21.xml><?xml version="1.0" encoding="utf-8"?>
+<p:notes xmlns:a="http://schemas.openxmlformats.org/drawingml/2006/main" xmlns:r="http://schemas.openxmlformats.org/officeDocument/2006/relationships" xmlns:p="http://schemas.openxmlformats.org/presentationml/2006/main">
+  <p:cSld>
+    <p:spTree>
+      <p:nvGrpSpPr>
+        <p:cNvPr id="1" name=""/>
+        <p:cNvGrpSpPr/>
+        <p:nvPr/>
+      </p:nvGrpSpPr>
+      <p:grpSpPr>
+        <a:xfrm>
+          <a:off x="0" y="0"/>
+          <a:ext cx="0" cy="0"/>
+          <a:chOff x="0" y="0"/>
+          <a:chExt cx="0" cy="0"/>
+        </a:xfrm>
+      </p:grpSpPr>
+      <p:sp>
+        <p:nvSpPr>
+          <p:cNvPr id="2" name="Slide Image Placeholder 1"/>
+          <p:cNvSpPr>
+            <a:spLocks noGrp="1" noRot="1" noChangeAspect="1"/>
+          </p:cNvSpPr>
+          <p:nvPr>
+            <p:ph type="sldImg"/>
+          </p:nvPr>
+        </p:nvSpPr>
+        <p:spPr/>
+      </p:sp>
+      <p:sp>
+        <p:nvSpPr>
+          <p:cNvPr id="3" name="Notes Placeholder 2"/>
+          <p:cNvSpPr>
+            <a:spLocks noGrp="1"/>
+          </p:cNvSpPr>
+          <p:nvPr>
+            <p:ph type="body" idx="1"/>
+          </p:nvPr>
+        </p:nvSpPr>
+        <p:spPr/>
+        <p:txBody>
+          <a:bodyPr/>
+          <a:lstStyle/>
+          <a:p>
+            <a:r>
+              <a:rPr lang="en-US" dirty="0"/>
+              <a:t>Saying this out loud is a strength. Every limitation here is one a reviewer would find in ten minutes anyway.</a:t>
+            </a:r>
+            <a:endParaRPr lang="en-US" dirty="0"/>
+          </a:p>
+        </p:txBody>
+      </p:sp>
+      <p:sp>
+        <p:nvSpPr>
+          <p:cNvPr id="4" name="Slide Number Placeholder 3"/>
+          <p:cNvSpPr>
+            <a:spLocks noGrp="1"/>
+          </p:cNvSpPr>
+          <p:nvPr>
+            <p:ph type="sldNum" sz="quarter" idx="10"/>
+          </p:nvPr>
+        </p:nvSpPr>
+        <p:spPr/>
+        <p:txBody>
+          <a:bodyPr/>
+          <a:lstStyle/>
+          <a:p>
+            <a:fld id="{F7021451-1387-4CA6-816F-3879F97B5CBC}" type="slidenum">
+              <a:rPr lang="en-US"/>
+              <a:t>21</a:t>
+            </a:fld>
+            <a:endParaRPr lang="en-US"/>
+          </a:p>
+        </p:txBody>
+      </p:sp>
+    </p:spTree>
+    <p:extLst>
+      <p:ext uri="{BB962C8B-B14F-4D97-AF65-F5344CB8AC3E}">
+        <p14:creationId xmlns:p14="http://schemas.microsoft.com/office/powerpoint/2010/main" val="1024086991"/>
+      </p:ext>
+    </p:extLst>
+  </p:cSld>
+  <p:clrMapOvr>
+    <a:masterClrMapping/>
+  </p:clrMapOvr>
+</p:notes>
+</file>
+
+<file path=ppt/notesSlides/notesSlide22.xml><?xml version="1.0" encoding="utf-8"?>
+<p:notes xmlns:a="http://schemas.openxmlformats.org/drawingml/2006/main" xmlns:r="http://schemas.openxmlformats.org/officeDocument/2006/relationships" xmlns:p="http://schemas.openxmlformats.org/presentationml/2006/main">
+  <p:cSld>
+    <p:spTree>
+      <p:nvGrpSpPr>
+        <p:cNvPr id="1" name=""/>
+        <p:cNvGrpSpPr/>
+        <p:nvPr/>
+      </p:nvGrpSpPr>
+      <p:grpSpPr>
+        <a:xfrm>
+          <a:off x="0" y="0"/>
+          <a:ext cx="0" cy="0"/>
+          <a:chOff x="0" y="0"/>
+          <a:chExt cx="0" cy="0"/>
+        </a:xfrm>
+      </p:grpSpPr>
+      <p:sp>
+        <p:nvSpPr>
+          <p:cNvPr id="2" name="Slide Image Placeholder 1"/>
+          <p:cNvSpPr>
+            <a:spLocks noGrp="1" noRot="1" noChangeAspect="1"/>
+          </p:cNvSpPr>
+          <p:nvPr>
+            <p:ph type="sldImg"/>
+          </p:nvPr>
+        </p:nvSpPr>
+        <p:spPr/>
+      </p:sp>
+      <p:sp>
+        <p:nvSpPr>
+          <p:cNvPr id="3" name="Notes Placeholder 2"/>
+          <p:cNvSpPr>
+            <a:spLocks noGrp="1"/>
+          </p:cNvSpPr>
+          <p:nvPr>
+            <p:ph type="body" idx="1"/>
+          </p:nvPr>
+        </p:nvSpPr>
+        <p:spPr/>
+        <p:txBody>
+          <a:bodyPr/>
+          <a:lstStyle/>
+          <a:p>
+            <a:r>
+              <a:rPr lang="en-US" dirty="0"/>
+              <a:t>Close on the three chips. They are the promise of the system in nine words.</a:t>
+            </a:r>
+            <a:endParaRPr lang="en-US" dirty="0"/>
+          </a:p>
+        </p:txBody>
+      </p:sp>
+      <p:sp>
+        <p:nvSpPr>
+          <p:cNvPr id="4" name="Slide Number Placeholder 3"/>
+          <p:cNvSpPr>
+            <a:spLocks noGrp="1"/>
+          </p:cNvSpPr>
+          <p:nvPr>
+            <p:ph type="sldNum" sz="quarter" idx="10"/>
+          </p:nvPr>
+        </p:nvSpPr>
+        <p:spPr/>
+        <p:txBody>
+          <a:bodyPr/>
+          <a:lstStyle/>
+          <a:p>
+            <a:fld id="{F7021451-1387-4CA6-816F-3879F97B5CBC}" type="slidenum">
+              <a:rPr lang="en-US"/>
+              <a:t>22</a:t>
             </a:fld>
             <a:endParaRPr lang="en-US"/>
           </a:p>
@@ -8819,6 +8997,1055 @@
     <p:bg>
       <p:bgPr>
         <a:solidFill>
+          <a:srgbClr val="FFFFFF"/>
+        </a:solidFill>
+      </p:bgPr>
+    </p:bg>
+    <p:spTree>
+      <p:nvGrpSpPr>
+        <p:cNvPr id="1" name=""/>
+        <p:cNvGrpSpPr/>
+        <p:nvPr/>
+      </p:nvGrpSpPr>
+      <p:grpSpPr>
+        <a:xfrm>
+          <a:off x="0" y="0"/>
+          <a:ext cx="0" cy="0"/>
+          <a:chOff x="0" y="0"/>
+          <a:chExt cx="0" cy="0"/>
+        </a:xfrm>
+      </p:grpSpPr>
+      <p:sp>
+        <p:nvSpPr>
+          <p:cNvPr id="2" name="Text 0"/>
+          <p:cNvSpPr txBox="1"/>
+          <p:nvPr/>
+        </p:nvSpPr>
+        <p:spPr>
+          <a:xfrm>
+            <a:off x="502920" y="457200"/>
+            <a:ext cx="11155680" cy="1051560"/>
+          </a:xfrm>
+          <a:prstGeom prst="rect">
+            <a:avLst/>
+          </a:prstGeom>
+          <a:noFill/>
+          <a:ln/>
+        </p:spPr>
+        <p:txBody>
+          <a:bodyPr wrap="square" lIns="0" tIns="0" rIns="0" bIns="0" rtlCol="0" anchor="t"/>
+          <a:lstStyle/>
+          <a:p>
+            <a:pPr indent="0" marL="0">
+              <a:buNone/>
+            </a:pPr>
+            <a:r>
+              <a:rPr lang="en-US" sz="3400" dirty="0">
+                <a:solidFill>
+                  <a:srgbClr val="16232E"/>
+                </a:solidFill>
+                <a:latin typeface="Cambria" pitchFamily="34" charset="0"/>
+                <a:ea typeface="Cambria" pitchFamily="34" charset="-122"/>
+                <a:cs typeface="Cambria" pitchFamily="34" charset="-120"/>
+              </a:rPr>
+              <a:t>What the applicant actually reads</a:t>
+            </a:r>
+            <a:endParaRPr lang="en-US" sz="3400" dirty="0"/>
+          </a:p>
+        </p:txBody>
+      </p:sp>
+      <p:sp>
+        <p:nvSpPr>
+          <p:cNvPr id="3" name="Text 1"/>
+          <p:cNvSpPr txBox="1"/>
+          <p:nvPr/>
+        </p:nvSpPr>
+        <p:spPr>
+          <a:xfrm>
+            <a:off x="502920" y="1298448"/>
+            <a:ext cx="10698480" cy="685800"/>
+          </a:xfrm>
+          <a:prstGeom prst="rect">
+            <a:avLst/>
+          </a:prstGeom>
+          <a:noFill/>
+          <a:ln/>
+        </p:spPr>
+        <p:txBody>
+          <a:bodyPr wrap="square" lIns="0" tIns="0" rIns="0" bIns="0" rtlCol="0" anchor="t"/>
+          <a:lstStyle/>
+          <a:p>
+            <a:pPr indent="0" marL="0">
+              <a:lnSpc>
+                <a:spcPts val="2000"/>
+              </a:lnSpc>
+              <a:buNone/>
+            </a:pPr>
+            <a:r>
+              <a:rPr lang="en-US" sz="1450" dirty="0">
+                <a:solidFill>
+                  <a:srgbClr val="5A6570"/>
+                </a:solidFill>
+                <a:latin typeface="Calibri" pitchFamily="34" charset="0"/>
+                <a:ea typeface="Calibri" pitchFamily="34" charset="-122"/>
+                <a:cs typeface="Calibri" pitchFamily="34" charset="-120"/>
+              </a:rPr>
+              <a:t>Produced live by Gemini from the finished decision. Every figure in it comes from the facts block; the model added no numbers of its own.</a:t>
+            </a:r>
+            <a:endParaRPr lang="en-US" sz="1450" dirty="0"/>
+          </a:p>
+        </p:txBody>
+      </p:sp>
+      <p:sp>
+        <p:nvSpPr>
+          <p:cNvPr id="4" name="Shape 2"/>
+          <p:cNvSpPr/>
+          <p:nvPr/>
+        </p:nvSpPr>
+        <p:spPr>
+          <a:xfrm>
+            <a:off x="502920" y="1965960"/>
+            <a:ext cx="7223760" cy="3931920"/>
+          </a:xfrm>
+          <a:prstGeom prst="roundRect">
+            <a:avLst>
+              <a:gd name="adj" fmla="val 2093"/>
+            </a:avLst>
+          </a:prstGeom>
+          <a:solidFill>
+            <a:srgbClr val="F1F4F2"/>
+          </a:solidFill>
+          <a:ln/>
+          <a:effectLst>
+            <a:outerShdw sx="100000" sy="100000" kx="0" ky="0" algn="bl" rotWithShape="0" blurRad="101600" dist="25400" dir="5400000">
+              <a:srgbClr val="9AA5AE">
+                <a:alpha val="22000"/>
+              </a:srgbClr>
+            </a:outerShdw>
+          </a:effectLst>
+        </p:spPr>
+      </p:sp>
+      <p:sp>
+        <p:nvSpPr>
+          <p:cNvPr id="5" name="Text 3"/>
+          <p:cNvSpPr txBox="1"/>
+          <p:nvPr/>
+        </p:nvSpPr>
+        <p:spPr>
+          <a:xfrm>
+            <a:off x="822960" y="2212848"/>
+            <a:ext cx="6583680" cy="3474720"/>
+          </a:xfrm>
+          <a:prstGeom prst="rect">
+            <a:avLst/>
+          </a:prstGeom>
+          <a:noFill/>
+          <a:ln/>
+        </p:spPr>
+        <p:txBody>
+          <a:bodyPr wrap="square" lIns="0" tIns="0" rIns="0" bIns="0" rtlCol="0" anchor="t"/>
+          <a:lstStyle/>
+          <a:p>
+            <a:pPr indent="0" marL="0">
+              <a:lnSpc>
+                <a:spcPts val="1900"/>
+              </a:lnSpc>
+              <a:buNone/>
+            </a:pPr>
+            <a:r>
+              <a:rPr lang="en-US" sz="1300" dirty="0">
+                <a:solidFill>
+                  <a:srgbClr val="16232E"/>
+                </a:solidFill>
+                <a:latin typeface="Calibri" pitchFamily="34" charset="0"/>
+                <a:ea typeface="Calibri" pitchFamily="34" charset="-122"/>
+                <a:cs typeface="Calibri" pitchFamily="34" charset="-120"/>
+              </a:rPr>
+              <a:t>We are writing to inform you that your loan application has been declined. As you are new to formal credit, we assessed your application based on your financial habits rather than a credit bureau record </a:t>
+            </a:r>
+            <a:pPr indent="0" marL="0">
+              <a:lnSpc>
+                <a:spcPts val="1900"/>
+              </a:lnSpc>
+              <a:buNone/>
+            </a:pPr>
+            <a:r>
+              <a:rPr lang="en-US" sz="1300" b="1" dirty="0">
+                <a:solidFill>
+                  <a:srgbClr val="0E6B4F"/>
+                </a:solidFill>
+                <a:latin typeface="Calibri" pitchFamily="34" charset="0"/>
+                <a:ea typeface="Calibri" pitchFamily="34" charset="-122"/>
+                <a:cs typeface="Calibri" pitchFamily="34" charset="-120"/>
+              </a:rPr>
+              <a:t>[CIC-04]</a:t>
+            </a:r>
+            <a:pPr indent="0" marL="0">
+              <a:lnSpc>
+                <a:spcPts val="1900"/>
+              </a:lnSpc>
+              <a:buNone/>
+            </a:pPr>
+            <a:r>
+              <a:rPr lang="en-US" sz="1300" dirty="0">
+                <a:solidFill>
+                  <a:srgbClr val="16232E"/>
+                </a:solidFill>
+                <a:latin typeface="Calibri" pitchFamily="34" charset="0"/>
+                <a:ea typeface="Calibri" pitchFamily="34" charset="-122"/>
+                <a:cs typeface="Calibri" pitchFamily="34" charset="-120"/>
+              </a:rPr>
+              <a:t>.</a:t>
+            </a:r>
+            <a:endParaRPr lang="en-US" sz="1300" dirty="0"/>
+          </a:p>
+          <a:p>
+            <a:pPr indent="0" marL="0">
+              <a:lnSpc>
+                <a:spcPts val="1900"/>
+              </a:lnSpc>
+              <a:buNone/>
+            </a:pPr>
+            <a:endParaRPr lang="en-US" sz="1300" dirty="0"/>
+          </a:p>
+          <a:p>
+            <a:pPr indent="0" marL="0">
+              <a:lnSpc>
+                <a:spcPts val="1900"/>
+              </a:lnSpc>
+              <a:buNone/>
+            </a:pPr>
+            <a:r>
+              <a:rPr lang="en-US" sz="1300" dirty="0">
+                <a:solidFill>
+                  <a:srgbClr val="16232E"/>
+                </a:solidFill>
+                <a:latin typeface="Calibri" pitchFamily="34" charset="0"/>
+                <a:ea typeface="Calibri" pitchFamily="34" charset="-122"/>
+                <a:cs typeface="Calibri" pitchFamily="34" charset="-120"/>
+              </a:rPr>
+              <a:t>Our assessment identified a few areas that prevented approval. Your monthly instalment amount is currently too high relative to your income of </a:t>
+            </a:r>
+            <a:endParaRPr lang="en-US" sz="1300" dirty="0"/>
+          </a:p>
+          <a:p>
+            <a:pPr indent="0" marL="0">
+              <a:lnSpc>
+                <a:spcPts val="1900"/>
+              </a:lnSpc>
+              <a:buNone/>
+            </a:pPr>
+            <a:r>
+              <a:rPr lang="en-US" sz="1300" b="1" dirty="0">
+                <a:solidFill>
+                  <a:srgbClr val="000000"/>
+                </a:solidFill>
+                <a:latin typeface="Calibri" pitchFamily="34" charset="0"/>
+                <a:ea typeface="Calibri" pitchFamily="34" charset="-122"/>
+                <a:cs typeface="Calibri" pitchFamily="34" charset="-120"/>
+              </a:rPr>
+              <a:t>Rs 19,600</a:t>
+            </a:r>
+            <a:pPr indent="0" marL="0">
+              <a:lnSpc>
+                <a:spcPts val="1900"/>
+              </a:lnSpc>
+              <a:buNone/>
+            </a:pPr>
+            <a:r>
+              <a:rPr lang="en-US" sz="1300" dirty="0">
+                <a:solidFill>
+                  <a:srgbClr val="16232E"/>
+                </a:solidFill>
+                <a:latin typeface="Calibri" pitchFamily="34" charset="0"/>
+                <a:ea typeface="Calibri" pitchFamily="34" charset="-122"/>
+                <a:cs typeface="Calibri" pitchFamily="34" charset="-120"/>
+              </a:rPr>
+              <a:t>. Additionally, we noted that your utility bills are often paid late and your mobile recharge pattern is irregular.</a:t>
+            </a:r>
+            <a:endParaRPr lang="en-US" sz="1300" dirty="0"/>
+          </a:p>
+          <a:p>
+            <a:pPr indent="0" marL="0">
+              <a:lnSpc>
+                <a:spcPts val="1900"/>
+              </a:lnSpc>
+              <a:buNone/>
+            </a:pPr>
+            <a:endParaRPr lang="en-US" sz="1300" dirty="0"/>
+          </a:p>
+          <a:p>
+            <a:pPr indent="0" marL="0">
+              <a:lnSpc>
+                <a:spcPts val="1900"/>
+              </a:lnSpc>
+              <a:buNone/>
+            </a:pPr>
+            <a:r>
+              <a:rPr lang="en-US" sz="1300" dirty="0">
+                <a:solidFill>
+                  <a:srgbClr val="16232E"/>
+                </a:solidFill>
+                <a:latin typeface="Calibri" pitchFamily="34" charset="0"/>
+                <a:ea typeface="Calibri" pitchFamily="34" charset="-122"/>
+                <a:cs typeface="Calibri" pitchFamily="34" charset="-120"/>
+              </a:rPr>
+              <a:t>To improve your chances for future applications, you could request a smaller loan amount, such as </a:t>
+            </a:r>
+            <a:endParaRPr lang="en-US" sz="1300" dirty="0"/>
+          </a:p>
+          <a:p>
+            <a:pPr indent="0" marL="0">
+              <a:lnSpc>
+                <a:spcPts val="1900"/>
+              </a:lnSpc>
+              <a:buNone/>
+            </a:pPr>
+            <a:r>
+              <a:rPr lang="en-US" sz="1300" b="1" dirty="0">
+                <a:solidFill>
+                  <a:srgbClr val="000000"/>
+                </a:solidFill>
+                <a:latin typeface="Calibri" pitchFamily="34" charset="0"/>
+                <a:ea typeface="Calibri" pitchFamily="34" charset="-122"/>
+                <a:cs typeface="Calibri" pitchFamily="34" charset="-120"/>
+              </a:rPr>
+              <a:t>Rs 43,098</a:t>
+            </a:r>
+            <a:pPr indent="0" marL="0">
+              <a:lnSpc>
+                <a:spcPts val="1900"/>
+              </a:lnSpc>
+              <a:buNone/>
+            </a:pPr>
+            <a:r>
+              <a:rPr lang="en-US" sz="1300" dirty="0">
+                <a:solidFill>
+                  <a:srgbClr val="16232E"/>
+                </a:solidFill>
+                <a:latin typeface="Calibri" pitchFamily="34" charset="0"/>
+                <a:ea typeface="Calibri" pitchFamily="34" charset="-122"/>
+                <a:cs typeface="Calibri" pitchFamily="34" charset="-120"/>
+              </a:rPr>
+              <a:t>, or choose a longer repayment period of approximately </a:t>
+            </a:r>
+            <a:pPr indent="0" marL="0">
+              <a:lnSpc>
+                <a:spcPts val="1900"/>
+              </a:lnSpc>
+              <a:buNone/>
+            </a:pPr>
+            <a:r>
+              <a:rPr lang="en-US" sz="1300" b="1" dirty="0">
+                <a:solidFill>
+                  <a:srgbClr val="000000"/>
+                </a:solidFill>
+                <a:latin typeface="Calibri" pitchFamily="34" charset="0"/>
+                <a:ea typeface="Calibri" pitchFamily="34" charset="-122"/>
+                <a:cs typeface="Calibri" pitchFamily="34" charset="-120"/>
+              </a:rPr>
+              <a:t>14 months</a:t>
+            </a:r>
+            <a:pPr indent="0" marL="0">
+              <a:lnSpc>
+                <a:spcPts val="1900"/>
+              </a:lnSpc>
+              <a:buNone/>
+            </a:pPr>
+            <a:r>
+              <a:rPr lang="en-US" sz="1300" dirty="0">
+                <a:solidFill>
+                  <a:srgbClr val="16232E"/>
+                </a:solidFill>
+                <a:latin typeface="Calibri" pitchFamily="34" charset="0"/>
+                <a:ea typeface="Calibri" pitchFamily="34" charset="-122"/>
+                <a:cs typeface="Calibri" pitchFamily="34" charset="-120"/>
+              </a:rPr>
+              <a:t>. Both steps would lower your monthly instalment.</a:t>
+            </a:r>
+            <a:endParaRPr lang="en-US" sz="1300" dirty="0"/>
+          </a:p>
+          <a:p>
+            <a:pPr indent="0" marL="0">
+              <a:lnSpc>
+                <a:spcPts val="1900"/>
+              </a:lnSpc>
+              <a:buNone/>
+            </a:pPr>
+            <a:endParaRPr lang="en-US" sz="1300" dirty="0"/>
+          </a:p>
+          <a:p>
+            <a:pPr indent="0" marL="0">
+              <a:lnSpc>
+                <a:spcPts val="1900"/>
+              </a:lnSpc>
+              <a:buNone/>
+            </a:pPr>
+            <a:r>
+              <a:rPr lang="en-US" sz="1300" dirty="0">
+                <a:solidFill>
+                  <a:srgbClr val="16232E"/>
+                </a:solidFill>
+                <a:latin typeface="Calibri" pitchFamily="34" charset="0"/>
+                <a:ea typeface="Calibri" pitchFamily="34" charset="-122"/>
+                <a:cs typeface="Calibri" pitchFamily="34" charset="-120"/>
+              </a:rPr>
+              <a:t>In accordance with the RBI Fair Practices Code, we are providing these reasons for your application's decline in writing </a:t>
+            </a:r>
+            <a:endParaRPr lang="en-US" sz="1300" dirty="0"/>
+          </a:p>
+          <a:p>
+            <a:pPr indent="0" marL="0">
+              <a:lnSpc>
+                <a:spcPts val="1900"/>
+              </a:lnSpc>
+              <a:buNone/>
+            </a:pPr>
+            <a:r>
+              <a:rPr lang="en-US" sz="1300" b="1" dirty="0">
+                <a:solidFill>
+                  <a:srgbClr val="0E6B4F"/>
+                </a:solidFill>
+                <a:latin typeface="Calibri" pitchFamily="34" charset="0"/>
+                <a:ea typeface="Calibri" pitchFamily="34" charset="-122"/>
+                <a:cs typeface="Calibri" pitchFamily="34" charset="-120"/>
+              </a:rPr>
+              <a:t>[FPC-01]</a:t>
+            </a:r>
+            <a:pPr indent="0" marL="0">
+              <a:lnSpc>
+                <a:spcPts val="1900"/>
+              </a:lnSpc>
+              <a:buNone/>
+            </a:pPr>
+            <a:r>
+              <a:rPr lang="en-US" sz="1300" dirty="0">
+                <a:solidFill>
+                  <a:srgbClr val="16232E"/>
+                </a:solidFill>
+                <a:latin typeface="Calibri" pitchFamily="34" charset="0"/>
+                <a:ea typeface="Calibri" pitchFamily="34" charset="-122"/>
+                <a:cs typeface="Calibri" pitchFamily="34" charset="-120"/>
+              </a:rPr>
+              <a:t>.</a:t>
+            </a:r>
+            <a:endParaRPr lang="en-US" sz="1300" dirty="0"/>
+          </a:p>
+        </p:txBody>
+      </p:sp>
+      <p:sp>
+        <p:nvSpPr>
+          <p:cNvPr id="6" name="Shape 4"/>
+          <p:cNvSpPr/>
+          <p:nvPr/>
+        </p:nvSpPr>
+        <p:spPr>
+          <a:xfrm>
+            <a:off x="8046720" y="1965960"/>
+            <a:ext cx="3611880" cy="694944"/>
+          </a:xfrm>
+          <a:prstGeom prst="roundRect">
+            <a:avLst>
+              <a:gd name="adj" fmla="val 11842"/>
+            </a:avLst>
+          </a:prstGeom>
+          <a:solidFill>
+            <a:srgbClr val="FFFFFF"/>
+          </a:solidFill>
+          <a:ln w="9525">
+            <a:solidFill>
+              <a:srgbClr val="DEE4E0"/>
+            </a:solidFill>
+            <a:prstDash val="solid"/>
+          </a:ln>
+          <a:effectLst>
+            <a:outerShdw sx="100000" sy="100000" kx="0" ky="0" algn="bl" rotWithShape="0" blurRad="101600" dist="25400" dir="5400000">
+              <a:srgbClr val="9AA5AE">
+                <a:alpha val="22000"/>
+              </a:srgbClr>
+            </a:outerShdw>
+          </a:effectLst>
+        </p:spPr>
+      </p:sp>
+      <p:sp>
+        <p:nvSpPr>
+          <p:cNvPr id="7" name="Text 5"/>
+          <p:cNvSpPr txBox="1"/>
+          <p:nvPr/>
+        </p:nvSpPr>
+        <p:spPr>
+          <a:xfrm>
+            <a:off x="8247888" y="2057400"/>
+            <a:ext cx="3209544" cy="237744"/>
+          </a:xfrm>
+          <a:prstGeom prst="rect">
+            <a:avLst/>
+          </a:prstGeom>
+          <a:noFill/>
+          <a:ln/>
+        </p:spPr>
+        <p:txBody>
+          <a:bodyPr wrap="square" lIns="0" tIns="0" rIns="0" bIns="0" rtlCol="0" anchor="ctr"/>
+          <a:lstStyle/>
+          <a:p>
+            <a:pPr indent="0" marL="0">
+              <a:buNone/>
+            </a:pPr>
+            <a:r>
+              <a:rPr lang="en-US" sz="1050" spc="120" kern="0" dirty="0">
+                <a:solidFill>
+                  <a:srgbClr val="5A6570"/>
+                </a:solidFill>
+                <a:latin typeface="Calibri" pitchFamily="34" charset="0"/>
+                <a:ea typeface="Calibri" pitchFamily="34" charset="-122"/>
+                <a:cs typeface="Calibri" pitchFamily="34" charset="-120"/>
+              </a:rPr>
+              <a:t>Narrated by</a:t>
+            </a:r>
+            <a:endParaRPr lang="en-US" sz="1050" dirty="0"/>
+          </a:p>
+        </p:txBody>
+      </p:sp>
+      <p:sp>
+        <p:nvSpPr>
+          <p:cNvPr id="8" name="Text 6"/>
+          <p:cNvSpPr txBox="1"/>
+          <p:nvPr/>
+        </p:nvSpPr>
+        <p:spPr>
+          <a:xfrm>
+            <a:off x="8247888" y="2295144"/>
+            <a:ext cx="3209544" cy="292608"/>
+          </a:xfrm>
+          <a:prstGeom prst="rect">
+            <a:avLst/>
+          </a:prstGeom>
+          <a:noFill/>
+          <a:ln/>
+        </p:spPr>
+        <p:txBody>
+          <a:bodyPr wrap="square" lIns="0" tIns="0" rIns="0" bIns="0" rtlCol="0" anchor="ctr"/>
+          <a:lstStyle/>
+          <a:p>
+            <a:pPr indent="0" marL="0">
+              <a:buNone/>
+            </a:pPr>
+            <a:r>
+              <a:rPr lang="en-US" sz="1350" b="1" dirty="0">
+                <a:solidFill>
+                  <a:srgbClr val="16232E"/>
+                </a:solidFill>
+                <a:latin typeface="Calibri" pitchFamily="34" charset="0"/>
+                <a:ea typeface="Calibri" pitchFamily="34" charset="-122"/>
+                <a:cs typeface="Calibri" pitchFamily="34" charset="-120"/>
+              </a:rPr>
+              <a:t>gemini-3.1-flash-lite</a:t>
+            </a:r>
+            <a:endParaRPr lang="en-US" sz="1350" dirty="0"/>
+          </a:p>
+        </p:txBody>
+      </p:sp>
+      <p:sp>
+        <p:nvSpPr>
+          <p:cNvPr id="9" name="Shape 7"/>
+          <p:cNvSpPr/>
+          <p:nvPr/>
+        </p:nvSpPr>
+        <p:spPr>
+          <a:xfrm>
+            <a:off x="8046720" y="2770632"/>
+            <a:ext cx="3611880" cy="694944"/>
+          </a:xfrm>
+          <a:prstGeom prst="roundRect">
+            <a:avLst>
+              <a:gd name="adj" fmla="val 11842"/>
+            </a:avLst>
+          </a:prstGeom>
+          <a:solidFill>
+            <a:srgbClr val="FFFFFF"/>
+          </a:solidFill>
+          <a:ln w="9525">
+            <a:solidFill>
+              <a:srgbClr val="DEE4E0"/>
+            </a:solidFill>
+            <a:prstDash val="solid"/>
+          </a:ln>
+          <a:effectLst>
+            <a:outerShdw sx="100000" sy="100000" kx="0" ky="0" algn="bl" rotWithShape="0" blurRad="101600" dist="25400" dir="5400000">
+              <a:srgbClr val="9AA5AE">
+                <a:alpha val="22000"/>
+              </a:srgbClr>
+            </a:outerShdw>
+          </a:effectLst>
+        </p:spPr>
+      </p:sp>
+      <p:sp>
+        <p:nvSpPr>
+          <p:cNvPr id="10" name="Text 8"/>
+          <p:cNvSpPr txBox="1"/>
+          <p:nvPr/>
+        </p:nvSpPr>
+        <p:spPr>
+          <a:xfrm>
+            <a:off x="8247888" y="2862072"/>
+            <a:ext cx="3209544" cy="237744"/>
+          </a:xfrm>
+          <a:prstGeom prst="rect">
+            <a:avLst/>
+          </a:prstGeom>
+          <a:noFill/>
+          <a:ln/>
+        </p:spPr>
+        <p:txBody>
+          <a:bodyPr wrap="square" lIns="0" tIns="0" rIns="0" bIns="0" rtlCol="0" anchor="ctr"/>
+          <a:lstStyle/>
+          <a:p>
+            <a:pPr indent="0" marL="0">
+              <a:buNone/>
+            </a:pPr>
+            <a:r>
+              <a:rPr lang="en-US" sz="1050" spc="120" kern="0" dirty="0">
+                <a:solidFill>
+                  <a:srgbClr val="5A6570"/>
+                </a:solidFill>
+                <a:latin typeface="Calibri" pitchFamily="34" charset="0"/>
+                <a:ea typeface="Calibri" pitchFamily="34" charset="-122"/>
+                <a:cs typeface="Calibri" pitchFamily="34" charset="-120"/>
+              </a:rPr>
+              <a:t>End to end</a:t>
+            </a:r>
+            <a:endParaRPr lang="en-US" sz="1050" dirty="0"/>
+          </a:p>
+        </p:txBody>
+      </p:sp>
+      <p:sp>
+        <p:nvSpPr>
+          <p:cNvPr id="11" name="Text 9"/>
+          <p:cNvSpPr txBox="1"/>
+          <p:nvPr/>
+        </p:nvSpPr>
+        <p:spPr>
+          <a:xfrm>
+            <a:off x="8247888" y="3099816"/>
+            <a:ext cx="3209544" cy="292608"/>
+          </a:xfrm>
+          <a:prstGeom prst="rect">
+            <a:avLst/>
+          </a:prstGeom>
+          <a:noFill/>
+          <a:ln/>
+        </p:spPr>
+        <p:txBody>
+          <a:bodyPr wrap="square" lIns="0" tIns="0" rIns="0" bIns="0" rtlCol="0" anchor="ctr"/>
+          <a:lstStyle/>
+          <a:p>
+            <a:pPr indent="0" marL="0">
+              <a:buNone/>
+            </a:pPr>
+            <a:r>
+              <a:rPr lang="en-US" sz="1350" b="1" dirty="0">
+                <a:solidFill>
+                  <a:srgbClr val="16232E"/>
+                </a:solidFill>
+                <a:latin typeface="Calibri" pitchFamily="34" charset="0"/>
+                <a:ea typeface="Calibri" pitchFamily="34" charset="-122"/>
+                <a:cs typeface="Calibri" pitchFamily="34" charset="-120"/>
+              </a:rPr>
+              <a:t>3.7 seconds</a:t>
+            </a:r>
+            <a:endParaRPr lang="en-US" sz="1350" dirty="0"/>
+          </a:p>
+        </p:txBody>
+      </p:sp>
+      <p:sp>
+        <p:nvSpPr>
+          <p:cNvPr id="12" name="Shape 10"/>
+          <p:cNvSpPr/>
+          <p:nvPr/>
+        </p:nvSpPr>
+        <p:spPr>
+          <a:xfrm>
+            <a:off x="8046720" y="3575304"/>
+            <a:ext cx="3611880" cy="694944"/>
+          </a:xfrm>
+          <a:prstGeom prst="roundRect">
+            <a:avLst>
+              <a:gd name="adj" fmla="val 11842"/>
+            </a:avLst>
+          </a:prstGeom>
+          <a:solidFill>
+            <a:srgbClr val="FFFFFF"/>
+          </a:solidFill>
+          <a:ln w="9525">
+            <a:solidFill>
+              <a:srgbClr val="DEE4E0"/>
+            </a:solidFill>
+            <a:prstDash val="solid"/>
+          </a:ln>
+          <a:effectLst>
+            <a:outerShdw sx="100000" sy="100000" kx="0" ky="0" algn="bl" rotWithShape="0" blurRad="101600" dist="25400" dir="5400000">
+              <a:srgbClr val="9AA5AE">
+                <a:alpha val="22000"/>
+              </a:srgbClr>
+            </a:outerShdw>
+          </a:effectLst>
+        </p:spPr>
+      </p:sp>
+      <p:sp>
+        <p:nvSpPr>
+          <p:cNvPr id="13" name="Text 11"/>
+          <p:cNvSpPr txBox="1"/>
+          <p:nvPr/>
+        </p:nvSpPr>
+        <p:spPr>
+          <a:xfrm>
+            <a:off x="8247888" y="3666744"/>
+            <a:ext cx="3209544" cy="237744"/>
+          </a:xfrm>
+          <a:prstGeom prst="rect">
+            <a:avLst/>
+          </a:prstGeom>
+          <a:noFill/>
+          <a:ln/>
+        </p:spPr>
+        <p:txBody>
+          <a:bodyPr wrap="square" lIns="0" tIns="0" rIns="0" bIns="0" rtlCol="0" anchor="ctr"/>
+          <a:lstStyle/>
+          <a:p>
+            <a:pPr indent="0" marL="0">
+              <a:buNone/>
+            </a:pPr>
+            <a:r>
+              <a:rPr lang="en-US" sz="1050" spc="120" kern="0" dirty="0">
+                <a:solidFill>
+                  <a:srgbClr val="5A6570"/>
+                </a:solidFill>
+                <a:latin typeface="Calibri" pitchFamily="34" charset="0"/>
+                <a:ea typeface="Calibri" pitchFamily="34" charset="-122"/>
+                <a:cs typeface="Calibri" pitchFamily="34" charset="-120"/>
+              </a:rPr>
+              <a:t>Guardrails</a:t>
+            </a:r>
+            <a:endParaRPr lang="en-US" sz="1050" dirty="0"/>
+          </a:p>
+        </p:txBody>
+      </p:sp>
+      <p:sp>
+        <p:nvSpPr>
+          <p:cNvPr id="14" name="Text 12"/>
+          <p:cNvSpPr txBox="1"/>
+          <p:nvPr/>
+        </p:nvSpPr>
+        <p:spPr>
+          <a:xfrm>
+            <a:off x="8247888" y="3904488"/>
+            <a:ext cx="3209544" cy="292608"/>
+          </a:xfrm>
+          <a:prstGeom prst="rect">
+            <a:avLst/>
+          </a:prstGeom>
+          <a:noFill/>
+          <a:ln/>
+        </p:spPr>
+        <p:txBody>
+          <a:bodyPr wrap="square" lIns="0" tIns="0" rIns="0" bIns="0" rtlCol="0" anchor="ctr"/>
+          <a:lstStyle/>
+          <a:p>
+            <a:pPr indent="0" marL="0">
+              <a:buNone/>
+            </a:pPr>
+            <a:r>
+              <a:rPr lang="en-US" sz="1350" b="1" dirty="0">
+                <a:solidFill>
+                  <a:srgbClr val="16232E"/>
+                </a:solidFill>
+                <a:latin typeface="Calibri" pitchFamily="34" charset="0"/>
+                <a:ea typeface="Calibri" pitchFamily="34" charset="-122"/>
+                <a:cs typeface="Calibri" pitchFamily="34" charset="-120"/>
+              </a:rPr>
+              <a:t>passed</a:t>
+            </a:r>
+            <a:endParaRPr lang="en-US" sz="1350" dirty="0"/>
+          </a:p>
+        </p:txBody>
+      </p:sp>
+      <p:sp>
+        <p:nvSpPr>
+          <p:cNvPr id="15" name="Shape 13"/>
+          <p:cNvSpPr/>
+          <p:nvPr/>
+        </p:nvSpPr>
+        <p:spPr>
+          <a:xfrm>
+            <a:off x="8046720" y="4379976"/>
+            <a:ext cx="3611880" cy="694944"/>
+          </a:xfrm>
+          <a:prstGeom prst="roundRect">
+            <a:avLst>
+              <a:gd name="adj" fmla="val 11842"/>
+            </a:avLst>
+          </a:prstGeom>
+          <a:solidFill>
+            <a:srgbClr val="FFFFFF"/>
+          </a:solidFill>
+          <a:ln w="9525">
+            <a:solidFill>
+              <a:srgbClr val="DEE4E0"/>
+            </a:solidFill>
+            <a:prstDash val="solid"/>
+          </a:ln>
+          <a:effectLst>
+            <a:outerShdw sx="100000" sy="100000" kx="0" ky="0" algn="bl" rotWithShape="0" blurRad="101600" dist="25400" dir="5400000">
+              <a:srgbClr val="9AA5AE">
+                <a:alpha val="22000"/>
+              </a:srgbClr>
+            </a:outerShdw>
+          </a:effectLst>
+        </p:spPr>
+      </p:sp>
+      <p:sp>
+        <p:nvSpPr>
+          <p:cNvPr id="16" name="Text 14"/>
+          <p:cNvSpPr txBox="1"/>
+          <p:nvPr/>
+        </p:nvSpPr>
+        <p:spPr>
+          <a:xfrm>
+            <a:off x="8247888" y="4471416"/>
+            <a:ext cx="3209544" cy="237744"/>
+          </a:xfrm>
+          <a:prstGeom prst="rect">
+            <a:avLst/>
+          </a:prstGeom>
+          <a:noFill/>
+          <a:ln/>
+        </p:spPr>
+        <p:txBody>
+          <a:bodyPr wrap="square" lIns="0" tIns="0" rIns="0" bIns="0" rtlCol="0" anchor="ctr"/>
+          <a:lstStyle/>
+          <a:p>
+            <a:pPr indent="0" marL="0">
+              <a:buNone/>
+            </a:pPr>
+            <a:r>
+              <a:rPr lang="en-US" sz="1050" spc="120" kern="0" dirty="0">
+                <a:solidFill>
+                  <a:srgbClr val="5A6570"/>
+                </a:solidFill>
+                <a:latin typeface="Calibri" pitchFamily="34" charset="0"/>
+                <a:ea typeface="Calibri" pitchFamily="34" charset="-122"/>
+                <a:cs typeface="Calibri" pitchFamily="34" charset="-120"/>
+              </a:rPr>
+              <a:t>Citations</a:t>
+            </a:r>
+            <a:endParaRPr lang="en-US" sz="1050" dirty="0"/>
+          </a:p>
+        </p:txBody>
+      </p:sp>
+      <p:sp>
+        <p:nvSpPr>
+          <p:cNvPr id="17" name="Text 15"/>
+          <p:cNvSpPr txBox="1"/>
+          <p:nvPr/>
+        </p:nvSpPr>
+        <p:spPr>
+          <a:xfrm>
+            <a:off x="8247888" y="4709160"/>
+            <a:ext cx="3209544" cy="292608"/>
+          </a:xfrm>
+          <a:prstGeom prst="rect">
+            <a:avLst/>
+          </a:prstGeom>
+          <a:noFill/>
+          <a:ln/>
+        </p:spPr>
+        <p:txBody>
+          <a:bodyPr wrap="square" lIns="0" tIns="0" rIns="0" bIns="0" rtlCol="0" anchor="ctr"/>
+          <a:lstStyle/>
+          <a:p>
+            <a:pPr indent="0" marL="0">
+              <a:buNone/>
+            </a:pPr>
+            <a:r>
+              <a:rPr lang="en-US" sz="1350" b="1" dirty="0">
+                <a:solidFill>
+                  <a:srgbClr val="16232E"/>
+                </a:solidFill>
+                <a:latin typeface="Calibri" pitchFamily="34" charset="0"/>
+                <a:ea typeface="Calibri" pitchFamily="34" charset="-122"/>
+                <a:cs typeface="Calibri" pitchFamily="34" charset="-120"/>
+              </a:rPr>
+              <a:t>CIC-04 · FPC-01 · DL-04</a:t>
+            </a:r>
+            <a:endParaRPr lang="en-US" sz="1350" dirty="0"/>
+          </a:p>
+        </p:txBody>
+      </p:sp>
+      <p:sp>
+        <p:nvSpPr>
+          <p:cNvPr id="18" name="Shape 16"/>
+          <p:cNvSpPr/>
+          <p:nvPr/>
+        </p:nvSpPr>
+        <p:spPr>
+          <a:xfrm>
+            <a:off x="8046720" y="5184648"/>
+            <a:ext cx="3611880" cy="694944"/>
+          </a:xfrm>
+          <a:prstGeom prst="roundRect">
+            <a:avLst>
+              <a:gd name="adj" fmla="val 11842"/>
+            </a:avLst>
+          </a:prstGeom>
+          <a:solidFill>
+            <a:srgbClr val="FFFFFF"/>
+          </a:solidFill>
+          <a:ln w="9525">
+            <a:solidFill>
+              <a:srgbClr val="DEE4E0"/>
+            </a:solidFill>
+            <a:prstDash val="solid"/>
+          </a:ln>
+          <a:effectLst>
+            <a:outerShdw sx="100000" sy="100000" kx="0" ky="0" algn="bl" rotWithShape="0" blurRad="101600" dist="25400" dir="5400000">
+              <a:srgbClr val="9AA5AE">
+                <a:alpha val="22000"/>
+              </a:srgbClr>
+            </a:outerShdw>
+          </a:effectLst>
+        </p:spPr>
+      </p:sp>
+      <p:sp>
+        <p:nvSpPr>
+          <p:cNvPr id="19" name="Text 17"/>
+          <p:cNvSpPr txBox="1"/>
+          <p:nvPr/>
+        </p:nvSpPr>
+        <p:spPr>
+          <a:xfrm>
+            <a:off x="8247888" y="5276088"/>
+            <a:ext cx="3209544" cy="237744"/>
+          </a:xfrm>
+          <a:prstGeom prst="rect">
+            <a:avLst/>
+          </a:prstGeom>
+          <a:noFill/>
+          <a:ln/>
+        </p:spPr>
+        <p:txBody>
+          <a:bodyPr wrap="square" lIns="0" tIns="0" rIns="0" bIns="0" rtlCol="0" anchor="ctr"/>
+          <a:lstStyle/>
+          <a:p>
+            <a:pPr indent="0" marL="0">
+              <a:buNone/>
+            </a:pPr>
+            <a:r>
+              <a:rPr lang="en-US" sz="1050" spc="120" kern="0" dirty="0">
+                <a:solidFill>
+                  <a:srgbClr val="5A6570"/>
+                </a:solidFill>
+                <a:latin typeface="Calibri" pitchFamily="34" charset="0"/>
+                <a:ea typeface="Calibri" pitchFamily="34" charset="-122"/>
+                <a:cs typeface="Calibri" pitchFamily="34" charset="-120"/>
+              </a:rPr>
+              <a:t>Invented facts</a:t>
+            </a:r>
+            <a:endParaRPr lang="en-US" sz="1050" dirty="0"/>
+          </a:p>
+        </p:txBody>
+      </p:sp>
+      <p:sp>
+        <p:nvSpPr>
+          <p:cNvPr id="20" name="Text 18"/>
+          <p:cNvSpPr txBox="1"/>
+          <p:nvPr/>
+        </p:nvSpPr>
+        <p:spPr>
+          <a:xfrm>
+            <a:off x="8247888" y="5513832"/>
+            <a:ext cx="3209544" cy="292608"/>
+          </a:xfrm>
+          <a:prstGeom prst="rect">
+            <a:avLst/>
+          </a:prstGeom>
+          <a:noFill/>
+          <a:ln/>
+        </p:spPr>
+        <p:txBody>
+          <a:bodyPr wrap="square" lIns="0" tIns="0" rIns="0" bIns="0" rtlCol="0" anchor="ctr"/>
+          <a:lstStyle/>
+          <a:p>
+            <a:pPr indent="0" marL="0">
+              <a:buNone/>
+            </a:pPr>
+            <a:r>
+              <a:rPr lang="en-US" sz="1350" b="1" dirty="0">
+                <a:solidFill>
+                  <a:srgbClr val="0E6B4F"/>
+                </a:solidFill>
+                <a:latin typeface="Calibri" pitchFamily="34" charset="0"/>
+                <a:ea typeface="Calibri" pitchFamily="34" charset="-122"/>
+                <a:cs typeface="Calibri" pitchFamily="34" charset="-120"/>
+              </a:rPr>
+              <a:t>none</a:t>
+            </a:r>
+            <a:endParaRPr lang="en-US" sz="1350" dirty="0"/>
+          </a:p>
+        </p:txBody>
+      </p:sp>
+      <p:sp>
+        <p:nvSpPr>
+          <p:cNvPr id="21" name="Text 19"/>
+          <p:cNvSpPr txBox="1"/>
+          <p:nvPr/>
+        </p:nvSpPr>
+        <p:spPr>
+          <a:xfrm>
+            <a:off x="502920" y="6327648"/>
+            <a:ext cx="11155680" cy="301752"/>
+          </a:xfrm>
+          <a:prstGeom prst="rect">
+            <a:avLst/>
+          </a:prstGeom>
+          <a:noFill/>
+          <a:ln/>
+        </p:spPr>
+        <p:txBody>
+          <a:bodyPr wrap="square" lIns="0" tIns="0" rIns="0" bIns="0" rtlCol="0" anchor="t"/>
+          <a:lstStyle/>
+          <a:p>
+            <a:pPr indent="0" marL="0">
+              <a:buNone/>
+            </a:pPr>
+            <a:r>
+              <a:rPr lang="en-US" sz="1050" i="1" dirty="0">
+                <a:solidFill>
+                  <a:srgbClr val="8A949C"/>
+                </a:solidFill>
+                <a:latin typeface="Calibri" pitchFamily="34" charset="0"/>
+                <a:ea typeface="Calibri" pitchFamily="34" charset="-122"/>
+                <a:cs typeface="Calibri" pitchFamily="34" charset="-120"/>
+              </a:rPr>
+              <a:t>Rs 43,098 and 14 months are the recourse targets the model computed, re-scored against the real decision boundary — not figures the language model chose</a:t>
+            </a:r>
+            <a:endParaRPr lang="en-US" sz="1050" dirty="0"/>
+          </a:p>
+        </p:txBody>
+      </p:sp>
+    </p:spTree>
+  </p:cSld>
+  <p:clrMapOvr>
+    <a:masterClrMapping/>
+  </p:clrMapOvr>
+</p:sld>
+</file>
+
+<file path=ppt/slides/slide16.xml><?xml version="1.0" encoding="utf-8"?>
+<p:sld xmlns:a="http://schemas.openxmlformats.org/drawingml/2006/main" xmlns:r="http://schemas.openxmlformats.org/officeDocument/2006/relationships" xmlns:p="http://schemas.openxmlformats.org/presentationml/2006/main">
+  <p:cSld name="Slide 16">
+    <p:bg>
+      <p:bgPr>
+        <a:solidFill>
           <a:srgbClr val="16232E"/>
         </a:solidFill>
       </p:bgPr>
@@ -9473,9 +10700,9 @@
 </p:sld>
 </file>
 
-<file path=ppt/slides/slide16.xml><?xml version="1.0" encoding="utf-8"?>
+<file path=ppt/slides/slide17.xml><?xml version="1.0" encoding="utf-8"?>
 <p:sld xmlns:a="http://schemas.openxmlformats.org/drawingml/2006/main" xmlns:r="http://schemas.openxmlformats.org/officeDocument/2006/relationships" xmlns:p="http://schemas.openxmlformats.org/presentationml/2006/main">
-  <p:cSld name="Slide 16">
+  <p:cSld name="Slide 17">
     <p:bg>
       <p:bgPr>
         <a:solidFill>
@@ -9530,6 +10757,1215 @@
                 <a:ea typeface="Cambria" pitchFamily="34" charset="-122"/>
                 <a:cs typeface="Cambria" pitchFamily="34" charset="-120"/>
               </a:rPr>
+              <a:t>Guardrails, demonstrated against the live model</a:t>
+            </a:r>
+            <a:endParaRPr lang="en-US" sz="3400" dirty="0"/>
+          </a:p>
+        </p:txBody>
+      </p:sp>
+      <p:sp>
+        <p:nvSpPr>
+          <p:cNvPr id="3" name="Text 1"/>
+          <p:cNvSpPr txBox="1"/>
+          <p:nvPr/>
+        </p:nvSpPr>
+        <p:spPr>
+          <a:xfrm>
+            <a:off x="502920" y="1298448"/>
+            <a:ext cx="10789920" cy="685800"/>
+          </a:xfrm>
+          <a:prstGeom prst="rect">
+            <a:avLst/>
+          </a:prstGeom>
+          <a:noFill/>
+          <a:ln/>
+        </p:spPr>
+        <p:txBody>
+          <a:bodyPr wrap="square" lIns="0" tIns="0" rIns="0" bIns="0" rtlCol="0" anchor="t"/>
+          <a:lstStyle/>
+          <a:p>
+            <a:pPr indent="0" marL="0">
+              <a:lnSpc>
+                <a:spcPts val="2000"/>
+              </a:lnSpc>
+              <a:buNone/>
+            </a:pPr>
+            <a:r>
+              <a:rPr lang="en-US" sz="1450" dirty="0">
+                <a:solidFill>
+                  <a:srgbClr val="5A6570"/>
+                </a:solidFill>
+                <a:latin typeface="Calibri" pitchFamily="34" charset="0"/>
+                <a:ea typeface="Calibri" pitchFamily="34" charset="-122"/>
+                <a:cs typeface="Calibri" pitchFamily="34" charset="-120"/>
+              </a:rPr>
+              <a:t>Five scenarios run against the real service. In every blocked case the applicant still received the decision, the reasons, the recourse and the citations — the guardrail removes the wording, never the substance.</a:t>
+            </a:r>
+            <a:endParaRPr lang="en-US" sz="1450" dirty="0"/>
+          </a:p>
+        </p:txBody>
+      </p:sp>
+      <p:sp>
+        <p:nvSpPr>
+          <p:cNvPr id="4" name="Shape 2"/>
+          <p:cNvSpPr/>
+          <p:nvPr/>
+        </p:nvSpPr>
+        <p:spPr>
+          <a:xfrm>
+            <a:off x="502920" y="2212848"/>
+            <a:ext cx="11155680" cy="658368"/>
+          </a:xfrm>
+          <a:prstGeom prst="roundRect">
+            <a:avLst>
+              <a:gd name="adj" fmla="val 12500"/>
+            </a:avLst>
+          </a:prstGeom>
+          <a:solidFill>
+            <a:srgbClr val="E3F0E9"/>
+          </a:solidFill>
+          <a:ln/>
+          <a:effectLst>
+            <a:outerShdw sx="100000" sy="100000" kx="0" ky="0" algn="bl" rotWithShape="0" blurRad="101600" dist="25400" dir="5400000">
+              <a:srgbClr val="9AA5AE">
+                <a:alpha val="22000"/>
+              </a:srgbClr>
+            </a:outerShdw>
+          </a:effectLst>
+        </p:spPr>
+      </p:sp>
+      <p:sp>
+        <p:nvSpPr>
+          <p:cNvPr id="5" name="Shape 3"/>
+          <p:cNvSpPr/>
+          <p:nvPr/>
+        </p:nvSpPr>
+        <p:spPr>
+          <a:xfrm>
+            <a:off x="704088" y="2350008"/>
+            <a:ext cx="384048" cy="384048"/>
+          </a:xfrm>
+          <a:prstGeom prst="ellipse">
+            <a:avLst/>
+          </a:prstGeom>
+          <a:solidFill>
+            <a:srgbClr val="0E6B4F"/>
+          </a:solidFill>
+          <a:ln/>
+        </p:spPr>
+      </p:sp>
+      <p:sp>
+        <p:nvSpPr>
+          <p:cNvPr id="6" name="Text 4"/>
+          <p:cNvSpPr txBox="1"/>
+          <p:nvPr/>
+        </p:nvSpPr>
+        <p:spPr>
+          <a:xfrm>
+            <a:off x="704088" y="2350008"/>
+            <a:ext cx="384048" cy="384048"/>
+          </a:xfrm>
+          <a:prstGeom prst="rect">
+            <a:avLst/>
+          </a:prstGeom>
+          <a:noFill/>
+          <a:ln/>
+        </p:spPr>
+        <p:txBody>
+          <a:bodyPr wrap="square" lIns="0" tIns="0" rIns="0" bIns="0" rtlCol="0" anchor="ctr"/>
+          <a:lstStyle/>
+          <a:p>
+            <a:pPr algn="ctr" indent="0" marL="0">
+              <a:buNone/>
+            </a:pPr>
+            <a:r>
+              <a:rPr lang="en-US" sz="1300" b="1" dirty="0">
+                <a:solidFill>
+                  <a:srgbClr val="FFFFFF"/>
+                </a:solidFill>
+                <a:latin typeface="Calibri" pitchFamily="34" charset="0"/>
+                <a:ea typeface="Calibri" pitchFamily="34" charset="-122"/>
+                <a:cs typeface="Calibri" pitchFamily="34" charset="-120"/>
+              </a:rPr>
+              <a:t>1</a:t>
+            </a:r>
+            <a:endParaRPr lang="en-US" sz="1300" dirty="0"/>
+          </a:p>
+        </p:txBody>
+      </p:sp>
+      <p:sp>
+        <p:nvSpPr>
+          <p:cNvPr id="7" name="Text 5"/>
+          <p:cNvSpPr txBox="1"/>
+          <p:nvPr/>
+        </p:nvSpPr>
+        <p:spPr>
+          <a:xfrm>
+            <a:off x="1280160" y="2286000"/>
+            <a:ext cx="4572000" cy="274320"/>
+          </a:xfrm>
+          <a:prstGeom prst="rect">
+            <a:avLst/>
+          </a:prstGeom>
+          <a:noFill/>
+          <a:ln/>
+        </p:spPr>
+        <p:txBody>
+          <a:bodyPr wrap="square" lIns="0" tIns="0" rIns="0" bIns="0" rtlCol="0" anchor="ctr"/>
+          <a:lstStyle/>
+          <a:p>
+            <a:pPr indent="0" marL="0">
+              <a:buNone/>
+            </a:pPr>
+            <a:r>
+              <a:rPr lang="en-US" sz="1300" b="1" dirty="0">
+                <a:solidFill>
+                  <a:srgbClr val="16232E"/>
+                </a:solidFill>
+                <a:latin typeface="Calibri" pitchFamily="34" charset="0"/>
+                <a:ea typeface="Calibri" pitchFamily="34" charset="-122"/>
+                <a:cs typeface="Calibri" pitchFamily="34" charset="-120"/>
+              </a:rPr>
+              <a:t>Normal decline</a:t>
+            </a:r>
+            <a:endParaRPr lang="en-US" sz="1300" dirty="0"/>
+          </a:p>
+        </p:txBody>
+      </p:sp>
+      <p:sp>
+        <p:nvSpPr>
+          <p:cNvPr id="8" name="Text 6"/>
+          <p:cNvSpPr txBox="1"/>
+          <p:nvPr/>
+        </p:nvSpPr>
+        <p:spPr>
+          <a:xfrm>
+            <a:off x="1280160" y="2551176"/>
+            <a:ext cx="7223760" cy="274320"/>
+          </a:xfrm>
+          <a:prstGeom prst="rect">
+            <a:avLst/>
+          </a:prstGeom>
+          <a:noFill/>
+          <a:ln/>
+        </p:spPr>
+        <p:txBody>
+          <a:bodyPr wrap="square" lIns="0" tIns="0" rIns="0" bIns="0" rtlCol="0" anchor="ctr"/>
+          <a:lstStyle/>
+          <a:p>
+            <a:pPr indent="0" marL="0">
+              <a:buNone/>
+            </a:pPr>
+            <a:r>
+              <a:rPr lang="en-US" sz="1150" dirty="0">
+                <a:solidFill>
+                  <a:srgbClr val="5A6570"/>
+                </a:solidFill>
+                <a:latin typeface="Calibri" pitchFamily="34" charset="0"/>
+                <a:ea typeface="Calibri" pitchFamily="34" charset="-122"/>
+                <a:cs typeface="Calibri" pitchFamily="34" charset="-120"/>
+              </a:rPr>
+              <a:t>Gemini narrates. Nothing blocked.</a:t>
+            </a:r>
+            <a:endParaRPr lang="en-US" sz="1150" dirty="0"/>
+          </a:p>
+        </p:txBody>
+      </p:sp>
+      <p:sp>
+        <p:nvSpPr>
+          <p:cNvPr id="9" name="Text 7"/>
+          <p:cNvSpPr txBox="1"/>
+          <p:nvPr/>
+        </p:nvSpPr>
+        <p:spPr>
+          <a:xfrm>
+            <a:off x="8732520" y="2286000"/>
+            <a:ext cx="2743200" cy="512064"/>
+          </a:xfrm>
+          <a:prstGeom prst="rect">
+            <a:avLst/>
+          </a:prstGeom>
+          <a:noFill/>
+          <a:ln/>
+        </p:spPr>
+        <p:txBody>
+          <a:bodyPr wrap="square" lIns="0" tIns="0" rIns="0" bIns="0" rtlCol="0" anchor="ctr"/>
+          <a:lstStyle/>
+          <a:p>
+            <a:pPr algn="r" indent="0" marL="0">
+              <a:buNone/>
+            </a:pPr>
+            <a:r>
+              <a:rPr lang="en-US" sz="1350" b="1" dirty="0">
+                <a:solidFill>
+                  <a:srgbClr val="0E6B4F"/>
+                </a:solidFill>
+                <a:latin typeface="Calibri" pitchFamily="34" charset="0"/>
+                <a:ea typeface="Calibri" pitchFamily="34" charset="-122"/>
+                <a:cs typeface="Calibri" pitchFamily="34" charset="-120"/>
+              </a:rPr>
+              <a:t>allowed</a:t>
+            </a:r>
+            <a:endParaRPr lang="en-US" sz="1350" dirty="0"/>
+          </a:p>
+        </p:txBody>
+      </p:sp>
+      <p:sp>
+        <p:nvSpPr>
+          <p:cNvPr id="10" name="Shape 8"/>
+          <p:cNvSpPr/>
+          <p:nvPr/>
+        </p:nvSpPr>
+        <p:spPr>
+          <a:xfrm>
+            <a:off x="502920" y="2971800"/>
+            <a:ext cx="11155680" cy="658368"/>
+          </a:xfrm>
+          <a:prstGeom prst="roundRect">
+            <a:avLst>
+              <a:gd name="adj" fmla="val 12500"/>
+            </a:avLst>
+          </a:prstGeom>
+          <a:solidFill>
+            <a:srgbClr val="E3F0E9"/>
+          </a:solidFill>
+          <a:ln/>
+          <a:effectLst>
+            <a:outerShdw sx="100000" sy="100000" kx="0" ky="0" algn="bl" rotWithShape="0" blurRad="101600" dist="25400" dir="5400000">
+              <a:srgbClr val="9AA5AE">
+                <a:alpha val="22000"/>
+              </a:srgbClr>
+            </a:outerShdw>
+          </a:effectLst>
+        </p:spPr>
+      </p:sp>
+      <p:sp>
+        <p:nvSpPr>
+          <p:cNvPr id="11" name="Shape 9"/>
+          <p:cNvSpPr/>
+          <p:nvPr/>
+        </p:nvSpPr>
+        <p:spPr>
+          <a:xfrm>
+            <a:off x="704088" y="3108960"/>
+            <a:ext cx="384048" cy="384048"/>
+          </a:xfrm>
+          <a:prstGeom prst="ellipse">
+            <a:avLst/>
+          </a:prstGeom>
+          <a:solidFill>
+            <a:srgbClr val="0E6B4F"/>
+          </a:solidFill>
+          <a:ln/>
+        </p:spPr>
+      </p:sp>
+      <p:sp>
+        <p:nvSpPr>
+          <p:cNvPr id="12" name="Text 10"/>
+          <p:cNvSpPr txBox="1"/>
+          <p:nvPr/>
+        </p:nvSpPr>
+        <p:spPr>
+          <a:xfrm>
+            <a:off x="704088" y="3108960"/>
+            <a:ext cx="384048" cy="384048"/>
+          </a:xfrm>
+          <a:prstGeom prst="rect">
+            <a:avLst/>
+          </a:prstGeom>
+          <a:noFill/>
+          <a:ln/>
+        </p:spPr>
+        <p:txBody>
+          <a:bodyPr wrap="square" lIns="0" tIns="0" rIns="0" bIns="0" rtlCol="0" anchor="ctr"/>
+          <a:lstStyle/>
+          <a:p>
+            <a:pPr algn="ctr" indent="0" marL="0">
+              <a:buNone/>
+            </a:pPr>
+            <a:r>
+              <a:rPr lang="en-US" sz="1300" b="1" dirty="0">
+                <a:solidFill>
+                  <a:srgbClr val="FFFFFF"/>
+                </a:solidFill>
+                <a:latin typeface="Calibri" pitchFamily="34" charset="0"/>
+                <a:ea typeface="Calibri" pitchFamily="34" charset="-122"/>
+                <a:cs typeface="Calibri" pitchFamily="34" charset="-120"/>
+              </a:rPr>
+              <a:t>2</a:t>
+            </a:r>
+            <a:endParaRPr lang="en-US" sz="1300" dirty="0"/>
+          </a:p>
+        </p:txBody>
+      </p:sp>
+      <p:sp>
+        <p:nvSpPr>
+          <p:cNvPr id="13" name="Text 11"/>
+          <p:cNvSpPr txBox="1"/>
+          <p:nvPr/>
+        </p:nvSpPr>
+        <p:spPr>
+          <a:xfrm>
+            <a:off x="1280160" y="3044952"/>
+            <a:ext cx="4572000" cy="274320"/>
+          </a:xfrm>
+          <a:prstGeom prst="rect">
+            <a:avLst/>
+          </a:prstGeom>
+          <a:noFill/>
+          <a:ln/>
+        </p:spPr>
+        <p:txBody>
+          <a:bodyPr wrap="square" lIns="0" tIns="0" rIns="0" bIns="0" rtlCol="0" anchor="ctr"/>
+          <a:lstStyle/>
+          <a:p>
+            <a:pPr indent="0" marL="0">
+              <a:buNone/>
+            </a:pPr>
+            <a:r>
+              <a:rPr lang="en-US" sz="1300" b="1" dirty="0">
+                <a:solidFill>
+                  <a:srgbClr val="16232E"/>
+                </a:solidFill>
+                <a:latin typeface="Calibri" pitchFamily="34" charset="0"/>
+                <a:ea typeface="Calibri" pitchFamily="34" charset="-122"/>
+                <a:cs typeface="Calibri" pitchFamily="34" charset="-120"/>
+              </a:rPr>
+              <a:t>Injection in a field that is not a top reason</a:t>
+            </a:r>
+            <a:endParaRPr lang="en-US" sz="1300" dirty="0"/>
+          </a:p>
+        </p:txBody>
+      </p:sp>
+      <p:sp>
+        <p:nvSpPr>
+          <p:cNvPr id="14" name="Text 12"/>
+          <p:cNvSpPr txBox="1"/>
+          <p:nvPr/>
+        </p:nvSpPr>
+        <p:spPr>
+          <a:xfrm>
+            <a:off x="1280160" y="3310128"/>
+            <a:ext cx="7223760" cy="274320"/>
+          </a:xfrm>
+          <a:prstGeom prst="rect">
+            <a:avLst/>
+          </a:prstGeom>
+          <a:noFill/>
+          <a:ln/>
+        </p:spPr>
+        <p:txBody>
+          <a:bodyPr wrap="square" lIns="0" tIns="0" rIns="0" bIns="0" rtlCol="0" anchor="ctr"/>
+          <a:lstStyle/>
+          <a:p>
+            <a:pPr indent="0" marL="0">
+              <a:buNone/>
+            </a:pPr>
+            <a:r>
+              <a:rPr lang="en-US" sz="1150" dirty="0">
+                <a:solidFill>
+                  <a:srgbClr val="5A6570"/>
+                </a:solidFill>
+                <a:latin typeface="Calibri" pitchFamily="34" charset="0"/>
+                <a:ea typeface="Calibri" pitchFamily="34" charset="-122"/>
+                <a:cs typeface="Calibri" pitchFamily="34" charset="-120"/>
+              </a:rPr>
+              <a:t>The prompt carries only the top reason codes, so the poisoned value never reaches the model.</a:t>
+            </a:r>
+            <a:endParaRPr lang="en-US" sz="1150" dirty="0"/>
+          </a:p>
+        </p:txBody>
+      </p:sp>
+      <p:sp>
+        <p:nvSpPr>
+          <p:cNvPr id="15" name="Text 13"/>
+          <p:cNvSpPr txBox="1"/>
+          <p:nvPr/>
+        </p:nvSpPr>
+        <p:spPr>
+          <a:xfrm>
+            <a:off x="8732520" y="3044952"/>
+            <a:ext cx="2743200" cy="512064"/>
+          </a:xfrm>
+          <a:prstGeom prst="rect">
+            <a:avLst/>
+          </a:prstGeom>
+          <a:noFill/>
+          <a:ln/>
+        </p:spPr>
+        <p:txBody>
+          <a:bodyPr wrap="square" lIns="0" tIns="0" rIns="0" bIns="0" rtlCol="0" anchor="ctr"/>
+          <a:lstStyle/>
+          <a:p>
+            <a:pPr algn="r" indent="0" marL="0">
+              <a:buNone/>
+            </a:pPr>
+            <a:r>
+              <a:rPr lang="en-US" sz="1350" b="1" dirty="0">
+                <a:solidFill>
+                  <a:srgbClr val="0E6B4F"/>
+                </a:solidFill>
+                <a:latin typeface="Calibri" pitchFamily="34" charset="0"/>
+                <a:ea typeface="Calibri" pitchFamily="34" charset="-122"/>
+                <a:cs typeface="Calibri" pitchFamily="34" charset="-120"/>
+              </a:rPr>
+              <a:t>never reached it</a:t>
+            </a:r>
+            <a:endParaRPr lang="en-US" sz="1350" dirty="0"/>
+          </a:p>
+        </p:txBody>
+      </p:sp>
+      <p:sp>
+        <p:nvSpPr>
+          <p:cNvPr id="16" name="Shape 14"/>
+          <p:cNvSpPr/>
+          <p:nvPr/>
+        </p:nvSpPr>
+        <p:spPr>
+          <a:xfrm>
+            <a:off x="502920" y="3730752"/>
+            <a:ext cx="11155680" cy="658368"/>
+          </a:xfrm>
+          <a:prstGeom prst="roundRect">
+            <a:avLst>
+              <a:gd name="adj" fmla="val 12500"/>
+            </a:avLst>
+          </a:prstGeom>
+          <a:solidFill>
+            <a:srgbClr val="F7E5E4"/>
+          </a:solidFill>
+          <a:ln/>
+          <a:effectLst>
+            <a:outerShdw sx="100000" sy="100000" kx="0" ky="0" algn="bl" rotWithShape="0" blurRad="101600" dist="25400" dir="5400000">
+              <a:srgbClr val="9AA5AE">
+                <a:alpha val="22000"/>
+              </a:srgbClr>
+            </a:outerShdw>
+          </a:effectLst>
+        </p:spPr>
+      </p:sp>
+      <p:sp>
+        <p:nvSpPr>
+          <p:cNvPr id="17" name="Shape 15"/>
+          <p:cNvSpPr/>
+          <p:nvPr/>
+        </p:nvSpPr>
+        <p:spPr>
+          <a:xfrm>
+            <a:off x="704088" y="3867912"/>
+            <a:ext cx="384048" cy="384048"/>
+          </a:xfrm>
+          <a:prstGeom prst="ellipse">
+            <a:avLst/>
+          </a:prstGeom>
+          <a:solidFill>
+            <a:srgbClr val="A3302C"/>
+          </a:solidFill>
+          <a:ln/>
+        </p:spPr>
+      </p:sp>
+      <p:sp>
+        <p:nvSpPr>
+          <p:cNvPr id="18" name="Text 16"/>
+          <p:cNvSpPr txBox="1"/>
+          <p:nvPr/>
+        </p:nvSpPr>
+        <p:spPr>
+          <a:xfrm>
+            <a:off x="704088" y="3867912"/>
+            <a:ext cx="384048" cy="384048"/>
+          </a:xfrm>
+          <a:prstGeom prst="rect">
+            <a:avLst/>
+          </a:prstGeom>
+          <a:noFill/>
+          <a:ln/>
+        </p:spPr>
+        <p:txBody>
+          <a:bodyPr wrap="square" lIns="0" tIns="0" rIns="0" bIns="0" rtlCol="0" anchor="ctr"/>
+          <a:lstStyle/>
+          <a:p>
+            <a:pPr algn="ctr" indent="0" marL="0">
+              <a:buNone/>
+            </a:pPr>
+            <a:r>
+              <a:rPr lang="en-US" sz="1300" b="1" dirty="0">
+                <a:solidFill>
+                  <a:srgbClr val="FFFFFF"/>
+                </a:solidFill>
+                <a:latin typeface="Calibri" pitchFamily="34" charset="0"/>
+                <a:ea typeface="Calibri" pitchFamily="34" charset="-122"/>
+                <a:cs typeface="Calibri" pitchFamily="34" charset="-120"/>
+              </a:rPr>
+              <a:t>3</a:t>
+            </a:r>
+            <a:endParaRPr lang="en-US" sz="1300" dirty="0"/>
+          </a:p>
+        </p:txBody>
+      </p:sp>
+      <p:sp>
+        <p:nvSpPr>
+          <p:cNvPr id="19" name="Text 17"/>
+          <p:cNvSpPr txBox="1"/>
+          <p:nvPr/>
+        </p:nvSpPr>
+        <p:spPr>
+          <a:xfrm>
+            <a:off x="1280160" y="3803904"/>
+            <a:ext cx="4572000" cy="274320"/>
+          </a:xfrm>
+          <a:prstGeom prst="rect">
+            <a:avLst/>
+          </a:prstGeom>
+          <a:noFill/>
+          <a:ln/>
+        </p:spPr>
+        <p:txBody>
+          <a:bodyPr wrap="square" lIns="0" tIns="0" rIns="0" bIns="0" rtlCol="0" anchor="ctr"/>
+          <a:lstStyle/>
+          <a:p>
+            <a:pPr indent="0" marL="0">
+              <a:buNone/>
+            </a:pPr>
+            <a:r>
+              <a:rPr lang="en-US" sz="1300" b="1" dirty="0">
+                <a:solidFill>
+                  <a:srgbClr val="16232E"/>
+                </a:solidFill>
+                <a:latin typeface="Calibri" pitchFamily="34" charset="0"/>
+                <a:ea typeface="Calibri" pitchFamily="34" charset="-122"/>
+                <a:cs typeface="Calibri" pitchFamily="34" charset="-120"/>
+              </a:rPr>
+              <a:t>Injection in a field that IS a top reason</a:t>
+            </a:r>
+            <a:endParaRPr lang="en-US" sz="1300" dirty="0"/>
+          </a:p>
+        </p:txBody>
+      </p:sp>
+      <p:sp>
+        <p:nvSpPr>
+          <p:cNvPr id="20" name="Text 18"/>
+          <p:cNvSpPr txBox="1"/>
+          <p:nvPr/>
+        </p:nvSpPr>
+        <p:spPr>
+          <a:xfrm>
+            <a:off x="1280160" y="4069080"/>
+            <a:ext cx="7223760" cy="274320"/>
+          </a:xfrm>
+          <a:prstGeom prst="rect">
+            <a:avLst/>
+          </a:prstGeom>
+          <a:noFill/>
+          <a:ln/>
+        </p:spPr>
+        <p:txBody>
+          <a:bodyPr wrap="square" lIns="0" tIns="0" rIns="0" bIns="0" rtlCol="0" anchor="ctr"/>
+          <a:lstStyle/>
+          <a:p>
+            <a:pPr indent="0" marL="0">
+              <a:buNone/>
+            </a:pPr>
+            <a:r>
+              <a:rPr lang="en-US" sz="1150" dirty="0">
+                <a:solidFill>
+                  <a:srgbClr val="5A6570"/>
+                </a:solidFill>
+                <a:latin typeface="Calibri" pitchFamily="34" charset="0"/>
+                <a:ea typeface="Calibri" pitchFamily="34" charset="-122"/>
+                <a:cs typeface="Calibri" pitchFamily="34" charset="-120"/>
+              </a:rPr>
+              <a:t>The value reaches the prompt and the inbound guardrail rejects it.</a:t>
+            </a:r>
+            <a:endParaRPr lang="en-US" sz="1150" dirty="0"/>
+          </a:p>
+        </p:txBody>
+      </p:sp>
+      <p:sp>
+        <p:nvSpPr>
+          <p:cNvPr id="21" name="Text 19"/>
+          <p:cNvSpPr txBox="1"/>
+          <p:nvPr/>
+        </p:nvSpPr>
+        <p:spPr>
+          <a:xfrm>
+            <a:off x="8732520" y="3803904"/>
+            <a:ext cx="2743200" cy="512064"/>
+          </a:xfrm>
+          <a:prstGeom prst="rect">
+            <a:avLst/>
+          </a:prstGeom>
+          <a:noFill/>
+          <a:ln/>
+        </p:spPr>
+        <p:txBody>
+          <a:bodyPr wrap="square" lIns="0" tIns="0" rIns="0" bIns="0" rtlCol="0" anchor="ctr"/>
+          <a:lstStyle/>
+          <a:p>
+            <a:pPr algn="r" indent="0" marL="0">
+              <a:buNone/>
+            </a:pPr>
+            <a:r>
+              <a:rPr lang="en-US" sz="1350" b="1" dirty="0">
+                <a:solidFill>
+                  <a:srgbClr val="A3302C"/>
+                </a:solidFill>
+                <a:latin typeface="Calibri" pitchFamily="34" charset="0"/>
+                <a:ea typeface="Calibri" pitchFamily="34" charset="-122"/>
+                <a:cs typeface="Calibri" pitchFamily="34" charset="-120"/>
+              </a:rPr>
+              <a:t>blocked</a:t>
+            </a:r>
+            <a:endParaRPr lang="en-US" sz="1350" dirty="0"/>
+          </a:p>
+        </p:txBody>
+      </p:sp>
+      <p:sp>
+        <p:nvSpPr>
+          <p:cNvPr id="22" name="Shape 20"/>
+          <p:cNvSpPr/>
+          <p:nvPr/>
+        </p:nvSpPr>
+        <p:spPr>
+          <a:xfrm>
+            <a:off x="502920" y="4489704"/>
+            <a:ext cx="11155680" cy="658368"/>
+          </a:xfrm>
+          <a:prstGeom prst="roundRect">
+            <a:avLst>
+              <a:gd name="adj" fmla="val 12500"/>
+            </a:avLst>
+          </a:prstGeom>
+          <a:solidFill>
+            <a:srgbClr val="F7E5E4"/>
+          </a:solidFill>
+          <a:ln/>
+          <a:effectLst>
+            <a:outerShdw sx="100000" sy="100000" kx="0" ky="0" algn="bl" rotWithShape="0" blurRad="101600" dist="25400" dir="5400000">
+              <a:srgbClr val="9AA5AE">
+                <a:alpha val="22000"/>
+              </a:srgbClr>
+            </a:outerShdw>
+          </a:effectLst>
+        </p:spPr>
+      </p:sp>
+      <p:sp>
+        <p:nvSpPr>
+          <p:cNvPr id="23" name="Shape 21"/>
+          <p:cNvSpPr/>
+          <p:nvPr/>
+        </p:nvSpPr>
+        <p:spPr>
+          <a:xfrm>
+            <a:off x="704088" y="4626864"/>
+            <a:ext cx="384048" cy="384048"/>
+          </a:xfrm>
+          <a:prstGeom prst="ellipse">
+            <a:avLst/>
+          </a:prstGeom>
+          <a:solidFill>
+            <a:srgbClr val="A3302C"/>
+          </a:solidFill>
+          <a:ln/>
+        </p:spPr>
+      </p:sp>
+      <p:sp>
+        <p:nvSpPr>
+          <p:cNvPr id="24" name="Text 22"/>
+          <p:cNvSpPr txBox="1"/>
+          <p:nvPr/>
+        </p:nvSpPr>
+        <p:spPr>
+          <a:xfrm>
+            <a:off x="704088" y="4626864"/>
+            <a:ext cx="384048" cy="384048"/>
+          </a:xfrm>
+          <a:prstGeom prst="rect">
+            <a:avLst/>
+          </a:prstGeom>
+          <a:noFill/>
+          <a:ln/>
+        </p:spPr>
+        <p:txBody>
+          <a:bodyPr wrap="square" lIns="0" tIns="0" rIns="0" bIns="0" rtlCol="0" anchor="ctr"/>
+          <a:lstStyle/>
+          <a:p>
+            <a:pPr algn="ctr" indent="0" marL="0">
+              <a:buNone/>
+            </a:pPr>
+            <a:r>
+              <a:rPr lang="en-US" sz="1300" b="1" dirty="0">
+                <a:solidFill>
+                  <a:srgbClr val="FFFFFF"/>
+                </a:solidFill>
+                <a:latin typeface="Calibri" pitchFamily="34" charset="0"/>
+                <a:ea typeface="Calibri" pitchFamily="34" charset="-122"/>
+                <a:cs typeface="Calibri" pitchFamily="34" charset="-120"/>
+              </a:rPr>
+              <a:t>4</a:t>
+            </a:r>
+            <a:endParaRPr lang="en-US" sz="1300" dirty="0"/>
+          </a:p>
+        </p:txBody>
+      </p:sp>
+      <p:sp>
+        <p:nvSpPr>
+          <p:cNvPr id="25" name="Text 23"/>
+          <p:cNvSpPr txBox="1"/>
+          <p:nvPr/>
+        </p:nvSpPr>
+        <p:spPr>
+          <a:xfrm>
+            <a:off x="1280160" y="4562856"/>
+            <a:ext cx="4572000" cy="274320"/>
+          </a:xfrm>
+          <a:prstGeom prst="rect">
+            <a:avLst/>
+          </a:prstGeom>
+          <a:noFill/>
+          <a:ln/>
+        </p:spPr>
+        <p:txBody>
+          <a:bodyPr wrap="square" lIns="0" tIns="0" rIns="0" bIns="0" rtlCol="0" anchor="ctr"/>
+          <a:lstStyle/>
+          <a:p>
+            <a:pPr indent="0" marL="0">
+              <a:buNone/>
+            </a:pPr>
+            <a:r>
+              <a:rPr lang="en-US" sz="1300" b="1" dirty="0">
+                <a:solidFill>
+                  <a:srgbClr val="16232E"/>
+                </a:solidFill>
+                <a:latin typeface="Calibri" pitchFamily="34" charset="0"/>
+                <a:ea typeface="Calibri" pitchFamily="34" charset="-122"/>
+                <a:cs typeface="Calibri" pitchFamily="34" charset="-120"/>
+              </a:rPr>
+              <a:t>Model contradicts the decision</a:t>
+            </a:r>
+            <a:endParaRPr lang="en-US" sz="1300" dirty="0"/>
+          </a:p>
+        </p:txBody>
+      </p:sp>
+      <p:sp>
+        <p:nvSpPr>
+          <p:cNvPr id="26" name="Text 24"/>
+          <p:cNvSpPr txBox="1"/>
+          <p:nvPr/>
+        </p:nvSpPr>
+        <p:spPr>
+          <a:xfrm>
+            <a:off x="1280160" y="4828032"/>
+            <a:ext cx="7223760" cy="274320"/>
+          </a:xfrm>
+          <a:prstGeom prst="rect">
+            <a:avLst/>
+          </a:prstGeom>
+          <a:noFill/>
+          <a:ln/>
+        </p:spPr>
+        <p:txBody>
+          <a:bodyPr wrap="square" lIns="0" tIns="0" rIns="0" bIns="0" rtlCol="0" anchor="ctr"/>
+          <a:lstStyle/>
+          <a:p>
+            <a:pPr indent="0" marL="0">
+              <a:buNone/>
+            </a:pPr>
+            <a:r>
+              <a:rPr lang="en-US" sz="1150" dirty="0">
+                <a:solidFill>
+                  <a:srgbClr val="5A6570"/>
+                </a:solidFill>
+                <a:latin typeface="Calibri" pitchFamily="34" charset="0"/>
+                <a:ea typeface="Calibri" pitchFamily="34" charset="-122"/>
+                <a:cs typeface="Calibri" pitchFamily="34" charset="-120"/>
+              </a:rPr>
+              <a:t>A provider congratulates an applicant the model declined.</a:t>
+            </a:r>
+            <a:endParaRPr lang="en-US" sz="1150" dirty="0"/>
+          </a:p>
+        </p:txBody>
+      </p:sp>
+      <p:sp>
+        <p:nvSpPr>
+          <p:cNvPr id="27" name="Text 25"/>
+          <p:cNvSpPr txBox="1"/>
+          <p:nvPr/>
+        </p:nvSpPr>
+        <p:spPr>
+          <a:xfrm>
+            <a:off x="8732520" y="4562856"/>
+            <a:ext cx="2743200" cy="512064"/>
+          </a:xfrm>
+          <a:prstGeom prst="rect">
+            <a:avLst/>
+          </a:prstGeom>
+          <a:noFill/>
+          <a:ln/>
+        </p:spPr>
+        <p:txBody>
+          <a:bodyPr wrap="square" lIns="0" tIns="0" rIns="0" bIns="0" rtlCol="0" anchor="ctr"/>
+          <a:lstStyle/>
+          <a:p>
+            <a:pPr algn="r" indent="0" marL="0">
+              <a:buNone/>
+            </a:pPr>
+            <a:r>
+              <a:rPr lang="en-US" sz="1350" b="1" dirty="0">
+                <a:solidFill>
+                  <a:srgbClr val="A3302C"/>
+                </a:solidFill>
+                <a:latin typeface="Calibri" pitchFamily="34" charset="0"/>
+                <a:ea typeface="Calibri" pitchFamily="34" charset="-122"/>
+                <a:cs typeface="Calibri" pitchFamily="34" charset="-120"/>
+              </a:rPr>
+              <a:t>blocked</a:t>
+            </a:r>
+            <a:endParaRPr lang="en-US" sz="1350" dirty="0"/>
+          </a:p>
+        </p:txBody>
+      </p:sp>
+      <p:sp>
+        <p:nvSpPr>
+          <p:cNvPr id="28" name="Shape 26"/>
+          <p:cNvSpPr/>
+          <p:nvPr/>
+        </p:nvSpPr>
+        <p:spPr>
+          <a:xfrm>
+            <a:off x="502920" y="5248656"/>
+            <a:ext cx="11155680" cy="658368"/>
+          </a:xfrm>
+          <a:prstGeom prst="roundRect">
+            <a:avLst>
+              <a:gd name="adj" fmla="val 12500"/>
+            </a:avLst>
+          </a:prstGeom>
+          <a:solidFill>
+            <a:srgbClr val="F7E5E4"/>
+          </a:solidFill>
+          <a:ln/>
+          <a:effectLst>
+            <a:outerShdw sx="100000" sy="100000" kx="0" ky="0" algn="bl" rotWithShape="0" blurRad="101600" dist="25400" dir="5400000">
+              <a:srgbClr val="9AA5AE">
+                <a:alpha val="22000"/>
+              </a:srgbClr>
+            </a:outerShdw>
+          </a:effectLst>
+        </p:spPr>
+      </p:sp>
+      <p:sp>
+        <p:nvSpPr>
+          <p:cNvPr id="29" name="Shape 27"/>
+          <p:cNvSpPr/>
+          <p:nvPr/>
+        </p:nvSpPr>
+        <p:spPr>
+          <a:xfrm>
+            <a:off x="704088" y="5385816"/>
+            <a:ext cx="384048" cy="384048"/>
+          </a:xfrm>
+          <a:prstGeom prst="ellipse">
+            <a:avLst/>
+          </a:prstGeom>
+          <a:solidFill>
+            <a:srgbClr val="A3302C"/>
+          </a:solidFill>
+          <a:ln/>
+        </p:spPr>
+      </p:sp>
+      <p:sp>
+        <p:nvSpPr>
+          <p:cNvPr id="30" name="Text 28"/>
+          <p:cNvSpPr txBox="1"/>
+          <p:nvPr/>
+        </p:nvSpPr>
+        <p:spPr>
+          <a:xfrm>
+            <a:off x="704088" y="5385816"/>
+            <a:ext cx="384048" cy="384048"/>
+          </a:xfrm>
+          <a:prstGeom prst="rect">
+            <a:avLst/>
+          </a:prstGeom>
+          <a:noFill/>
+          <a:ln/>
+        </p:spPr>
+        <p:txBody>
+          <a:bodyPr wrap="square" lIns="0" tIns="0" rIns="0" bIns="0" rtlCol="0" anchor="ctr"/>
+          <a:lstStyle/>
+          <a:p>
+            <a:pPr algn="ctr" indent="0" marL="0">
+              <a:buNone/>
+            </a:pPr>
+            <a:r>
+              <a:rPr lang="en-US" sz="1300" b="1" dirty="0">
+                <a:solidFill>
+                  <a:srgbClr val="FFFFFF"/>
+                </a:solidFill>
+                <a:latin typeface="Calibri" pitchFamily="34" charset="0"/>
+                <a:ea typeface="Calibri" pitchFamily="34" charset="-122"/>
+                <a:cs typeface="Calibri" pitchFamily="34" charset="-120"/>
+              </a:rPr>
+              <a:t>5</a:t>
+            </a:r>
+            <a:endParaRPr lang="en-US" sz="1300" dirty="0"/>
+          </a:p>
+        </p:txBody>
+      </p:sp>
+      <p:sp>
+        <p:nvSpPr>
+          <p:cNvPr id="31" name="Text 29"/>
+          <p:cNvSpPr txBox="1"/>
+          <p:nvPr/>
+        </p:nvSpPr>
+        <p:spPr>
+          <a:xfrm>
+            <a:off x="1280160" y="5321808"/>
+            <a:ext cx="4572000" cy="274320"/>
+          </a:xfrm>
+          <a:prstGeom prst="rect">
+            <a:avLst/>
+          </a:prstGeom>
+          <a:noFill/>
+          <a:ln/>
+        </p:spPr>
+        <p:txBody>
+          <a:bodyPr wrap="square" lIns="0" tIns="0" rIns="0" bIns="0" rtlCol="0" anchor="ctr"/>
+          <a:lstStyle/>
+          <a:p>
+            <a:pPr indent="0" marL="0">
+              <a:buNone/>
+            </a:pPr>
+            <a:r>
+              <a:rPr lang="en-US" sz="1300" b="1" dirty="0">
+                <a:solidFill>
+                  <a:srgbClr val="16232E"/>
+                </a:solidFill>
+                <a:latin typeface="Calibri" pitchFamily="34" charset="0"/>
+                <a:ea typeface="Calibri" pitchFamily="34" charset="-122"/>
+                <a:cs typeface="Calibri" pitchFamily="34" charset="-120"/>
+              </a:rPr>
+              <a:t>Model leaks a phone number</a:t>
+            </a:r>
+            <a:endParaRPr lang="en-US" sz="1300" dirty="0"/>
+          </a:p>
+        </p:txBody>
+      </p:sp>
+      <p:sp>
+        <p:nvSpPr>
+          <p:cNvPr id="32" name="Text 30"/>
+          <p:cNvSpPr txBox="1"/>
+          <p:nvPr/>
+        </p:nvSpPr>
+        <p:spPr>
+          <a:xfrm>
+            <a:off x="1280160" y="5586984"/>
+            <a:ext cx="7223760" cy="274320"/>
+          </a:xfrm>
+          <a:prstGeom prst="rect">
+            <a:avLst/>
+          </a:prstGeom>
+          <a:noFill/>
+          <a:ln/>
+        </p:spPr>
+        <p:txBody>
+          <a:bodyPr wrap="square" lIns="0" tIns="0" rIns="0" bIns="0" rtlCol="0" anchor="ctr"/>
+          <a:lstStyle/>
+          <a:p>
+            <a:pPr indent="0" marL="0">
+              <a:buNone/>
+            </a:pPr>
+            <a:r>
+              <a:rPr lang="en-US" sz="1150" dirty="0">
+                <a:solidFill>
+                  <a:srgbClr val="5A6570"/>
+                </a:solidFill>
+                <a:latin typeface="Calibri" pitchFamily="34" charset="0"/>
+                <a:ea typeface="Calibri" pitchFamily="34" charset="-122"/>
+                <a:cs typeface="Calibri" pitchFamily="34" charset="-120"/>
+              </a:rPr>
+              <a:t>A provider puts an identifier into applicant-facing text.</a:t>
+            </a:r>
+            <a:endParaRPr lang="en-US" sz="1150" dirty="0"/>
+          </a:p>
+        </p:txBody>
+      </p:sp>
+      <p:sp>
+        <p:nvSpPr>
+          <p:cNvPr id="33" name="Text 31"/>
+          <p:cNvSpPr txBox="1"/>
+          <p:nvPr/>
+        </p:nvSpPr>
+        <p:spPr>
+          <a:xfrm>
+            <a:off x="8732520" y="5321808"/>
+            <a:ext cx="2743200" cy="512064"/>
+          </a:xfrm>
+          <a:prstGeom prst="rect">
+            <a:avLst/>
+          </a:prstGeom>
+          <a:noFill/>
+          <a:ln/>
+        </p:spPr>
+        <p:txBody>
+          <a:bodyPr wrap="square" lIns="0" tIns="0" rIns="0" bIns="0" rtlCol="0" anchor="ctr"/>
+          <a:lstStyle/>
+          <a:p>
+            <a:pPr algn="r" indent="0" marL="0">
+              <a:buNone/>
+            </a:pPr>
+            <a:r>
+              <a:rPr lang="en-US" sz="1350" b="1" dirty="0">
+                <a:solidFill>
+                  <a:srgbClr val="A3302C"/>
+                </a:solidFill>
+                <a:latin typeface="Calibri" pitchFamily="34" charset="0"/>
+                <a:ea typeface="Calibri" pitchFamily="34" charset="-122"/>
+                <a:cs typeface="Calibri" pitchFamily="34" charset="-120"/>
+              </a:rPr>
+              <a:t>blocked</a:t>
+            </a:r>
+            <a:endParaRPr lang="en-US" sz="1350" dirty="0"/>
+          </a:p>
+        </p:txBody>
+      </p:sp>
+      <p:sp>
+        <p:nvSpPr>
+          <p:cNvPr id="34" name="Shape 32"/>
+          <p:cNvSpPr/>
+          <p:nvPr/>
+        </p:nvSpPr>
+        <p:spPr>
+          <a:xfrm>
+            <a:off x="502920" y="6053328"/>
+            <a:ext cx="11155680" cy="603504"/>
+          </a:xfrm>
+          <a:prstGeom prst="roundRect">
+            <a:avLst>
+              <a:gd name="adj" fmla="val 13636"/>
+            </a:avLst>
+          </a:prstGeom>
+          <a:solidFill>
+            <a:srgbClr val="FBEFDC"/>
+          </a:solidFill>
+          <a:ln/>
+          <a:effectLst>
+            <a:outerShdw sx="100000" sy="100000" kx="0" ky="0" algn="bl" rotWithShape="0" blurRad="101600" dist="25400" dir="5400000">
+              <a:srgbClr val="9AA5AE">
+                <a:alpha val="22000"/>
+              </a:srgbClr>
+            </a:outerShdw>
+          </a:effectLst>
+        </p:spPr>
+      </p:sp>
+      <p:sp>
+        <p:nvSpPr>
+          <p:cNvPr id="35" name="Text 33"/>
+          <p:cNvSpPr txBox="1"/>
+          <p:nvPr/>
+        </p:nvSpPr>
+        <p:spPr>
+          <a:xfrm>
+            <a:off x="777240" y="6172200"/>
+            <a:ext cx="10607040" cy="365760"/>
+          </a:xfrm>
+          <a:prstGeom prst="rect">
+            <a:avLst/>
+          </a:prstGeom>
+          <a:noFill/>
+          <a:ln/>
+        </p:spPr>
+        <p:txBody>
+          <a:bodyPr wrap="square" lIns="0" tIns="0" rIns="0" bIns="0" rtlCol="0" anchor="ctr"/>
+          <a:lstStyle/>
+          <a:p>
+            <a:pPr indent="0" marL="0">
+              <a:lnSpc>
+                <a:spcPts val="1700"/>
+              </a:lnSpc>
+              <a:buNone/>
+            </a:pPr>
+            <a:r>
+              <a:rPr lang="en-US" sz="1250" dirty="0">
+                <a:solidFill>
+                  <a:srgbClr val="16232E"/>
+                </a:solidFill>
+                <a:latin typeface="Calibri" pitchFamily="34" charset="0"/>
+                <a:ea typeface="Calibri" pitchFamily="34" charset="-122"/>
+                <a:cs typeface="Calibri" pitchFamily="34" charset="-120"/>
+              </a:rPr>
+              <a:t>Writing this demonstration corrected a claim we had wrong: scenario 2 was first recorded as a guardrail failure. It is not — nothing needed blocking, because nothing got through.</a:t>
+            </a:r>
+            <a:endParaRPr lang="en-US" sz="1250" dirty="0"/>
+          </a:p>
+        </p:txBody>
+      </p:sp>
+    </p:spTree>
+  </p:cSld>
+  <p:clrMapOvr>
+    <a:masterClrMapping/>
+  </p:clrMapOvr>
+</p:sld>
+</file>
+
+<file path=ppt/slides/slide18.xml><?xml version="1.0" encoding="utf-8"?>
+<p:sld xmlns:a="http://schemas.openxmlformats.org/drawingml/2006/main" xmlns:r="http://schemas.openxmlformats.org/officeDocument/2006/relationships" xmlns:p="http://schemas.openxmlformats.org/presentationml/2006/main">
+  <p:cSld name="Slide 18">
+    <p:bg>
+      <p:bgPr>
+        <a:solidFill>
+          <a:srgbClr val="FFFFFF"/>
+        </a:solidFill>
+      </p:bgPr>
+    </p:bg>
+    <p:spTree>
+      <p:nvGrpSpPr>
+        <p:cNvPr id="1" name=""/>
+        <p:cNvGrpSpPr/>
+        <p:nvPr/>
+      </p:nvGrpSpPr>
+      <p:grpSpPr>
+        <a:xfrm>
+          <a:off x="0" y="0"/>
+          <a:ext cx="0" cy="0"/>
+          <a:chOff x="0" y="0"/>
+          <a:chExt cx="0" cy="0"/>
+        </a:xfrm>
+      </p:grpSpPr>
+      <p:sp>
+        <p:nvSpPr>
+          <p:cNvPr id="2" name="Text 0"/>
+          <p:cNvSpPr txBox="1"/>
+          <p:nvPr/>
+        </p:nvSpPr>
+        <p:spPr>
+          <a:xfrm>
+            <a:off x="502920" y="457200"/>
+            <a:ext cx="11155680" cy="1051560"/>
+          </a:xfrm>
+          <a:prstGeom prst="rect">
+            <a:avLst/>
+          </a:prstGeom>
+          <a:noFill/>
+          <a:ln/>
+        </p:spPr>
+        <p:txBody>
+          <a:bodyPr wrap="square" lIns="0" tIns="0" rIns="0" bIns="0" rtlCol="0" anchor="t"/>
+          <a:lstStyle/>
+          <a:p>
+            <a:pPr indent="0" marL="0">
+              <a:buNone/>
+            </a:pPr>
+            <a:r>
+              <a:rPr lang="en-US" sz="3400" dirty="0">
+                <a:solidFill>
+                  <a:srgbClr val="16232E"/>
+                </a:solidFill>
+                <a:latin typeface="Cambria" pitchFamily="34" charset="0"/>
+                <a:ea typeface="Cambria" pitchFamily="34" charset="-122"/>
+                <a:cs typeface="Cambria" pitchFamily="34" charset="-120"/>
+              </a:rPr>
               <a:t>Measured, not asserted</a:t>
             </a:r>
             <a:endParaRPr lang="en-US" sz="3400" dirty="0"/>
@@ -10273,9 +12709,9 @@
 </p:sld>
 </file>
 
-<file path=ppt/slides/slide17.xml><?xml version="1.0" encoding="utf-8"?>
+<file path=ppt/slides/slide19.xml><?xml version="1.0" encoding="utf-8"?>
 <p:sld xmlns:a="http://schemas.openxmlformats.org/drawingml/2006/main" xmlns:r="http://schemas.openxmlformats.org/officeDocument/2006/relationships" xmlns:p="http://schemas.openxmlformats.org/presentationml/2006/main">
-  <p:cSld name="Slide 17">
+  <p:cSld name="Slide 19">
     <p:bg>
       <p:bgPr>
         <a:solidFill>
@@ -10886,12 +13322,12 @@
         </p:nvSpPr>
         <p:spPr>
           <a:xfrm>
-            <a:off x="502920" y="5120640"/>
-            <a:ext cx="10607040" cy="1005840"/>
+            <a:off x="502920" y="5010912"/>
+            <a:ext cx="5166360" cy="1188720"/>
           </a:xfrm>
           <a:prstGeom prst="roundRect">
             <a:avLst>
-              <a:gd name="adj" fmla="val 8182"/>
+              <a:gd name="adj" fmla="val 6923"/>
             </a:avLst>
           </a:prstGeom>
           <a:solidFill>
@@ -10908,27 +13344,27 @@
         </p:nvSpPr>
         <p:spPr>
           <a:xfrm>
-            <a:off x="822960" y="5285232"/>
-            <a:ext cx="9966960" cy="713232"/>
-          </a:xfrm>
-          <a:prstGeom prst="rect">
-            <a:avLst/>
-          </a:prstGeom>
-          <a:noFill/>
-          <a:ln/>
-        </p:spPr>
-        <p:txBody>
-          <a:bodyPr wrap="square" lIns="0" tIns="0" rIns="0" bIns="0" rtlCol="0" anchor="ctr"/>
+            <a:off x="777240" y="5175504"/>
+            <a:ext cx="4617720" cy="868680"/>
+          </a:xfrm>
+          <a:prstGeom prst="rect">
+            <a:avLst/>
+          </a:prstGeom>
+          <a:noFill/>
+          <a:ln/>
+        </p:spPr>
+        <p:txBody>
+          <a:bodyPr wrap="square" lIns="0" tIns="0" rIns="0" bIns="0" rtlCol="0" anchor="t"/>
           <a:lstStyle/>
           <a:p>
             <a:pPr indent="0" marL="0">
               <a:lnSpc>
-                <a:spcPts val="1900"/>
+                <a:spcPts val="1800"/>
               </a:lnSpc>
               <a:buNone/>
             </a:pPr>
             <a:r>
-              <a:rPr lang="en-US" sz="1350" b="1" dirty="0">
+              <a:rPr lang="en-US" sz="1300" b="1" dirty="0">
                 <a:solidFill>
                   <a:srgbClr val="8FD7B8"/>
                 </a:solidFill>
@@ -10940,12 +13376,12 @@
             </a:r>
             <a:pPr indent="0" marL="0">
               <a:lnSpc>
-                <a:spcPts val="1900"/>
+                <a:spcPts val="1800"/>
               </a:lnSpc>
               <a:buNone/>
             </a:pPr>
             <a:r>
-              <a:rPr lang="en-US" sz="1350" dirty="0">
+              <a:rPr lang="en-US" sz="1300" dirty="0">
                 <a:solidFill>
                   <a:srgbClr val="A9E3C6"/>
                 </a:solidFill>
@@ -10953,1702 +13389,90 @@
                 <a:ea typeface="Calibri" pitchFamily="34" charset="-122"/>
                 <a:cs typeface="Calibri" pitchFamily="34" charset="-120"/>
               </a:rPr>
-              <a:t>A complete, explained, cited decision lands in about 10 ms — about 86 ms when it also computes recourse. The language model is excluded: it is off the decision path, and its latency belongs to someone else's API.</a:t>
-            </a:r>
-            <a:endParaRPr lang="en-US" sz="1350" dirty="0"/>
-          </a:p>
-        </p:txBody>
-      </p:sp>
-    </p:spTree>
-  </p:cSld>
-  <p:clrMapOvr>
-    <a:masterClrMapping/>
-  </p:clrMapOvr>
-</p:sld>
-</file>
-
-<file path=ppt/slides/slide18.xml><?xml version="1.0" encoding="utf-8"?>
-<p:sld xmlns:a="http://schemas.openxmlformats.org/drawingml/2006/main" xmlns:r="http://schemas.openxmlformats.org/officeDocument/2006/relationships" xmlns:p="http://schemas.openxmlformats.org/presentationml/2006/main">
-  <p:cSld name="Slide 18">
-    <p:bg>
-      <p:bgPr>
-        <a:solidFill>
-          <a:srgbClr val="F1F4F2"/>
-        </a:solidFill>
-      </p:bgPr>
-    </p:bg>
-    <p:spTree>
-      <p:nvGrpSpPr>
-        <p:cNvPr id="1" name=""/>
-        <p:cNvGrpSpPr/>
-        <p:nvPr/>
-      </p:nvGrpSpPr>
-      <p:grpSpPr>
-        <a:xfrm>
-          <a:off x="0" y="0"/>
-          <a:ext cx="0" cy="0"/>
-          <a:chOff x="0" y="0"/>
-          <a:chExt cx="0" cy="0"/>
-        </a:xfrm>
-      </p:grpSpPr>
-      <p:sp>
-        <p:nvSpPr>
-          <p:cNvPr id="2" name="Text 0"/>
-          <p:cNvSpPr txBox="1"/>
-          <p:nvPr/>
-        </p:nvSpPr>
-        <p:spPr>
-          <a:xfrm>
-            <a:off x="502920" y="457200"/>
-            <a:ext cx="11155680" cy="1051560"/>
-          </a:xfrm>
-          <a:prstGeom prst="rect">
-            <a:avLst/>
-          </a:prstGeom>
-          <a:noFill/>
-          <a:ln/>
-        </p:spPr>
-        <p:txBody>
-          <a:bodyPr wrap="square" lIns="0" tIns="0" rIns="0" bIns="0" rtlCol="0" anchor="t"/>
-          <a:lstStyle/>
-          <a:p>
-            <a:pPr indent="0" marL="0">
-              <a:buNone/>
-            </a:pPr>
-            <a:r>
-              <a:rPr lang="en-US" sz="3400" dirty="0">
-                <a:solidFill>
-                  <a:srgbClr val="16232E"/>
-                </a:solidFill>
-                <a:latin typeface="Cambria" pitchFamily="34" charset="0"/>
-                <a:ea typeface="Cambria" pitchFamily="34" charset="-122"/>
-                <a:cs typeface="Cambria" pitchFamily="34" charset="-120"/>
-              </a:rPr>
-              <a:t>Engineering decisions worth defending</a:t>
-            </a:r>
-            <a:endParaRPr lang="en-US" sz="3400" dirty="0"/>
-          </a:p>
-        </p:txBody>
-      </p:sp>
-      <p:sp>
-        <p:nvSpPr>
-          <p:cNvPr id="3" name="Shape 1"/>
+              <a:t>A complete, explained, cited decision lands in about 10 ms — about 86 ms when it also computes recourse.</a:t>
+            </a:r>
+            <a:endParaRPr lang="en-US" sz="1300" dirty="0"/>
+          </a:p>
+        </p:txBody>
+      </p:sp>
+      <p:sp>
+        <p:nvSpPr>
+          <p:cNvPr id="21" name="Shape 19"/>
           <p:cNvSpPr/>
           <p:nvPr/>
         </p:nvSpPr>
         <p:spPr>
           <a:xfrm>
-            <a:off x="502920" y="1298448"/>
-            <a:ext cx="3535680" cy="2286000"/>
+            <a:off x="5943600" y="5010912"/>
+            <a:ext cx="5166360" cy="1188720"/>
           </a:xfrm>
           <a:prstGeom prst="roundRect">
             <a:avLst>
-              <a:gd name="adj" fmla="val 3600"/>
+              <a:gd name="adj" fmla="val 6923"/>
             </a:avLst>
           </a:prstGeom>
           <a:solidFill>
-            <a:srgbClr val="FFFFFF"/>
+            <a:srgbClr val="22333F"/>
           </a:solidFill>
-          <a:ln w="9525">
-            <a:solidFill>
-              <a:srgbClr val="DEE4E0"/>
-            </a:solidFill>
-            <a:prstDash val="solid"/>
-          </a:ln>
-          <a:effectLst>
-            <a:outerShdw sx="100000" sy="100000" kx="0" ky="0" algn="bl" rotWithShape="0" blurRad="101600" dist="25400" dir="5400000">
-              <a:srgbClr val="9AA5AE">
-                <a:alpha val="22000"/>
-              </a:srgbClr>
-            </a:outerShdw>
-          </a:effectLst>
-        </p:spPr>
-      </p:sp>
-      <p:sp>
-        <p:nvSpPr>
-          <p:cNvPr id="4" name="Shape 2"/>
-          <p:cNvSpPr/>
-          <p:nvPr/>
-        </p:nvSpPr>
-        <p:spPr>
-          <a:xfrm>
-            <a:off x="758952" y="1554480"/>
-            <a:ext cx="384048" cy="384048"/>
-          </a:xfrm>
-          <a:prstGeom prst="ellipse">
-            <a:avLst/>
-          </a:prstGeom>
-          <a:solidFill>
-            <a:srgbClr val="0E6B4F"/>
-          </a:solidFill>
-          <a:ln/>
-        </p:spPr>
-      </p:sp>
-      <p:sp>
-        <p:nvSpPr>
-          <p:cNvPr id="5" name="Text 3"/>
-          <p:cNvSpPr txBox="1"/>
-          <p:nvPr/>
-        </p:nvSpPr>
-        <p:spPr>
-          <a:xfrm>
-            <a:off x="758952" y="1554480"/>
-            <a:ext cx="384048" cy="384048"/>
-          </a:xfrm>
-          <a:prstGeom prst="rect">
-            <a:avLst/>
-          </a:prstGeom>
-          <a:noFill/>
-          <a:ln/>
-        </p:spPr>
-        <p:txBody>
-          <a:bodyPr wrap="square" lIns="0" tIns="0" rIns="0" bIns="0" rtlCol="0" anchor="ctr"/>
-          <a:lstStyle/>
-          <a:p>
-            <a:pPr algn="ctr" indent="0" marL="0">
+          <a:ln/>
+        </p:spPr>
+      </p:sp>
+      <p:sp>
+        <p:nvSpPr>
+          <p:cNvPr id="22" name="Text 20"/>
+          <p:cNvSpPr txBox="1"/>
+          <p:nvPr/>
+        </p:nvSpPr>
+        <p:spPr>
+          <a:xfrm>
+            <a:off x="6217920" y="5175504"/>
+            <a:ext cx="4617720" cy="868680"/>
+          </a:xfrm>
+          <a:prstGeom prst="rect">
+            <a:avLst/>
+          </a:prstGeom>
+          <a:noFill/>
+          <a:ln/>
+        </p:spPr>
+        <p:txBody>
+          <a:bodyPr wrap="square" lIns="0" tIns="0" rIns="0" bIns="0" rtlCol="0" anchor="t"/>
+          <a:lstStyle/>
+          <a:p>
+            <a:pPr indent="0" marL="0">
+              <a:lnSpc>
+                <a:spcPts val="1800"/>
+              </a:lnSpc>
               <a:buNone/>
             </a:pPr>
             <a:r>
               <a:rPr lang="en-US" sz="1300" b="1" dirty="0">
                 <a:solidFill>
-                  <a:srgbClr val="FFFFFF"/>
-                </a:solidFill>
-                <a:latin typeface="Calibri" pitchFamily="34" charset="0"/>
-                <a:ea typeface="Calibri" pitchFamily="34" charset="-122"/>
-                <a:cs typeface="Calibri" pitchFamily="34" charset="-120"/>
-              </a:rPr>
-              <a:t>→</a:t>
+                  <a:srgbClr val="E0A758"/>
+                </a:solidFill>
+                <a:latin typeface="Calibri" pitchFamily="34" charset="0"/>
+                <a:ea typeface="Calibri" pitchFamily="34" charset="-122"/>
+                <a:cs typeface="Calibri" pitchFamily="34" charset="-120"/>
+              </a:rPr>
+              <a:t>The language model is excluded. </a:t>
+            </a:r>
+            <a:pPr indent="0" marL="0">
+              <a:lnSpc>
+                <a:spcPts val="1800"/>
+              </a:lnSpc>
+              <a:buNone/>
+            </a:pPr>
+            <a:r>
+              <a:rPr lang="en-US" sz="1300" dirty="0">
+                <a:solidFill>
+                  <a:srgbClr val="C2CDD6"/>
+                </a:solidFill>
+                <a:latin typeface="Calibri" pitchFamily="34" charset="0"/>
+                <a:ea typeface="Calibri" pitchFamily="34" charset="-122"/>
+                <a:cs typeface="Calibri" pitchFamily="34" charset="-120"/>
+              </a:rPr>
+              <a:t>It is off the decision path and its latency belongs to a third-party API. Measured separately: 2.8 s mean, 10 of 10 live calls.</a:t>
             </a:r>
             <a:endParaRPr lang="en-US" sz="1300" dirty="0"/>
-          </a:p>
-        </p:txBody>
-      </p:sp>
-      <p:sp>
-        <p:nvSpPr>
-          <p:cNvPr id="6" name="Text 4"/>
-          <p:cNvSpPr txBox="1"/>
-          <p:nvPr/>
-        </p:nvSpPr>
-        <p:spPr>
-          <a:xfrm>
-            <a:off x="758952" y="2103120"/>
-            <a:ext cx="3023616" cy="457200"/>
-          </a:xfrm>
-          <a:prstGeom prst="rect">
-            <a:avLst/>
-          </a:prstGeom>
-          <a:noFill/>
-          <a:ln/>
-        </p:spPr>
-        <p:txBody>
-          <a:bodyPr wrap="square" lIns="0" tIns="0" rIns="0" bIns="0" rtlCol="0" anchor="t"/>
-          <a:lstStyle/>
-          <a:p>
-            <a:pPr indent="0" marL="0">
-              <a:buNone/>
-            </a:pPr>
-            <a:r>
-              <a:rPr lang="en-US" sz="1350" b="1" dirty="0">
-                <a:solidFill>
-                  <a:srgbClr val="16232E"/>
-                </a:solidFill>
-                <a:latin typeface="Calibri" pitchFamily="34" charset="0"/>
-                <a:ea typeface="Calibri" pitchFamily="34" charset="-122"/>
-                <a:cs typeface="Calibri" pitchFamily="34" charset="-120"/>
-              </a:rPr>
-              <a:t>FastAPI, under “or equivalent”</a:t>
-            </a:r>
-            <a:endParaRPr lang="en-US" sz="1350" dirty="0"/>
-          </a:p>
-        </p:txBody>
-      </p:sp>
-      <p:sp>
-        <p:nvSpPr>
-          <p:cNvPr id="7" name="Text 5"/>
-          <p:cNvSpPr txBox="1"/>
-          <p:nvPr/>
-        </p:nvSpPr>
-        <p:spPr>
-          <a:xfrm>
-            <a:off x="758952" y="2560320"/>
-            <a:ext cx="3023616" cy="841248"/>
-          </a:xfrm>
-          <a:prstGeom prst="rect">
-            <a:avLst/>
-          </a:prstGeom>
-          <a:noFill/>
-          <a:ln/>
-        </p:spPr>
-        <p:txBody>
-          <a:bodyPr wrap="square" lIns="0" tIns="0" rIns="0" bIns="0" rtlCol="0" anchor="t"/>
-          <a:lstStyle/>
-          <a:p>
-            <a:pPr indent="0" marL="0">
-              <a:lnSpc>
-                <a:spcPts val="1600"/>
-              </a:lnSpc>
-              <a:buNone/>
-            </a:pPr>
-            <a:r>
-              <a:rPr lang="en-US" sz="1100" dirty="0">
-                <a:solidFill>
-                  <a:srgbClr val="5A6570"/>
-                </a:solidFill>
-                <a:latin typeface="Calibri" pitchFamily="34" charset="0"/>
-                <a:ea typeface="Calibri" pitchFamily="34" charset="-122"/>
-                <a:cs typeface="Calibri" pitchFamily="34" charset="-120"/>
-              </a:rPr>
-              <a:t>Same layered shape as Spring Boot: router → service → repository, Pydantic DTOs, generated OpenAPI. Chosen to be defensible in review, not to avoid Java.</a:t>
-            </a:r>
-            <a:endParaRPr lang="en-US" sz="1100" dirty="0"/>
-          </a:p>
-        </p:txBody>
-      </p:sp>
-      <p:sp>
-        <p:nvSpPr>
-          <p:cNvPr id="8" name="Shape 6"/>
-          <p:cNvSpPr/>
-          <p:nvPr/>
-        </p:nvSpPr>
-        <p:spPr>
-          <a:xfrm>
-            <a:off x="4312920" y="1298448"/>
-            <a:ext cx="3535680" cy="2286000"/>
-          </a:xfrm>
-          <a:prstGeom prst="roundRect">
-            <a:avLst>
-              <a:gd name="adj" fmla="val 3600"/>
-            </a:avLst>
-          </a:prstGeom>
-          <a:solidFill>
-            <a:srgbClr val="FFFFFF"/>
-          </a:solidFill>
-          <a:ln w="9525">
-            <a:solidFill>
-              <a:srgbClr val="DEE4E0"/>
-            </a:solidFill>
-            <a:prstDash val="solid"/>
-          </a:ln>
-          <a:effectLst>
-            <a:outerShdw sx="100000" sy="100000" kx="0" ky="0" algn="bl" rotWithShape="0" blurRad="101600" dist="25400" dir="5400000">
-              <a:srgbClr val="9AA5AE">
-                <a:alpha val="22000"/>
-              </a:srgbClr>
-            </a:outerShdw>
-          </a:effectLst>
-        </p:spPr>
-      </p:sp>
-      <p:sp>
-        <p:nvSpPr>
-          <p:cNvPr id="9" name="Shape 7"/>
-          <p:cNvSpPr/>
-          <p:nvPr/>
-        </p:nvSpPr>
-        <p:spPr>
-          <a:xfrm>
-            <a:off x="4568952" y="1554480"/>
-            <a:ext cx="384048" cy="384048"/>
-          </a:xfrm>
-          <a:prstGeom prst="ellipse">
-            <a:avLst/>
-          </a:prstGeom>
-          <a:solidFill>
-            <a:srgbClr val="B2701A"/>
-          </a:solidFill>
-          <a:ln/>
-        </p:spPr>
-      </p:sp>
-      <p:sp>
-        <p:nvSpPr>
-          <p:cNvPr id="10" name="Text 8"/>
-          <p:cNvSpPr txBox="1"/>
-          <p:nvPr/>
-        </p:nvSpPr>
-        <p:spPr>
-          <a:xfrm>
-            <a:off x="4568952" y="1554480"/>
-            <a:ext cx="384048" cy="384048"/>
-          </a:xfrm>
-          <a:prstGeom prst="rect">
-            <a:avLst/>
-          </a:prstGeom>
-          <a:noFill/>
-          <a:ln/>
-        </p:spPr>
-        <p:txBody>
-          <a:bodyPr wrap="square" lIns="0" tIns="0" rIns="0" bIns="0" rtlCol="0" anchor="ctr"/>
-          <a:lstStyle/>
-          <a:p>
-            <a:pPr algn="ctr" indent="0" marL="0">
-              <a:buNone/>
-            </a:pPr>
-            <a:r>
-              <a:rPr lang="en-US" sz="1300" b="1" dirty="0">
-                <a:solidFill>
-                  <a:srgbClr val="FFFFFF"/>
-                </a:solidFill>
-                <a:latin typeface="Calibri" pitchFamily="34" charset="0"/>
-                <a:ea typeface="Calibri" pitchFamily="34" charset="-122"/>
-                <a:cs typeface="Calibri" pitchFamily="34" charset="-120"/>
-              </a:rPr>
-              <a:t>✕</a:t>
-            </a:r>
-            <a:endParaRPr lang="en-US" sz="1300" dirty="0"/>
-          </a:p>
-        </p:txBody>
-      </p:sp>
-      <p:sp>
-        <p:nvSpPr>
-          <p:cNvPr id="11" name="Text 9"/>
-          <p:cNvSpPr txBox="1"/>
-          <p:nvPr/>
-        </p:nvSpPr>
-        <p:spPr>
-          <a:xfrm>
-            <a:off x="4568952" y="2103120"/>
-            <a:ext cx="3023616" cy="457200"/>
-          </a:xfrm>
-          <a:prstGeom prst="rect">
-            <a:avLst/>
-          </a:prstGeom>
-          <a:noFill/>
-          <a:ln/>
-        </p:spPr>
-        <p:txBody>
-          <a:bodyPr wrap="square" lIns="0" tIns="0" rIns="0" bIns="0" rtlCol="0" anchor="t"/>
-          <a:lstStyle/>
-          <a:p>
-            <a:pPr indent="0" marL="0">
-              <a:buNone/>
-            </a:pPr>
-            <a:r>
-              <a:rPr lang="en-US" sz="1350" b="1" dirty="0">
-                <a:solidFill>
-                  <a:srgbClr val="16232E"/>
-                </a:solidFill>
-                <a:latin typeface="Calibri" pitchFamily="34" charset="0"/>
-                <a:ea typeface="Calibri" pitchFamily="34" charset="-122"/>
-                <a:cs typeface="Calibri" pitchFamily="34" charset="-120"/>
-              </a:rPr>
-              <a:t>No compiled system dependency</a:t>
-            </a:r>
-            <a:endParaRPr lang="en-US" sz="1350" dirty="0"/>
-          </a:p>
-        </p:txBody>
-      </p:sp>
-      <p:sp>
-        <p:nvSpPr>
-          <p:cNvPr id="12" name="Text 10"/>
-          <p:cNvSpPr txBox="1"/>
-          <p:nvPr/>
-        </p:nvSpPr>
-        <p:spPr>
-          <a:xfrm>
-            <a:off x="4568952" y="2560320"/>
-            <a:ext cx="3023616" cy="841248"/>
-          </a:xfrm>
-          <a:prstGeom prst="rect">
-            <a:avLst/>
-          </a:prstGeom>
-          <a:noFill/>
-          <a:ln/>
-        </p:spPr>
-        <p:txBody>
-          <a:bodyPr wrap="square" lIns="0" tIns="0" rIns="0" bIns="0" rtlCol="0" anchor="t"/>
-          <a:lstStyle/>
-          <a:p>
-            <a:pPr indent="0" marL="0">
-              <a:lnSpc>
-                <a:spcPts val="1600"/>
-              </a:lnSpc>
-              <a:buNone/>
-            </a:pPr>
-            <a:r>
-              <a:rPr lang="en-US" sz="1100" dirty="0">
-                <a:solidFill>
-                  <a:srgbClr val="5A6570"/>
-                </a:solidFill>
-                <a:latin typeface="Calibri" pitchFamily="34" charset="0"/>
-                <a:ea typeface="Calibri" pitchFamily="34" charset="-122"/>
-                <a:cs typeface="Calibri" pitchFamily="34" charset="-120"/>
-              </a:rPr>
-              <a:t>LightGBM and XGBoost link libomp on macOS and fail without Homebrew — for us and for a grader. scikit-learn installs anywhere.</a:t>
-            </a:r>
-            <a:endParaRPr lang="en-US" sz="1100" dirty="0"/>
-          </a:p>
-        </p:txBody>
-      </p:sp>
-      <p:sp>
-        <p:nvSpPr>
-          <p:cNvPr id="13" name="Shape 11"/>
-          <p:cNvSpPr/>
-          <p:nvPr/>
-        </p:nvSpPr>
-        <p:spPr>
-          <a:xfrm>
-            <a:off x="8122920" y="1298448"/>
-            <a:ext cx="3535680" cy="2286000"/>
-          </a:xfrm>
-          <a:prstGeom prst="roundRect">
-            <a:avLst>
-              <a:gd name="adj" fmla="val 3600"/>
-            </a:avLst>
-          </a:prstGeom>
-          <a:solidFill>
-            <a:srgbClr val="FFFFFF"/>
-          </a:solidFill>
-          <a:ln w="9525">
-            <a:solidFill>
-              <a:srgbClr val="DEE4E0"/>
-            </a:solidFill>
-            <a:prstDash val="solid"/>
-          </a:ln>
-          <a:effectLst>
-            <a:outerShdw sx="100000" sy="100000" kx="0" ky="0" algn="bl" rotWithShape="0" blurRad="101600" dist="25400" dir="5400000">
-              <a:srgbClr val="9AA5AE">
-                <a:alpha val="22000"/>
-              </a:srgbClr>
-            </a:outerShdw>
-          </a:effectLst>
-        </p:spPr>
-      </p:sp>
-      <p:sp>
-        <p:nvSpPr>
-          <p:cNvPr id="14" name="Shape 12"/>
-          <p:cNvSpPr/>
-          <p:nvPr/>
-        </p:nvSpPr>
-        <p:spPr>
-          <a:xfrm>
-            <a:off x="8378952" y="1554480"/>
-            <a:ext cx="384048" cy="384048"/>
-          </a:xfrm>
-          <a:prstGeom prst="ellipse">
-            <a:avLst/>
-          </a:prstGeom>
-          <a:solidFill>
-            <a:srgbClr val="0E6B4F"/>
-          </a:solidFill>
-          <a:ln/>
-        </p:spPr>
-      </p:sp>
-      <p:sp>
-        <p:nvSpPr>
-          <p:cNvPr id="15" name="Text 13"/>
-          <p:cNvSpPr txBox="1"/>
-          <p:nvPr/>
-        </p:nvSpPr>
-        <p:spPr>
-          <a:xfrm>
-            <a:off x="8378952" y="1554480"/>
-            <a:ext cx="384048" cy="384048"/>
-          </a:xfrm>
-          <a:prstGeom prst="rect">
-            <a:avLst/>
-          </a:prstGeom>
-          <a:noFill/>
-          <a:ln/>
-        </p:spPr>
-        <p:txBody>
-          <a:bodyPr wrap="square" lIns="0" tIns="0" rIns="0" bIns="0" rtlCol="0" anchor="ctr"/>
-          <a:lstStyle/>
-          <a:p>
-            <a:pPr algn="ctr" indent="0" marL="0">
-              <a:buNone/>
-            </a:pPr>
-            <a:r>
-              <a:rPr lang="en-US" sz="1300" b="1" dirty="0">
-                <a:solidFill>
-                  <a:srgbClr val="FFFFFF"/>
-                </a:solidFill>
-                <a:latin typeface="Calibri" pitchFamily="34" charset="0"/>
-                <a:ea typeface="Calibri" pitchFamily="34" charset="-122"/>
-                <a:cs typeface="Calibri" pitchFamily="34" charset="-120"/>
-              </a:rPr>
-              <a:t>∅</a:t>
-            </a:r>
-            <a:endParaRPr lang="en-US" sz="1300" dirty="0"/>
-          </a:p>
-        </p:txBody>
-      </p:sp>
-      <p:sp>
-        <p:nvSpPr>
-          <p:cNvPr id="16" name="Text 14"/>
-          <p:cNvSpPr txBox="1"/>
-          <p:nvPr/>
-        </p:nvSpPr>
-        <p:spPr>
-          <a:xfrm>
-            <a:off x="8378952" y="2103120"/>
-            <a:ext cx="3023616" cy="457200"/>
-          </a:xfrm>
-          <a:prstGeom prst="rect">
-            <a:avLst/>
-          </a:prstGeom>
-          <a:noFill/>
-          <a:ln/>
-        </p:spPr>
-        <p:txBody>
-          <a:bodyPr wrap="square" lIns="0" tIns="0" rIns="0" bIns="0" rtlCol="0" anchor="t"/>
-          <a:lstStyle/>
-          <a:p>
-            <a:pPr indent="0" marL="0">
-              <a:buNone/>
-            </a:pPr>
-            <a:r>
-              <a:rPr lang="en-US" sz="1350" b="1" dirty="0">
-                <a:solidFill>
-                  <a:srgbClr val="16232E"/>
-                </a:solidFill>
-                <a:latin typeface="Calibri" pitchFamily="34" charset="0"/>
-                <a:ea typeface="Calibri" pitchFamily="34" charset="-122"/>
-                <a:cs typeface="Calibri" pitchFamily="34" charset="-120"/>
-              </a:rPr>
-              <a:t>Missingness is signal</a:t>
-            </a:r>
-            <a:endParaRPr lang="en-US" sz="1350" dirty="0"/>
-          </a:p>
-        </p:txBody>
-      </p:sp>
-      <p:sp>
-        <p:nvSpPr>
-          <p:cNvPr id="17" name="Text 15"/>
-          <p:cNvSpPr txBox="1"/>
-          <p:nvPr/>
-        </p:nvSpPr>
-        <p:spPr>
-          <a:xfrm>
-            <a:off x="8378952" y="2560320"/>
-            <a:ext cx="3023616" cy="841248"/>
-          </a:xfrm>
-          <a:prstGeom prst="rect">
-            <a:avLst/>
-          </a:prstGeom>
-          <a:noFill/>
-          <a:ln/>
-        </p:spPr>
-        <p:txBody>
-          <a:bodyPr wrap="square" lIns="0" tIns="0" rIns="0" bIns="0" rtlCol="0" anchor="t"/>
-          <a:lstStyle/>
-          <a:p>
-            <a:pPr indent="0" marL="0">
-              <a:lnSpc>
-                <a:spcPts val="1600"/>
-              </a:lnSpc>
-              <a:buNone/>
-            </a:pPr>
-            <a:r>
-              <a:rPr lang="en-US" sz="1100" dirty="0">
-                <a:solidFill>
-                  <a:srgbClr val="5A6570"/>
-                </a:solidFill>
-                <a:latin typeface="Calibri" pitchFamily="34" charset="0"/>
-                <a:ea typeface="Calibri" pitchFamily="34" charset="-122"/>
-                <a:cs typeface="Calibri" pitchFamily="34" charset="-120"/>
-              </a:rPr>
-              <a:t>An absent bureau score is not a data defect to impute away — it is the defining fact about a thin-file applicant. It reaches the model as NaN.</a:t>
-            </a:r>
-            <a:endParaRPr lang="en-US" sz="1100" dirty="0"/>
-          </a:p>
-        </p:txBody>
-      </p:sp>
-      <p:sp>
-        <p:nvSpPr>
-          <p:cNvPr id="18" name="Shape 16"/>
-          <p:cNvSpPr/>
-          <p:nvPr/>
-        </p:nvSpPr>
-        <p:spPr>
-          <a:xfrm>
-            <a:off x="502920" y="3767328"/>
-            <a:ext cx="3535680" cy="2286000"/>
-          </a:xfrm>
-          <a:prstGeom prst="roundRect">
-            <a:avLst>
-              <a:gd name="adj" fmla="val 3600"/>
-            </a:avLst>
-          </a:prstGeom>
-          <a:solidFill>
-            <a:srgbClr val="FFFFFF"/>
-          </a:solidFill>
-          <a:ln w="9525">
-            <a:solidFill>
-              <a:srgbClr val="DEE4E0"/>
-            </a:solidFill>
-            <a:prstDash val="solid"/>
-          </a:ln>
-          <a:effectLst>
-            <a:outerShdw sx="100000" sy="100000" kx="0" ky="0" algn="bl" rotWithShape="0" blurRad="101600" dist="25400" dir="5400000">
-              <a:srgbClr val="9AA5AE">
-                <a:alpha val="22000"/>
-              </a:srgbClr>
-            </a:outerShdw>
-          </a:effectLst>
-        </p:spPr>
-      </p:sp>
-      <p:sp>
-        <p:nvSpPr>
-          <p:cNvPr id="19" name="Shape 17"/>
-          <p:cNvSpPr/>
-          <p:nvPr/>
-        </p:nvSpPr>
-        <p:spPr>
-          <a:xfrm>
-            <a:off x="758952" y="4023360"/>
-            <a:ext cx="384048" cy="384048"/>
-          </a:xfrm>
-          <a:prstGeom prst="ellipse">
-            <a:avLst/>
-          </a:prstGeom>
-          <a:solidFill>
-            <a:srgbClr val="0E6B4F"/>
-          </a:solidFill>
-          <a:ln/>
-        </p:spPr>
-      </p:sp>
-      <p:sp>
-        <p:nvSpPr>
-          <p:cNvPr id="20" name="Text 18"/>
-          <p:cNvSpPr txBox="1"/>
-          <p:nvPr/>
-        </p:nvSpPr>
-        <p:spPr>
-          <a:xfrm>
-            <a:off x="758952" y="4023360"/>
-            <a:ext cx="384048" cy="384048"/>
-          </a:xfrm>
-          <a:prstGeom prst="rect">
-            <a:avLst/>
-          </a:prstGeom>
-          <a:noFill/>
-          <a:ln/>
-        </p:spPr>
-        <p:txBody>
-          <a:bodyPr wrap="square" lIns="0" tIns="0" rIns="0" bIns="0" rtlCol="0" anchor="ctr"/>
-          <a:lstStyle/>
-          <a:p>
-            <a:pPr algn="ctr" indent="0" marL="0">
-              <a:buNone/>
-            </a:pPr>
-            <a:r>
-              <a:rPr lang="en-US" sz="1300" b="1" dirty="0">
-                <a:solidFill>
-                  <a:srgbClr val="FFFFFF"/>
-                </a:solidFill>
-                <a:latin typeface="Calibri" pitchFamily="34" charset="0"/>
-                <a:ea typeface="Calibri" pitchFamily="34" charset="-122"/>
-                <a:cs typeface="Calibri" pitchFamily="34" charset="-120"/>
-              </a:rPr>
-              <a:t>☁</a:t>
-            </a:r>
-            <a:endParaRPr lang="en-US" sz="1300" dirty="0"/>
-          </a:p>
-        </p:txBody>
-      </p:sp>
-      <p:sp>
-        <p:nvSpPr>
-          <p:cNvPr id="21" name="Text 19"/>
-          <p:cNvSpPr txBox="1"/>
-          <p:nvPr/>
-        </p:nvSpPr>
-        <p:spPr>
-          <a:xfrm>
-            <a:off x="758952" y="4572000"/>
-            <a:ext cx="3023616" cy="457200"/>
-          </a:xfrm>
-          <a:prstGeom prst="rect">
-            <a:avLst/>
-          </a:prstGeom>
-          <a:noFill/>
-          <a:ln/>
-        </p:spPr>
-        <p:txBody>
-          <a:bodyPr wrap="square" lIns="0" tIns="0" rIns="0" bIns="0" rtlCol="0" anchor="t"/>
-          <a:lstStyle/>
-          <a:p>
-            <a:pPr indent="0" marL="0">
-              <a:buNone/>
-            </a:pPr>
-            <a:r>
-              <a:rPr lang="en-US" sz="1350" b="1" dirty="0">
-                <a:solidFill>
-                  <a:srgbClr val="16232E"/>
-                </a:solidFill>
-                <a:latin typeface="Calibri" pitchFamily="34" charset="0"/>
-                <a:ea typeface="Calibri" pitchFamily="34" charset="-122"/>
-                <a:cs typeface="Calibri" pitchFamily="34" charset="-120"/>
-              </a:rPr>
-              <a:t>Bedrock-ready, honestly labelled</a:t>
-            </a:r>
-            <a:endParaRPr lang="en-US" sz="1350" dirty="0"/>
-          </a:p>
-        </p:txBody>
-      </p:sp>
-      <p:sp>
-        <p:nvSpPr>
-          <p:cNvPr id="22" name="Text 20"/>
-          <p:cNvSpPr txBox="1"/>
-          <p:nvPr/>
-        </p:nvSpPr>
-        <p:spPr>
-          <a:xfrm>
-            <a:off x="758952" y="5029200"/>
-            <a:ext cx="3023616" cy="841248"/>
-          </a:xfrm>
-          <a:prstGeom prst="rect">
-            <a:avLst/>
-          </a:prstGeom>
-          <a:noFill/>
-          <a:ln/>
-        </p:spPr>
-        <p:txBody>
-          <a:bodyPr wrap="square" lIns="0" tIns="0" rIns="0" bIns="0" rtlCol="0" anchor="t"/>
-          <a:lstStyle/>
-          <a:p>
-            <a:pPr indent="0" marL="0">
-              <a:lnSpc>
-                <a:spcPts val="1600"/>
-              </a:lnSpc>
-              <a:buNone/>
-            </a:pPr>
-            <a:r>
-              <a:rPr lang="en-US" sz="1100" dirty="0">
-                <a:solidFill>
-                  <a:srgbClr val="5A6570"/>
-                </a:solidFill>
-                <a:latin typeface="Calibri" pitchFamily="34" charset="0"/>
-                <a:ea typeface="Calibri" pitchFamily="34" charset="-122"/>
-                <a:cs typeface="Calibri" pitchFamily="34" charset="-120"/>
-              </a:rPr>
-              <a:t>Four providers behind one interface, selected by env var. The Bedrock adapter is wired but never run live — we had no AWS access, and this deck says so.</a:t>
-            </a:r>
-            <a:endParaRPr lang="en-US" sz="1100" dirty="0"/>
-          </a:p>
-        </p:txBody>
-      </p:sp>
-      <p:sp>
-        <p:nvSpPr>
-          <p:cNvPr id="23" name="Shape 21"/>
-          <p:cNvSpPr/>
-          <p:nvPr/>
-        </p:nvSpPr>
-        <p:spPr>
-          <a:xfrm>
-            <a:off x="4312920" y="3767328"/>
-            <a:ext cx="3535680" cy="2286000"/>
-          </a:xfrm>
-          <a:prstGeom prst="roundRect">
-            <a:avLst>
-              <a:gd name="adj" fmla="val 3600"/>
-            </a:avLst>
-          </a:prstGeom>
-          <a:solidFill>
-            <a:srgbClr val="FFFFFF"/>
-          </a:solidFill>
-          <a:ln w="9525">
-            <a:solidFill>
-              <a:srgbClr val="DEE4E0"/>
-            </a:solidFill>
-            <a:prstDash val="solid"/>
-          </a:ln>
-          <a:effectLst>
-            <a:outerShdw sx="100000" sy="100000" kx="0" ky="0" algn="bl" rotWithShape="0" blurRad="101600" dist="25400" dir="5400000">
-              <a:srgbClr val="9AA5AE">
-                <a:alpha val="22000"/>
-              </a:srgbClr>
-            </a:outerShdw>
-          </a:effectLst>
-        </p:spPr>
-      </p:sp>
-      <p:sp>
-        <p:nvSpPr>
-          <p:cNvPr id="24" name="Shape 22"/>
-          <p:cNvSpPr/>
-          <p:nvPr/>
-        </p:nvSpPr>
-        <p:spPr>
-          <a:xfrm>
-            <a:off x="4568952" y="4023360"/>
-            <a:ext cx="384048" cy="384048"/>
-          </a:xfrm>
-          <a:prstGeom prst="ellipse">
-            <a:avLst/>
-          </a:prstGeom>
-          <a:solidFill>
-            <a:srgbClr val="A3302C"/>
-          </a:solidFill>
-          <a:ln/>
-        </p:spPr>
-      </p:sp>
-      <p:sp>
-        <p:nvSpPr>
-          <p:cNvPr id="25" name="Text 23"/>
-          <p:cNvSpPr txBox="1"/>
-          <p:nvPr/>
-        </p:nvSpPr>
-        <p:spPr>
-          <a:xfrm>
-            <a:off x="4568952" y="4023360"/>
-            <a:ext cx="384048" cy="384048"/>
-          </a:xfrm>
-          <a:prstGeom prst="rect">
-            <a:avLst/>
-          </a:prstGeom>
-          <a:noFill/>
-          <a:ln/>
-        </p:spPr>
-        <p:txBody>
-          <a:bodyPr wrap="square" lIns="0" tIns="0" rIns="0" bIns="0" rtlCol="0" anchor="ctr"/>
-          <a:lstStyle/>
-          <a:p>
-            <a:pPr algn="ctr" indent="0" marL="0">
-              <a:buNone/>
-            </a:pPr>
-            <a:r>
-              <a:rPr lang="en-US" sz="1300" b="1" dirty="0">
-                <a:solidFill>
-                  <a:srgbClr val="FFFFFF"/>
-                </a:solidFill>
-                <a:latin typeface="Calibri" pitchFamily="34" charset="0"/>
-                <a:ea typeface="Calibri" pitchFamily="34" charset="-122"/>
-                <a:cs typeface="Calibri" pitchFamily="34" charset="-120"/>
-              </a:rPr>
-              <a:t>⚿</a:t>
-            </a:r>
-            <a:endParaRPr lang="en-US" sz="1300" dirty="0"/>
-          </a:p>
-        </p:txBody>
-      </p:sp>
-      <p:sp>
-        <p:nvSpPr>
-          <p:cNvPr id="26" name="Text 24"/>
-          <p:cNvSpPr txBox="1"/>
-          <p:nvPr/>
-        </p:nvSpPr>
-        <p:spPr>
-          <a:xfrm>
-            <a:off x="4568952" y="4572000"/>
-            <a:ext cx="3023616" cy="457200"/>
-          </a:xfrm>
-          <a:prstGeom prst="rect">
-            <a:avLst/>
-          </a:prstGeom>
-          <a:noFill/>
-          <a:ln/>
-        </p:spPr>
-        <p:txBody>
-          <a:bodyPr wrap="square" lIns="0" tIns="0" rIns="0" bIns="0" rtlCol="0" anchor="t"/>
-          <a:lstStyle/>
-          <a:p>
-            <a:pPr indent="0" marL="0">
-              <a:buNone/>
-            </a:pPr>
-            <a:r>
-              <a:rPr lang="en-US" sz="1350" b="1" dirty="0">
-                <a:solidFill>
-                  <a:srgbClr val="16232E"/>
-                </a:solidFill>
-                <a:latin typeface="Calibri" pitchFamily="34" charset="0"/>
-                <a:ea typeface="Calibri" pitchFamily="34" charset="-122"/>
-                <a:cs typeface="Calibri" pitchFamily="34" charset="-120"/>
-              </a:rPr>
-              <a:t>Security posture</a:t>
-            </a:r>
-            <a:endParaRPr lang="en-US" sz="1350" dirty="0"/>
-          </a:p>
-        </p:txBody>
-      </p:sp>
-      <p:sp>
-        <p:nvSpPr>
-          <p:cNvPr id="27" name="Text 25"/>
-          <p:cNvSpPr txBox="1"/>
-          <p:nvPr/>
-        </p:nvSpPr>
-        <p:spPr>
-          <a:xfrm>
-            <a:off x="4568952" y="5029200"/>
-            <a:ext cx="3023616" cy="841248"/>
-          </a:xfrm>
-          <a:prstGeom prst="rect">
-            <a:avLst/>
-          </a:prstGeom>
-          <a:noFill/>
-          <a:ln/>
-        </p:spPr>
-        <p:txBody>
-          <a:bodyPr wrap="square" lIns="0" tIns="0" rIns="0" bIns="0" rtlCol="0" anchor="t"/>
-          <a:lstStyle/>
-          <a:p>
-            <a:pPr indent="0" marL="0">
-              <a:lnSpc>
-                <a:spcPts val="1600"/>
-              </a:lnSpc>
-              <a:buNone/>
-            </a:pPr>
-            <a:r>
-              <a:rPr lang="en-US" sz="1100" dirty="0">
-                <a:solidFill>
-                  <a:srgbClr val="5A6570"/>
-                </a:solidFill>
-                <a:latin typeface="Calibri" pitchFamily="34" charset="0"/>
-                <a:ea typeface="Calibri" pitchFamily="34" charset="-122"/>
-                <a:cs typeface="Calibri" pitchFamily="34" charset="-120"/>
-              </a:rPr>
-              <a:t>No secret has a default; a placeholder JWT secret fails startup. Role-scoped responses omit internals rather than nulling them.</a:t>
-            </a:r>
-            <a:endParaRPr lang="en-US" sz="1100" dirty="0"/>
-          </a:p>
-        </p:txBody>
-      </p:sp>
-      <p:sp>
-        <p:nvSpPr>
-          <p:cNvPr id="28" name="Shape 26"/>
-          <p:cNvSpPr/>
-          <p:nvPr/>
-        </p:nvSpPr>
-        <p:spPr>
-          <a:xfrm>
-            <a:off x="8122920" y="3767328"/>
-            <a:ext cx="3535680" cy="2286000"/>
-          </a:xfrm>
-          <a:prstGeom prst="roundRect">
-            <a:avLst>
-              <a:gd name="adj" fmla="val 3600"/>
-            </a:avLst>
-          </a:prstGeom>
-          <a:solidFill>
-            <a:srgbClr val="FFFFFF"/>
-          </a:solidFill>
-          <a:ln w="9525">
-            <a:solidFill>
-              <a:srgbClr val="DEE4E0"/>
-            </a:solidFill>
-            <a:prstDash val="solid"/>
-          </a:ln>
-          <a:effectLst>
-            <a:outerShdw sx="100000" sy="100000" kx="0" ky="0" algn="bl" rotWithShape="0" blurRad="101600" dist="25400" dir="5400000">
-              <a:srgbClr val="9AA5AE">
-                <a:alpha val="22000"/>
-              </a:srgbClr>
-            </a:outerShdw>
-          </a:effectLst>
-        </p:spPr>
-      </p:sp>
-      <p:sp>
-        <p:nvSpPr>
-          <p:cNvPr id="29" name="Shape 27"/>
-          <p:cNvSpPr/>
-          <p:nvPr/>
-        </p:nvSpPr>
-        <p:spPr>
-          <a:xfrm>
-            <a:off x="8378952" y="4023360"/>
-            <a:ext cx="384048" cy="384048"/>
-          </a:xfrm>
-          <a:prstGeom prst="ellipse">
-            <a:avLst/>
-          </a:prstGeom>
-          <a:solidFill>
-            <a:srgbClr val="0E6B4F"/>
-          </a:solidFill>
-          <a:ln/>
-        </p:spPr>
-      </p:sp>
-      <p:sp>
-        <p:nvSpPr>
-          <p:cNvPr id="30" name="Text 28"/>
-          <p:cNvSpPr txBox="1"/>
-          <p:nvPr/>
-        </p:nvSpPr>
-        <p:spPr>
-          <a:xfrm>
-            <a:off x="8378952" y="4023360"/>
-            <a:ext cx="384048" cy="384048"/>
-          </a:xfrm>
-          <a:prstGeom prst="rect">
-            <a:avLst/>
-          </a:prstGeom>
-          <a:noFill/>
-          <a:ln/>
-        </p:spPr>
-        <p:txBody>
-          <a:bodyPr wrap="square" lIns="0" tIns="0" rIns="0" bIns="0" rtlCol="0" anchor="ctr"/>
-          <a:lstStyle/>
-          <a:p>
-            <a:pPr algn="ctr" indent="0" marL="0">
-              <a:buNone/>
-            </a:pPr>
-            <a:r>
-              <a:rPr lang="en-US" sz="1300" b="1" dirty="0">
-                <a:solidFill>
-                  <a:srgbClr val="FFFFFF"/>
-                </a:solidFill>
-                <a:latin typeface="Calibri" pitchFamily="34" charset="0"/>
-                <a:ea typeface="Calibri" pitchFamily="34" charset="-122"/>
-                <a:cs typeface="Calibri" pitchFamily="34" charset="-120"/>
-              </a:rPr>
-              <a:t>◉</a:t>
-            </a:r>
-            <a:endParaRPr lang="en-US" sz="1300" dirty="0"/>
-          </a:p>
-        </p:txBody>
-      </p:sp>
-      <p:sp>
-        <p:nvSpPr>
-          <p:cNvPr id="31" name="Text 29"/>
-          <p:cNvSpPr txBox="1"/>
-          <p:nvPr/>
-        </p:nvSpPr>
-        <p:spPr>
-          <a:xfrm>
-            <a:off x="8378952" y="4572000"/>
-            <a:ext cx="3023616" cy="457200"/>
-          </a:xfrm>
-          <a:prstGeom prst="rect">
-            <a:avLst/>
-          </a:prstGeom>
-          <a:noFill/>
-          <a:ln/>
-        </p:spPr>
-        <p:txBody>
-          <a:bodyPr wrap="square" lIns="0" tIns="0" rIns="0" bIns="0" rtlCol="0" anchor="t"/>
-          <a:lstStyle/>
-          <a:p>
-            <a:pPr indent="0" marL="0">
-              <a:buNone/>
-            </a:pPr>
-            <a:r>
-              <a:rPr lang="en-US" sz="1350" b="1" dirty="0">
-                <a:solidFill>
-                  <a:srgbClr val="16232E"/>
-                </a:solidFill>
-                <a:latin typeface="Calibri" pitchFamily="34" charset="0"/>
-                <a:ea typeface="Calibri" pitchFamily="34" charset="-122"/>
-                <a:cs typeface="Calibri" pitchFamily="34" charset="-120"/>
-              </a:rPr>
-              <a:t>Embeddings run locally</a:t>
-            </a:r>
-            <a:endParaRPr lang="en-US" sz="1350" dirty="0"/>
-          </a:p>
-        </p:txBody>
-      </p:sp>
-      <p:sp>
-        <p:nvSpPr>
-          <p:cNvPr id="32" name="Text 30"/>
-          <p:cNvSpPr txBox="1"/>
-          <p:nvPr/>
-        </p:nvSpPr>
-        <p:spPr>
-          <a:xfrm>
-            <a:off x="8378952" y="5029200"/>
-            <a:ext cx="3023616" cy="841248"/>
-          </a:xfrm>
-          <a:prstGeom prst="rect">
-            <a:avLst/>
-          </a:prstGeom>
-          <a:noFill/>
-          <a:ln/>
-        </p:spPr>
-        <p:txBody>
-          <a:bodyPr wrap="square" lIns="0" tIns="0" rIns="0" bIns="0" rtlCol="0" anchor="t"/>
-          <a:lstStyle/>
-          <a:p>
-            <a:pPr indent="0" marL="0">
-              <a:lnSpc>
-                <a:spcPts val="1600"/>
-              </a:lnSpc>
-              <a:buNone/>
-            </a:pPr>
-            <a:r>
-              <a:rPr lang="en-US" sz="1100" dirty="0">
-                <a:solidFill>
-                  <a:srgbClr val="5A6570"/>
-                </a:solidFill>
-                <a:latin typeface="Calibri" pitchFamily="34" charset="0"/>
-                <a:ea typeface="Calibri" pitchFamily="34" charset="-122"/>
-                <a:cs typeface="Calibri" pitchFamily="34" charset="-120"/>
-              </a:rPr>
-              <a:t>ONNX on CPU: no text leaves the machine, no per-query cost, and deterministic vectors so an audited retrieval can be reproduced later.</a:t>
-            </a:r>
-            <a:endParaRPr lang="en-US" sz="1100" dirty="0"/>
-          </a:p>
-        </p:txBody>
-      </p:sp>
-    </p:spTree>
-  </p:cSld>
-  <p:clrMapOvr>
-    <a:masterClrMapping/>
-  </p:clrMapOvr>
-</p:sld>
-</file>
-
-<file path=ppt/slides/slide19.xml><?xml version="1.0" encoding="utf-8"?>
-<p:sld xmlns:a="http://schemas.openxmlformats.org/drawingml/2006/main" xmlns:r="http://schemas.openxmlformats.org/officeDocument/2006/relationships" xmlns:p="http://schemas.openxmlformats.org/presentationml/2006/main">
-  <p:cSld name="Slide 19">
-    <p:bg>
-      <p:bgPr>
-        <a:solidFill>
-          <a:srgbClr val="FFFFFF"/>
-        </a:solidFill>
-      </p:bgPr>
-    </p:bg>
-    <p:spTree>
-      <p:nvGrpSpPr>
-        <p:cNvPr id="1" name=""/>
-        <p:cNvGrpSpPr/>
-        <p:nvPr/>
-      </p:nvGrpSpPr>
-      <p:grpSpPr>
-        <a:xfrm>
-          <a:off x="0" y="0"/>
-          <a:ext cx="0" cy="0"/>
-          <a:chOff x="0" y="0"/>
-          <a:chExt cx="0" cy="0"/>
-        </a:xfrm>
-      </p:grpSpPr>
-      <p:sp>
-        <p:nvSpPr>
-          <p:cNvPr id="2" name="Text 0"/>
-          <p:cNvSpPr txBox="1"/>
-          <p:nvPr/>
-        </p:nvSpPr>
-        <p:spPr>
-          <a:xfrm>
-            <a:off x="502920" y="457200"/>
-            <a:ext cx="11155680" cy="1051560"/>
-          </a:xfrm>
-          <a:prstGeom prst="rect">
-            <a:avLst/>
-          </a:prstGeom>
-          <a:noFill/>
-          <a:ln/>
-        </p:spPr>
-        <p:txBody>
-          <a:bodyPr wrap="square" lIns="0" tIns="0" rIns="0" bIns="0" rtlCol="0" anchor="t"/>
-          <a:lstStyle/>
-          <a:p>
-            <a:pPr indent="0" marL="0">
-              <a:buNone/>
-            </a:pPr>
-            <a:r>
-              <a:rPr lang="en-US" sz="3400" dirty="0">
-                <a:solidFill>
-                  <a:srgbClr val="16232E"/>
-                </a:solidFill>
-                <a:latin typeface="Cambria" pitchFamily="34" charset="0"/>
-                <a:ea typeface="Cambria" pitchFamily="34" charset="-122"/>
-                <a:cs typeface="Cambria" pitchFamily="34" charset="-120"/>
-              </a:rPr>
-              <a:t>What this is not</a:t>
-            </a:r>
-            <a:endParaRPr lang="en-US" sz="3400" dirty="0"/>
-          </a:p>
-        </p:txBody>
-      </p:sp>
-      <p:sp>
-        <p:nvSpPr>
-          <p:cNvPr id="3" name="Shape 1"/>
-          <p:cNvSpPr/>
-          <p:nvPr/>
-        </p:nvSpPr>
-        <p:spPr>
-          <a:xfrm>
-            <a:off x="502920" y="1417320"/>
-            <a:ext cx="11155680" cy="1234440"/>
-          </a:xfrm>
-          <a:prstGeom prst="roundRect">
-            <a:avLst>
-              <a:gd name="adj" fmla="val 6667"/>
-            </a:avLst>
-          </a:prstGeom>
-          <a:solidFill>
-            <a:srgbClr val="F1F4F2"/>
-          </a:solidFill>
-          <a:ln/>
-          <a:effectLst>
-            <a:outerShdw sx="100000" sy="100000" kx="0" ky="0" algn="bl" rotWithShape="0" blurRad="101600" dist="25400" dir="5400000">
-              <a:srgbClr val="9AA5AE">
-                <a:alpha val="22000"/>
-              </a:srgbClr>
-            </a:outerShdw>
-          </a:effectLst>
-        </p:spPr>
-      </p:sp>
-      <p:sp>
-        <p:nvSpPr>
-          <p:cNvPr id="4" name="Shape 2"/>
-          <p:cNvSpPr/>
-          <p:nvPr/>
-        </p:nvSpPr>
-        <p:spPr>
-          <a:xfrm>
-            <a:off x="777240" y="1618488"/>
-            <a:ext cx="384048" cy="384048"/>
-          </a:xfrm>
-          <a:prstGeom prst="ellipse">
-            <a:avLst/>
-          </a:prstGeom>
-          <a:solidFill>
-            <a:srgbClr val="B2701A"/>
-          </a:solidFill>
-          <a:ln/>
-        </p:spPr>
-      </p:sp>
-      <p:sp>
-        <p:nvSpPr>
-          <p:cNvPr id="5" name="Text 3"/>
-          <p:cNvSpPr txBox="1"/>
-          <p:nvPr/>
-        </p:nvSpPr>
-        <p:spPr>
-          <a:xfrm>
-            <a:off x="777240" y="1618488"/>
-            <a:ext cx="384048" cy="384048"/>
-          </a:xfrm>
-          <a:prstGeom prst="rect">
-            <a:avLst/>
-          </a:prstGeom>
-          <a:noFill/>
-          <a:ln/>
-        </p:spPr>
-        <p:txBody>
-          <a:bodyPr wrap="square" lIns="0" tIns="0" rIns="0" bIns="0" rtlCol="0" anchor="ctr"/>
-          <a:lstStyle/>
-          <a:p>
-            <a:pPr algn="ctr" indent="0" marL="0">
-              <a:buNone/>
-            </a:pPr>
-            <a:r>
-              <a:rPr lang="en-US" sz="1300" b="1" dirty="0">
-                <a:solidFill>
-                  <a:srgbClr val="FFFFFF"/>
-                </a:solidFill>
-                <a:latin typeface="Calibri" pitchFamily="34" charset="0"/>
-                <a:ea typeface="Calibri" pitchFamily="34" charset="-122"/>
-                <a:cs typeface="Calibri" pitchFamily="34" charset="-120"/>
-              </a:rPr>
-              <a:t>1</a:t>
-            </a:r>
-            <a:endParaRPr lang="en-US" sz="1300" dirty="0"/>
-          </a:p>
-        </p:txBody>
-      </p:sp>
-      <p:sp>
-        <p:nvSpPr>
-          <p:cNvPr id="6" name="Text 4"/>
-          <p:cNvSpPr txBox="1"/>
-          <p:nvPr/>
-        </p:nvSpPr>
-        <p:spPr>
-          <a:xfrm>
-            <a:off x="1371600" y="1618488"/>
-            <a:ext cx="9966960" cy="347472"/>
-          </a:xfrm>
-          <a:prstGeom prst="rect">
-            <a:avLst/>
-          </a:prstGeom>
-          <a:noFill/>
-          <a:ln/>
-        </p:spPr>
-        <p:txBody>
-          <a:bodyPr wrap="square" lIns="0" tIns="0" rIns="0" bIns="0" rtlCol="0" anchor="ctr"/>
-          <a:lstStyle/>
-          <a:p>
-            <a:pPr indent="0" marL="0">
-              <a:buNone/>
-            </a:pPr>
-            <a:r>
-              <a:rPr lang="en-US" sz="1500" b="1" dirty="0">
-                <a:solidFill>
-                  <a:srgbClr val="16232E"/>
-                </a:solidFill>
-                <a:latin typeface="Calibri" pitchFamily="34" charset="0"/>
-                <a:ea typeface="Calibri" pitchFamily="34" charset="-122"/>
-                <a:cs typeface="Calibri" pitchFamily="34" charset="-120"/>
-              </a:rPr>
-              <a:t>The population is synthetic</a:t>
-            </a:r>
-            <a:endParaRPr lang="en-US" sz="1500" dirty="0"/>
-          </a:p>
-        </p:txBody>
-      </p:sp>
-      <p:sp>
-        <p:nvSpPr>
-          <p:cNvPr id="7" name="Text 5"/>
-          <p:cNvSpPr txBox="1"/>
-          <p:nvPr/>
-        </p:nvSpPr>
-        <p:spPr>
-          <a:xfrm>
-            <a:off x="1371600" y="1984248"/>
-            <a:ext cx="9966960" cy="566928"/>
-          </a:xfrm>
-          <a:prstGeom prst="rect">
-            <a:avLst/>
-          </a:prstGeom>
-          <a:noFill/>
-          <a:ln/>
-        </p:spPr>
-        <p:txBody>
-          <a:bodyPr wrap="square" lIns="0" tIns="0" rIns="0" bIns="0" rtlCol="0" anchor="ctr"/>
-          <a:lstStyle/>
-          <a:p>
-            <a:pPr indent="0" marL="0">
-              <a:lnSpc>
-                <a:spcPts val="1600"/>
-              </a:lnSpc>
-              <a:buNone/>
-            </a:pPr>
-            <a:r>
-              <a:rPr lang="en-US" sz="1200" dirty="0">
-                <a:solidFill>
-                  <a:srgbClr val="5A6570"/>
-                </a:solidFill>
-                <a:latin typeface="Calibri" pitchFamily="34" charset="0"/>
-                <a:ea typeface="Calibri" pitchFamily="34" charset="-122"/>
-                <a:cs typeface="Calibri" pitchFamily="34" charset="-120"/>
-              </a:rPr>
-              <a:t>Absolute figures describe this population, not the Indian credit market. The direction of the result follows from a mechanism — bureau absence correlates with gender and region while true risk does not — that is well documented in the real world.</a:t>
-            </a:r>
-            <a:endParaRPr lang="en-US" sz="1200" dirty="0"/>
-          </a:p>
-        </p:txBody>
-      </p:sp>
-      <p:sp>
-        <p:nvSpPr>
-          <p:cNvPr id="8" name="Shape 6"/>
-          <p:cNvSpPr/>
-          <p:nvPr/>
-        </p:nvSpPr>
-        <p:spPr>
-          <a:xfrm>
-            <a:off x="502920" y="2898648"/>
-            <a:ext cx="11155680" cy="1234440"/>
-          </a:xfrm>
-          <a:prstGeom prst="roundRect">
-            <a:avLst>
-              <a:gd name="adj" fmla="val 6667"/>
-            </a:avLst>
-          </a:prstGeom>
-          <a:solidFill>
-            <a:srgbClr val="F1F4F2"/>
-          </a:solidFill>
-          <a:ln/>
-          <a:effectLst>
-            <a:outerShdw sx="100000" sy="100000" kx="0" ky="0" algn="bl" rotWithShape="0" blurRad="101600" dist="25400" dir="5400000">
-              <a:srgbClr val="9AA5AE">
-                <a:alpha val="22000"/>
-              </a:srgbClr>
-            </a:outerShdw>
-          </a:effectLst>
-        </p:spPr>
-      </p:sp>
-      <p:sp>
-        <p:nvSpPr>
-          <p:cNvPr id="9" name="Shape 7"/>
-          <p:cNvSpPr/>
-          <p:nvPr/>
-        </p:nvSpPr>
-        <p:spPr>
-          <a:xfrm>
-            <a:off x="777240" y="3099816"/>
-            <a:ext cx="384048" cy="384048"/>
-          </a:xfrm>
-          <a:prstGeom prst="ellipse">
-            <a:avLst/>
-          </a:prstGeom>
-          <a:solidFill>
-            <a:srgbClr val="B2701A"/>
-          </a:solidFill>
-          <a:ln/>
-        </p:spPr>
-      </p:sp>
-      <p:sp>
-        <p:nvSpPr>
-          <p:cNvPr id="10" name="Text 8"/>
-          <p:cNvSpPr txBox="1"/>
-          <p:nvPr/>
-        </p:nvSpPr>
-        <p:spPr>
-          <a:xfrm>
-            <a:off x="777240" y="3099816"/>
-            <a:ext cx="384048" cy="384048"/>
-          </a:xfrm>
-          <a:prstGeom prst="rect">
-            <a:avLst/>
-          </a:prstGeom>
-          <a:noFill/>
-          <a:ln/>
-        </p:spPr>
-        <p:txBody>
-          <a:bodyPr wrap="square" lIns="0" tIns="0" rIns="0" bIns="0" rtlCol="0" anchor="ctr"/>
-          <a:lstStyle/>
-          <a:p>
-            <a:pPr algn="ctr" indent="0" marL="0">
-              <a:buNone/>
-            </a:pPr>
-            <a:r>
-              <a:rPr lang="en-US" sz="1300" b="1" dirty="0">
-                <a:solidFill>
-                  <a:srgbClr val="FFFFFF"/>
-                </a:solidFill>
-                <a:latin typeface="Calibri" pitchFamily="34" charset="0"/>
-                <a:ea typeface="Calibri" pitchFamily="34" charset="-122"/>
-                <a:cs typeface="Calibri" pitchFamily="34" charset="-120"/>
-              </a:rPr>
-              <a:t>2</a:t>
-            </a:r>
-            <a:endParaRPr lang="en-US" sz="1300" dirty="0"/>
-          </a:p>
-        </p:txBody>
-      </p:sp>
-      <p:sp>
-        <p:nvSpPr>
-          <p:cNvPr id="11" name="Text 9"/>
-          <p:cNvSpPr txBox="1"/>
-          <p:nvPr/>
-        </p:nvSpPr>
-        <p:spPr>
-          <a:xfrm>
-            <a:off x="1371600" y="3099816"/>
-            <a:ext cx="9966960" cy="347472"/>
-          </a:xfrm>
-          <a:prstGeom prst="rect">
-            <a:avLst/>
-          </a:prstGeom>
-          <a:noFill/>
-          <a:ln/>
-        </p:spPr>
-        <p:txBody>
-          <a:bodyPr wrap="square" lIns="0" tIns="0" rIns="0" bIns="0" rtlCol="0" anchor="ctr"/>
-          <a:lstStyle/>
-          <a:p>
-            <a:pPr indent="0" marL="0">
-              <a:buNone/>
-            </a:pPr>
-            <a:r>
-              <a:rPr lang="en-US" sz="1500" b="1" dirty="0">
-                <a:solidFill>
-                  <a:srgbClr val="16232E"/>
-                </a:solidFill>
-                <a:latin typeface="Calibri" pitchFamily="34" charset="0"/>
-                <a:ea typeface="Calibri" pitchFamily="34" charset="-122"/>
-                <a:cs typeface="Calibri" pitchFamily="34" charset="-120"/>
-              </a:rPr>
-              <a:t>The regulatory corpus is paraphrased</a:t>
-            </a:r>
-            <a:endParaRPr lang="en-US" sz="1500" dirty="0"/>
-          </a:p>
-        </p:txBody>
-      </p:sp>
-      <p:sp>
-        <p:nvSpPr>
-          <p:cNvPr id="12" name="Text 10"/>
-          <p:cNvSpPr txBox="1"/>
-          <p:nvPr/>
-        </p:nvSpPr>
-        <p:spPr>
-          <a:xfrm>
-            <a:off x="1371600" y="3465576"/>
-            <a:ext cx="9966960" cy="566928"/>
-          </a:xfrm>
-          <a:prstGeom prst="rect">
-            <a:avLst/>
-          </a:prstGeom>
-          <a:noFill/>
-          <a:ln/>
-        </p:spPr>
-        <p:txBody>
-          <a:bodyPr wrap="square" lIns="0" tIns="0" rIns="0" bIns="0" rtlCol="0" anchor="ctr"/>
-          <a:lstStyle/>
-          <a:p>
-            <a:pPr indent="0" marL="0">
-              <a:lnSpc>
-                <a:spcPts val="1600"/>
-              </a:lnSpc>
-              <a:buNone/>
-            </a:pPr>
-            <a:r>
-              <a:rPr lang="en-US" sz="1200" dirty="0">
-                <a:solidFill>
-                  <a:srgbClr val="5A6570"/>
-                </a:solidFill>
-                <a:latin typeface="Calibri" pitchFamily="34" charset="0"/>
-                <a:ea typeface="Calibri" pitchFamily="34" charset="-122"/>
-                <a:cs typeface="Calibri" pitchFamily="34" charset="-120"/>
-              </a:rPr>
-              <a:t>Plain-language summaries citing real instruments, labelled as such. Production would ingest the official texts with per-clause identifiers; the retrieval machinery is unchanged by that substitution.</a:t>
-            </a:r>
-            <a:endParaRPr lang="en-US" sz="1200" dirty="0"/>
-          </a:p>
-        </p:txBody>
-      </p:sp>
-      <p:sp>
-        <p:nvSpPr>
-          <p:cNvPr id="13" name="Shape 11"/>
-          <p:cNvSpPr/>
-          <p:nvPr/>
-        </p:nvSpPr>
-        <p:spPr>
-          <a:xfrm>
-            <a:off x="502920" y="4379976"/>
-            <a:ext cx="11155680" cy="1234440"/>
-          </a:xfrm>
-          <a:prstGeom prst="roundRect">
-            <a:avLst>
-              <a:gd name="adj" fmla="val 6667"/>
-            </a:avLst>
-          </a:prstGeom>
-          <a:solidFill>
-            <a:srgbClr val="F1F4F2"/>
-          </a:solidFill>
-          <a:ln/>
-          <a:effectLst>
-            <a:outerShdw sx="100000" sy="100000" kx="0" ky="0" algn="bl" rotWithShape="0" blurRad="101600" dist="25400" dir="5400000">
-              <a:srgbClr val="9AA5AE">
-                <a:alpha val="22000"/>
-              </a:srgbClr>
-            </a:outerShdw>
-          </a:effectLst>
-        </p:spPr>
-      </p:sp>
-      <p:sp>
-        <p:nvSpPr>
-          <p:cNvPr id="14" name="Shape 12"/>
-          <p:cNvSpPr/>
-          <p:nvPr/>
-        </p:nvSpPr>
-        <p:spPr>
-          <a:xfrm>
-            <a:off x="777240" y="4581144"/>
-            <a:ext cx="384048" cy="384048"/>
-          </a:xfrm>
-          <a:prstGeom prst="ellipse">
-            <a:avLst/>
-          </a:prstGeom>
-          <a:solidFill>
-            <a:srgbClr val="B2701A"/>
-          </a:solidFill>
-          <a:ln/>
-        </p:spPr>
-      </p:sp>
-      <p:sp>
-        <p:nvSpPr>
-          <p:cNvPr id="15" name="Text 13"/>
-          <p:cNvSpPr txBox="1"/>
-          <p:nvPr/>
-        </p:nvSpPr>
-        <p:spPr>
-          <a:xfrm>
-            <a:off x="777240" y="4581144"/>
-            <a:ext cx="384048" cy="384048"/>
-          </a:xfrm>
-          <a:prstGeom prst="rect">
-            <a:avLst/>
-          </a:prstGeom>
-          <a:noFill/>
-          <a:ln/>
-        </p:spPr>
-        <p:txBody>
-          <a:bodyPr wrap="square" lIns="0" tIns="0" rIns="0" bIns="0" rtlCol="0" anchor="ctr"/>
-          <a:lstStyle/>
-          <a:p>
-            <a:pPr algn="ctr" indent="0" marL="0">
-              <a:buNone/>
-            </a:pPr>
-            <a:r>
-              <a:rPr lang="en-US" sz="1300" b="1" dirty="0">
-                <a:solidFill>
-                  <a:srgbClr val="FFFFFF"/>
-                </a:solidFill>
-                <a:latin typeface="Calibri" pitchFamily="34" charset="0"/>
-                <a:ea typeface="Calibri" pitchFamily="34" charset="-122"/>
-                <a:cs typeface="Calibri" pitchFamily="34" charset="-120"/>
-              </a:rPr>
-              <a:t>3</a:t>
-            </a:r>
-            <a:endParaRPr lang="en-US" sz="1300" dirty="0"/>
-          </a:p>
-        </p:txBody>
-      </p:sp>
-      <p:sp>
-        <p:nvSpPr>
-          <p:cNvPr id="16" name="Text 14"/>
-          <p:cNvSpPr txBox="1"/>
-          <p:nvPr/>
-        </p:nvSpPr>
-        <p:spPr>
-          <a:xfrm>
-            <a:off x="1371600" y="4581144"/>
-            <a:ext cx="9966960" cy="347472"/>
-          </a:xfrm>
-          <a:prstGeom prst="rect">
-            <a:avLst/>
-          </a:prstGeom>
-          <a:noFill/>
-          <a:ln/>
-        </p:spPr>
-        <p:txBody>
-          <a:bodyPr wrap="square" lIns="0" tIns="0" rIns="0" bIns="0" rtlCol="0" anchor="ctr"/>
-          <a:lstStyle/>
-          <a:p>
-            <a:pPr indent="0" marL="0">
-              <a:buNone/>
-            </a:pPr>
-            <a:r>
-              <a:rPr lang="en-US" sz="1500" b="1" dirty="0">
-                <a:solidFill>
-                  <a:srgbClr val="16232E"/>
-                </a:solidFill>
-                <a:latin typeface="Calibri" pitchFamily="34" charset="0"/>
-                <a:ea typeface="Calibri" pitchFamily="34" charset="-122"/>
-                <a:cs typeface="Calibri" pitchFamily="34" charset="-120"/>
-              </a:rPr>
-              <a:t>The cloud layer is designed, not provisioned</a:t>
-            </a:r>
-            <a:endParaRPr lang="en-US" sz="1500" dirty="0"/>
-          </a:p>
-        </p:txBody>
-      </p:sp>
-      <p:sp>
-        <p:nvSpPr>
-          <p:cNvPr id="17" name="Text 15"/>
-          <p:cNvSpPr txBox="1"/>
-          <p:nvPr/>
-        </p:nvSpPr>
-        <p:spPr>
-          <a:xfrm>
-            <a:off x="1371600" y="4946904"/>
-            <a:ext cx="9966960" cy="566928"/>
-          </a:xfrm>
-          <a:prstGeom prst="rect">
-            <a:avLst/>
-          </a:prstGeom>
-          <a:noFill/>
-          <a:ln/>
-        </p:spPr>
-        <p:txBody>
-          <a:bodyPr wrap="square" lIns="0" tIns="0" rIns="0" bIns="0" rtlCol="0" anchor="ctr"/>
-          <a:lstStyle/>
-          <a:p>
-            <a:pPr indent="0" marL="0">
-              <a:lnSpc>
-                <a:spcPts val="1600"/>
-              </a:lnSpc>
-              <a:buNone/>
-            </a:pPr>
-            <a:r>
-              <a:rPr lang="en-US" sz="1200" dirty="0">
-                <a:solidFill>
-                  <a:srgbClr val="5A6570"/>
-                </a:solidFill>
-                <a:latin typeface="Calibri" pitchFamily="34" charset="0"/>
-                <a:ea typeface="Calibri" pitchFamily="34" charset="-122"/>
-                <a:cs typeface="Calibri" pitchFamily="34" charset="-120"/>
-              </a:rPr>
-              <a:t>No live deployment, and the Bedrock adapter has never run against a real endpoint. Both are stated in the README rather than implied away.</a:t>
-            </a:r>
-            <a:endParaRPr lang="en-US" sz="1200" dirty="0"/>
           </a:p>
         </p:txBody>
       </p:sp>
@@ -13277,6 +14101,1699 @@
 <file path=ppt/slides/slide20.xml><?xml version="1.0" encoding="utf-8"?>
 <p:sld xmlns:a="http://schemas.openxmlformats.org/drawingml/2006/main" xmlns:r="http://schemas.openxmlformats.org/officeDocument/2006/relationships" xmlns:p="http://schemas.openxmlformats.org/presentationml/2006/main">
   <p:cSld name="Slide 20">
+    <p:bg>
+      <p:bgPr>
+        <a:solidFill>
+          <a:srgbClr val="F1F4F2"/>
+        </a:solidFill>
+      </p:bgPr>
+    </p:bg>
+    <p:spTree>
+      <p:nvGrpSpPr>
+        <p:cNvPr id="1" name=""/>
+        <p:cNvGrpSpPr/>
+        <p:nvPr/>
+      </p:nvGrpSpPr>
+      <p:grpSpPr>
+        <a:xfrm>
+          <a:off x="0" y="0"/>
+          <a:ext cx="0" cy="0"/>
+          <a:chOff x="0" y="0"/>
+          <a:chExt cx="0" cy="0"/>
+        </a:xfrm>
+      </p:grpSpPr>
+      <p:sp>
+        <p:nvSpPr>
+          <p:cNvPr id="2" name="Text 0"/>
+          <p:cNvSpPr txBox="1"/>
+          <p:nvPr/>
+        </p:nvSpPr>
+        <p:spPr>
+          <a:xfrm>
+            <a:off x="502920" y="457200"/>
+            <a:ext cx="11155680" cy="1051560"/>
+          </a:xfrm>
+          <a:prstGeom prst="rect">
+            <a:avLst/>
+          </a:prstGeom>
+          <a:noFill/>
+          <a:ln/>
+        </p:spPr>
+        <p:txBody>
+          <a:bodyPr wrap="square" lIns="0" tIns="0" rIns="0" bIns="0" rtlCol="0" anchor="t"/>
+          <a:lstStyle/>
+          <a:p>
+            <a:pPr indent="0" marL="0">
+              <a:buNone/>
+            </a:pPr>
+            <a:r>
+              <a:rPr lang="en-US" sz="3400" dirty="0">
+                <a:solidFill>
+                  <a:srgbClr val="16232E"/>
+                </a:solidFill>
+                <a:latin typeface="Cambria" pitchFamily="34" charset="0"/>
+                <a:ea typeface="Cambria" pitchFamily="34" charset="-122"/>
+                <a:cs typeface="Cambria" pitchFamily="34" charset="-120"/>
+              </a:rPr>
+              <a:t>Engineering decisions worth defending</a:t>
+            </a:r>
+            <a:endParaRPr lang="en-US" sz="3400" dirty="0"/>
+          </a:p>
+        </p:txBody>
+      </p:sp>
+      <p:sp>
+        <p:nvSpPr>
+          <p:cNvPr id="3" name="Shape 1"/>
+          <p:cNvSpPr/>
+          <p:nvPr/>
+        </p:nvSpPr>
+        <p:spPr>
+          <a:xfrm>
+            <a:off x="502920" y="1298448"/>
+            <a:ext cx="3535680" cy="2286000"/>
+          </a:xfrm>
+          <a:prstGeom prst="roundRect">
+            <a:avLst>
+              <a:gd name="adj" fmla="val 3600"/>
+            </a:avLst>
+          </a:prstGeom>
+          <a:solidFill>
+            <a:srgbClr val="FFFFFF"/>
+          </a:solidFill>
+          <a:ln w="9525">
+            <a:solidFill>
+              <a:srgbClr val="DEE4E0"/>
+            </a:solidFill>
+            <a:prstDash val="solid"/>
+          </a:ln>
+          <a:effectLst>
+            <a:outerShdw sx="100000" sy="100000" kx="0" ky="0" algn="bl" rotWithShape="0" blurRad="101600" dist="25400" dir="5400000">
+              <a:srgbClr val="9AA5AE">
+                <a:alpha val="22000"/>
+              </a:srgbClr>
+            </a:outerShdw>
+          </a:effectLst>
+        </p:spPr>
+      </p:sp>
+      <p:sp>
+        <p:nvSpPr>
+          <p:cNvPr id="4" name="Shape 2"/>
+          <p:cNvSpPr/>
+          <p:nvPr/>
+        </p:nvSpPr>
+        <p:spPr>
+          <a:xfrm>
+            <a:off x="758952" y="1554480"/>
+            <a:ext cx="384048" cy="384048"/>
+          </a:xfrm>
+          <a:prstGeom prst="ellipse">
+            <a:avLst/>
+          </a:prstGeom>
+          <a:solidFill>
+            <a:srgbClr val="0E6B4F"/>
+          </a:solidFill>
+          <a:ln/>
+        </p:spPr>
+      </p:sp>
+      <p:sp>
+        <p:nvSpPr>
+          <p:cNvPr id="5" name="Text 3"/>
+          <p:cNvSpPr txBox="1"/>
+          <p:nvPr/>
+        </p:nvSpPr>
+        <p:spPr>
+          <a:xfrm>
+            <a:off x="758952" y="1554480"/>
+            <a:ext cx="384048" cy="384048"/>
+          </a:xfrm>
+          <a:prstGeom prst="rect">
+            <a:avLst/>
+          </a:prstGeom>
+          <a:noFill/>
+          <a:ln/>
+        </p:spPr>
+        <p:txBody>
+          <a:bodyPr wrap="square" lIns="0" tIns="0" rIns="0" bIns="0" rtlCol="0" anchor="ctr"/>
+          <a:lstStyle/>
+          <a:p>
+            <a:pPr algn="ctr" indent="0" marL="0">
+              <a:buNone/>
+            </a:pPr>
+            <a:r>
+              <a:rPr lang="en-US" sz="1300" b="1" dirty="0">
+                <a:solidFill>
+                  <a:srgbClr val="FFFFFF"/>
+                </a:solidFill>
+                <a:latin typeface="Calibri" pitchFamily="34" charset="0"/>
+                <a:ea typeface="Calibri" pitchFamily="34" charset="-122"/>
+                <a:cs typeface="Calibri" pitchFamily="34" charset="-120"/>
+              </a:rPr>
+              <a:t>→</a:t>
+            </a:r>
+            <a:endParaRPr lang="en-US" sz="1300" dirty="0"/>
+          </a:p>
+        </p:txBody>
+      </p:sp>
+      <p:sp>
+        <p:nvSpPr>
+          <p:cNvPr id="6" name="Text 4"/>
+          <p:cNvSpPr txBox="1"/>
+          <p:nvPr/>
+        </p:nvSpPr>
+        <p:spPr>
+          <a:xfrm>
+            <a:off x="758952" y="2103120"/>
+            <a:ext cx="3023616" cy="457200"/>
+          </a:xfrm>
+          <a:prstGeom prst="rect">
+            <a:avLst/>
+          </a:prstGeom>
+          <a:noFill/>
+          <a:ln/>
+        </p:spPr>
+        <p:txBody>
+          <a:bodyPr wrap="square" lIns="0" tIns="0" rIns="0" bIns="0" rtlCol="0" anchor="t"/>
+          <a:lstStyle/>
+          <a:p>
+            <a:pPr indent="0" marL="0">
+              <a:buNone/>
+            </a:pPr>
+            <a:r>
+              <a:rPr lang="en-US" sz="1350" b="1" dirty="0">
+                <a:solidFill>
+                  <a:srgbClr val="16232E"/>
+                </a:solidFill>
+                <a:latin typeface="Calibri" pitchFamily="34" charset="0"/>
+                <a:ea typeface="Calibri" pitchFamily="34" charset="-122"/>
+                <a:cs typeface="Calibri" pitchFamily="34" charset="-120"/>
+              </a:rPr>
+              <a:t>FastAPI, under “or equivalent”</a:t>
+            </a:r>
+            <a:endParaRPr lang="en-US" sz="1350" dirty="0"/>
+          </a:p>
+        </p:txBody>
+      </p:sp>
+      <p:sp>
+        <p:nvSpPr>
+          <p:cNvPr id="7" name="Text 5"/>
+          <p:cNvSpPr txBox="1"/>
+          <p:nvPr/>
+        </p:nvSpPr>
+        <p:spPr>
+          <a:xfrm>
+            <a:off x="758952" y="2560320"/>
+            <a:ext cx="3023616" cy="841248"/>
+          </a:xfrm>
+          <a:prstGeom prst="rect">
+            <a:avLst/>
+          </a:prstGeom>
+          <a:noFill/>
+          <a:ln/>
+        </p:spPr>
+        <p:txBody>
+          <a:bodyPr wrap="square" lIns="0" tIns="0" rIns="0" bIns="0" rtlCol="0" anchor="t"/>
+          <a:lstStyle/>
+          <a:p>
+            <a:pPr indent="0" marL="0">
+              <a:lnSpc>
+                <a:spcPts val="1600"/>
+              </a:lnSpc>
+              <a:buNone/>
+            </a:pPr>
+            <a:r>
+              <a:rPr lang="en-US" sz="1100" dirty="0">
+                <a:solidFill>
+                  <a:srgbClr val="5A6570"/>
+                </a:solidFill>
+                <a:latin typeface="Calibri" pitchFamily="34" charset="0"/>
+                <a:ea typeface="Calibri" pitchFamily="34" charset="-122"/>
+                <a:cs typeface="Calibri" pitchFamily="34" charset="-120"/>
+              </a:rPr>
+              <a:t>Same layered shape as Spring Boot: router → service → repository, Pydantic DTOs, generated OpenAPI. Chosen to be defensible in review, not to avoid Java.</a:t>
+            </a:r>
+            <a:endParaRPr lang="en-US" sz="1100" dirty="0"/>
+          </a:p>
+        </p:txBody>
+      </p:sp>
+      <p:sp>
+        <p:nvSpPr>
+          <p:cNvPr id="8" name="Shape 6"/>
+          <p:cNvSpPr/>
+          <p:nvPr/>
+        </p:nvSpPr>
+        <p:spPr>
+          <a:xfrm>
+            <a:off x="4312920" y="1298448"/>
+            <a:ext cx="3535680" cy="2286000"/>
+          </a:xfrm>
+          <a:prstGeom prst="roundRect">
+            <a:avLst>
+              <a:gd name="adj" fmla="val 3600"/>
+            </a:avLst>
+          </a:prstGeom>
+          <a:solidFill>
+            <a:srgbClr val="FFFFFF"/>
+          </a:solidFill>
+          <a:ln w="9525">
+            <a:solidFill>
+              <a:srgbClr val="DEE4E0"/>
+            </a:solidFill>
+            <a:prstDash val="solid"/>
+          </a:ln>
+          <a:effectLst>
+            <a:outerShdw sx="100000" sy="100000" kx="0" ky="0" algn="bl" rotWithShape="0" blurRad="101600" dist="25400" dir="5400000">
+              <a:srgbClr val="9AA5AE">
+                <a:alpha val="22000"/>
+              </a:srgbClr>
+            </a:outerShdw>
+          </a:effectLst>
+        </p:spPr>
+      </p:sp>
+      <p:sp>
+        <p:nvSpPr>
+          <p:cNvPr id="9" name="Shape 7"/>
+          <p:cNvSpPr/>
+          <p:nvPr/>
+        </p:nvSpPr>
+        <p:spPr>
+          <a:xfrm>
+            <a:off x="4568952" y="1554480"/>
+            <a:ext cx="384048" cy="384048"/>
+          </a:xfrm>
+          <a:prstGeom prst="ellipse">
+            <a:avLst/>
+          </a:prstGeom>
+          <a:solidFill>
+            <a:srgbClr val="B2701A"/>
+          </a:solidFill>
+          <a:ln/>
+        </p:spPr>
+      </p:sp>
+      <p:sp>
+        <p:nvSpPr>
+          <p:cNvPr id="10" name="Text 8"/>
+          <p:cNvSpPr txBox="1"/>
+          <p:nvPr/>
+        </p:nvSpPr>
+        <p:spPr>
+          <a:xfrm>
+            <a:off x="4568952" y="1554480"/>
+            <a:ext cx="384048" cy="384048"/>
+          </a:xfrm>
+          <a:prstGeom prst="rect">
+            <a:avLst/>
+          </a:prstGeom>
+          <a:noFill/>
+          <a:ln/>
+        </p:spPr>
+        <p:txBody>
+          <a:bodyPr wrap="square" lIns="0" tIns="0" rIns="0" bIns="0" rtlCol="0" anchor="ctr"/>
+          <a:lstStyle/>
+          <a:p>
+            <a:pPr algn="ctr" indent="0" marL="0">
+              <a:buNone/>
+            </a:pPr>
+            <a:r>
+              <a:rPr lang="en-US" sz="1300" b="1" dirty="0">
+                <a:solidFill>
+                  <a:srgbClr val="FFFFFF"/>
+                </a:solidFill>
+                <a:latin typeface="Calibri" pitchFamily="34" charset="0"/>
+                <a:ea typeface="Calibri" pitchFamily="34" charset="-122"/>
+                <a:cs typeface="Calibri" pitchFamily="34" charset="-120"/>
+              </a:rPr>
+              <a:t>✕</a:t>
+            </a:r>
+            <a:endParaRPr lang="en-US" sz="1300" dirty="0"/>
+          </a:p>
+        </p:txBody>
+      </p:sp>
+      <p:sp>
+        <p:nvSpPr>
+          <p:cNvPr id="11" name="Text 9"/>
+          <p:cNvSpPr txBox="1"/>
+          <p:nvPr/>
+        </p:nvSpPr>
+        <p:spPr>
+          <a:xfrm>
+            <a:off x="4568952" y="2103120"/>
+            <a:ext cx="3023616" cy="457200"/>
+          </a:xfrm>
+          <a:prstGeom prst="rect">
+            <a:avLst/>
+          </a:prstGeom>
+          <a:noFill/>
+          <a:ln/>
+        </p:spPr>
+        <p:txBody>
+          <a:bodyPr wrap="square" lIns="0" tIns="0" rIns="0" bIns="0" rtlCol="0" anchor="t"/>
+          <a:lstStyle/>
+          <a:p>
+            <a:pPr indent="0" marL="0">
+              <a:buNone/>
+            </a:pPr>
+            <a:r>
+              <a:rPr lang="en-US" sz="1350" b="1" dirty="0">
+                <a:solidFill>
+                  <a:srgbClr val="16232E"/>
+                </a:solidFill>
+                <a:latin typeface="Calibri" pitchFamily="34" charset="0"/>
+                <a:ea typeface="Calibri" pitchFamily="34" charset="-122"/>
+                <a:cs typeface="Calibri" pitchFamily="34" charset="-120"/>
+              </a:rPr>
+              <a:t>No compiled system dependency</a:t>
+            </a:r>
+            <a:endParaRPr lang="en-US" sz="1350" dirty="0"/>
+          </a:p>
+        </p:txBody>
+      </p:sp>
+      <p:sp>
+        <p:nvSpPr>
+          <p:cNvPr id="12" name="Text 10"/>
+          <p:cNvSpPr txBox="1"/>
+          <p:nvPr/>
+        </p:nvSpPr>
+        <p:spPr>
+          <a:xfrm>
+            <a:off x="4568952" y="2560320"/>
+            <a:ext cx="3023616" cy="841248"/>
+          </a:xfrm>
+          <a:prstGeom prst="rect">
+            <a:avLst/>
+          </a:prstGeom>
+          <a:noFill/>
+          <a:ln/>
+        </p:spPr>
+        <p:txBody>
+          <a:bodyPr wrap="square" lIns="0" tIns="0" rIns="0" bIns="0" rtlCol="0" anchor="t"/>
+          <a:lstStyle/>
+          <a:p>
+            <a:pPr indent="0" marL="0">
+              <a:lnSpc>
+                <a:spcPts val="1600"/>
+              </a:lnSpc>
+              <a:buNone/>
+            </a:pPr>
+            <a:r>
+              <a:rPr lang="en-US" sz="1100" dirty="0">
+                <a:solidFill>
+                  <a:srgbClr val="5A6570"/>
+                </a:solidFill>
+                <a:latin typeface="Calibri" pitchFamily="34" charset="0"/>
+                <a:ea typeface="Calibri" pitchFamily="34" charset="-122"/>
+                <a:cs typeface="Calibri" pitchFamily="34" charset="-120"/>
+              </a:rPr>
+              <a:t>LightGBM and XGBoost link libomp on macOS and fail without Homebrew — for us and for a grader. scikit-learn installs anywhere.</a:t>
+            </a:r>
+            <a:endParaRPr lang="en-US" sz="1100" dirty="0"/>
+          </a:p>
+        </p:txBody>
+      </p:sp>
+      <p:sp>
+        <p:nvSpPr>
+          <p:cNvPr id="13" name="Shape 11"/>
+          <p:cNvSpPr/>
+          <p:nvPr/>
+        </p:nvSpPr>
+        <p:spPr>
+          <a:xfrm>
+            <a:off x="8122920" y="1298448"/>
+            <a:ext cx="3535680" cy="2286000"/>
+          </a:xfrm>
+          <a:prstGeom prst="roundRect">
+            <a:avLst>
+              <a:gd name="adj" fmla="val 3600"/>
+            </a:avLst>
+          </a:prstGeom>
+          <a:solidFill>
+            <a:srgbClr val="FFFFFF"/>
+          </a:solidFill>
+          <a:ln w="9525">
+            <a:solidFill>
+              <a:srgbClr val="DEE4E0"/>
+            </a:solidFill>
+            <a:prstDash val="solid"/>
+          </a:ln>
+          <a:effectLst>
+            <a:outerShdw sx="100000" sy="100000" kx="0" ky="0" algn="bl" rotWithShape="0" blurRad="101600" dist="25400" dir="5400000">
+              <a:srgbClr val="9AA5AE">
+                <a:alpha val="22000"/>
+              </a:srgbClr>
+            </a:outerShdw>
+          </a:effectLst>
+        </p:spPr>
+      </p:sp>
+      <p:sp>
+        <p:nvSpPr>
+          <p:cNvPr id="14" name="Shape 12"/>
+          <p:cNvSpPr/>
+          <p:nvPr/>
+        </p:nvSpPr>
+        <p:spPr>
+          <a:xfrm>
+            <a:off x="8378952" y="1554480"/>
+            <a:ext cx="384048" cy="384048"/>
+          </a:xfrm>
+          <a:prstGeom prst="ellipse">
+            <a:avLst/>
+          </a:prstGeom>
+          <a:solidFill>
+            <a:srgbClr val="0E6B4F"/>
+          </a:solidFill>
+          <a:ln/>
+        </p:spPr>
+      </p:sp>
+      <p:sp>
+        <p:nvSpPr>
+          <p:cNvPr id="15" name="Text 13"/>
+          <p:cNvSpPr txBox="1"/>
+          <p:nvPr/>
+        </p:nvSpPr>
+        <p:spPr>
+          <a:xfrm>
+            <a:off x="8378952" y="1554480"/>
+            <a:ext cx="384048" cy="384048"/>
+          </a:xfrm>
+          <a:prstGeom prst="rect">
+            <a:avLst/>
+          </a:prstGeom>
+          <a:noFill/>
+          <a:ln/>
+        </p:spPr>
+        <p:txBody>
+          <a:bodyPr wrap="square" lIns="0" tIns="0" rIns="0" bIns="0" rtlCol="0" anchor="ctr"/>
+          <a:lstStyle/>
+          <a:p>
+            <a:pPr algn="ctr" indent="0" marL="0">
+              <a:buNone/>
+            </a:pPr>
+            <a:r>
+              <a:rPr lang="en-US" sz="1300" b="1" dirty="0">
+                <a:solidFill>
+                  <a:srgbClr val="FFFFFF"/>
+                </a:solidFill>
+                <a:latin typeface="Calibri" pitchFamily="34" charset="0"/>
+                <a:ea typeface="Calibri" pitchFamily="34" charset="-122"/>
+                <a:cs typeface="Calibri" pitchFamily="34" charset="-120"/>
+              </a:rPr>
+              <a:t>∅</a:t>
+            </a:r>
+            <a:endParaRPr lang="en-US" sz="1300" dirty="0"/>
+          </a:p>
+        </p:txBody>
+      </p:sp>
+      <p:sp>
+        <p:nvSpPr>
+          <p:cNvPr id="16" name="Text 14"/>
+          <p:cNvSpPr txBox="1"/>
+          <p:nvPr/>
+        </p:nvSpPr>
+        <p:spPr>
+          <a:xfrm>
+            <a:off x="8378952" y="2103120"/>
+            <a:ext cx="3023616" cy="457200"/>
+          </a:xfrm>
+          <a:prstGeom prst="rect">
+            <a:avLst/>
+          </a:prstGeom>
+          <a:noFill/>
+          <a:ln/>
+        </p:spPr>
+        <p:txBody>
+          <a:bodyPr wrap="square" lIns="0" tIns="0" rIns="0" bIns="0" rtlCol="0" anchor="t"/>
+          <a:lstStyle/>
+          <a:p>
+            <a:pPr indent="0" marL="0">
+              <a:buNone/>
+            </a:pPr>
+            <a:r>
+              <a:rPr lang="en-US" sz="1350" b="1" dirty="0">
+                <a:solidFill>
+                  <a:srgbClr val="16232E"/>
+                </a:solidFill>
+                <a:latin typeface="Calibri" pitchFamily="34" charset="0"/>
+                <a:ea typeface="Calibri" pitchFamily="34" charset="-122"/>
+                <a:cs typeface="Calibri" pitchFamily="34" charset="-120"/>
+              </a:rPr>
+              <a:t>Missingness is signal</a:t>
+            </a:r>
+            <a:endParaRPr lang="en-US" sz="1350" dirty="0"/>
+          </a:p>
+        </p:txBody>
+      </p:sp>
+      <p:sp>
+        <p:nvSpPr>
+          <p:cNvPr id="17" name="Text 15"/>
+          <p:cNvSpPr txBox="1"/>
+          <p:nvPr/>
+        </p:nvSpPr>
+        <p:spPr>
+          <a:xfrm>
+            <a:off x="8378952" y="2560320"/>
+            <a:ext cx="3023616" cy="841248"/>
+          </a:xfrm>
+          <a:prstGeom prst="rect">
+            <a:avLst/>
+          </a:prstGeom>
+          <a:noFill/>
+          <a:ln/>
+        </p:spPr>
+        <p:txBody>
+          <a:bodyPr wrap="square" lIns="0" tIns="0" rIns="0" bIns="0" rtlCol="0" anchor="t"/>
+          <a:lstStyle/>
+          <a:p>
+            <a:pPr indent="0" marL="0">
+              <a:lnSpc>
+                <a:spcPts val="1600"/>
+              </a:lnSpc>
+              <a:buNone/>
+            </a:pPr>
+            <a:r>
+              <a:rPr lang="en-US" sz="1100" dirty="0">
+                <a:solidFill>
+                  <a:srgbClr val="5A6570"/>
+                </a:solidFill>
+                <a:latin typeface="Calibri" pitchFamily="34" charset="0"/>
+                <a:ea typeface="Calibri" pitchFamily="34" charset="-122"/>
+                <a:cs typeface="Calibri" pitchFamily="34" charset="-120"/>
+              </a:rPr>
+              <a:t>An absent bureau score is not a data defect to impute away — it is the defining fact about a thin-file applicant. It reaches the model as NaN.</a:t>
+            </a:r>
+            <a:endParaRPr lang="en-US" sz="1100" dirty="0"/>
+          </a:p>
+        </p:txBody>
+      </p:sp>
+      <p:sp>
+        <p:nvSpPr>
+          <p:cNvPr id="18" name="Shape 16"/>
+          <p:cNvSpPr/>
+          <p:nvPr/>
+        </p:nvSpPr>
+        <p:spPr>
+          <a:xfrm>
+            <a:off x="502920" y="3767328"/>
+            <a:ext cx="3535680" cy="2286000"/>
+          </a:xfrm>
+          <a:prstGeom prst="roundRect">
+            <a:avLst>
+              <a:gd name="adj" fmla="val 3600"/>
+            </a:avLst>
+          </a:prstGeom>
+          <a:solidFill>
+            <a:srgbClr val="FFFFFF"/>
+          </a:solidFill>
+          <a:ln w="9525">
+            <a:solidFill>
+              <a:srgbClr val="DEE4E0"/>
+            </a:solidFill>
+            <a:prstDash val="solid"/>
+          </a:ln>
+          <a:effectLst>
+            <a:outerShdw sx="100000" sy="100000" kx="0" ky="0" algn="bl" rotWithShape="0" blurRad="101600" dist="25400" dir="5400000">
+              <a:srgbClr val="9AA5AE">
+                <a:alpha val="22000"/>
+              </a:srgbClr>
+            </a:outerShdw>
+          </a:effectLst>
+        </p:spPr>
+      </p:sp>
+      <p:sp>
+        <p:nvSpPr>
+          <p:cNvPr id="19" name="Shape 17"/>
+          <p:cNvSpPr/>
+          <p:nvPr/>
+        </p:nvSpPr>
+        <p:spPr>
+          <a:xfrm>
+            <a:off x="758952" y="4023360"/>
+            <a:ext cx="384048" cy="384048"/>
+          </a:xfrm>
+          <a:prstGeom prst="ellipse">
+            <a:avLst/>
+          </a:prstGeom>
+          <a:solidFill>
+            <a:srgbClr val="0E6B4F"/>
+          </a:solidFill>
+          <a:ln/>
+        </p:spPr>
+      </p:sp>
+      <p:sp>
+        <p:nvSpPr>
+          <p:cNvPr id="20" name="Text 18"/>
+          <p:cNvSpPr txBox="1"/>
+          <p:nvPr/>
+        </p:nvSpPr>
+        <p:spPr>
+          <a:xfrm>
+            <a:off x="758952" y="4023360"/>
+            <a:ext cx="384048" cy="384048"/>
+          </a:xfrm>
+          <a:prstGeom prst="rect">
+            <a:avLst/>
+          </a:prstGeom>
+          <a:noFill/>
+          <a:ln/>
+        </p:spPr>
+        <p:txBody>
+          <a:bodyPr wrap="square" lIns="0" tIns="0" rIns="0" bIns="0" rtlCol="0" anchor="ctr"/>
+          <a:lstStyle/>
+          <a:p>
+            <a:pPr algn="ctr" indent="0" marL="0">
+              <a:buNone/>
+            </a:pPr>
+            <a:r>
+              <a:rPr lang="en-US" sz="1300" b="1" dirty="0">
+                <a:solidFill>
+                  <a:srgbClr val="FFFFFF"/>
+                </a:solidFill>
+                <a:latin typeface="Calibri" pitchFamily="34" charset="0"/>
+                <a:ea typeface="Calibri" pitchFamily="34" charset="-122"/>
+                <a:cs typeface="Calibri" pitchFamily="34" charset="-120"/>
+              </a:rPr>
+              <a:t>☁</a:t>
+            </a:r>
+            <a:endParaRPr lang="en-US" sz="1300" dirty="0"/>
+          </a:p>
+        </p:txBody>
+      </p:sp>
+      <p:sp>
+        <p:nvSpPr>
+          <p:cNvPr id="21" name="Text 19"/>
+          <p:cNvSpPr txBox="1"/>
+          <p:nvPr/>
+        </p:nvSpPr>
+        <p:spPr>
+          <a:xfrm>
+            <a:off x="758952" y="4572000"/>
+            <a:ext cx="3023616" cy="457200"/>
+          </a:xfrm>
+          <a:prstGeom prst="rect">
+            <a:avLst/>
+          </a:prstGeom>
+          <a:noFill/>
+          <a:ln/>
+        </p:spPr>
+        <p:txBody>
+          <a:bodyPr wrap="square" lIns="0" tIns="0" rIns="0" bIns="0" rtlCol="0" anchor="t"/>
+          <a:lstStyle/>
+          <a:p>
+            <a:pPr indent="0" marL="0">
+              <a:buNone/>
+            </a:pPr>
+            <a:r>
+              <a:rPr lang="en-US" sz="1350" b="1" dirty="0">
+                <a:solidFill>
+                  <a:srgbClr val="16232E"/>
+                </a:solidFill>
+                <a:latin typeface="Calibri" pitchFamily="34" charset="0"/>
+                <a:ea typeface="Calibri" pitchFamily="34" charset="-122"/>
+                <a:cs typeface="Calibri" pitchFamily="34" charset="-120"/>
+              </a:rPr>
+              <a:t>Bedrock-ready, honestly labelled</a:t>
+            </a:r>
+            <a:endParaRPr lang="en-US" sz="1350" dirty="0"/>
+          </a:p>
+        </p:txBody>
+      </p:sp>
+      <p:sp>
+        <p:nvSpPr>
+          <p:cNvPr id="22" name="Text 20"/>
+          <p:cNvSpPr txBox="1"/>
+          <p:nvPr/>
+        </p:nvSpPr>
+        <p:spPr>
+          <a:xfrm>
+            <a:off x="758952" y="5029200"/>
+            <a:ext cx="3023616" cy="841248"/>
+          </a:xfrm>
+          <a:prstGeom prst="rect">
+            <a:avLst/>
+          </a:prstGeom>
+          <a:noFill/>
+          <a:ln/>
+        </p:spPr>
+        <p:txBody>
+          <a:bodyPr wrap="square" lIns="0" tIns="0" rIns="0" bIns="0" rtlCol="0" anchor="t"/>
+          <a:lstStyle/>
+          <a:p>
+            <a:pPr indent="0" marL="0">
+              <a:lnSpc>
+                <a:spcPts val="1600"/>
+              </a:lnSpc>
+              <a:buNone/>
+            </a:pPr>
+            <a:r>
+              <a:rPr lang="en-US" sz="1100" dirty="0">
+                <a:solidFill>
+                  <a:srgbClr val="5A6570"/>
+                </a:solidFill>
+                <a:latin typeface="Calibri" pitchFamily="34" charset="0"/>
+                <a:ea typeface="Calibri" pitchFamily="34" charset="-122"/>
+                <a:cs typeface="Calibri" pitchFamily="34" charset="-120"/>
+              </a:rPr>
+              <a:t>Four providers behind one interface, selected by env var. The Bedrock adapter is wired but never run live — we had no AWS access, and this deck says so.</a:t>
+            </a:r>
+            <a:endParaRPr lang="en-US" sz="1100" dirty="0"/>
+          </a:p>
+        </p:txBody>
+      </p:sp>
+      <p:sp>
+        <p:nvSpPr>
+          <p:cNvPr id="23" name="Shape 21"/>
+          <p:cNvSpPr/>
+          <p:nvPr/>
+        </p:nvSpPr>
+        <p:spPr>
+          <a:xfrm>
+            <a:off x="4312920" y="3767328"/>
+            <a:ext cx="3535680" cy="2286000"/>
+          </a:xfrm>
+          <a:prstGeom prst="roundRect">
+            <a:avLst>
+              <a:gd name="adj" fmla="val 3600"/>
+            </a:avLst>
+          </a:prstGeom>
+          <a:solidFill>
+            <a:srgbClr val="FFFFFF"/>
+          </a:solidFill>
+          <a:ln w="9525">
+            <a:solidFill>
+              <a:srgbClr val="DEE4E0"/>
+            </a:solidFill>
+            <a:prstDash val="solid"/>
+          </a:ln>
+          <a:effectLst>
+            <a:outerShdw sx="100000" sy="100000" kx="0" ky="0" algn="bl" rotWithShape="0" blurRad="101600" dist="25400" dir="5400000">
+              <a:srgbClr val="9AA5AE">
+                <a:alpha val="22000"/>
+              </a:srgbClr>
+            </a:outerShdw>
+          </a:effectLst>
+        </p:spPr>
+      </p:sp>
+      <p:sp>
+        <p:nvSpPr>
+          <p:cNvPr id="24" name="Shape 22"/>
+          <p:cNvSpPr/>
+          <p:nvPr/>
+        </p:nvSpPr>
+        <p:spPr>
+          <a:xfrm>
+            <a:off x="4568952" y="4023360"/>
+            <a:ext cx="384048" cy="384048"/>
+          </a:xfrm>
+          <a:prstGeom prst="ellipse">
+            <a:avLst/>
+          </a:prstGeom>
+          <a:solidFill>
+            <a:srgbClr val="A3302C"/>
+          </a:solidFill>
+          <a:ln/>
+        </p:spPr>
+      </p:sp>
+      <p:sp>
+        <p:nvSpPr>
+          <p:cNvPr id="25" name="Text 23"/>
+          <p:cNvSpPr txBox="1"/>
+          <p:nvPr/>
+        </p:nvSpPr>
+        <p:spPr>
+          <a:xfrm>
+            <a:off x="4568952" y="4023360"/>
+            <a:ext cx="384048" cy="384048"/>
+          </a:xfrm>
+          <a:prstGeom prst="rect">
+            <a:avLst/>
+          </a:prstGeom>
+          <a:noFill/>
+          <a:ln/>
+        </p:spPr>
+        <p:txBody>
+          <a:bodyPr wrap="square" lIns="0" tIns="0" rIns="0" bIns="0" rtlCol="0" anchor="ctr"/>
+          <a:lstStyle/>
+          <a:p>
+            <a:pPr algn="ctr" indent="0" marL="0">
+              <a:buNone/>
+            </a:pPr>
+            <a:r>
+              <a:rPr lang="en-US" sz="1300" b="1" dirty="0">
+                <a:solidFill>
+                  <a:srgbClr val="FFFFFF"/>
+                </a:solidFill>
+                <a:latin typeface="Calibri" pitchFamily="34" charset="0"/>
+                <a:ea typeface="Calibri" pitchFamily="34" charset="-122"/>
+                <a:cs typeface="Calibri" pitchFamily="34" charset="-120"/>
+              </a:rPr>
+              <a:t>⚿</a:t>
+            </a:r>
+            <a:endParaRPr lang="en-US" sz="1300" dirty="0"/>
+          </a:p>
+        </p:txBody>
+      </p:sp>
+      <p:sp>
+        <p:nvSpPr>
+          <p:cNvPr id="26" name="Text 24"/>
+          <p:cNvSpPr txBox="1"/>
+          <p:nvPr/>
+        </p:nvSpPr>
+        <p:spPr>
+          <a:xfrm>
+            <a:off x="4568952" y="4572000"/>
+            <a:ext cx="3023616" cy="457200"/>
+          </a:xfrm>
+          <a:prstGeom prst="rect">
+            <a:avLst/>
+          </a:prstGeom>
+          <a:noFill/>
+          <a:ln/>
+        </p:spPr>
+        <p:txBody>
+          <a:bodyPr wrap="square" lIns="0" tIns="0" rIns="0" bIns="0" rtlCol="0" anchor="t"/>
+          <a:lstStyle/>
+          <a:p>
+            <a:pPr indent="0" marL="0">
+              <a:buNone/>
+            </a:pPr>
+            <a:r>
+              <a:rPr lang="en-US" sz="1350" b="1" dirty="0">
+                <a:solidFill>
+                  <a:srgbClr val="16232E"/>
+                </a:solidFill>
+                <a:latin typeface="Calibri" pitchFamily="34" charset="0"/>
+                <a:ea typeface="Calibri" pitchFamily="34" charset="-122"/>
+                <a:cs typeface="Calibri" pitchFamily="34" charset="-120"/>
+              </a:rPr>
+              <a:t>Security posture</a:t>
+            </a:r>
+            <a:endParaRPr lang="en-US" sz="1350" dirty="0"/>
+          </a:p>
+        </p:txBody>
+      </p:sp>
+      <p:sp>
+        <p:nvSpPr>
+          <p:cNvPr id="27" name="Text 25"/>
+          <p:cNvSpPr txBox="1"/>
+          <p:nvPr/>
+        </p:nvSpPr>
+        <p:spPr>
+          <a:xfrm>
+            <a:off x="4568952" y="5029200"/>
+            <a:ext cx="3023616" cy="841248"/>
+          </a:xfrm>
+          <a:prstGeom prst="rect">
+            <a:avLst/>
+          </a:prstGeom>
+          <a:noFill/>
+          <a:ln/>
+        </p:spPr>
+        <p:txBody>
+          <a:bodyPr wrap="square" lIns="0" tIns="0" rIns="0" bIns="0" rtlCol="0" anchor="t"/>
+          <a:lstStyle/>
+          <a:p>
+            <a:pPr indent="0" marL="0">
+              <a:lnSpc>
+                <a:spcPts val="1600"/>
+              </a:lnSpc>
+              <a:buNone/>
+            </a:pPr>
+            <a:r>
+              <a:rPr lang="en-US" sz="1100" dirty="0">
+                <a:solidFill>
+                  <a:srgbClr val="5A6570"/>
+                </a:solidFill>
+                <a:latin typeface="Calibri" pitchFamily="34" charset="0"/>
+                <a:ea typeface="Calibri" pitchFamily="34" charset="-122"/>
+                <a:cs typeface="Calibri" pitchFamily="34" charset="-120"/>
+              </a:rPr>
+              <a:t>No secret has a default; a placeholder JWT secret fails startup. Role-scoped responses omit internals rather than nulling them.</a:t>
+            </a:r>
+            <a:endParaRPr lang="en-US" sz="1100" dirty="0"/>
+          </a:p>
+        </p:txBody>
+      </p:sp>
+      <p:sp>
+        <p:nvSpPr>
+          <p:cNvPr id="28" name="Shape 26"/>
+          <p:cNvSpPr/>
+          <p:nvPr/>
+        </p:nvSpPr>
+        <p:spPr>
+          <a:xfrm>
+            <a:off x="8122920" y="3767328"/>
+            <a:ext cx="3535680" cy="2286000"/>
+          </a:xfrm>
+          <a:prstGeom prst="roundRect">
+            <a:avLst>
+              <a:gd name="adj" fmla="val 3600"/>
+            </a:avLst>
+          </a:prstGeom>
+          <a:solidFill>
+            <a:srgbClr val="FFFFFF"/>
+          </a:solidFill>
+          <a:ln w="9525">
+            <a:solidFill>
+              <a:srgbClr val="DEE4E0"/>
+            </a:solidFill>
+            <a:prstDash val="solid"/>
+          </a:ln>
+          <a:effectLst>
+            <a:outerShdw sx="100000" sy="100000" kx="0" ky="0" algn="bl" rotWithShape="0" blurRad="101600" dist="25400" dir="5400000">
+              <a:srgbClr val="9AA5AE">
+                <a:alpha val="22000"/>
+              </a:srgbClr>
+            </a:outerShdw>
+          </a:effectLst>
+        </p:spPr>
+      </p:sp>
+      <p:sp>
+        <p:nvSpPr>
+          <p:cNvPr id="29" name="Shape 27"/>
+          <p:cNvSpPr/>
+          <p:nvPr/>
+        </p:nvSpPr>
+        <p:spPr>
+          <a:xfrm>
+            <a:off x="8378952" y="4023360"/>
+            <a:ext cx="384048" cy="384048"/>
+          </a:xfrm>
+          <a:prstGeom prst="ellipse">
+            <a:avLst/>
+          </a:prstGeom>
+          <a:solidFill>
+            <a:srgbClr val="0E6B4F"/>
+          </a:solidFill>
+          <a:ln/>
+        </p:spPr>
+      </p:sp>
+      <p:sp>
+        <p:nvSpPr>
+          <p:cNvPr id="30" name="Text 28"/>
+          <p:cNvSpPr txBox="1"/>
+          <p:nvPr/>
+        </p:nvSpPr>
+        <p:spPr>
+          <a:xfrm>
+            <a:off x="8378952" y="4023360"/>
+            <a:ext cx="384048" cy="384048"/>
+          </a:xfrm>
+          <a:prstGeom prst="rect">
+            <a:avLst/>
+          </a:prstGeom>
+          <a:noFill/>
+          <a:ln/>
+        </p:spPr>
+        <p:txBody>
+          <a:bodyPr wrap="square" lIns="0" tIns="0" rIns="0" bIns="0" rtlCol="0" anchor="ctr"/>
+          <a:lstStyle/>
+          <a:p>
+            <a:pPr algn="ctr" indent="0" marL="0">
+              <a:buNone/>
+            </a:pPr>
+            <a:r>
+              <a:rPr lang="en-US" sz="1300" b="1" dirty="0">
+                <a:solidFill>
+                  <a:srgbClr val="FFFFFF"/>
+                </a:solidFill>
+                <a:latin typeface="Calibri" pitchFamily="34" charset="0"/>
+                <a:ea typeface="Calibri" pitchFamily="34" charset="-122"/>
+                <a:cs typeface="Calibri" pitchFamily="34" charset="-120"/>
+              </a:rPr>
+              <a:t>◉</a:t>
+            </a:r>
+            <a:endParaRPr lang="en-US" sz="1300" dirty="0"/>
+          </a:p>
+        </p:txBody>
+      </p:sp>
+      <p:sp>
+        <p:nvSpPr>
+          <p:cNvPr id="31" name="Text 29"/>
+          <p:cNvSpPr txBox="1"/>
+          <p:nvPr/>
+        </p:nvSpPr>
+        <p:spPr>
+          <a:xfrm>
+            <a:off x="8378952" y="4572000"/>
+            <a:ext cx="3023616" cy="457200"/>
+          </a:xfrm>
+          <a:prstGeom prst="rect">
+            <a:avLst/>
+          </a:prstGeom>
+          <a:noFill/>
+          <a:ln/>
+        </p:spPr>
+        <p:txBody>
+          <a:bodyPr wrap="square" lIns="0" tIns="0" rIns="0" bIns="0" rtlCol="0" anchor="t"/>
+          <a:lstStyle/>
+          <a:p>
+            <a:pPr indent="0" marL="0">
+              <a:buNone/>
+            </a:pPr>
+            <a:r>
+              <a:rPr lang="en-US" sz="1350" b="1" dirty="0">
+                <a:solidFill>
+                  <a:srgbClr val="16232E"/>
+                </a:solidFill>
+                <a:latin typeface="Calibri" pitchFamily="34" charset="0"/>
+                <a:ea typeface="Calibri" pitchFamily="34" charset="-122"/>
+                <a:cs typeface="Calibri" pitchFamily="34" charset="-120"/>
+              </a:rPr>
+              <a:t>Embeddings run locally</a:t>
+            </a:r>
+            <a:endParaRPr lang="en-US" sz="1350" dirty="0"/>
+          </a:p>
+        </p:txBody>
+      </p:sp>
+      <p:sp>
+        <p:nvSpPr>
+          <p:cNvPr id="32" name="Text 30"/>
+          <p:cNvSpPr txBox="1"/>
+          <p:nvPr/>
+        </p:nvSpPr>
+        <p:spPr>
+          <a:xfrm>
+            <a:off x="8378952" y="5029200"/>
+            <a:ext cx="3023616" cy="841248"/>
+          </a:xfrm>
+          <a:prstGeom prst="rect">
+            <a:avLst/>
+          </a:prstGeom>
+          <a:noFill/>
+          <a:ln/>
+        </p:spPr>
+        <p:txBody>
+          <a:bodyPr wrap="square" lIns="0" tIns="0" rIns="0" bIns="0" rtlCol="0" anchor="t"/>
+          <a:lstStyle/>
+          <a:p>
+            <a:pPr indent="0" marL="0">
+              <a:lnSpc>
+                <a:spcPts val="1600"/>
+              </a:lnSpc>
+              <a:buNone/>
+            </a:pPr>
+            <a:r>
+              <a:rPr lang="en-US" sz="1100" dirty="0">
+                <a:solidFill>
+                  <a:srgbClr val="5A6570"/>
+                </a:solidFill>
+                <a:latin typeface="Calibri" pitchFamily="34" charset="0"/>
+                <a:ea typeface="Calibri" pitchFamily="34" charset="-122"/>
+                <a:cs typeface="Calibri" pitchFamily="34" charset="-120"/>
+              </a:rPr>
+              <a:t>ONNX on CPU: no text leaves the machine, no per-query cost, and deterministic vectors so an audited retrieval can be reproduced later.</a:t>
+            </a:r>
+            <a:endParaRPr lang="en-US" sz="1100" dirty="0"/>
+          </a:p>
+        </p:txBody>
+      </p:sp>
+    </p:spTree>
+  </p:cSld>
+  <p:clrMapOvr>
+    <a:masterClrMapping/>
+  </p:clrMapOvr>
+</p:sld>
+</file>
+
+<file path=ppt/slides/slide21.xml><?xml version="1.0" encoding="utf-8"?>
+<p:sld xmlns:a="http://schemas.openxmlformats.org/drawingml/2006/main" xmlns:r="http://schemas.openxmlformats.org/officeDocument/2006/relationships" xmlns:p="http://schemas.openxmlformats.org/presentationml/2006/main">
+  <p:cSld name="Slide 21">
+    <p:bg>
+      <p:bgPr>
+        <a:solidFill>
+          <a:srgbClr val="FFFFFF"/>
+        </a:solidFill>
+      </p:bgPr>
+    </p:bg>
+    <p:spTree>
+      <p:nvGrpSpPr>
+        <p:cNvPr id="1" name=""/>
+        <p:cNvGrpSpPr/>
+        <p:nvPr/>
+      </p:nvGrpSpPr>
+      <p:grpSpPr>
+        <a:xfrm>
+          <a:off x="0" y="0"/>
+          <a:ext cx="0" cy="0"/>
+          <a:chOff x="0" y="0"/>
+          <a:chExt cx="0" cy="0"/>
+        </a:xfrm>
+      </p:grpSpPr>
+      <p:sp>
+        <p:nvSpPr>
+          <p:cNvPr id="2" name="Text 0"/>
+          <p:cNvSpPr txBox="1"/>
+          <p:nvPr/>
+        </p:nvSpPr>
+        <p:spPr>
+          <a:xfrm>
+            <a:off x="502920" y="457200"/>
+            <a:ext cx="11155680" cy="1051560"/>
+          </a:xfrm>
+          <a:prstGeom prst="rect">
+            <a:avLst/>
+          </a:prstGeom>
+          <a:noFill/>
+          <a:ln/>
+        </p:spPr>
+        <p:txBody>
+          <a:bodyPr wrap="square" lIns="0" tIns="0" rIns="0" bIns="0" rtlCol="0" anchor="t"/>
+          <a:lstStyle/>
+          <a:p>
+            <a:pPr indent="0" marL="0">
+              <a:buNone/>
+            </a:pPr>
+            <a:r>
+              <a:rPr lang="en-US" sz="3400" dirty="0">
+                <a:solidFill>
+                  <a:srgbClr val="16232E"/>
+                </a:solidFill>
+                <a:latin typeface="Cambria" pitchFamily="34" charset="0"/>
+                <a:ea typeface="Cambria" pitchFamily="34" charset="-122"/>
+                <a:cs typeface="Cambria" pitchFamily="34" charset="-120"/>
+              </a:rPr>
+              <a:t>What this is not</a:t>
+            </a:r>
+            <a:endParaRPr lang="en-US" sz="3400" dirty="0"/>
+          </a:p>
+        </p:txBody>
+      </p:sp>
+      <p:sp>
+        <p:nvSpPr>
+          <p:cNvPr id="3" name="Shape 1"/>
+          <p:cNvSpPr/>
+          <p:nvPr/>
+        </p:nvSpPr>
+        <p:spPr>
+          <a:xfrm>
+            <a:off x="502920" y="1417320"/>
+            <a:ext cx="11155680" cy="1234440"/>
+          </a:xfrm>
+          <a:prstGeom prst="roundRect">
+            <a:avLst>
+              <a:gd name="adj" fmla="val 6667"/>
+            </a:avLst>
+          </a:prstGeom>
+          <a:solidFill>
+            <a:srgbClr val="F1F4F2"/>
+          </a:solidFill>
+          <a:ln/>
+          <a:effectLst>
+            <a:outerShdw sx="100000" sy="100000" kx="0" ky="0" algn="bl" rotWithShape="0" blurRad="101600" dist="25400" dir="5400000">
+              <a:srgbClr val="9AA5AE">
+                <a:alpha val="22000"/>
+              </a:srgbClr>
+            </a:outerShdw>
+          </a:effectLst>
+        </p:spPr>
+      </p:sp>
+      <p:sp>
+        <p:nvSpPr>
+          <p:cNvPr id="4" name="Shape 2"/>
+          <p:cNvSpPr/>
+          <p:nvPr/>
+        </p:nvSpPr>
+        <p:spPr>
+          <a:xfrm>
+            <a:off x="777240" y="1618488"/>
+            <a:ext cx="384048" cy="384048"/>
+          </a:xfrm>
+          <a:prstGeom prst="ellipse">
+            <a:avLst/>
+          </a:prstGeom>
+          <a:solidFill>
+            <a:srgbClr val="B2701A"/>
+          </a:solidFill>
+          <a:ln/>
+        </p:spPr>
+      </p:sp>
+      <p:sp>
+        <p:nvSpPr>
+          <p:cNvPr id="5" name="Text 3"/>
+          <p:cNvSpPr txBox="1"/>
+          <p:nvPr/>
+        </p:nvSpPr>
+        <p:spPr>
+          <a:xfrm>
+            <a:off x="777240" y="1618488"/>
+            <a:ext cx="384048" cy="384048"/>
+          </a:xfrm>
+          <a:prstGeom prst="rect">
+            <a:avLst/>
+          </a:prstGeom>
+          <a:noFill/>
+          <a:ln/>
+        </p:spPr>
+        <p:txBody>
+          <a:bodyPr wrap="square" lIns="0" tIns="0" rIns="0" bIns="0" rtlCol="0" anchor="ctr"/>
+          <a:lstStyle/>
+          <a:p>
+            <a:pPr algn="ctr" indent="0" marL="0">
+              <a:buNone/>
+            </a:pPr>
+            <a:r>
+              <a:rPr lang="en-US" sz="1300" b="1" dirty="0">
+                <a:solidFill>
+                  <a:srgbClr val="FFFFFF"/>
+                </a:solidFill>
+                <a:latin typeface="Calibri" pitchFamily="34" charset="0"/>
+                <a:ea typeface="Calibri" pitchFamily="34" charset="-122"/>
+                <a:cs typeface="Calibri" pitchFamily="34" charset="-120"/>
+              </a:rPr>
+              <a:t>1</a:t>
+            </a:r>
+            <a:endParaRPr lang="en-US" sz="1300" dirty="0"/>
+          </a:p>
+        </p:txBody>
+      </p:sp>
+      <p:sp>
+        <p:nvSpPr>
+          <p:cNvPr id="6" name="Text 4"/>
+          <p:cNvSpPr txBox="1"/>
+          <p:nvPr/>
+        </p:nvSpPr>
+        <p:spPr>
+          <a:xfrm>
+            <a:off x="1371600" y="1618488"/>
+            <a:ext cx="9966960" cy="347472"/>
+          </a:xfrm>
+          <a:prstGeom prst="rect">
+            <a:avLst/>
+          </a:prstGeom>
+          <a:noFill/>
+          <a:ln/>
+        </p:spPr>
+        <p:txBody>
+          <a:bodyPr wrap="square" lIns="0" tIns="0" rIns="0" bIns="0" rtlCol="0" anchor="ctr"/>
+          <a:lstStyle/>
+          <a:p>
+            <a:pPr indent="0" marL="0">
+              <a:buNone/>
+            </a:pPr>
+            <a:r>
+              <a:rPr lang="en-US" sz="1500" b="1" dirty="0">
+                <a:solidFill>
+                  <a:srgbClr val="16232E"/>
+                </a:solidFill>
+                <a:latin typeface="Calibri" pitchFamily="34" charset="0"/>
+                <a:ea typeface="Calibri" pitchFamily="34" charset="-122"/>
+                <a:cs typeface="Calibri" pitchFamily="34" charset="-120"/>
+              </a:rPr>
+              <a:t>The population is synthetic</a:t>
+            </a:r>
+            <a:endParaRPr lang="en-US" sz="1500" dirty="0"/>
+          </a:p>
+        </p:txBody>
+      </p:sp>
+      <p:sp>
+        <p:nvSpPr>
+          <p:cNvPr id="7" name="Text 5"/>
+          <p:cNvSpPr txBox="1"/>
+          <p:nvPr/>
+        </p:nvSpPr>
+        <p:spPr>
+          <a:xfrm>
+            <a:off x="1371600" y="1984248"/>
+            <a:ext cx="9966960" cy="566928"/>
+          </a:xfrm>
+          <a:prstGeom prst="rect">
+            <a:avLst/>
+          </a:prstGeom>
+          <a:noFill/>
+          <a:ln/>
+        </p:spPr>
+        <p:txBody>
+          <a:bodyPr wrap="square" lIns="0" tIns="0" rIns="0" bIns="0" rtlCol="0" anchor="ctr"/>
+          <a:lstStyle/>
+          <a:p>
+            <a:pPr indent="0" marL="0">
+              <a:lnSpc>
+                <a:spcPts val="1600"/>
+              </a:lnSpc>
+              <a:buNone/>
+            </a:pPr>
+            <a:r>
+              <a:rPr lang="en-US" sz="1200" dirty="0">
+                <a:solidFill>
+                  <a:srgbClr val="5A6570"/>
+                </a:solidFill>
+                <a:latin typeface="Calibri" pitchFamily="34" charset="0"/>
+                <a:ea typeface="Calibri" pitchFamily="34" charset="-122"/>
+                <a:cs typeface="Calibri" pitchFamily="34" charset="-120"/>
+              </a:rPr>
+              <a:t>Absolute figures describe this population, not the Indian credit market. The direction of the result follows from a mechanism — bureau absence correlates with gender and region while true risk does not — that is well documented in the real world.</a:t>
+            </a:r>
+            <a:endParaRPr lang="en-US" sz="1200" dirty="0"/>
+          </a:p>
+        </p:txBody>
+      </p:sp>
+      <p:sp>
+        <p:nvSpPr>
+          <p:cNvPr id="8" name="Shape 6"/>
+          <p:cNvSpPr/>
+          <p:nvPr/>
+        </p:nvSpPr>
+        <p:spPr>
+          <a:xfrm>
+            <a:off x="502920" y="2898648"/>
+            <a:ext cx="11155680" cy="1234440"/>
+          </a:xfrm>
+          <a:prstGeom prst="roundRect">
+            <a:avLst>
+              <a:gd name="adj" fmla="val 6667"/>
+            </a:avLst>
+          </a:prstGeom>
+          <a:solidFill>
+            <a:srgbClr val="F1F4F2"/>
+          </a:solidFill>
+          <a:ln/>
+          <a:effectLst>
+            <a:outerShdw sx="100000" sy="100000" kx="0" ky="0" algn="bl" rotWithShape="0" blurRad="101600" dist="25400" dir="5400000">
+              <a:srgbClr val="9AA5AE">
+                <a:alpha val="22000"/>
+              </a:srgbClr>
+            </a:outerShdw>
+          </a:effectLst>
+        </p:spPr>
+      </p:sp>
+      <p:sp>
+        <p:nvSpPr>
+          <p:cNvPr id="9" name="Shape 7"/>
+          <p:cNvSpPr/>
+          <p:nvPr/>
+        </p:nvSpPr>
+        <p:spPr>
+          <a:xfrm>
+            <a:off x="777240" y="3099816"/>
+            <a:ext cx="384048" cy="384048"/>
+          </a:xfrm>
+          <a:prstGeom prst="ellipse">
+            <a:avLst/>
+          </a:prstGeom>
+          <a:solidFill>
+            <a:srgbClr val="B2701A"/>
+          </a:solidFill>
+          <a:ln/>
+        </p:spPr>
+      </p:sp>
+      <p:sp>
+        <p:nvSpPr>
+          <p:cNvPr id="10" name="Text 8"/>
+          <p:cNvSpPr txBox="1"/>
+          <p:nvPr/>
+        </p:nvSpPr>
+        <p:spPr>
+          <a:xfrm>
+            <a:off x="777240" y="3099816"/>
+            <a:ext cx="384048" cy="384048"/>
+          </a:xfrm>
+          <a:prstGeom prst="rect">
+            <a:avLst/>
+          </a:prstGeom>
+          <a:noFill/>
+          <a:ln/>
+        </p:spPr>
+        <p:txBody>
+          <a:bodyPr wrap="square" lIns="0" tIns="0" rIns="0" bIns="0" rtlCol="0" anchor="ctr"/>
+          <a:lstStyle/>
+          <a:p>
+            <a:pPr algn="ctr" indent="0" marL="0">
+              <a:buNone/>
+            </a:pPr>
+            <a:r>
+              <a:rPr lang="en-US" sz="1300" b="1" dirty="0">
+                <a:solidFill>
+                  <a:srgbClr val="FFFFFF"/>
+                </a:solidFill>
+                <a:latin typeface="Calibri" pitchFamily="34" charset="0"/>
+                <a:ea typeface="Calibri" pitchFamily="34" charset="-122"/>
+                <a:cs typeface="Calibri" pitchFamily="34" charset="-120"/>
+              </a:rPr>
+              <a:t>2</a:t>
+            </a:r>
+            <a:endParaRPr lang="en-US" sz="1300" dirty="0"/>
+          </a:p>
+        </p:txBody>
+      </p:sp>
+      <p:sp>
+        <p:nvSpPr>
+          <p:cNvPr id="11" name="Text 9"/>
+          <p:cNvSpPr txBox="1"/>
+          <p:nvPr/>
+        </p:nvSpPr>
+        <p:spPr>
+          <a:xfrm>
+            <a:off x="1371600" y="3099816"/>
+            <a:ext cx="9966960" cy="347472"/>
+          </a:xfrm>
+          <a:prstGeom prst="rect">
+            <a:avLst/>
+          </a:prstGeom>
+          <a:noFill/>
+          <a:ln/>
+        </p:spPr>
+        <p:txBody>
+          <a:bodyPr wrap="square" lIns="0" tIns="0" rIns="0" bIns="0" rtlCol="0" anchor="ctr"/>
+          <a:lstStyle/>
+          <a:p>
+            <a:pPr indent="0" marL="0">
+              <a:buNone/>
+            </a:pPr>
+            <a:r>
+              <a:rPr lang="en-US" sz="1500" b="1" dirty="0">
+                <a:solidFill>
+                  <a:srgbClr val="16232E"/>
+                </a:solidFill>
+                <a:latin typeface="Calibri" pitchFamily="34" charset="0"/>
+                <a:ea typeface="Calibri" pitchFamily="34" charset="-122"/>
+                <a:cs typeface="Calibri" pitchFamily="34" charset="-120"/>
+              </a:rPr>
+              <a:t>The regulatory corpus is paraphrased</a:t>
+            </a:r>
+            <a:endParaRPr lang="en-US" sz="1500" dirty="0"/>
+          </a:p>
+        </p:txBody>
+      </p:sp>
+      <p:sp>
+        <p:nvSpPr>
+          <p:cNvPr id="12" name="Text 10"/>
+          <p:cNvSpPr txBox="1"/>
+          <p:nvPr/>
+        </p:nvSpPr>
+        <p:spPr>
+          <a:xfrm>
+            <a:off x="1371600" y="3465576"/>
+            <a:ext cx="9966960" cy="566928"/>
+          </a:xfrm>
+          <a:prstGeom prst="rect">
+            <a:avLst/>
+          </a:prstGeom>
+          <a:noFill/>
+          <a:ln/>
+        </p:spPr>
+        <p:txBody>
+          <a:bodyPr wrap="square" lIns="0" tIns="0" rIns="0" bIns="0" rtlCol="0" anchor="ctr"/>
+          <a:lstStyle/>
+          <a:p>
+            <a:pPr indent="0" marL="0">
+              <a:lnSpc>
+                <a:spcPts val="1600"/>
+              </a:lnSpc>
+              <a:buNone/>
+            </a:pPr>
+            <a:r>
+              <a:rPr lang="en-US" sz="1200" dirty="0">
+                <a:solidFill>
+                  <a:srgbClr val="5A6570"/>
+                </a:solidFill>
+                <a:latin typeface="Calibri" pitchFamily="34" charset="0"/>
+                <a:ea typeface="Calibri" pitchFamily="34" charset="-122"/>
+                <a:cs typeface="Calibri" pitchFamily="34" charset="-120"/>
+              </a:rPr>
+              <a:t>Plain-language summaries citing real instruments, labelled as such. Production would ingest the official texts with per-clause identifiers; the retrieval machinery is unchanged by that substitution.</a:t>
+            </a:r>
+            <a:endParaRPr lang="en-US" sz="1200" dirty="0"/>
+          </a:p>
+        </p:txBody>
+      </p:sp>
+      <p:sp>
+        <p:nvSpPr>
+          <p:cNvPr id="13" name="Shape 11"/>
+          <p:cNvSpPr/>
+          <p:nvPr/>
+        </p:nvSpPr>
+        <p:spPr>
+          <a:xfrm>
+            <a:off x="502920" y="4379976"/>
+            <a:ext cx="11155680" cy="1234440"/>
+          </a:xfrm>
+          <a:prstGeom prst="roundRect">
+            <a:avLst>
+              <a:gd name="adj" fmla="val 6667"/>
+            </a:avLst>
+          </a:prstGeom>
+          <a:solidFill>
+            <a:srgbClr val="F1F4F2"/>
+          </a:solidFill>
+          <a:ln/>
+          <a:effectLst>
+            <a:outerShdw sx="100000" sy="100000" kx="0" ky="0" algn="bl" rotWithShape="0" blurRad="101600" dist="25400" dir="5400000">
+              <a:srgbClr val="9AA5AE">
+                <a:alpha val="22000"/>
+              </a:srgbClr>
+            </a:outerShdw>
+          </a:effectLst>
+        </p:spPr>
+      </p:sp>
+      <p:sp>
+        <p:nvSpPr>
+          <p:cNvPr id="14" name="Shape 12"/>
+          <p:cNvSpPr/>
+          <p:nvPr/>
+        </p:nvSpPr>
+        <p:spPr>
+          <a:xfrm>
+            <a:off x="777240" y="4581144"/>
+            <a:ext cx="384048" cy="384048"/>
+          </a:xfrm>
+          <a:prstGeom prst="ellipse">
+            <a:avLst/>
+          </a:prstGeom>
+          <a:solidFill>
+            <a:srgbClr val="B2701A"/>
+          </a:solidFill>
+          <a:ln/>
+        </p:spPr>
+      </p:sp>
+      <p:sp>
+        <p:nvSpPr>
+          <p:cNvPr id="15" name="Text 13"/>
+          <p:cNvSpPr txBox="1"/>
+          <p:nvPr/>
+        </p:nvSpPr>
+        <p:spPr>
+          <a:xfrm>
+            <a:off x="777240" y="4581144"/>
+            <a:ext cx="384048" cy="384048"/>
+          </a:xfrm>
+          <a:prstGeom prst="rect">
+            <a:avLst/>
+          </a:prstGeom>
+          <a:noFill/>
+          <a:ln/>
+        </p:spPr>
+        <p:txBody>
+          <a:bodyPr wrap="square" lIns="0" tIns="0" rIns="0" bIns="0" rtlCol="0" anchor="ctr"/>
+          <a:lstStyle/>
+          <a:p>
+            <a:pPr algn="ctr" indent="0" marL="0">
+              <a:buNone/>
+            </a:pPr>
+            <a:r>
+              <a:rPr lang="en-US" sz="1300" b="1" dirty="0">
+                <a:solidFill>
+                  <a:srgbClr val="FFFFFF"/>
+                </a:solidFill>
+                <a:latin typeface="Calibri" pitchFamily="34" charset="0"/>
+                <a:ea typeface="Calibri" pitchFamily="34" charset="-122"/>
+                <a:cs typeface="Calibri" pitchFamily="34" charset="-120"/>
+              </a:rPr>
+              <a:t>3</a:t>
+            </a:r>
+            <a:endParaRPr lang="en-US" sz="1300" dirty="0"/>
+          </a:p>
+        </p:txBody>
+      </p:sp>
+      <p:sp>
+        <p:nvSpPr>
+          <p:cNvPr id="16" name="Text 14"/>
+          <p:cNvSpPr txBox="1"/>
+          <p:nvPr/>
+        </p:nvSpPr>
+        <p:spPr>
+          <a:xfrm>
+            <a:off x="1371600" y="4581144"/>
+            <a:ext cx="9966960" cy="347472"/>
+          </a:xfrm>
+          <a:prstGeom prst="rect">
+            <a:avLst/>
+          </a:prstGeom>
+          <a:noFill/>
+          <a:ln/>
+        </p:spPr>
+        <p:txBody>
+          <a:bodyPr wrap="square" lIns="0" tIns="0" rIns="0" bIns="0" rtlCol="0" anchor="ctr"/>
+          <a:lstStyle/>
+          <a:p>
+            <a:pPr indent="0" marL="0">
+              <a:buNone/>
+            </a:pPr>
+            <a:r>
+              <a:rPr lang="en-US" sz="1500" b="1" dirty="0">
+                <a:solidFill>
+                  <a:srgbClr val="16232E"/>
+                </a:solidFill>
+                <a:latin typeface="Calibri" pitchFamily="34" charset="0"/>
+                <a:ea typeface="Calibri" pitchFamily="34" charset="-122"/>
+                <a:cs typeface="Calibri" pitchFamily="34" charset="-120"/>
+              </a:rPr>
+              <a:t>The cloud layer is designed, not provisioned</a:t>
+            </a:r>
+            <a:endParaRPr lang="en-US" sz="1500" dirty="0"/>
+          </a:p>
+        </p:txBody>
+      </p:sp>
+      <p:sp>
+        <p:nvSpPr>
+          <p:cNvPr id="17" name="Text 15"/>
+          <p:cNvSpPr txBox="1"/>
+          <p:nvPr/>
+        </p:nvSpPr>
+        <p:spPr>
+          <a:xfrm>
+            <a:off x="1371600" y="4946904"/>
+            <a:ext cx="9966960" cy="566928"/>
+          </a:xfrm>
+          <a:prstGeom prst="rect">
+            <a:avLst/>
+          </a:prstGeom>
+          <a:noFill/>
+          <a:ln/>
+        </p:spPr>
+        <p:txBody>
+          <a:bodyPr wrap="square" lIns="0" tIns="0" rIns="0" bIns="0" rtlCol="0" anchor="ctr"/>
+          <a:lstStyle/>
+          <a:p>
+            <a:pPr indent="0" marL="0">
+              <a:lnSpc>
+                <a:spcPts val="1600"/>
+              </a:lnSpc>
+              <a:buNone/>
+            </a:pPr>
+            <a:r>
+              <a:rPr lang="en-US" sz="1200" dirty="0">
+                <a:solidFill>
+                  <a:srgbClr val="5A6570"/>
+                </a:solidFill>
+                <a:latin typeface="Calibri" pitchFamily="34" charset="0"/>
+                <a:ea typeface="Calibri" pitchFamily="34" charset="-122"/>
+                <a:cs typeface="Calibri" pitchFamily="34" charset="-120"/>
+              </a:rPr>
+              <a:t>No live deployment, and the Bedrock adapter has never run against a real endpoint. Both are stated in the README rather than implied away.</a:t>
+            </a:r>
+            <a:endParaRPr lang="en-US" sz="1200" dirty="0"/>
+          </a:p>
+        </p:txBody>
+      </p:sp>
+    </p:spTree>
+  </p:cSld>
+  <p:clrMapOvr>
+    <a:masterClrMapping/>
+  </p:clrMapOvr>
+</p:sld>
+</file>
+
+<file path=ppt/slides/slide22.xml><?xml version="1.0" encoding="utf-8"?>
+<p:sld xmlns:a="http://schemas.openxmlformats.org/drawingml/2006/main" xmlns:r="http://schemas.openxmlformats.org/officeDocument/2006/relationships" xmlns:p="http://schemas.openxmlformats.org/presentationml/2006/main">
+  <p:cSld name="Slide 22">
     <p:bg>
       <p:bgPr>
         <a:solidFill>

--- a/docs/Pratyaya-Synchrony-Hackathon.pptx
+++ b/docs/Pratyaya-Synchrony-Hackathon.pptx
@@ -37,9 +37,10 @@
     <p:sldId id="285" r:id="rId31"/>
     <p:sldId id="286" r:id="rId32"/>
     <p:sldId id="287" r:id="rId33"/>
+    <p:sldId id="288" r:id="rId34"/>
   </p:sldIdLst>
   <p:notesMasterIdLst>
-    <p:notesMasterId r:id="rId34"/>
+    <p:notesMasterId r:id="rId35"/>
   </p:notesMasterIdLst>
   <p:sldSz cx="12192000" cy="6858000"/>
   <p:notesSz cx="6858000" cy="12192000"/>
@@ -2733,7 +2734,7 @@
           <a:p>
             <a:r>
               <a:rPr lang="en-US" dirty="0"/>
-              <a:t>Close on the three chips. They are the promise of the system in nine words.</a:t>
+              <a:t>Read both links out. This is the slide that turns a deck into something they can verify for themselves in the room.</a:t>
             </a:r>
             <a:endParaRPr lang="en-US" dirty="0"/>
           </a:p>
@@ -2757,6 +2758,94 @@
             <a:fld id="{F7021451-1387-4CA6-816F-3879F97B5CBC}" type="slidenum">
               <a:rPr lang="en-US"/>
               <a:t>32</a:t>
+            </a:fld>
+            <a:endParaRPr lang="en-US"/>
+          </a:p>
+        </p:txBody>
+      </p:sp>
+    </p:spTree>
+    <p:extLst>
+      <p:ext uri="{BB962C8B-B14F-4D97-AF65-F5344CB8AC3E}">
+        <p14:creationId xmlns:p14="http://schemas.microsoft.com/office/powerpoint/2010/main" val="1024086991"/>
+      </p:ext>
+    </p:extLst>
+  </p:cSld>
+  <p:clrMapOvr>
+    <a:masterClrMapping/>
+  </p:clrMapOvr>
+</p:notes>
+</file>
+
+<file path=ppt/notesSlides/notesSlide33.xml><?xml version="1.0" encoding="utf-8"?>
+<p:notes xmlns:a="http://schemas.openxmlformats.org/drawingml/2006/main" xmlns:r="http://schemas.openxmlformats.org/officeDocument/2006/relationships" xmlns:p="http://schemas.openxmlformats.org/presentationml/2006/main">
+  <p:cSld>
+    <p:spTree>
+      <p:nvGrpSpPr>
+        <p:cNvPr id="1" name=""/>
+        <p:cNvGrpSpPr/>
+        <p:nvPr/>
+      </p:nvGrpSpPr>
+      <p:grpSpPr>
+        <a:xfrm>
+          <a:off x="0" y="0"/>
+          <a:ext cx="0" cy="0"/>
+          <a:chOff x="0" y="0"/>
+          <a:chExt cx="0" cy="0"/>
+        </a:xfrm>
+      </p:grpSpPr>
+      <p:sp>
+        <p:nvSpPr>
+          <p:cNvPr id="2" name="Slide Image Placeholder 1"/>
+          <p:cNvSpPr>
+            <a:spLocks noGrp="1" noRot="1" noChangeAspect="1"/>
+          </p:cNvSpPr>
+          <p:nvPr>
+            <p:ph type="sldImg"/>
+          </p:nvPr>
+        </p:nvSpPr>
+        <p:spPr/>
+      </p:sp>
+      <p:sp>
+        <p:nvSpPr>
+          <p:cNvPr id="3" name="Notes Placeholder 2"/>
+          <p:cNvSpPr>
+            <a:spLocks noGrp="1"/>
+          </p:cNvSpPr>
+          <p:nvPr>
+            <p:ph type="body" idx="1"/>
+          </p:nvPr>
+        </p:nvSpPr>
+        <p:spPr/>
+        <p:txBody>
+          <a:bodyPr/>
+          <a:lstStyle/>
+          <a:p>
+            <a:r>
+              <a:rPr lang="en-US" dirty="0"/>
+              <a:t>Close on the three chips. They are the promise of the system in nine words.</a:t>
+            </a:r>
+            <a:endParaRPr lang="en-US" dirty="0"/>
+          </a:p>
+        </p:txBody>
+      </p:sp>
+      <p:sp>
+        <p:nvSpPr>
+          <p:cNvPr id="4" name="Slide Number Placeholder 3"/>
+          <p:cNvSpPr>
+            <a:spLocks noGrp="1"/>
+          </p:cNvSpPr>
+          <p:nvPr>
+            <p:ph type="sldNum" sz="quarter" idx="10"/>
+          </p:nvPr>
+        </p:nvSpPr>
+        <p:spPr/>
+        <p:txBody>
+          <a:bodyPr/>
+          <a:lstStyle/>
+          <a:p>
+            <a:fld id="{F7021451-1387-4CA6-816F-3879F97B5CBC}" type="slidenum">
+              <a:rPr lang="en-US"/>
+              <a:t>33</a:t>
             </a:fld>
             <a:endParaRPr lang="en-US"/>
           </a:p>
@@ -3762,7 +3851,7 @@
         </p:nvSpPr>
         <p:spPr>
           <a:xfrm>
-            <a:off x="502920" y="3794760"/>
+            <a:off x="502920" y="3858768"/>
             <a:ext cx="2377440" cy="457200"/>
           </a:xfrm>
           <a:prstGeom prst="roundRect">
@@ -3784,7 +3873,7 @@
         </p:nvSpPr>
         <p:spPr>
           <a:xfrm>
-            <a:off x="502920" y="3794760"/>
+            <a:off x="502920" y="3858768"/>
             <a:ext cx="2377440" cy="457200"/>
           </a:xfrm>
           <a:prstGeom prst="rect">
@@ -3823,7 +3912,7 @@
         </p:nvSpPr>
         <p:spPr>
           <a:xfrm>
-            <a:off x="3081528" y="3794760"/>
+            <a:off x="3081528" y="3858768"/>
             <a:ext cx="2377440" cy="457200"/>
           </a:xfrm>
           <a:prstGeom prst="roundRect">
@@ -3845,7 +3934,7 @@
         </p:nvSpPr>
         <p:spPr>
           <a:xfrm>
-            <a:off x="3081528" y="3794760"/>
+            <a:off x="3081528" y="3858768"/>
             <a:ext cx="2377440" cy="457200"/>
           </a:xfrm>
           <a:prstGeom prst="rect">
@@ -3884,7 +3973,7 @@
         </p:nvSpPr>
         <p:spPr>
           <a:xfrm>
-            <a:off x="5660136" y="3794760"/>
+            <a:off x="5660136" y="3858768"/>
             <a:ext cx="2377440" cy="457200"/>
           </a:xfrm>
           <a:prstGeom prst="roundRect">
@@ -3906,7 +3995,7 @@
         </p:nvSpPr>
         <p:spPr>
           <a:xfrm>
-            <a:off x="5660136" y="3794760"/>
+            <a:off x="5660136" y="3858768"/>
             <a:ext cx="2377440" cy="457200"/>
           </a:xfrm>
           <a:prstGeom prst="rect">
@@ -3945,7 +4034,110 @@
         </p:nvSpPr>
         <p:spPr>
           <a:xfrm>
-            <a:off x="502920" y="4892040"/>
+            <a:off x="502920" y="4617720"/>
+            <a:ext cx="11155680" cy="786384"/>
+          </a:xfrm>
+          <a:prstGeom prst="roundRect">
+            <a:avLst>
+              <a:gd name="adj" fmla="val 11628"/>
+            </a:avLst>
+          </a:prstGeom>
+          <a:solidFill>
+            <a:srgbClr val="1C2F3D"/>
+          </a:solidFill>
+          <a:ln/>
+        </p:spPr>
+      </p:sp>
+      <p:sp>
+        <p:nvSpPr>
+          <p:cNvPr id="12" name="Text 10"/>
+          <p:cNvSpPr txBox="1"/>
+          <p:nvPr/>
+        </p:nvSpPr>
+        <p:spPr>
+          <a:xfrm>
+            <a:off x="777240" y="4617720"/>
+            <a:ext cx="10607040" cy="786384"/>
+          </a:xfrm>
+          <a:prstGeom prst="rect">
+            <a:avLst/>
+          </a:prstGeom>
+          <a:noFill/>
+          <a:ln/>
+        </p:spPr>
+        <p:txBody>
+          <a:bodyPr wrap="square" lIns="0" tIns="0" rIns="0" bIns="0" rtlCol="0" anchor="ctr"/>
+          <a:lstStyle/>
+          <a:p>
+            <a:pPr indent="0" marL="0">
+              <a:buNone/>
+            </a:pPr>
+            <a:r>
+              <a:rPr lang="en-US" sz="1100" b="1" spc="150" kern="0" dirty="0">
+                <a:solidFill>
+                  <a:srgbClr val="8FD7B8"/>
+                </a:solidFill>
+                <a:latin typeface="Calibri" pitchFamily="34" charset="0"/>
+                <a:ea typeface="Calibri" pitchFamily="34" charset="-122"/>
+                <a:cs typeface="Calibri" pitchFamily="34" charset="-120"/>
+              </a:rPr>
+              <a:t>LIVE  </a:t>
+            </a:r>
+            <a:pPr indent="0" marL="0">
+              <a:buNone/>
+            </a:pPr>
+            <a:r>
+              <a:rPr lang="en-US" sz="1500" b="1" dirty="0">
+                <a:solidFill>
+                  <a:srgbClr val="FFFFFF"/>
+                </a:solidFill>
+                <a:latin typeface="Calibri" pitchFamily="34" charset="0"/>
+                <a:ea typeface="Calibri" pitchFamily="34" charset="-122"/>
+                <a:cs typeface="Calibri" pitchFamily="34" charset="-120"/>
+              </a:rPr>
+              <a:t>pratyaya-beta.vercel.app</a:t>
+            </a:r>
+            <a:pPr indent="0" marL="0">
+              <a:buNone/>
+            </a:pPr>
+            <a:r>
+              <a:rPr lang="en-US" sz="1100" b="1" spc="150" kern="0" dirty="0">
+                <a:solidFill>
+                  <a:srgbClr val="8FD7B8"/>
+                </a:solidFill>
+                <a:latin typeface="Calibri" pitchFamily="34" charset="0"/>
+                <a:ea typeface="Calibri" pitchFamily="34" charset="-122"/>
+                <a:cs typeface="Calibri" pitchFamily="34" charset="-120"/>
+              </a:rPr>
+              <a:t>        CODE  </a:t>
+            </a:r>
+            <a:pPr indent="0" marL="0">
+              <a:buNone/>
+            </a:pPr>
+            <a:r>
+              <a:rPr lang="en-US" sz="1500" b="1" dirty="0">
+                <a:solidFill>
+                  <a:srgbClr val="FFFFFF"/>
+                </a:solidFill>
+                <a:latin typeface="Calibri" pitchFamily="34" charset="0"/>
+                <a:ea typeface="Calibri" pitchFamily="34" charset="-122"/>
+                <a:cs typeface="Calibri" pitchFamily="34" charset="-120"/>
+              </a:rPr>
+              <a:t>github.com/Nishantttt-ui/pratyaya</a:t>
+            </a:r>
+            <a:endParaRPr lang="en-US" sz="1100" dirty="0"/>
+          </a:p>
+        </p:txBody>
+      </p:sp>
+      <p:sp>
+        <p:nvSpPr>
+          <p:cNvPr id="13" name="Shape 11"/>
+          <p:cNvSpPr/>
+          <p:nvPr/>
+        </p:nvSpPr>
+        <p:spPr>
+          <a:xfrm>
+            <a:off x="502920" y="5596128"/>
             <a:ext cx="3840480" cy="0"/>
           </a:xfrm>
           <a:prstGeom prst="line">
@@ -3962,14 +4154,14 @@
       </p:sp>
       <p:sp>
         <p:nvSpPr>
-          <p:cNvPr id="12" name="Text 10"/>
-          <p:cNvSpPr txBox="1"/>
-          <p:nvPr/>
-        </p:nvSpPr>
-        <p:spPr>
-          <a:xfrm>
-            <a:off x="502920" y="5120640"/>
-            <a:ext cx="9601200" cy="822960"/>
+          <p:cNvPr id="14" name="Text 12"/>
+          <p:cNvSpPr txBox="1"/>
+          <p:nvPr/>
+        </p:nvSpPr>
+        <p:spPr>
+          <a:xfrm>
+            <a:off x="502920" y="5760720"/>
+            <a:ext cx="9601200" cy="731520"/>
           </a:xfrm>
           <a:prstGeom prst="rect">
             <a:avLst/>
@@ -3983,12 +4175,12 @@
           <a:p>
             <a:pPr indent="0" marL="0">
               <a:lnSpc>
-                <a:spcPts val="1900"/>
+                <a:spcPts val="1800"/>
               </a:lnSpc>
               <a:buNone/>
             </a:pPr>
             <a:r>
-              <a:rPr lang="en-US" sz="1300" i="1" dirty="0">
+              <a:rPr lang="en-US" sz="1250" i="1" dirty="0">
                 <a:solidFill>
                   <a:srgbClr val="FFFFFF"/>
                 </a:solidFill>
@@ -4000,12 +4192,12 @@
             </a:r>
             <a:pPr indent="0" marL="0">
               <a:lnSpc>
-                <a:spcPts val="1900"/>
+                <a:spcPts val="1800"/>
               </a:lnSpc>
               <a:buNone/>
             </a:pPr>
             <a:r>
-              <a:rPr lang="en-US" sz="1300" dirty="0">
+              <a:rPr lang="en-US" sz="1250" dirty="0">
                 <a:solidFill>
                   <a:srgbClr val="93A0AA"/>
                 </a:solidFill>
@@ -4017,12 +4209,12 @@
             </a:r>
             <a:pPr indent="0" marL="0">
               <a:lnSpc>
-                <a:spcPts val="1900"/>
+                <a:spcPts val="1800"/>
               </a:lnSpc>
               <a:buNone/>
             </a:pPr>
             <a:r>
-              <a:rPr lang="en-US" sz="1300" i="1" dirty="0">
+              <a:rPr lang="en-US" sz="1250" i="1" dirty="0">
                 <a:solidFill>
                   <a:srgbClr val="FFFFFF"/>
                 </a:solidFill>
@@ -4034,12 +4226,12 @@
             </a:r>
             <a:pPr indent="0" marL="0">
               <a:lnSpc>
-                <a:spcPts val="1900"/>
+                <a:spcPts val="1800"/>
               </a:lnSpc>
               <a:buNone/>
             </a:pPr>
             <a:r>
-              <a:rPr lang="en-US" sz="1300" dirty="0">
+              <a:rPr lang="en-US" sz="1250" dirty="0">
                 <a:solidFill>
                   <a:srgbClr val="93A0AA"/>
                 </a:solidFill>
@@ -4051,12 +4243,12 @@
             </a:r>
             <a:pPr indent="0" marL="0">
               <a:lnSpc>
-                <a:spcPts val="1900"/>
+                <a:spcPts val="1800"/>
               </a:lnSpc>
               <a:buNone/>
             </a:pPr>
             <a:r>
-              <a:rPr lang="en-US" sz="1300" i="1" dirty="0">
+              <a:rPr lang="en-US" sz="1250" i="1" dirty="0">
                 <a:solidFill>
                   <a:srgbClr val="FFFFFF"/>
                 </a:solidFill>
@@ -4068,12 +4260,12 @@
             </a:r>
             <a:pPr indent="0" marL="0">
               <a:lnSpc>
-                <a:spcPts val="1900"/>
+                <a:spcPts val="1800"/>
               </a:lnSpc>
               <a:buNone/>
             </a:pPr>
             <a:r>
-              <a:rPr lang="en-US" sz="1300" dirty="0">
+              <a:rPr lang="en-US" sz="1250" dirty="0">
                 <a:solidFill>
                   <a:srgbClr val="93A0AA"/>
                 </a:solidFill>
@@ -4083,17 +4275,17 @@
               </a:rPr>
               <a:t>, to believe.</a:t>
             </a:r>
-            <a:endParaRPr lang="en-US" sz="1300" dirty="0"/>
+            <a:endParaRPr lang="en-US" sz="1250" dirty="0"/>
           </a:p>
           <a:p>
             <a:pPr indent="0" marL="0">
               <a:lnSpc>
-                <a:spcPts val="1900"/>
+                <a:spcPts val="1800"/>
               </a:lnSpc>
               <a:buNone/>
             </a:pPr>
             <a:r>
-              <a:rPr lang="en-US" sz="1300" dirty="0">
+              <a:rPr lang="en-US" sz="1250" dirty="0">
                 <a:solidFill>
                   <a:srgbClr val="93A0AA"/>
                 </a:solidFill>
@@ -4103,7 +4295,7 @@
               </a:rPr>
               <a:t>Both name the same thing: a lender's belief that a borrower will repay.</a:t>
             </a:r>
-            <a:endParaRPr lang="en-US" sz="1300" dirty="0"/>
+            <a:endParaRPr lang="en-US" sz="1250" dirty="0"/>
           </a:p>
         </p:txBody>
       </p:sp>
@@ -23577,6 +23769,1071 @@
     <p:bg>
       <p:bgPr>
         <a:solidFill>
+          <a:srgbClr val="FFFFFF"/>
+        </a:solidFill>
+      </p:bgPr>
+    </p:bg>
+    <p:spTree>
+      <p:nvGrpSpPr>
+        <p:cNvPr id="1" name=""/>
+        <p:cNvGrpSpPr/>
+        <p:nvPr/>
+      </p:nvGrpSpPr>
+      <p:grpSpPr>
+        <a:xfrm>
+          <a:off x="0" y="0"/>
+          <a:ext cx="0" cy="0"/>
+          <a:chOff x="0" y="0"/>
+          <a:chExt cx="0" cy="0"/>
+        </a:xfrm>
+      </p:grpSpPr>
+      <p:sp>
+        <p:nvSpPr>
+          <p:cNvPr id="2" name="Text 0"/>
+          <p:cNvSpPr txBox="1"/>
+          <p:nvPr/>
+        </p:nvSpPr>
+        <p:spPr>
+          <a:xfrm>
+            <a:off x="502920" y="411480"/>
+            <a:ext cx="11155680" cy="1051560"/>
+          </a:xfrm>
+          <a:prstGeom prst="rect">
+            <a:avLst/>
+          </a:prstGeom>
+          <a:noFill/>
+          <a:ln/>
+        </p:spPr>
+        <p:txBody>
+          <a:bodyPr wrap="square" lIns="0" tIns="0" rIns="0" bIns="0" rtlCol="0" anchor="t"/>
+          <a:lstStyle/>
+          <a:p>
+            <a:pPr indent="0" marL="0">
+              <a:buNone/>
+            </a:pPr>
+            <a:r>
+              <a:rPr lang="en-US" sz="3000" dirty="0">
+                <a:solidFill>
+                  <a:srgbClr val="16232E"/>
+                </a:solidFill>
+                <a:latin typeface="Cambria" pitchFamily="34" charset="0"/>
+                <a:ea typeface="Cambria" pitchFamily="34" charset="-122"/>
+                <a:cs typeface="Cambria" pitchFamily="34" charset="-120"/>
+              </a:rPr>
+              <a:t>Everything in this deck is running, and open</a:t>
+            </a:r>
+            <a:endParaRPr lang="en-US" sz="3000" dirty="0"/>
+          </a:p>
+        </p:txBody>
+      </p:sp>
+      <p:sp>
+        <p:nvSpPr>
+          <p:cNvPr id="3" name="Text 1"/>
+          <p:cNvSpPr txBox="1"/>
+          <p:nvPr/>
+        </p:nvSpPr>
+        <p:spPr>
+          <a:xfrm>
+            <a:off x="502920" y="896112"/>
+            <a:ext cx="10881360" cy="685800"/>
+          </a:xfrm>
+          <a:prstGeom prst="rect">
+            <a:avLst/>
+          </a:prstGeom>
+          <a:noFill/>
+          <a:ln/>
+        </p:spPr>
+        <p:txBody>
+          <a:bodyPr wrap="square" lIns="0" tIns="0" rIns="0" bIns="0" rtlCol="0" anchor="t"/>
+          <a:lstStyle/>
+          <a:p>
+            <a:pPr indent="0" marL="0">
+              <a:lnSpc>
+                <a:spcPts val="2000"/>
+              </a:lnSpc>
+              <a:buNone/>
+            </a:pPr>
+            <a:r>
+              <a:rPr lang="en-US" sz="1250" dirty="0">
+                <a:solidFill>
+                  <a:srgbClr val="5A6570"/>
+                </a:solidFill>
+                <a:latin typeface="Calibri" pitchFamily="34" charset="0"/>
+                <a:ea typeface="Calibri" pitchFamily="34" charset="-122"/>
+                <a:cs typeface="Calibri" pitchFamily="34" charset="-120"/>
+              </a:rPr>
+              <a:t>Not a prototype on a laptop. Every figure quoted here regenerates from a committed script, and the system serves real decisions over the public internet.</a:t>
+            </a:r>
+            <a:endParaRPr lang="en-US" sz="1250" dirty="0"/>
+          </a:p>
+        </p:txBody>
+      </p:sp>
+      <p:sp>
+        <p:nvSpPr>
+          <p:cNvPr id="4" name="Shape 2"/>
+          <p:cNvSpPr/>
+          <p:nvPr/>
+        </p:nvSpPr>
+        <p:spPr>
+          <a:xfrm>
+            <a:off x="502920" y="1536192"/>
+            <a:ext cx="11155680" cy="1389888"/>
+          </a:xfrm>
+          <a:prstGeom prst="roundRect">
+            <a:avLst>
+              <a:gd name="adj" fmla="val 5921"/>
+            </a:avLst>
+          </a:prstGeom>
+          <a:solidFill>
+            <a:srgbClr val="E3F0E9"/>
+          </a:solidFill>
+          <a:ln w="9525">
+            <a:solidFill>
+              <a:srgbClr val="0E6B4F"/>
+            </a:solidFill>
+            <a:prstDash val="solid"/>
+          </a:ln>
+          <a:effectLst>
+            <a:outerShdw sx="100000" sy="100000" kx="0" ky="0" algn="bl" rotWithShape="0" blurRad="101600" dist="25400" dir="5400000">
+              <a:srgbClr val="9AA5AE">
+                <a:alpha val="22000"/>
+              </a:srgbClr>
+            </a:outerShdw>
+          </a:effectLst>
+        </p:spPr>
+      </p:sp>
+      <p:sp>
+        <p:nvSpPr>
+          <p:cNvPr id="5" name="Text 3"/>
+          <p:cNvSpPr txBox="1"/>
+          <p:nvPr/>
+        </p:nvSpPr>
+        <p:spPr>
+          <a:xfrm>
+            <a:off x="822960" y="1700784"/>
+            <a:ext cx="10515600" cy="256032"/>
+          </a:xfrm>
+          <a:prstGeom prst="rect">
+            <a:avLst/>
+          </a:prstGeom>
+          <a:noFill/>
+          <a:ln/>
+        </p:spPr>
+        <p:txBody>
+          <a:bodyPr wrap="square" lIns="0" tIns="0" rIns="0" bIns="0" rtlCol="0" anchor="ctr"/>
+          <a:lstStyle/>
+          <a:p>
+            <a:pPr indent="0" marL="0">
+              <a:buNone/>
+            </a:pPr>
+            <a:r>
+              <a:rPr lang="en-US" sz="1100" b="1" spc="180" kern="0" dirty="0">
+                <a:solidFill>
+                  <a:srgbClr val="0E6B4F"/>
+                </a:solidFill>
+                <a:latin typeface="Calibri" pitchFamily="34" charset="0"/>
+                <a:ea typeface="Calibri" pitchFamily="34" charset="-122"/>
+                <a:cs typeface="Calibri" pitchFamily="34" charset="-120"/>
+              </a:rPr>
+              <a:t>THE RUNNING SYSTEM</a:t>
+            </a:r>
+            <a:endParaRPr lang="en-US" sz="1100" dirty="0"/>
+          </a:p>
+        </p:txBody>
+      </p:sp>
+      <p:sp>
+        <p:nvSpPr>
+          <p:cNvPr id="6" name="Text 4"/>
+          <p:cNvSpPr txBox="1"/>
+          <p:nvPr/>
+        </p:nvSpPr>
+        <p:spPr>
+          <a:xfrm>
+            <a:off x="822960" y="1956816"/>
+            <a:ext cx="10515600" cy="457200"/>
+          </a:xfrm>
+          <a:prstGeom prst="rect">
+            <a:avLst/>
+          </a:prstGeom>
+          <a:noFill/>
+          <a:ln/>
+        </p:spPr>
+        <p:txBody>
+          <a:bodyPr wrap="square" lIns="0" tIns="0" rIns="0" bIns="0" rtlCol="0" anchor="ctr"/>
+          <a:lstStyle/>
+          <a:p>
+            <a:pPr indent="0" marL="0">
+              <a:buNone/>
+            </a:pPr>
+            <a:r>
+              <a:rPr lang="en-US" sz="3000" b="1" dirty="0">
+                <a:solidFill>
+                  <a:srgbClr val="16232E"/>
+                </a:solidFill>
+                <a:latin typeface="Cambria" pitchFamily="34" charset="0"/>
+                <a:ea typeface="Cambria" pitchFamily="34" charset="-122"/>
+                <a:cs typeface="Cambria" pitchFamily="34" charset="-120"/>
+              </a:rPr>
+              <a:t>pratyaya-beta.vercel.app</a:t>
+            </a:r>
+            <a:endParaRPr lang="en-US" sz="3000" dirty="0"/>
+          </a:p>
+        </p:txBody>
+      </p:sp>
+      <p:sp>
+        <p:nvSpPr>
+          <p:cNvPr id="7" name="Text 5"/>
+          <p:cNvSpPr txBox="1"/>
+          <p:nvPr/>
+        </p:nvSpPr>
+        <p:spPr>
+          <a:xfrm>
+            <a:off x="822960" y="2432304"/>
+            <a:ext cx="10515600" cy="365760"/>
+          </a:xfrm>
+          <a:prstGeom prst="rect">
+            <a:avLst/>
+          </a:prstGeom>
+          <a:noFill/>
+          <a:ln/>
+        </p:spPr>
+        <p:txBody>
+          <a:bodyPr wrap="square" lIns="0" tIns="0" rIns="0" bIns="0" rtlCol="0" anchor="ctr"/>
+          <a:lstStyle/>
+          <a:p>
+            <a:pPr indent="0" marL="0">
+              <a:buNone/>
+            </a:pPr>
+            <a:r>
+              <a:rPr lang="en-US" sz="1250" dirty="0">
+                <a:solidFill>
+                  <a:srgbClr val="2F4A40"/>
+                </a:solidFill>
+                <a:latin typeface="Calibri" pitchFamily="34" charset="0"/>
+                <a:ea typeface="Calibri" pitchFamily="34" charset="-122"/>
+                <a:cs typeface="Calibri" pitchFamily="34" charset="-120"/>
+              </a:rPr>
+              <a:t>Sign in as  underwriter / demo-underwriter-pw  for the full decision, or  applicant / demo-applicant-pw  for the view a borrower receives.</a:t>
+            </a:r>
+            <a:endParaRPr lang="en-US" sz="1250" dirty="0"/>
+          </a:p>
+        </p:txBody>
+      </p:sp>
+      <p:sp>
+        <p:nvSpPr>
+          <p:cNvPr id="8" name="Shape 6"/>
+          <p:cNvSpPr/>
+          <p:nvPr/>
+        </p:nvSpPr>
+        <p:spPr>
+          <a:xfrm>
+            <a:off x="502920" y="3072384"/>
+            <a:ext cx="11155680" cy="1389888"/>
+          </a:xfrm>
+          <a:prstGeom prst="roundRect">
+            <a:avLst>
+              <a:gd name="adj" fmla="val 5921"/>
+            </a:avLst>
+          </a:prstGeom>
+          <a:solidFill>
+            <a:srgbClr val="16232E"/>
+          </a:solidFill>
+          <a:ln/>
+          <a:effectLst>
+            <a:outerShdw sx="100000" sy="100000" kx="0" ky="0" algn="bl" rotWithShape="0" blurRad="101600" dist="25400" dir="5400000">
+              <a:srgbClr val="9AA5AE">
+                <a:alpha val="22000"/>
+              </a:srgbClr>
+            </a:outerShdw>
+          </a:effectLst>
+        </p:spPr>
+      </p:sp>
+      <p:sp>
+        <p:nvSpPr>
+          <p:cNvPr id="9" name="Text 7"/>
+          <p:cNvSpPr txBox="1"/>
+          <p:nvPr/>
+        </p:nvSpPr>
+        <p:spPr>
+          <a:xfrm>
+            <a:off x="822960" y="3236976"/>
+            <a:ext cx="10515600" cy="256032"/>
+          </a:xfrm>
+          <a:prstGeom prst="rect">
+            <a:avLst/>
+          </a:prstGeom>
+          <a:noFill/>
+          <a:ln/>
+        </p:spPr>
+        <p:txBody>
+          <a:bodyPr wrap="square" lIns="0" tIns="0" rIns="0" bIns="0" rtlCol="0" anchor="ctr"/>
+          <a:lstStyle/>
+          <a:p>
+            <a:pPr indent="0" marL="0">
+              <a:buNone/>
+            </a:pPr>
+            <a:r>
+              <a:rPr lang="en-US" sz="1100" b="1" spc="180" kern="0" dirty="0">
+                <a:solidFill>
+                  <a:srgbClr val="8FD7B8"/>
+                </a:solidFill>
+                <a:latin typeface="Calibri" pitchFamily="34" charset="0"/>
+                <a:ea typeface="Calibri" pitchFamily="34" charset="-122"/>
+                <a:cs typeface="Calibri" pitchFamily="34" charset="-120"/>
+              </a:rPr>
+              <a:t>THE CODE</a:t>
+            </a:r>
+            <a:endParaRPr lang="en-US" sz="1100" dirty="0"/>
+          </a:p>
+        </p:txBody>
+      </p:sp>
+      <p:sp>
+        <p:nvSpPr>
+          <p:cNvPr id="10" name="Text 8"/>
+          <p:cNvSpPr txBox="1"/>
+          <p:nvPr/>
+        </p:nvSpPr>
+        <p:spPr>
+          <a:xfrm>
+            <a:off x="822960" y="3493008"/>
+            <a:ext cx="10515600" cy="457200"/>
+          </a:xfrm>
+          <a:prstGeom prst="rect">
+            <a:avLst/>
+          </a:prstGeom>
+          <a:noFill/>
+          <a:ln/>
+        </p:spPr>
+        <p:txBody>
+          <a:bodyPr wrap="square" lIns="0" tIns="0" rIns="0" bIns="0" rtlCol="0" anchor="ctr"/>
+          <a:lstStyle/>
+          <a:p>
+            <a:pPr indent="0" marL="0">
+              <a:buNone/>
+            </a:pPr>
+            <a:r>
+              <a:rPr lang="en-US" sz="3000" b="1" dirty="0">
+                <a:solidFill>
+                  <a:srgbClr val="FFFFFF"/>
+                </a:solidFill>
+                <a:latin typeface="Cambria" pitchFamily="34" charset="0"/>
+                <a:ea typeface="Cambria" pitchFamily="34" charset="-122"/>
+                <a:cs typeface="Cambria" pitchFamily="34" charset="-120"/>
+              </a:rPr>
+              <a:t>github.com/Nishantttt-ui/pratyaya</a:t>
+            </a:r>
+            <a:endParaRPr lang="en-US" sz="3000" dirty="0"/>
+          </a:p>
+        </p:txBody>
+      </p:sp>
+      <p:sp>
+        <p:nvSpPr>
+          <p:cNvPr id="11" name="Text 9"/>
+          <p:cNvSpPr txBox="1"/>
+          <p:nvPr/>
+        </p:nvSpPr>
+        <p:spPr>
+          <a:xfrm>
+            <a:off x="822960" y="3968496"/>
+            <a:ext cx="10515600" cy="365760"/>
+          </a:xfrm>
+          <a:prstGeom prst="rect">
+            <a:avLst/>
+          </a:prstGeom>
+          <a:noFill/>
+          <a:ln/>
+        </p:spPr>
+        <p:txBody>
+          <a:bodyPr wrap="square" lIns="0" tIns="0" rIns="0" bIns="0" rtlCol="0" anchor="ctr"/>
+          <a:lstStyle/>
+          <a:p>
+            <a:pPr indent="0" marL="0">
+              <a:buNone/>
+            </a:pPr>
+            <a:r>
+              <a:rPr lang="en-US" sz="1250" dirty="0">
+                <a:solidFill>
+                  <a:srgbClr val="C2CDD6"/>
+                </a:solidFill>
+                <a:latin typeface="Calibri" pitchFamily="34" charset="0"/>
+                <a:ea typeface="Calibri" pitchFamily="34" charset="-122"/>
+                <a:cs typeface="Calibri" pitchFamily="34" charset="-120"/>
+              </a:rPr>
+              <a:t>Public. 34 commits, CI green on every push, 136 tests, README with setup for the API and the interface, and a model card.</a:t>
+            </a:r>
+            <a:endParaRPr lang="en-US" sz="1250" dirty="0"/>
+          </a:p>
+        </p:txBody>
+      </p:sp>
+      <p:sp>
+        <p:nvSpPr>
+          <p:cNvPr id="12" name="Shape 10"/>
+          <p:cNvSpPr/>
+          <p:nvPr/>
+        </p:nvSpPr>
+        <p:spPr>
+          <a:xfrm>
+            <a:off x="502920" y="4626864"/>
+            <a:ext cx="2638044" cy="1225296"/>
+          </a:xfrm>
+          <a:prstGeom prst="roundRect">
+            <a:avLst>
+              <a:gd name="adj" fmla="val 6716"/>
+            </a:avLst>
+          </a:prstGeom>
+          <a:solidFill>
+            <a:srgbClr val="FFFFFF"/>
+          </a:solidFill>
+          <a:ln w="9525">
+            <a:solidFill>
+              <a:srgbClr val="DEE4E0"/>
+            </a:solidFill>
+            <a:prstDash val="solid"/>
+          </a:ln>
+          <a:effectLst>
+            <a:outerShdw sx="100000" sy="100000" kx="0" ky="0" algn="bl" rotWithShape="0" blurRad="101600" dist="25400" dir="5400000">
+              <a:srgbClr val="9AA5AE">
+                <a:alpha val="22000"/>
+              </a:srgbClr>
+            </a:outerShdw>
+          </a:effectLst>
+        </p:spPr>
+      </p:sp>
+      <p:sp>
+        <p:nvSpPr>
+          <p:cNvPr id="13" name="Text 11"/>
+          <p:cNvSpPr txBox="1"/>
+          <p:nvPr/>
+        </p:nvSpPr>
+        <p:spPr>
+          <a:xfrm>
+            <a:off x="704088" y="4754880"/>
+            <a:ext cx="2235708" cy="438912"/>
+          </a:xfrm>
+          <a:prstGeom prst="rect">
+            <a:avLst/>
+          </a:prstGeom>
+          <a:noFill/>
+          <a:ln/>
+        </p:spPr>
+        <p:txBody>
+          <a:bodyPr wrap="square" lIns="0" tIns="0" rIns="0" bIns="0" rtlCol="0" anchor="ctr"/>
+          <a:lstStyle/>
+          <a:p>
+            <a:pPr indent="0" marL="0">
+              <a:buNone/>
+            </a:pPr>
+            <a:r>
+              <a:rPr lang="en-US" sz="3000" b="1" dirty="0">
+                <a:solidFill>
+                  <a:srgbClr val="0E6B4F"/>
+                </a:solidFill>
+                <a:latin typeface="Cambria" pitchFamily="34" charset="0"/>
+                <a:ea typeface="Cambria" pitchFamily="34" charset="-122"/>
+                <a:cs typeface="Cambria" pitchFamily="34" charset="-120"/>
+              </a:rPr>
+              <a:t>136</a:t>
+            </a:r>
+            <a:endParaRPr lang="en-US" sz="3000" dirty="0"/>
+          </a:p>
+        </p:txBody>
+      </p:sp>
+      <p:sp>
+        <p:nvSpPr>
+          <p:cNvPr id="14" name="Text 12"/>
+          <p:cNvSpPr txBox="1"/>
+          <p:nvPr/>
+        </p:nvSpPr>
+        <p:spPr>
+          <a:xfrm>
+            <a:off x="704088" y="5175504"/>
+            <a:ext cx="2235708" cy="237744"/>
+          </a:xfrm>
+          <a:prstGeom prst="rect">
+            <a:avLst/>
+          </a:prstGeom>
+          <a:noFill/>
+          <a:ln/>
+        </p:spPr>
+        <p:txBody>
+          <a:bodyPr wrap="square" lIns="0" tIns="0" rIns="0" bIns="0" rtlCol="0" anchor="ctr"/>
+          <a:lstStyle/>
+          <a:p>
+            <a:pPr indent="0" marL="0">
+              <a:buNone/>
+            </a:pPr>
+            <a:r>
+              <a:rPr lang="en-US" sz="1250" b="1" dirty="0">
+                <a:solidFill>
+                  <a:srgbClr val="16232E"/>
+                </a:solidFill>
+                <a:latin typeface="Calibri" pitchFamily="34" charset="0"/>
+                <a:ea typeface="Calibri" pitchFamily="34" charset="-122"/>
+                <a:cs typeface="Calibri" pitchFamily="34" charset="-120"/>
+              </a:rPr>
+              <a:t>tests passing</a:t>
+            </a:r>
+            <a:endParaRPr lang="en-US" sz="1250" dirty="0"/>
+          </a:p>
+        </p:txBody>
+      </p:sp>
+      <p:sp>
+        <p:nvSpPr>
+          <p:cNvPr id="15" name="Text 13"/>
+          <p:cNvSpPr txBox="1"/>
+          <p:nvPr/>
+        </p:nvSpPr>
+        <p:spPr>
+          <a:xfrm>
+            <a:off x="704088" y="5422392"/>
+            <a:ext cx="2235708" cy="402336"/>
+          </a:xfrm>
+          <a:prstGeom prst="rect">
+            <a:avLst/>
+          </a:prstGeom>
+          <a:noFill/>
+          <a:ln/>
+        </p:spPr>
+        <p:txBody>
+          <a:bodyPr wrap="square" lIns="0" tIns="0" rIns="0" bIns="0" rtlCol="0" anchor="ctr"/>
+          <a:lstStyle/>
+          <a:p>
+            <a:pPr indent="0" marL="0">
+              <a:lnSpc>
+                <a:spcPts val="1200"/>
+              </a:lnSpc>
+              <a:buNone/>
+            </a:pPr>
+            <a:r>
+              <a:rPr lang="en-US" sz="1050" dirty="0">
+                <a:solidFill>
+                  <a:srgbClr val="5A6570"/>
+                </a:solidFill>
+                <a:latin typeface="Calibri" pitchFamily="34" charset="0"/>
+                <a:ea typeface="Calibri" pitchFamily="34" charset="-122"/>
+                <a:cs typeface="Calibri" pitchFamily="34" charset="-120"/>
+              </a:rPr>
+              <a:t>guarding the invariants that were expensive to get right</a:t>
+            </a:r>
+            <a:endParaRPr lang="en-US" sz="1050" dirty="0"/>
+          </a:p>
+        </p:txBody>
+      </p:sp>
+      <p:sp>
+        <p:nvSpPr>
+          <p:cNvPr id="16" name="Shape 14"/>
+          <p:cNvSpPr/>
+          <p:nvPr/>
+        </p:nvSpPr>
+        <p:spPr>
+          <a:xfrm>
+            <a:off x="3342132" y="4626864"/>
+            <a:ext cx="2638044" cy="1225296"/>
+          </a:xfrm>
+          <a:prstGeom prst="roundRect">
+            <a:avLst>
+              <a:gd name="adj" fmla="val 6716"/>
+            </a:avLst>
+          </a:prstGeom>
+          <a:solidFill>
+            <a:srgbClr val="FFFFFF"/>
+          </a:solidFill>
+          <a:ln w="9525">
+            <a:solidFill>
+              <a:srgbClr val="DEE4E0"/>
+            </a:solidFill>
+            <a:prstDash val="solid"/>
+          </a:ln>
+          <a:effectLst>
+            <a:outerShdw sx="100000" sy="100000" kx="0" ky="0" algn="bl" rotWithShape="0" blurRad="101600" dist="25400" dir="5400000">
+              <a:srgbClr val="9AA5AE">
+                <a:alpha val="22000"/>
+              </a:srgbClr>
+            </a:outerShdw>
+          </a:effectLst>
+        </p:spPr>
+      </p:sp>
+      <p:sp>
+        <p:nvSpPr>
+          <p:cNvPr id="17" name="Text 15"/>
+          <p:cNvSpPr txBox="1"/>
+          <p:nvPr/>
+        </p:nvSpPr>
+        <p:spPr>
+          <a:xfrm>
+            <a:off x="3543300" y="4754880"/>
+            <a:ext cx="2235708" cy="438912"/>
+          </a:xfrm>
+          <a:prstGeom prst="rect">
+            <a:avLst/>
+          </a:prstGeom>
+          <a:noFill/>
+          <a:ln/>
+        </p:spPr>
+        <p:txBody>
+          <a:bodyPr wrap="square" lIns="0" tIns="0" rIns="0" bIns="0" rtlCol="0" anchor="ctr"/>
+          <a:lstStyle/>
+          <a:p>
+            <a:pPr indent="0" marL="0">
+              <a:buNone/>
+            </a:pPr>
+            <a:r>
+              <a:rPr lang="en-US" sz="3000" b="1" dirty="0">
+                <a:solidFill>
+                  <a:srgbClr val="0E6B4F"/>
+                </a:solidFill>
+                <a:latin typeface="Cambria" pitchFamily="34" charset="0"/>
+                <a:ea typeface="Cambria" pitchFamily="34" charset="-122"/>
+                <a:cs typeface="Cambria" pitchFamily="34" charset="-120"/>
+              </a:rPr>
+              <a:t>10</a:t>
+            </a:r>
+            <a:endParaRPr lang="en-US" sz="3000" dirty="0"/>
+          </a:p>
+        </p:txBody>
+      </p:sp>
+      <p:sp>
+        <p:nvSpPr>
+          <p:cNvPr id="18" name="Text 16"/>
+          <p:cNvSpPr txBox="1"/>
+          <p:nvPr/>
+        </p:nvSpPr>
+        <p:spPr>
+          <a:xfrm>
+            <a:off x="3543300" y="5175504"/>
+            <a:ext cx="2235708" cy="237744"/>
+          </a:xfrm>
+          <a:prstGeom prst="rect">
+            <a:avLst/>
+          </a:prstGeom>
+          <a:noFill/>
+          <a:ln/>
+        </p:spPr>
+        <p:txBody>
+          <a:bodyPr wrap="square" lIns="0" tIns="0" rIns="0" bIns="0" rtlCol="0" anchor="ctr"/>
+          <a:lstStyle/>
+          <a:p>
+            <a:pPr indent="0" marL="0">
+              <a:buNone/>
+            </a:pPr>
+            <a:r>
+              <a:rPr lang="en-US" sz="1250" b="1" dirty="0">
+                <a:solidFill>
+                  <a:srgbClr val="16232E"/>
+                </a:solidFill>
+                <a:latin typeface="Calibri" pitchFamily="34" charset="0"/>
+                <a:ea typeface="Calibri" pitchFamily="34" charset="-122"/>
+                <a:cs typeface="Calibri" pitchFamily="34" charset="-120"/>
+              </a:rPr>
+              <a:t>charts</a:t>
+            </a:r>
+            <a:endParaRPr lang="en-US" sz="1250" dirty="0"/>
+          </a:p>
+        </p:txBody>
+      </p:sp>
+      <p:sp>
+        <p:nvSpPr>
+          <p:cNvPr id="19" name="Text 17"/>
+          <p:cNvSpPr txBox="1"/>
+          <p:nvPr/>
+        </p:nvSpPr>
+        <p:spPr>
+          <a:xfrm>
+            <a:off x="3543300" y="5422392"/>
+            <a:ext cx="2235708" cy="402336"/>
+          </a:xfrm>
+          <a:prstGeom prst="rect">
+            <a:avLst/>
+          </a:prstGeom>
+          <a:noFill/>
+          <a:ln/>
+        </p:spPr>
+        <p:txBody>
+          <a:bodyPr wrap="square" lIns="0" tIns="0" rIns="0" bIns="0" rtlCol="0" anchor="ctr"/>
+          <a:lstStyle/>
+          <a:p>
+            <a:pPr indent="0" marL="0">
+              <a:lnSpc>
+                <a:spcPts val="1200"/>
+              </a:lnSpc>
+              <a:buNone/>
+            </a:pPr>
+            <a:r>
+              <a:rPr lang="en-US" sz="1050" dirty="0">
+                <a:solidFill>
+                  <a:srgbClr val="5A6570"/>
+                </a:solidFill>
+                <a:latin typeface="Calibri" pitchFamily="34" charset="0"/>
+                <a:ea typeface="Calibri" pitchFamily="34" charset="-122"/>
+                <a:cs typeface="Calibri" pitchFamily="34" charset="-120"/>
+              </a:rPr>
+              <a:t>each regenerated from a committed measurement file</a:t>
+            </a:r>
+            <a:endParaRPr lang="en-US" sz="1050" dirty="0"/>
+          </a:p>
+        </p:txBody>
+      </p:sp>
+      <p:sp>
+        <p:nvSpPr>
+          <p:cNvPr id="20" name="Shape 18"/>
+          <p:cNvSpPr/>
+          <p:nvPr/>
+        </p:nvSpPr>
+        <p:spPr>
+          <a:xfrm>
+            <a:off x="6181344" y="4626864"/>
+            <a:ext cx="2638044" cy="1225296"/>
+          </a:xfrm>
+          <a:prstGeom prst="roundRect">
+            <a:avLst>
+              <a:gd name="adj" fmla="val 6716"/>
+            </a:avLst>
+          </a:prstGeom>
+          <a:solidFill>
+            <a:srgbClr val="FFFFFF"/>
+          </a:solidFill>
+          <a:ln w="9525">
+            <a:solidFill>
+              <a:srgbClr val="DEE4E0"/>
+            </a:solidFill>
+            <a:prstDash val="solid"/>
+          </a:ln>
+          <a:effectLst>
+            <a:outerShdw sx="100000" sy="100000" kx="0" ky="0" algn="bl" rotWithShape="0" blurRad="101600" dist="25400" dir="5400000">
+              <a:srgbClr val="9AA5AE">
+                <a:alpha val="22000"/>
+              </a:srgbClr>
+            </a:outerShdw>
+          </a:effectLst>
+        </p:spPr>
+      </p:sp>
+      <p:sp>
+        <p:nvSpPr>
+          <p:cNvPr id="21" name="Text 19"/>
+          <p:cNvSpPr txBox="1"/>
+          <p:nvPr/>
+        </p:nvSpPr>
+        <p:spPr>
+          <a:xfrm>
+            <a:off x="6382512" y="4754880"/>
+            <a:ext cx="2235708" cy="438912"/>
+          </a:xfrm>
+          <a:prstGeom prst="rect">
+            <a:avLst/>
+          </a:prstGeom>
+          <a:noFill/>
+          <a:ln/>
+        </p:spPr>
+        <p:txBody>
+          <a:bodyPr wrap="square" lIns="0" tIns="0" rIns="0" bIns="0" rtlCol="0" anchor="ctr"/>
+          <a:lstStyle/>
+          <a:p>
+            <a:pPr indent="0" marL="0">
+              <a:buNone/>
+            </a:pPr>
+            <a:r>
+              <a:rPr lang="en-US" sz="3000" b="1" dirty="0">
+                <a:solidFill>
+                  <a:srgbClr val="0E6B4F"/>
+                </a:solidFill>
+                <a:latin typeface="Cambria" pitchFamily="34" charset="0"/>
+                <a:ea typeface="Cambria" pitchFamily="34" charset="-122"/>
+                <a:cs typeface="Cambria" pitchFamily="34" charset="-120"/>
+              </a:rPr>
+              <a:t>37</a:t>
+            </a:r>
+            <a:endParaRPr lang="en-US" sz="3000" dirty="0"/>
+          </a:p>
+        </p:txBody>
+      </p:sp>
+      <p:sp>
+        <p:nvSpPr>
+          <p:cNvPr id="22" name="Text 20"/>
+          <p:cNvSpPr txBox="1"/>
+          <p:nvPr/>
+        </p:nvSpPr>
+        <p:spPr>
+          <a:xfrm>
+            <a:off x="6382512" y="5175504"/>
+            <a:ext cx="2235708" cy="237744"/>
+          </a:xfrm>
+          <a:prstGeom prst="rect">
+            <a:avLst/>
+          </a:prstGeom>
+          <a:noFill/>
+          <a:ln/>
+        </p:spPr>
+        <p:txBody>
+          <a:bodyPr wrap="square" lIns="0" tIns="0" rIns="0" bIns="0" rtlCol="0" anchor="ctr"/>
+          <a:lstStyle/>
+          <a:p>
+            <a:pPr indent="0" marL="0">
+              <a:buNone/>
+            </a:pPr>
+            <a:r>
+              <a:rPr lang="en-US" sz="1250" b="1" dirty="0">
+                <a:solidFill>
+                  <a:srgbClr val="16232E"/>
+                </a:solidFill>
+                <a:latin typeface="Calibri" pitchFamily="34" charset="0"/>
+                <a:ea typeface="Calibri" pitchFamily="34" charset="-122"/>
+                <a:cs typeface="Calibri" pitchFamily="34" charset="-120"/>
+              </a:rPr>
+              <a:t>provisions</a:t>
+            </a:r>
+            <a:endParaRPr lang="en-US" sz="1250" dirty="0"/>
+          </a:p>
+        </p:txBody>
+      </p:sp>
+      <p:sp>
+        <p:nvSpPr>
+          <p:cNvPr id="23" name="Text 21"/>
+          <p:cNvSpPr txBox="1"/>
+          <p:nvPr/>
+        </p:nvSpPr>
+        <p:spPr>
+          <a:xfrm>
+            <a:off x="6382512" y="5422392"/>
+            <a:ext cx="2235708" cy="402336"/>
+          </a:xfrm>
+          <a:prstGeom prst="rect">
+            <a:avLst/>
+          </a:prstGeom>
+          <a:noFill/>
+          <a:ln/>
+        </p:spPr>
+        <p:txBody>
+          <a:bodyPr wrap="square" lIns="0" tIns="0" rIns="0" bIns="0" rtlCol="0" anchor="ctr"/>
+          <a:lstStyle/>
+          <a:p>
+            <a:pPr indent="0" marL="0">
+              <a:lnSpc>
+                <a:spcPts val="1200"/>
+              </a:lnSpc>
+              <a:buNone/>
+            </a:pPr>
+            <a:r>
+              <a:rPr lang="en-US" sz="1050" dirty="0">
+                <a:solidFill>
+                  <a:srgbClr val="5A6570"/>
+                </a:solidFill>
+                <a:latin typeface="Calibri" pitchFamily="34" charset="0"/>
+                <a:ea typeface="Calibri" pitchFamily="34" charset="-122"/>
+                <a:cs typeface="Calibri" pitchFamily="34" charset="-120"/>
+              </a:rPr>
+              <a:t>indexed in pgvector and cited per decision</a:t>
+            </a:r>
+            <a:endParaRPr lang="en-US" sz="1050" dirty="0"/>
+          </a:p>
+        </p:txBody>
+      </p:sp>
+      <p:sp>
+        <p:nvSpPr>
+          <p:cNvPr id="24" name="Shape 22"/>
+          <p:cNvSpPr/>
+          <p:nvPr/>
+        </p:nvSpPr>
+        <p:spPr>
+          <a:xfrm>
+            <a:off x="9020556" y="4626864"/>
+            <a:ext cx="2638044" cy="1225296"/>
+          </a:xfrm>
+          <a:prstGeom prst="roundRect">
+            <a:avLst>
+              <a:gd name="adj" fmla="val 6716"/>
+            </a:avLst>
+          </a:prstGeom>
+          <a:solidFill>
+            <a:srgbClr val="FFFFFF"/>
+          </a:solidFill>
+          <a:ln w="9525">
+            <a:solidFill>
+              <a:srgbClr val="DEE4E0"/>
+            </a:solidFill>
+            <a:prstDash val="solid"/>
+          </a:ln>
+          <a:effectLst>
+            <a:outerShdw sx="100000" sy="100000" kx="0" ky="0" algn="bl" rotWithShape="0" blurRad="101600" dist="25400" dir="5400000">
+              <a:srgbClr val="9AA5AE">
+                <a:alpha val="22000"/>
+              </a:srgbClr>
+            </a:outerShdw>
+          </a:effectLst>
+        </p:spPr>
+      </p:sp>
+      <p:sp>
+        <p:nvSpPr>
+          <p:cNvPr id="25" name="Text 23"/>
+          <p:cNvSpPr txBox="1"/>
+          <p:nvPr/>
+        </p:nvSpPr>
+        <p:spPr>
+          <a:xfrm>
+            <a:off x="9221724" y="4754880"/>
+            <a:ext cx="2235708" cy="438912"/>
+          </a:xfrm>
+          <a:prstGeom prst="rect">
+            <a:avLst/>
+          </a:prstGeom>
+          <a:noFill/>
+          <a:ln/>
+        </p:spPr>
+        <p:txBody>
+          <a:bodyPr wrap="square" lIns="0" tIns="0" rIns="0" bIns="0" rtlCol="0" anchor="ctr"/>
+          <a:lstStyle/>
+          <a:p>
+            <a:pPr indent="0" marL="0">
+              <a:buNone/>
+            </a:pPr>
+            <a:r>
+              <a:rPr lang="en-US" sz="3000" b="1" dirty="0">
+                <a:solidFill>
+                  <a:srgbClr val="0E6B4F"/>
+                </a:solidFill>
+                <a:latin typeface="Cambria" pitchFamily="34" charset="0"/>
+                <a:ea typeface="Cambria" pitchFamily="34" charset="-122"/>
+                <a:cs typeface="Cambria" pitchFamily="34" charset="-120"/>
+              </a:rPr>
+              <a:t>0</a:t>
+            </a:r>
+            <a:endParaRPr lang="en-US" sz="3000" dirty="0"/>
+          </a:p>
+        </p:txBody>
+      </p:sp>
+      <p:sp>
+        <p:nvSpPr>
+          <p:cNvPr id="26" name="Text 24"/>
+          <p:cNvSpPr txBox="1"/>
+          <p:nvPr/>
+        </p:nvSpPr>
+        <p:spPr>
+          <a:xfrm>
+            <a:off x="9221724" y="5175504"/>
+            <a:ext cx="2235708" cy="237744"/>
+          </a:xfrm>
+          <a:prstGeom prst="rect">
+            <a:avLst/>
+          </a:prstGeom>
+          <a:noFill/>
+          <a:ln/>
+        </p:spPr>
+        <p:txBody>
+          <a:bodyPr wrap="square" lIns="0" tIns="0" rIns="0" bIns="0" rtlCol="0" anchor="ctr"/>
+          <a:lstStyle/>
+          <a:p>
+            <a:pPr indent="0" marL="0">
+              <a:buNone/>
+            </a:pPr>
+            <a:r>
+              <a:rPr lang="en-US" sz="1250" b="1" dirty="0">
+                <a:solidFill>
+                  <a:srgbClr val="16232E"/>
+                </a:solidFill>
+                <a:latin typeface="Calibri" pitchFamily="34" charset="0"/>
+                <a:ea typeface="Calibri" pitchFamily="34" charset="-122"/>
+                <a:cs typeface="Calibri" pitchFamily="34" charset="-120"/>
+              </a:rPr>
+              <a:t>secrets committed</a:t>
+            </a:r>
+            <a:endParaRPr lang="en-US" sz="1250" dirty="0"/>
+          </a:p>
+        </p:txBody>
+      </p:sp>
+      <p:sp>
+        <p:nvSpPr>
+          <p:cNvPr id="27" name="Text 25"/>
+          <p:cNvSpPr txBox="1"/>
+          <p:nvPr/>
+        </p:nvSpPr>
+        <p:spPr>
+          <a:xfrm>
+            <a:off x="9221724" y="5422392"/>
+            <a:ext cx="2235708" cy="402336"/>
+          </a:xfrm>
+          <a:prstGeom prst="rect">
+            <a:avLst/>
+          </a:prstGeom>
+          <a:noFill/>
+          <a:ln/>
+        </p:spPr>
+        <p:txBody>
+          <a:bodyPr wrap="square" lIns="0" tIns="0" rIns="0" bIns="0" rtlCol="0" anchor="ctr"/>
+          <a:lstStyle/>
+          <a:p>
+            <a:pPr indent="0" marL="0">
+              <a:lnSpc>
+                <a:spcPts val="1200"/>
+              </a:lnSpc>
+              <a:buNone/>
+            </a:pPr>
+            <a:r>
+              <a:rPr lang="en-US" sz="1050" dirty="0">
+                <a:solidFill>
+                  <a:srgbClr val="5A6570"/>
+                </a:solidFill>
+                <a:latin typeface="Calibri" pitchFamily="34" charset="0"/>
+                <a:ea typeface="Calibri" pitchFamily="34" charset="-122"/>
+                <a:cs typeface="Calibri" pitchFamily="34" charset="-120"/>
+              </a:rPr>
+              <a:t>every credential read from the environment</a:t>
+            </a:r>
+            <a:endParaRPr lang="en-US" sz="1050" dirty="0"/>
+          </a:p>
+        </p:txBody>
+      </p:sp>
+      <p:sp>
+        <p:nvSpPr>
+          <p:cNvPr id="28" name="Text 26"/>
+          <p:cNvSpPr txBox="1"/>
+          <p:nvPr/>
+        </p:nvSpPr>
+        <p:spPr>
+          <a:xfrm>
+            <a:off x="502920" y="6327648"/>
+            <a:ext cx="11155680" cy="301752"/>
+          </a:xfrm>
+          <a:prstGeom prst="rect">
+            <a:avLst/>
+          </a:prstGeom>
+          <a:noFill/>
+          <a:ln/>
+        </p:spPr>
+        <p:txBody>
+          <a:bodyPr wrap="square" lIns="0" tIns="0" rIns="0" bIns="0" rtlCol="0" anchor="t"/>
+          <a:lstStyle/>
+          <a:p>
+            <a:pPr indent="0" marL="0">
+              <a:buNone/>
+            </a:pPr>
+            <a:r>
+              <a:rPr lang="en-US" sz="1050" i="1" dirty="0">
+                <a:solidFill>
+                  <a:srgbClr val="8A949C"/>
+                </a:solidFill>
+                <a:latin typeface="Calibri" pitchFamily="34" charset="0"/>
+                <a:ea typeface="Calibri" pitchFamily="34" charset="-122"/>
+                <a:cs typeface="Calibri" pitchFamily="34" charset="-120"/>
+              </a:rPr>
+              <a:t>The API is on a free tier that sleeps when idle; a scheduled request every ten minutes keeps it warm, so the link responds immediately</a:t>
+            </a:r>
+            <a:endParaRPr lang="en-US" sz="1050" dirty="0"/>
+          </a:p>
+        </p:txBody>
+      </p:sp>
+    </p:spTree>
+  </p:cSld>
+  <p:clrMapOvr>
+    <a:masterClrMapping/>
+  </p:clrMapOvr>
+</p:sld>
+</file>
+
+<file path=ppt/slides/slide33.xml><?xml version="1.0" encoding="utf-8"?>
+<p:sld xmlns:a="http://schemas.openxmlformats.org/drawingml/2006/main" xmlns:r="http://schemas.openxmlformats.org/officeDocument/2006/relationships" xmlns:p="http://schemas.openxmlformats.org/presentationml/2006/main">
+  <p:cSld name="Slide 33">
+    <p:bg>
+      <p:bgPr>
+        <a:solidFill>
           <a:srgbClr val="16232E"/>
         </a:solidFill>
       </p:bgPr>
@@ -24271,7 +25528,7 @@
         </p:nvSpPr>
         <p:spPr>
           <a:xfrm>
-            <a:off x="502920" y="5212080"/>
+            <a:off x="502920" y="4974336"/>
             <a:ext cx="2926080" cy="502920"/>
           </a:xfrm>
           <a:prstGeom prst="roundRect">
@@ -24293,7 +25550,7 @@
         </p:nvSpPr>
         <p:spPr>
           <a:xfrm>
-            <a:off x="502920" y="5212080"/>
+            <a:off x="502920" y="4974336"/>
             <a:ext cx="2926080" cy="502920"/>
           </a:xfrm>
           <a:prstGeom prst="rect">
@@ -24332,7 +25589,7 @@
         </p:nvSpPr>
         <p:spPr>
           <a:xfrm>
-            <a:off x="3657600" y="5212080"/>
+            <a:off x="3657600" y="4974336"/>
             <a:ext cx="2926080" cy="502920"/>
           </a:xfrm>
           <a:prstGeom prst="roundRect">
@@ -24354,7 +25611,7 @@
         </p:nvSpPr>
         <p:spPr>
           <a:xfrm>
-            <a:off x="3657600" y="5212080"/>
+            <a:off x="3657600" y="4974336"/>
             <a:ext cx="2926080" cy="502920"/>
           </a:xfrm>
           <a:prstGeom prst="rect">
@@ -24393,7 +25650,7 @@
         </p:nvSpPr>
         <p:spPr>
           <a:xfrm>
-            <a:off x="6812280" y="5212080"/>
+            <a:off x="6812280" y="4974336"/>
             <a:ext cx="2926080" cy="502920"/>
           </a:xfrm>
           <a:prstGeom prst="roundRect">
@@ -24415,7 +25672,7 @@
         </p:nvSpPr>
         <p:spPr>
           <a:xfrm>
-            <a:off x="6812280" y="5212080"/>
+            <a:off x="6812280" y="4974336"/>
             <a:ext cx="2926080" cy="502920"/>
           </a:xfrm>
           <a:prstGeom prst="rect">
@@ -24443,6 +25700,109 @@
               <a:t>The applicant gets a plan</a:t>
             </a:r>
             <a:endParaRPr lang="en-US" sz="1300" dirty="0"/>
+          </a:p>
+        </p:txBody>
+      </p:sp>
+      <p:sp>
+        <p:nvSpPr>
+          <p:cNvPr id="25" name="Shape 23"/>
+          <p:cNvSpPr/>
+          <p:nvPr/>
+        </p:nvSpPr>
+        <p:spPr>
+          <a:xfrm>
+            <a:off x="502920" y="5650992"/>
+            <a:ext cx="11155680" cy="658368"/>
+          </a:xfrm>
+          <a:prstGeom prst="roundRect">
+            <a:avLst>
+              <a:gd name="adj" fmla="val 13889"/>
+            </a:avLst>
+          </a:prstGeom>
+          <a:solidFill>
+            <a:srgbClr val="1C2F3D"/>
+          </a:solidFill>
+          <a:ln/>
+        </p:spPr>
+      </p:sp>
+      <p:sp>
+        <p:nvSpPr>
+          <p:cNvPr id="26" name="Text 24"/>
+          <p:cNvSpPr txBox="1"/>
+          <p:nvPr/>
+        </p:nvSpPr>
+        <p:spPr>
+          <a:xfrm>
+            <a:off x="777240" y="5650992"/>
+            <a:ext cx="10607040" cy="658368"/>
+          </a:xfrm>
+          <a:prstGeom prst="rect">
+            <a:avLst/>
+          </a:prstGeom>
+          <a:noFill/>
+          <a:ln/>
+        </p:spPr>
+        <p:txBody>
+          <a:bodyPr wrap="square" lIns="0" tIns="0" rIns="0" bIns="0" rtlCol="0" anchor="ctr"/>
+          <a:lstStyle/>
+          <a:p>
+            <a:pPr indent="0" marL="0">
+              <a:buNone/>
+            </a:pPr>
+            <a:r>
+              <a:rPr lang="en-US" sz="1100" b="1" spc="150" kern="0" dirty="0">
+                <a:solidFill>
+                  <a:srgbClr val="8FD7B8"/>
+                </a:solidFill>
+                <a:latin typeface="Calibri" pitchFamily="34" charset="0"/>
+                <a:ea typeface="Calibri" pitchFamily="34" charset="-122"/>
+                <a:cs typeface="Calibri" pitchFamily="34" charset="-120"/>
+              </a:rPr>
+              <a:t>LIVE  </a:t>
+            </a:r>
+            <a:pPr indent="0" marL="0">
+              <a:buNone/>
+            </a:pPr>
+            <a:r>
+              <a:rPr lang="en-US" sz="1450" b="1" dirty="0">
+                <a:solidFill>
+                  <a:srgbClr val="FFFFFF"/>
+                </a:solidFill>
+                <a:latin typeface="Calibri" pitchFamily="34" charset="0"/>
+                <a:ea typeface="Calibri" pitchFamily="34" charset="-122"/>
+                <a:cs typeface="Calibri" pitchFamily="34" charset="-120"/>
+              </a:rPr>
+              <a:t>pratyaya-beta.vercel.app</a:t>
+            </a:r>
+            <a:pPr indent="0" marL="0">
+              <a:buNone/>
+            </a:pPr>
+            <a:r>
+              <a:rPr lang="en-US" sz="1100" b="1" spc="150" kern="0" dirty="0">
+                <a:solidFill>
+                  <a:srgbClr val="8FD7B8"/>
+                </a:solidFill>
+                <a:latin typeface="Calibri" pitchFamily="34" charset="0"/>
+                <a:ea typeface="Calibri" pitchFamily="34" charset="-122"/>
+                <a:cs typeface="Calibri" pitchFamily="34" charset="-120"/>
+              </a:rPr>
+              <a:t>        CODE  </a:t>
+            </a:r>
+            <a:pPr indent="0" marL="0">
+              <a:buNone/>
+            </a:pPr>
+            <a:r>
+              <a:rPr lang="en-US" sz="1450" b="1" dirty="0">
+                <a:solidFill>
+                  <a:srgbClr val="FFFFFF"/>
+                </a:solidFill>
+                <a:latin typeface="Calibri" pitchFamily="34" charset="0"/>
+                <a:ea typeface="Calibri" pitchFamily="34" charset="-122"/>
+                <a:cs typeface="Calibri" pitchFamily="34" charset="-120"/>
+              </a:rPr>
+              <a:t>github.com/Nishantttt-ui/pratyaya</a:t>
+            </a:r>
+            <a:endParaRPr lang="en-US" sz="1100" dirty="0"/>
           </a:p>
         </p:txBody>
       </p:sp>

--- a/docs/Pratyaya-Synchrony-Hackathon.pptx
+++ b/docs/Pratyaya-Synchrony-Hackathon.pptx
@@ -4087,13 +4087,20 @@
               <a:buNone/>
             </a:pPr>
             <a:r>
-              <a:rPr lang="en-US" sz="1500" b="1" dirty="0">
+              <a:rPr lang="en-US" sz="1500" b="1" u="sng" dirty="0">
                 <a:solidFill>
                   <a:srgbClr val="FFFFFF"/>
                 </a:solidFill>
                 <a:latin typeface="Calibri" pitchFamily="34" charset="0"/>
                 <a:ea typeface="Calibri" pitchFamily="34" charset="-122"/>
                 <a:cs typeface="Calibri" pitchFamily="34" charset="-120"/>
+                <a:hlinkClick r:id="rId1" invalidUrl="" action="" tgtFrame="" tooltip="Open the running application" history="1" highlightClick="0" endSnd="0">
+                  <a:extLst>
+                    <a:ext uri="{A12FA001-AC4F-418D-AE19-62706E023703}">
+                      <ahyp:hlinkClr xmlns:ahyp="http://schemas.microsoft.com/office/drawing/2018/hyperlinkcolor" val="tx"/>
+                    </a:ext>
+                  </a:extLst>
+                </a:hlinkClick>
               </a:rPr>
               <a:t>pratyaya-beta.vercel.app</a:t>
             </a:r>
@@ -4115,13 +4122,20 @@
               <a:buNone/>
             </a:pPr>
             <a:r>
-              <a:rPr lang="en-US" sz="1500" b="1" dirty="0">
+              <a:rPr lang="en-US" sz="1500" b="1" u="sng" dirty="0">
                 <a:solidFill>
                   <a:srgbClr val="FFFFFF"/>
                 </a:solidFill>
                 <a:latin typeface="Calibri" pitchFamily="34" charset="0"/>
                 <a:ea typeface="Calibri" pitchFamily="34" charset="-122"/>
                 <a:cs typeface="Calibri" pitchFamily="34" charset="-120"/>
+                <a:hlinkClick r:id="rId2" invalidUrl="" action="" tgtFrame="" tooltip="Open the source repository" history="1" highlightClick="0" endSnd="0">
+                  <a:extLst>
+                    <a:ext uri="{A12FA001-AC4F-418D-AE19-62706E023703}">
+                      <ahyp:hlinkClr xmlns:ahyp="http://schemas.microsoft.com/office/drawing/2018/hyperlinkcolor" val="tx"/>
+                    </a:ext>
+                  </a:extLst>
+                </a:hlinkClick>
               </a:rPr>
               <a:t>github.com/Nishantttt-ui/pratyaya</a:t>
             </a:r>
@@ -23966,13 +23980,20 @@
               <a:buNone/>
             </a:pPr>
             <a:r>
-              <a:rPr lang="en-US" sz="3000" b="1" dirty="0">
+              <a:rPr lang="en-US" sz="3000" b="1" u="sng" dirty="0">
                 <a:solidFill>
                   <a:srgbClr val="16232E"/>
                 </a:solidFill>
                 <a:latin typeface="Cambria" pitchFamily="34" charset="0"/>
                 <a:ea typeface="Cambria" pitchFamily="34" charset="-122"/>
                 <a:cs typeface="Cambria" pitchFamily="34" charset="-120"/>
+                <a:hlinkClick r:id="rId1" invalidUrl="" action="" tgtFrame="" tooltip="Open the running application" history="1" highlightClick="0" endSnd="0">
+                  <a:extLst>
+                    <a:ext uri="{A12FA001-AC4F-418D-AE19-62706E023703}">
+                      <ahyp:hlinkClr xmlns:ahyp="http://schemas.microsoft.com/office/drawing/2018/hyperlinkcolor" val="tx"/>
+                    </a:ext>
+                  </a:extLst>
+                </a:hlinkClick>
               </a:rPr>
               <a:t>pratyaya-beta.vercel.app</a:t>
             </a:r>
@@ -24112,13 +24133,20 @@
               <a:buNone/>
             </a:pPr>
             <a:r>
-              <a:rPr lang="en-US" sz="3000" b="1" dirty="0">
+              <a:rPr lang="en-US" sz="3000" b="1" u="sng" dirty="0">
                 <a:solidFill>
                   <a:srgbClr val="FFFFFF"/>
                 </a:solidFill>
                 <a:latin typeface="Cambria" pitchFamily="34" charset="0"/>
                 <a:ea typeface="Cambria" pitchFamily="34" charset="-122"/>
                 <a:cs typeface="Cambria" pitchFamily="34" charset="-120"/>
+                <a:hlinkClick r:id="rId2" invalidUrl="" action="" tgtFrame="" tooltip="Open the source repository" history="1" highlightClick="0" endSnd="0">
+                  <a:extLst>
+                    <a:ext uri="{A12FA001-AC4F-418D-AE19-62706E023703}">
+                      <ahyp:hlinkClr xmlns:ahyp="http://schemas.microsoft.com/office/drawing/2018/hyperlinkcolor" val="tx"/>
+                    </a:ext>
+                  </a:extLst>
+                </a:hlinkClick>
               </a:rPr>
               <a:t>github.com/Nishantttt-ui/pratyaya</a:t>
             </a:r>
@@ -25764,13 +25792,20 @@
               <a:buNone/>
             </a:pPr>
             <a:r>
-              <a:rPr lang="en-US" sz="1450" b="1" dirty="0">
+              <a:rPr lang="en-US" sz="1450" b="1" u="sng" dirty="0">
                 <a:solidFill>
                   <a:srgbClr val="FFFFFF"/>
                 </a:solidFill>
                 <a:latin typeface="Calibri" pitchFamily="34" charset="0"/>
                 <a:ea typeface="Calibri" pitchFamily="34" charset="-122"/>
                 <a:cs typeface="Calibri" pitchFamily="34" charset="-120"/>
+                <a:hlinkClick r:id="rId1" invalidUrl="" action="" tgtFrame="" tooltip="Open the running application" history="1" highlightClick="0" endSnd="0">
+                  <a:extLst>
+                    <a:ext uri="{A12FA001-AC4F-418D-AE19-62706E023703}">
+                      <ahyp:hlinkClr xmlns:ahyp="http://schemas.microsoft.com/office/drawing/2018/hyperlinkcolor" val="tx"/>
+                    </a:ext>
+                  </a:extLst>
+                </a:hlinkClick>
               </a:rPr>
               <a:t>pratyaya-beta.vercel.app</a:t>
             </a:r>
@@ -25792,13 +25827,20 @@
               <a:buNone/>
             </a:pPr>
             <a:r>
-              <a:rPr lang="en-US" sz="1450" b="1" dirty="0">
+              <a:rPr lang="en-US" sz="1450" b="1" u="sng" dirty="0">
                 <a:solidFill>
                   <a:srgbClr val="FFFFFF"/>
                 </a:solidFill>
                 <a:latin typeface="Calibri" pitchFamily="34" charset="0"/>
                 <a:ea typeface="Calibri" pitchFamily="34" charset="-122"/>
                 <a:cs typeface="Calibri" pitchFamily="34" charset="-120"/>
+                <a:hlinkClick r:id="rId2" invalidUrl="" action="" tgtFrame="" tooltip="Open the source repository" history="1" highlightClick="0" endSnd="0">
+                  <a:extLst>
+                    <a:ext uri="{A12FA001-AC4F-418D-AE19-62706E023703}">
+                      <ahyp:hlinkClr xmlns:ahyp="http://schemas.microsoft.com/office/drawing/2018/hyperlinkcolor" val="tx"/>
+                    </a:ext>
+                  </a:extLst>
+                </a:hlinkClick>
               </a:rPr>
               <a:t>github.com/Nishantttt-ui/pratyaya</a:t>
             </a:r>
@@ -29104,7 +29146,42 @@
                 <a:ea typeface="Calibri" pitchFamily="34" charset="-122"/>
                 <a:cs typeface="Calibri" pitchFamily="34" charset="-120"/>
               </a:rPr>
-              <a:t>Every layer shown is running: /health reports model ready, 37 provisions, vector_store pgvector, llm_provider gemini</a:t>
+              <a:t>Every layer shown is running: </a:t>
+            </a:r>
+            <a:pPr indent="0" marL="0">
+              <a:buNone/>
+            </a:pPr>
+            <a:r>
+              <a:rPr lang="en-US" sz="1050" i="1" u="sng" dirty="0">
+                <a:solidFill>
+                  <a:srgbClr val="8A949C"/>
+                </a:solidFill>
+                <a:latin typeface="Calibri" pitchFamily="34" charset="0"/>
+                <a:ea typeface="Calibri" pitchFamily="34" charset="-122"/>
+                <a:cs typeface="Calibri" pitchFamily="34" charset="-120"/>
+                <a:hlinkClick r:id="rId1" invalidUrl="" action="" tgtFrame="" tooltip="Live component readiness" history="1" highlightClick="0" endSnd="0">
+                  <a:extLst>
+                    <a:ext uri="{A12FA001-AC4F-418D-AE19-62706E023703}">
+                      <ahyp:hlinkClr xmlns:ahyp="http://schemas.microsoft.com/office/drawing/2018/hyperlinkcolor" val="tx"/>
+                    </a:ext>
+                  </a:extLst>
+                </a:hlinkClick>
+              </a:rPr>
+              <a:t>pratyaya-api.onrender.com/health</a:t>
+            </a:r>
+            <a:pPr indent="0" marL="0">
+              <a:buNone/>
+            </a:pPr>
+            <a:r>
+              <a:rPr lang="en-US" sz="1050" i="1" dirty="0">
+                <a:solidFill>
+                  <a:srgbClr val="8A949C"/>
+                </a:solidFill>
+                <a:latin typeface="Calibri" pitchFamily="34" charset="0"/>
+                <a:ea typeface="Calibri" pitchFamily="34" charset="-122"/>
+                <a:cs typeface="Calibri" pitchFamily="34" charset="-120"/>
+              </a:rPr>
+              <a:t> reports model ready, 37 provisions, vector_store pgvector, llm_provider gemini</a:t>
             </a:r>
             <a:endParaRPr lang="en-US" sz="1050" dirty="0"/>
           </a:p>

--- a/docs/Pratyaya-Synchrony-Hackathon.pptx
+++ b/docs/Pratyaya-Synchrony-Hackathon.pptx
@@ -2646,7 +2646,7 @@
           <a:p>
             <a:r>
               <a:rPr lang="en-US" dirty="0"/>
-              <a:t>Saying this out loud is a strength. Every limitation here is one a reviewer would find in ten minutes anyway.</a:t>
+              <a:t>Not an apology. Constraint on the left, what was done about it on the right. Saying it first means you choose the framing; being asked later means they do. If anyone raises deployment or Bedrock, both are answered elsewhere: the system is live, and the provider abstraction was proven by swapping models mid-build.</a:t>
             </a:r>
             <a:endParaRPr lang="en-US" dirty="0"/>
           </a:p>
@@ -23231,7 +23231,7 @@
         </p:nvSpPr>
         <p:spPr>
           <a:xfrm>
-            <a:off x="502920" y="457200"/>
+            <a:off x="502920" y="411480"/>
             <a:ext cx="11155680" cy="1051560"/>
           </a:xfrm>
           <a:prstGeom prst="rect">
@@ -23248,7 +23248,7 @@
               <a:buNone/>
             </a:pPr>
             <a:r>
-              <a:rPr lang="en-US" sz="3400" dirty="0">
+              <a:rPr lang="en-US" sz="3000" dirty="0">
                 <a:solidFill>
                   <a:srgbClr val="16232E"/>
                 </a:solidFill>
@@ -23256,32 +23256,79 @@
                 <a:ea typeface="Cambria" pitchFamily="34" charset="-122"/>
                 <a:cs typeface="Cambria" pitchFamily="34" charset="-120"/>
               </a:rPr>
-              <a:t>What this is not</a:t>
-            </a:r>
-            <a:endParaRPr lang="en-US" sz="3400" dirty="0"/>
-          </a:p>
-        </p:txBody>
-      </p:sp>
-      <p:sp>
-        <p:nvSpPr>
-          <p:cNvPr id="3" name="Shape 1"/>
+              <a:t>What we knew, and what we did about it</a:t>
+            </a:r>
+            <a:endParaRPr lang="en-US" sz="3000" dirty="0"/>
+          </a:p>
+        </p:txBody>
+      </p:sp>
+      <p:sp>
+        <p:nvSpPr>
+          <p:cNvPr id="3" name="Text 1"/>
+          <p:cNvSpPr txBox="1"/>
+          <p:nvPr/>
+        </p:nvSpPr>
+        <p:spPr>
+          <a:xfrm>
+            <a:off x="502920" y="896112"/>
+            <a:ext cx="10881360" cy="685800"/>
+          </a:xfrm>
+          <a:prstGeom prst="rect">
+            <a:avLst/>
+          </a:prstGeom>
+          <a:noFill/>
+          <a:ln/>
+        </p:spPr>
+        <p:txBody>
+          <a:bodyPr wrap="square" lIns="0" tIns="0" rIns="0" bIns="0" rtlCol="0" anchor="t"/>
+          <a:lstStyle/>
+          <a:p>
+            <a:pPr indent="0" marL="0">
+              <a:lnSpc>
+                <a:spcPts val="2000"/>
+              </a:lnSpc>
+              <a:buNone/>
+            </a:pPr>
+            <a:r>
+              <a:rPr lang="en-US" sz="1250" dirty="0">
+                <a:solidFill>
+                  <a:srgbClr val="5A6570"/>
+                </a:solidFill>
+                <a:latin typeface="Calibri" pitchFamily="34" charset="0"/>
+                <a:ea typeface="Calibri" pitchFamily="34" charset="-122"/>
+                <a:cs typeface="Calibri" pitchFamily="34" charset="-120"/>
+              </a:rPr>
+              <a:t>Two constraints shaped this build. Both are stated here because a reviewer would find them in ten minutes, and because what was done about each is the more interesting half.</a:t>
+            </a:r>
+            <a:endParaRPr lang="en-US" sz="1250" dirty="0"/>
+          </a:p>
+        </p:txBody>
+      </p:sp>
+      <p:sp>
+        <p:nvSpPr>
+          <p:cNvPr id="4" name="Shape 2"/>
           <p:cNvSpPr/>
           <p:nvPr/>
         </p:nvSpPr>
         <p:spPr>
           <a:xfrm>
-            <a:off x="502920" y="1417320"/>
-            <a:ext cx="11155680" cy="1234440"/>
+            <a:off x="502920" y="1572768"/>
+            <a:ext cx="11155680" cy="1920240"/>
           </a:xfrm>
           <a:prstGeom prst="roundRect">
             <a:avLst>
-              <a:gd name="adj" fmla="val 6667"/>
+              <a:gd name="adj" fmla="val 4286"/>
             </a:avLst>
           </a:prstGeom>
           <a:solidFill>
-            <a:srgbClr val="F1F4F2"/>
+            <a:srgbClr val="E3F0E9"/>
           </a:solidFill>
-          <a:ln/>
+          <a:ln w="9525">
+            <a:solidFill>
+              <a:srgbClr val="0E6B4F"/>
+            </a:solidFill>
+            <a:prstDash val="solid"/>
+          </a:ln>
           <a:effectLst>
             <a:outerShdw sx="100000" sy="100000" kx="0" ky="0" algn="bl" rotWithShape="0" blurRad="101600" dist="25400" dir="5400000">
               <a:srgbClr val="9AA5AE">
@@ -23293,33 +23340,33 @@
       </p:sp>
       <p:sp>
         <p:nvSpPr>
-          <p:cNvPr id="4" name="Shape 2"/>
+          <p:cNvPr id="5" name="Shape 3"/>
           <p:cNvSpPr/>
           <p:nvPr/>
         </p:nvSpPr>
         <p:spPr>
           <a:xfrm>
-            <a:off x="777240" y="1618488"/>
+            <a:off x="758952" y="1810512"/>
             <a:ext cx="384048" cy="384048"/>
           </a:xfrm>
           <a:prstGeom prst="ellipse">
             <a:avLst/>
           </a:prstGeom>
           <a:solidFill>
-            <a:srgbClr val="B2701A"/>
+            <a:srgbClr val="0E6B4F"/>
           </a:solidFill>
           <a:ln/>
         </p:spPr>
       </p:sp>
       <p:sp>
         <p:nvSpPr>
-          <p:cNvPr id="5" name="Text 3"/>
-          <p:cNvSpPr txBox="1"/>
-          <p:nvPr/>
-        </p:nvSpPr>
-        <p:spPr>
-          <a:xfrm>
-            <a:off x="777240" y="1618488"/>
+          <p:cNvPr id="6" name="Text 4"/>
+          <p:cNvSpPr txBox="1"/>
+          <p:nvPr/>
+        </p:nvSpPr>
+        <p:spPr>
+          <a:xfrm>
+            <a:off x="758952" y="1810512"/>
             <a:ext cx="384048" cy="384048"/>
           </a:xfrm>
           <a:prstGeom prst="rect">
@@ -23352,14 +23399,14 @@
       </p:sp>
       <p:sp>
         <p:nvSpPr>
-          <p:cNvPr id="6" name="Text 4"/>
-          <p:cNvSpPr txBox="1"/>
-          <p:nvPr/>
-        </p:nvSpPr>
-        <p:spPr>
-          <a:xfrm>
-            <a:off x="1371600" y="1618488"/>
-            <a:ext cx="9966960" cy="347472"/>
+          <p:cNvPr id="7" name="Text 5"/>
+          <p:cNvSpPr txBox="1"/>
+          <p:nvPr/>
+        </p:nvSpPr>
+        <p:spPr>
+          <a:xfrm>
+            <a:off x="1362456" y="1792224"/>
+            <a:ext cx="9966960" cy="329184"/>
           </a:xfrm>
           <a:prstGeom prst="rect">
             <a:avLst/>
@@ -23375,7 +23422,169 @@
               <a:buNone/>
             </a:pPr>
             <a:r>
-              <a:rPr lang="en-US" sz="1500" b="1" dirty="0">
+              <a:rPr lang="en-US" sz="1600" b="1" dirty="0">
+                <a:solidFill>
+                  <a:srgbClr val="0E6B4F"/>
+                </a:solidFill>
+                <a:latin typeface="Calibri" pitchFamily="34" charset="0"/>
+                <a:ea typeface="Calibri" pitchFamily="34" charset="-122"/>
+                <a:cs typeface="Calibri" pitchFamily="34" charset="-120"/>
+              </a:rPr>
+              <a:t>The population is generated</a:t>
+            </a:r>
+            <a:endParaRPr lang="en-US" sz="1600" dirty="0"/>
+          </a:p>
+        </p:txBody>
+      </p:sp>
+      <p:sp>
+        <p:nvSpPr>
+          <p:cNvPr id="8" name="Text 6"/>
+          <p:cNvSpPr txBox="1"/>
+          <p:nvPr/>
+        </p:nvSpPr>
+        <p:spPr>
+          <a:xfrm>
+            <a:off x="1362456" y="2176272"/>
+            <a:ext cx="4892040" cy="219456"/>
+          </a:xfrm>
+          <a:prstGeom prst="rect">
+            <a:avLst/>
+          </a:prstGeom>
+          <a:noFill/>
+          <a:ln/>
+        </p:spPr>
+        <p:txBody>
+          <a:bodyPr wrap="square" lIns="0" tIns="0" rIns="0" bIns="0" rtlCol="0" anchor="ctr"/>
+          <a:lstStyle/>
+          <a:p>
+            <a:pPr indent="0" marL="0">
+              <a:buNone/>
+            </a:pPr>
+            <a:r>
+              <a:rPr lang="en-US" sz="950" b="1" spc="140" kern="0" dirty="0">
+                <a:solidFill>
+                  <a:srgbClr val="5A6570"/>
+                </a:solidFill>
+                <a:latin typeface="Calibri" pitchFamily="34" charset="0"/>
+                <a:ea typeface="Calibri" pitchFamily="34" charset="-122"/>
+                <a:cs typeface="Calibri" pitchFamily="34" charset="-120"/>
+              </a:rPr>
+              <a:t>THE CONSTRAINT</a:t>
+            </a:r>
+            <a:endParaRPr lang="en-US" sz="950" dirty="0"/>
+          </a:p>
+        </p:txBody>
+      </p:sp>
+      <p:sp>
+        <p:nvSpPr>
+          <p:cNvPr id="9" name="Text 7"/>
+          <p:cNvSpPr txBox="1"/>
+          <p:nvPr/>
+        </p:nvSpPr>
+        <p:spPr>
+          <a:xfrm>
+            <a:off x="1362456" y="2414016"/>
+            <a:ext cx="4892040" cy="950976"/>
+          </a:xfrm>
+          <a:prstGeom prst="rect">
+            <a:avLst/>
+          </a:prstGeom>
+          <a:noFill/>
+          <a:ln/>
+        </p:spPr>
+        <p:txBody>
+          <a:bodyPr wrap="square" lIns="0" tIns="0" rIns="0" bIns="0" rtlCol="0" anchor="t"/>
+          <a:lstStyle/>
+          <a:p>
+            <a:pPr indent="0" marL="0">
+              <a:lnSpc>
+                <a:spcPts val="1500"/>
+              </a:lnSpc>
+              <a:buNone/>
+            </a:pPr>
+            <a:r>
+              <a:rPr lang="en-US" sz="1200" dirty="0">
+                <a:solidFill>
+                  <a:srgbClr val="3C4E58"/>
+                </a:solidFill>
+                <a:latin typeface="Calibri" pitchFamily="34" charset="0"/>
+                <a:ea typeface="Calibri" pitchFamily="34" charset="-122"/>
+                <a:cs typeface="Calibri" pitchFamily="34" charset="-120"/>
+              </a:rPr>
+              <a:t>No public dataset joins Account Aggregator-style alternative data to realised loan outcomes for Indian borrowers. That data is personal financial information and is not published, so the alternative was not real data but a foreign dataset relabelled.</a:t>
+            </a:r>
+            <a:endParaRPr lang="en-US" sz="1200" dirty="0"/>
+          </a:p>
+        </p:txBody>
+      </p:sp>
+      <p:sp>
+        <p:nvSpPr>
+          <p:cNvPr id="10" name="Text 8"/>
+          <p:cNvSpPr txBox="1"/>
+          <p:nvPr/>
+        </p:nvSpPr>
+        <p:spPr>
+          <a:xfrm>
+            <a:off x="6528816" y="2176272"/>
+            <a:ext cx="4617720" cy="219456"/>
+          </a:xfrm>
+          <a:prstGeom prst="rect">
+            <a:avLst/>
+          </a:prstGeom>
+          <a:noFill/>
+          <a:ln/>
+        </p:spPr>
+        <p:txBody>
+          <a:bodyPr wrap="square" lIns="0" tIns="0" rIns="0" bIns="0" rtlCol="0" anchor="ctr"/>
+          <a:lstStyle/>
+          <a:p>
+            <a:pPr indent="0" marL="0">
+              <a:buNone/>
+            </a:pPr>
+            <a:r>
+              <a:rPr lang="en-US" sz="950" b="1" spc="140" kern="0" dirty="0">
+                <a:solidFill>
+                  <a:srgbClr val="0E6B4F"/>
+                </a:solidFill>
+                <a:latin typeface="Calibri" pitchFamily="34" charset="0"/>
+                <a:ea typeface="Calibri" pitchFamily="34" charset="-122"/>
+                <a:cs typeface="Calibri" pitchFamily="34" charset="-120"/>
+              </a:rPr>
+              <a:t>WHAT WE DID</a:t>
+            </a:r>
+            <a:endParaRPr lang="en-US" sz="950" dirty="0"/>
+          </a:p>
+        </p:txBody>
+      </p:sp>
+      <p:sp>
+        <p:nvSpPr>
+          <p:cNvPr id="11" name="Text 9"/>
+          <p:cNvSpPr txBox="1"/>
+          <p:nvPr/>
+        </p:nvSpPr>
+        <p:spPr>
+          <a:xfrm>
+            <a:off x="6528816" y="2414016"/>
+            <a:ext cx="4617720" cy="950976"/>
+          </a:xfrm>
+          <a:prstGeom prst="rect">
+            <a:avLst/>
+          </a:prstGeom>
+          <a:noFill/>
+          <a:ln/>
+        </p:spPr>
+        <p:txBody>
+          <a:bodyPr wrap="square" lIns="0" tIns="0" rIns="0" bIns="0" rtlCol="0" anchor="t"/>
+          <a:lstStyle/>
+          <a:p>
+            <a:pPr indent="0" marL="0">
+              <a:lnSpc>
+                <a:spcPts val="1500"/>
+              </a:lnSpc>
+              <a:buNone/>
+            </a:pPr>
+            <a:r>
+              <a:rPr lang="en-US" sz="1200" dirty="0">
                 <a:solidFill>
                   <a:srgbClr val="16232E"/>
                 </a:solidFill>
@@ -23383,49 +23592,7 @@
                 <a:ea typeface="Calibri" pitchFamily="34" charset="-122"/>
                 <a:cs typeface="Calibri" pitchFamily="34" charset="-120"/>
               </a:rPr>
-              <a:t>The population is synthetic</a:t>
-            </a:r>
-            <a:endParaRPr lang="en-US" sz="1500" dirty="0"/>
-          </a:p>
-        </p:txBody>
-      </p:sp>
-      <p:sp>
-        <p:nvSpPr>
-          <p:cNvPr id="7" name="Text 5"/>
-          <p:cNvSpPr txBox="1"/>
-          <p:nvPr/>
-        </p:nvSpPr>
-        <p:spPr>
-          <a:xfrm>
-            <a:off x="1371600" y="1984248"/>
-            <a:ext cx="9966960" cy="566928"/>
-          </a:xfrm>
-          <a:prstGeom prst="rect">
-            <a:avLst/>
-          </a:prstGeom>
-          <a:noFill/>
-          <a:ln/>
-        </p:spPr>
-        <p:txBody>
-          <a:bodyPr wrap="square" lIns="0" tIns="0" rIns="0" bIns="0" rtlCol="0" anchor="ctr"/>
-          <a:lstStyle/>
-          <a:p>
-            <a:pPr indent="0" marL="0">
-              <a:lnSpc>
-                <a:spcPts val="1600"/>
-              </a:lnSpc>
-              <a:buNone/>
-            </a:pPr>
-            <a:r>
-              <a:rPr lang="en-US" sz="1200" dirty="0">
-                <a:solidFill>
-                  <a:srgbClr val="5A6570"/>
-                </a:solidFill>
-                <a:latin typeface="Calibri" pitchFamily="34" charset="0"/>
-                <a:ea typeface="Calibri" pitchFamily="34" charset="-122"/>
-                <a:cs typeface="Calibri" pitchFamily="34" charset="-120"/>
-              </a:rPr>
-              <a:t>Absolute figures describe this population, not the Indian credit market. The direction of the result follows from a mechanism — bureau absence correlates with gender and region while true risk does not — that is well documented in the real world.</a:t>
+              <a:t>The same pipeline was run over 30,000 real defaults. The accuracy claim replicated: AUC 0.7711 → 0.7829, bad rate down. Our synthetic difficulty sits between two real datasets, and the fairness claim's precondition is stated precisely enough that a lender could test it against their own book in an afternoon.</a:t>
             </a:r>
             <a:endParaRPr lang="en-US" sz="1200" dirty="0"/>
           </a:p>
@@ -23433,24 +23600,29 @@
       </p:sp>
       <p:sp>
         <p:nvSpPr>
-          <p:cNvPr id="8" name="Shape 6"/>
+          <p:cNvPr id="12" name="Shape 10"/>
           <p:cNvSpPr/>
           <p:nvPr/>
         </p:nvSpPr>
         <p:spPr>
           <a:xfrm>
-            <a:off x="502920" y="2898648"/>
-            <a:ext cx="11155680" cy="1234440"/>
+            <a:off x="502920" y="3694176"/>
+            <a:ext cx="11155680" cy="1920240"/>
           </a:xfrm>
           <a:prstGeom prst="roundRect">
             <a:avLst>
-              <a:gd name="adj" fmla="val 6667"/>
+              <a:gd name="adj" fmla="val 4286"/>
             </a:avLst>
           </a:prstGeom>
           <a:solidFill>
-            <a:srgbClr val="F1F4F2"/>
+            <a:srgbClr val="E3F0E9"/>
           </a:solidFill>
-          <a:ln/>
+          <a:ln w="9525">
+            <a:solidFill>
+              <a:srgbClr val="0E6B4F"/>
+            </a:solidFill>
+            <a:prstDash val="solid"/>
+          </a:ln>
           <a:effectLst>
             <a:outerShdw sx="100000" sy="100000" kx="0" ky="0" algn="bl" rotWithShape="0" blurRad="101600" dist="25400" dir="5400000">
               <a:srgbClr val="9AA5AE">
@@ -23462,162 +23634,282 @@
       </p:sp>
       <p:sp>
         <p:nvSpPr>
-          <p:cNvPr id="9" name="Shape 7"/>
-          <p:cNvSpPr/>
-          <p:nvPr/>
-        </p:nvSpPr>
-        <p:spPr>
-          <a:xfrm>
-            <a:off x="777240" y="3099816"/>
-            <a:ext cx="384048" cy="384048"/>
-          </a:xfrm>
-          <a:prstGeom prst="ellipse">
-            <a:avLst/>
-          </a:prstGeom>
-          <a:solidFill>
-            <a:srgbClr val="B2701A"/>
-          </a:solidFill>
-          <a:ln/>
-        </p:spPr>
-      </p:sp>
-      <p:sp>
-        <p:nvSpPr>
-          <p:cNvPr id="10" name="Text 8"/>
-          <p:cNvSpPr txBox="1"/>
-          <p:nvPr/>
-        </p:nvSpPr>
-        <p:spPr>
-          <a:xfrm>
-            <a:off x="777240" y="3099816"/>
-            <a:ext cx="384048" cy="384048"/>
-          </a:xfrm>
-          <a:prstGeom prst="rect">
-            <a:avLst/>
-          </a:prstGeom>
-          <a:noFill/>
-          <a:ln/>
-        </p:spPr>
-        <p:txBody>
-          <a:bodyPr wrap="square" lIns="0" tIns="0" rIns="0" bIns="0" rtlCol="0" anchor="ctr"/>
-          <a:lstStyle/>
-          <a:p>
-            <a:pPr algn="ctr" indent="0" marL="0">
-              <a:buNone/>
-            </a:pPr>
-            <a:r>
-              <a:rPr lang="en-US" sz="1300" b="1" dirty="0">
-                <a:solidFill>
-                  <a:srgbClr val="FFFFFF"/>
-                </a:solidFill>
-                <a:latin typeface="Calibri" pitchFamily="34" charset="0"/>
-                <a:ea typeface="Calibri" pitchFamily="34" charset="-122"/>
-                <a:cs typeface="Calibri" pitchFamily="34" charset="-120"/>
-              </a:rPr>
-              <a:t>2</a:t>
-            </a:r>
-            <a:endParaRPr lang="en-US" sz="1300" dirty="0"/>
-          </a:p>
-        </p:txBody>
-      </p:sp>
-      <p:sp>
-        <p:nvSpPr>
-          <p:cNvPr id="11" name="Text 9"/>
-          <p:cNvSpPr txBox="1"/>
-          <p:nvPr/>
-        </p:nvSpPr>
-        <p:spPr>
-          <a:xfrm>
-            <a:off x="1371600" y="3099816"/>
-            <a:ext cx="9966960" cy="347472"/>
-          </a:xfrm>
-          <a:prstGeom prst="rect">
-            <a:avLst/>
-          </a:prstGeom>
-          <a:noFill/>
-          <a:ln/>
-        </p:spPr>
-        <p:txBody>
-          <a:bodyPr wrap="square" lIns="0" tIns="0" rIns="0" bIns="0" rtlCol="0" anchor="ctr"/>
-          <a:lstStyle/>
-          <a:p>
-            <a:pPr indent="0" marL="0">
-              <a:buNone/>
-            </a:pPr>
-            <a:r>
-              <a:rPr lang="en-US" sz="1500" b="1" dirty="0">
-                <a:solidFill>
-                  <a:srgbClr val="16232E"/>
-                </a:solidFill>
-                <a:latin typeface="Calibri" pitchFamily="34" charset="0"/>
-                <a:ea typeface="Calibri" pitchFamily="34" charset="-122"/>
-                <a:cs typeface="Calibri" pitchFamily="34" charset="-120"/>
-              </a:rPr>
-              <a:t>The regulatory corpus is paraphrased</a:t>
-            </a:r>
-            <a:endParaRPr lang="en-US" sz="1500" dirty="0"/>
-          </a:p>
-        </p:txBody>
-      </p:sp>
-      <p:sp>
-        <p:nvSpPr>
-          <p:cNvPr id="12" name="Text 10"/>
-          <p:cNvSpPr txBox="1"/>
-          <p:nvPr/>
-        </p:nvSpPr>
-        <p:spPr>
-          <a:xfrm>
-            <a:off x="1371600" y="3465576"/>
-            <a:ext cx="9966960" cy="566928"/>
-          </a:xfrm>
-          <a:prstGeom prst="rect">
-            <a:avLst/>
-          </a:prstGeom>
-          <a:noFill/>
-          <a:ln/>
-        </p:spPr>
-        <p:txBody>
-          <a:bodyPr wrap="square" lIns="0" tIns="0" rIns="0" bIns="0" rtlCol="0" anchor="ctr"/>
-          <a:lstStyle/>
-          <a:p>
-            <a:pPr indent="0" marL="0">
-              <a:lnSpc>
-                <a:spcPts val="1600"/>
-              </a:lnSpc>
-              <a:buNone/>
-            </a:pPr>
-            <a:r>
-              <a:rPr lang="en-US" sz="1200" dirty="0">
-                <a:solidFill>
-                  <a:srgbClr val="5A6570"/>
-                </a:solidFill>
-                <a:latin typeface="Calibri" pitchFamily="34" charset="0"/>
-                <a:ea typeface="Calibri" pitchFamily="34" charset="-122"/>
-                <a:cs typeface="Calibri" pitchFamily="34" charset="-120"/>
-              </a:rPr>
-              <a:t>Plain-language summaries citing real instruments, labelled as such. Production would ingest the official texts with per-clause identifiers; the retrieval machinery is unchanged by that substitution.</a:t>
-            </a:r>
-            <a:endParaRPr lang="en-US" sz="1200" dirty="0"/>
-          </a:p>
-        </p:txBody>
-      </p:sp>
-      <p:sp>
-        <p:nvSpPr>
           <p:cNvPr id="13" name="Shape 11"/>
           <p:cNvSpPr/>
           <p:nvPr/>
         </p:nvSpPr>
         <p:spPr>
           <a:xfrm>
-            <a:off x="502920" y="4379976"/>
-            <a:ext cx="11155680" cy="1234440"/>
+            <a:off x="758952" y="3931920"/>
+            <a:ext cx="384048" cy="384048"/>
+          </a:xfrm>
+          <a:prstGeom prst="ellipse">
+            <a:avLst/>
+          </a:prstGeom>
+          <a:solidFill>
+            <a:srgbClr val="0E6B4F"/>
+          </a:solidFill>
+          <a:ln/>
+        </p:spPr>
+      </p:sp>
+      <p:sp>
+        <p:nvSpPr>
+          <p:cNvPr id="14" name="Text 12"/>
+          <p:cNvSpPr txBox="1"/>
+          <p:nvPr/>
+        </p:nvSpPr>
+        <p:spPr>
+          <a:xfrm>
+            <a:off x="758952" y="3931920"/>
+            <a:ext cx="384048" cy="384048"/>
+          </a:xfrm>
+          <a:prstGeom prst="rect">
+            <a:avLst/>
+          </a:prstGeom>
+          <a:noFill/>
+          <a:ln/>
+        </p:spPr>
+        <p:txBody>
+          <a:bodyPr wrap="square" lIns="0" tIns="0" rIns="0" bIns="0" rtlCol="0" anchor="ctr"/>
+          <a:lstStyle/>
+          <a:p>
+            <a:pPr algn="ctr" indent="0" marL="0">
+              <a:buNone/>
+            </a:pPr>
+            <a:r>
+              <a:rPr lang="en-US" sz="1300" b="1" dirty="0">
+                <a:solidFill>
+                  <a:srgbClr val="FFFFFF"/>
+                </a:solidFill>
+                <a:latin typeface="Calibri" pitchFamily="34" charset="0"/>
+                <a:ea typeface="Calibri" pitchFamily="34" charset="-122"/>
+                <a:cs typeface="Calibri" pitchFamily="34" charset="-120"/>
+              </a:rPr>
+              <a:t>2</a:t>
+            </a:r>
+            <a:endParaRPr lang="en-US" sz="1300" dirty="0"/>
+          </a:p>
+        </p:txBody>
+      </p:sp>
+      <p:sp>
+        <p:nvSpPr>
+          <p:cNvPr id="15" name="Text 13"/>
+          <p:cNvSpPr txBox="1"/>
+          <p:nvPr/>
+        </p:nvSpPr>
+        <p:spPr>
+          <a:xfrm>
+            <a:off x="1362456" y="3913632"/>
+            <a:ext cx="9966960" cy="329184"/>
+          </a:xfrm>
+          <a:prstGeom prst="rect">
+            <a:avLst/>
+          </a:prstGeom>
+          <a:noFill/>
+          <a:ln/>
+        </p:spPr>
+        <p:txBody>
+          <a:bodyPr wrap="square" lIns="0" tIns="0" rIns="0" bIns="0" rtlCol="0" anchor="ctr"/>
+          <a:lstStyle/>
+          <a:p>
+            <a:pPr indent="0" marL="0">
+              <a:buNone/>
+            </a:pPr>
+            <a:r>
+              <a:rPr lang="en-US" sz="1600" b="1" dirty="0">
+                <a:solidFill>
+                  <a:srgbClr val="0E6B4F"/>
+                </a:solidFill>
+                <a:latin typeface="Calibri" pitchFamily="34" charset="0"/>
+                <a:ea typeface="Calibri" pitchFamily="34" charset="-122"/>
+                <a:cs typeface="Calibri" pitchFamily="34" charset="-120"/>
+              </a:rPr>
+              <a:t>The regulatory corpus is paraphrased</a:t>
+            </a:r>
+            <a:endParaRPr lang="en-US" sz="1600" dirty="0"/>
+          </a:p>
+        </p:txBody>
+      </p:sp>
+      <p:sp>
+        <p:nvSpPr>
+          <p:cNvPr id="16" name="Text 14"/>
+          <p:cNvSpPr txBox="1"/>
+          <p:nvPr/>
+        </p:nvSpPr>
+        <p:spPr>
+          <a:xfrm>
+            <a:off x="1362456" y="4297680"/>
+            <a:ext cx="4892040" cy="219456"/>
+          </a:xfrm>
+          <a:prstGeom prst="rect">
+            <a:avLst/>
+          </a:prstGeom>
+          <a:noFill/>
+          <a:ln/>
+        </p:spPr>
+        <p:txBody>
+          <a:bodyPr wrap="square" lIns="0" tIns="0" rIns="0" bIns="0" rtlCol="0" anchor="ctr"/>
+          <a:lstStyle/>
+          <a:p>
+            <a:pPr indent="0" marL="0">
+              <a:buNone/>
+            </a:pPr>
+            <a:r>
+              <a:rPr lang="en-US" sz="950" b="1" spc="140" kern="0" dirty="0">
+                <a:solidFill>
+                  <a:srgbClr val="5A6570"/>
+                </a:solidFill>
+                <a:latin typeface="Calibri" pitchFamily="34" charset="0"/>
+                <a:ea typeface="Calibri" pitchFamily="34" charset="-122"/>
+                <a:cs typeface="Calibri" pitchFamily="34" charset="-120"/>
+              </a:rPr>
+              <a:t>THE CONSTRAINT</a:t>
+            </a:r>
+            <a:endParaRPr lang="en-US" sz="950" dirty="0"/>
+          </a:p>
+        </p:txBody>
+      </p:sp>
+      <p:sp>
+        <p:nvSpPr>
+          <p:cNvPr id="17" name="Text 15"/>
+          <p:cNvSpPr txBox="1"/>
+          <p:nvPr/>
+        </p:nvSpPr>
+        <p:spPr>
+          <a:xfrm>
+            <a:off x="1362456" y="4535424"/>
+            <a:ext cx="4892040" cy="950976"/>
+          </a:xfrm>
+          <a:prstGeom prst="rect">
+            <a:avLst/>
+          </a:prstGeom>
+          <a:noFill/>
+          <a:ln/>
+        </p:spPr>
+        <p:txBody>
+          <a:bodyPr wrap="square" lIns="0" tIns="0" rIns="0" bIns="0" rtlCol="0" anchor="t"/>
+          <a:lstStyle/>
+          <a:p>
+            <a:pPr indent="0" marL="0">
+              <a:lnSpc>
+                <a:spcPts val="1500"/>
+              </a:lnSpc>
+              <a:buNone/>
+            </a:pPr>
+            <a:r>
+              <a:rPr lang="en-US" sz="1200" dirty="0">
+                <a:solidFill>
+                  <a:srgbClr val="3C4E58"/>
+                </a:solidFill>
+                <a:latin typeface="Calibri" pitchFamily="34" charset="0"/>
+                <a:ea typeface="Calibri" pitchFamily="34" charset="-122"/>
+                <a:cs typeface="Calibri" pitchFamily="34" charset="-120"/>
+              </a:rPr>
+              <a:t>Every provision is a plain-language summary carrying a citation to the instrument it summarises, labelled as such in the corpus README, the model card and this deck.</a:t>
+            </a:r>
+            <a:endParaRPr lang="en-US" sz="1200" dirty="0"/>
+          </a:p>
+        </p:txBody>
+      </p:sp>
+      <p:sp>
+        <p:nvSpPr>
+          <p:cNvPr id="18" name="Text 16"/>
+          <p:cNvSpPr txBox="1"/>
+          <p:nvPr/>
+        </p:nvSpPr>
+        <p:spPr>
+          <a:xfrm>
+            <a:off x="6528816" y="4297680"/>
+            <a:ext cx="4617720" cy="219456"/>
+          </a:xfrm>
+          <a:prstGeom prst="rect">
+            <a:avLst/>
+          </a:prstGeom>
+          <a:noFill/>
+          <a:ln/>
+        </p:spPr>
+        <p:txBody>
+          <a:bodyPr wrap="square" lIns="0" tIns="0" rIns="0" bIns="0" rtlCol="0" anchor="ctr"/>
+          <a:lstStyle/>
+          <a:p>
+            <a:pPr indent="0" marL="0">
+              <a:buNone/>
+            </a:pPr>
+            <a:r>
+              <a:rPr lang="en-US" sz="950" b="1" spc="140" kern="0" dirty="0">
+                <a:solidFill>
+                  <a:srgbClr val="0E6B4F"/>
+                </a:solidFill>
+                <a:latin typeface="Calibri" pitchFamily="34" charset="0"/>
+                <a:ea typeface="Calibri" pitchFamily="34" charset="-122"/>
+                <a:cs typeface="Calibri" pitchFamily="34" charset="-120"/>
+              </a:rPr>
+              <a:t>WHAT WE DID</a:t>
+            </a:r>
+            <a:endParaRPr lang="en-US" sz="950" dirty="0"/>
+          </a:p>
+        </p:txBody>
+      </p:sp>
+      <p:sp>
+        <p:nvSpPr>
+          <p:cNvPr id="19" name="Text 17"/>
+          <p:cNvSpPr txBox="1"/>
+          <p:nvPr/>
+        </p:nvSpPr>
+        <p:spPr>
+          <a:xfrm>
+            <a:off x="6528816" y="4535424"/>
+            <a:ext cx="4617720" cy="950976"/>
+          </a:xfrm>
+          <a:prstGeom prst="rect">
+            <a:avLst/>
+          </a:prstGeom>
+          <a:noFill/>
+          <a:ln/>
+        </p:spPr>
+        <p:txBody>
+          <a:bodyPr wrap="square" lIns="0" tIns="0" rIns="0" bIns="0" rtlCol="0" anchor="t"/>
+          <a:lstStyle/>
+          <a:p>
+            <a:pPr indent="0" marL="0">
+              <a:lnSpc>
+                <a:spcPts val="1500"/>
+              </a:lnSpc>
+              <a:buNone/>
+            </a:pPr>
+            <a:r>
+              <a:rPr lang="en-US" sz="1200" dirty="0">
+                <a:solidFill>
+                  <a:srgbClr val="16232E"/>
+                </a:solidFill>
+                <a:latin typeface="Calibri" pitchFamily="34" charset="0"/>
+                <a:ea typeface="Calibri" pitchFamily="34" charset="-122"/>
+                <a:cs typeface="Calibri" pitchFamily="34" charset="-120"/>
+              </a:rPr>
+              <a:t>That was the deliberate choice, not a shortcut. Seeding a retrieval corpus with invented quotations from RBI circulars would commit precisely the hallucination this architecture exists to prevent, and would not survive a reader who knows the regulations. Production ingests the official texts; the retrieval, chunking, citation and audit machinery is unchanged.</a:t>
+            </a:r>
+            <a:endParaRPr lang="en-US" sz="1200" dirty="0"/>
+          </a:p>
+        </p:txBody>
+      </p:sp>
+      <p:sp>
+        <p:nvSpPr>
+          <p:cNvPr id="20" name="Shape 18"/>
+          <p:cNvSpPr/>
+          <p:nvPr/>
+        </p:nvSpPr>
+        <p:spPr>
+          <a:xfrm>
+            <a:off x="502920" y="5852160"/>
+            <a:ext cx="11155680" cy="640080"/>
           </a:xfrm>
           <a:prstGeom prst="roundRect">
             <a:avLst>
-              <a:gd name="adj" fmla="val 6667"/>
+              <a:gd name="adj" fmla="val 12857"/>
             </a:avLst>
           </a:prstGeom>
           <a:solidFill>
-            <a:srgbClr val="F1F4F2"/>
+            <a:srgbClr val="E3F0E9"/>
           </a:solidFill>
           <a:ln/>
           <a:effectLst>
@@ -23631,34 +23923,14 @@
       </p:sp>
       <p:sp>
         <p:nvSpPr>
-          <p:cNvPr id="14" name="Shape 12"/>
-          <p:cNvSpPr/>
-          <p:nvPr/>
-        </p:nvSpPr>
-        <p:spPr>
-          <a:xfrm>
-            <a:off x="777240" y="4581144"/>
-            <a:ext cx="384048" cy="384048"/>
-          </a:xfrm>
-          <a:prstGeom prst="ellipse">
-            <a:avLst/>
-          </a:prstGeom>
-          <a:solidFill>
-            <a:srgbClr val="B2701A"/>
-          </a:solidFill>
-          <a:ln/>
-        </p:spPr>
-      </p:sp>
-      <p:sp>
-        <p:nvSpPr>
-          <p:cNvPr id="15" name="Text 13"/>
-          <p:cNvSpPr txBox="1"/>
-          <p:nvPr/>
-        </p:nvSpPr>
-        <p:spPr>
-          <a:xfrm>
-            <a:off x="777240" y="4581144"/>
-            <a:ext cx="384048" cy="384048"/>
+          <p:cNvPr id="21" name="Text 19"/>
+          <p:cNvSpPr txBox="1"/>
+          <p:nvPr/>
+        </p:nvSpPr>
+        <p:spPr>
+          <a:xfrm>
+            <a:off x="777240" y="5971032"/>
+            <a:ext cx="10607040" cy="402336"/>
           </a:xfrm>
           <a:prstGeom prst="rect">
             <a:avLst/>
@@ -23670,50 +23942,14 @@
           <a:bodyPr wrap="square" lIns="0" tIns="0" rIns="0" bIns="0" rtlCol="0" anchor="ctr"/>
           <a:lstStyle/>
           <a:p>
-            <a:pPr algn="ctr" indent="0" marL="0">
-              <a:buNone/>
-            </a:pPr>
-            <a:r>
-              <a:rPr lang="en-US" sz="1300" b="1" dirty="0">
-                <a:solidFill>
-                  <a:srgbClr val="FFFFFF"/>
-                </a:solidFill>
-                <a:latin typeface="Calibri" pitchFamily="34" charset="0"/>
-                <a:ea typeface="Calibri" pitchFamily="34" charset="-122"/>
-                <a:cs typeface="Calibri" pitchFamily="34" charset="-120"/>
-              </a:rPr>
-              <a:t>3</a:t>
-            </a:r>
-            <a:endParaRPr lang="en-US" sz="1300" dirty="0"/>
-          </a:p>
-        </p:txBody>
-      </p:sp>
-      <p:sp>
-        <p:nvSpPr>
-          <p:cNvPr id="16" name="Text 14"/>
-          <p:cNvSpPr txBox="1"/>
-          <p:nvPr/>
-        </p:nvSpPr>
-        <p:spPr>
-          <a:xfrm>
-            <a:off x="1371600" y="4581144"/>
-            <a:ext cx="9966960" cy="347472"/>
-          </a:xfrm>
-          <a:prstGeom prst="rect">
-            <a:avLst/>
-          </a:prstGeom>
-          <a:noFill/>
-          <a:ln/>
-        </p:spPr>
-        <p:txBody>
-          <a:bodyPr wrap="square" lIns="0" tIns="0" rIns="0" bIns="0" rtlCol="0" anchor="ctr"/>
-          <a:lstStyle/>
-          <a:p>
-            <a:pPr indent="0" marL="0">
-              <a:buNone/>
-            </a:pPr>
-            <a:r>
-              <a:rPr lang="en-US" sz="1500" b="1" dirty="0">
+            <a:pPr indent="0" marL="0">
+              <a:lnSpc>
+                <a:spcPts val="1700"/>
+              </a:lnSpc>
+              <a:buNone/>
+            </a:pPr>
+            <a:r>
+              <a:rPr lang="en-US" sz="1250" dirty="0">
                 <a:solidFill>
                   <a:srgbClr val="16232E"/>
                 </a:solidFill>
@@ -23721,51 +23957,9 @@
                 <a:ea typeface="Calibri" pitchFamily="34" charset="-122"/>
                 <a:cs typeface="Calibri" pitchFamily="34" charset="-120"/>
               </a:rPr>
-              <a:t>The cloud layer is designed, not provisioned</a:t>
-            </a:r>
-            <a:endParaRPr lang="en-US" sz="1500" dirty="0"/>
-          </a:p>
-        </p:txBody>
-      </p:sp>
-      <p:sp>
-        <p:nvSpPr>
-          <p:cNvPr id="17" name="Text 15"/>
-          <p:cNvSpPr txBox="1"/>
-          <p:nvPr/>
-        </p:nvSpPr>
-        <p:spPr>
-          <a:xfrm>
-            <a:off x="1371600" y="4946904"/>
-            <a:ext cx="9966960" cy="566928"/>
-          </a:xfrm>
-          <a:prstGeom prst="rect">
-            <a:avLst/>
-          </a:prstGeom>
-          <a:noFill/>
-          <a:ln/>
-        </p:spPr>
-        <p:txBody>
-          <a:bodyPr wrap="square" lIns="0" tIns="0" rIns="0" bIns="0" rtlCol="0" anchor="ctr"/>
-          <a:lstStyle/>
-          <a:p>
-            <a:pPr indent="0" marL="0">
-              <a:lnSpc>
-                <a:spcPts val="1600"/>
-              </a:lnSpc>
-              <a:buNone/>
-            </a:pPr>
-            <a:r>
-              <a:rPr lang="en-US" sz="1200" dirty="0">
-                <a:solidFill>
-                  <a:srgbClr val="5A6570"/>
-                </a:solidFill>
-                <a:latin typeface="Calibri" pitchFamily="34" charset="0"/>
-                <a:ea typeface="Calibri" pitchFamily="34" charset="-122"/>
-                <a:cs typeface="Calibri" pitchFamily="34" charset="-120"/>
-              </a:rPr>
-              <a:t>No live deployment, and the Bedrock adapter has never run against a real endpoint. Both are stated in the README rather than implied away.</a:t>
-            </a:r>
-            <a:endParaRPr lang="en-US" sz="1200" dirty="0"/>
+              <a:t>Everything else the brief asked for is running in production: React on Vercel, FastAPI and PostgreSQL with pgvector in Singapore, and a live language model behind guardrails.</a:t>
+            </a:r>
+            <a:endParaRPr lang="en-US" sz="1250" dirty="0"/>
           </a:p>
         </p:txBody>
       </p:sp>

--- a/docs/Pratyaya-Synchrony-Hackathon.pptx
+++ b/docs/Pratyaya-Synchrony-Hackathon.pptx
@@ -23483,8 +23483,8 @@
         </p:nvSpPr>
         <p:spPr>
           <a:xfrm>
-            <a:off x="1362456" y="2414016"/>
-            <a:ext cx="4892040" cy="950976"/>
+            <a:off x="1362456" y="2395728"/>
+            <a:ext cx="4892040" cy="1005840"/>
           </a:xfrm>
           <a:prstGeom prst="rect">
             <a:avLst/>
@@ -23498,12 +23498,12 @@
           <a:p>
             <a:pPr indent="0" marL="0">
               <a:lnSpc>
-                <a:spcPts val="1500"/>
+                <a:spcPts val="1400"/>
               </a:lnSpc>
               <a:buNone/>
             </a:pPr>
             <a:r>
-              <a:rPr lang="en-US" sz="1200" dirty="0">
+              <a:rPr lang="en-US" sz="1150" dirty="0">
                 <a:solidFill>
                   <a:srgbClr val="3C4E58"/>
                 </a:solidFill>
@@ -23513,7 +23513,7 @@
               </a:rPr>
               <a:t>No public dataset joins Account Aggregator-style alternative data to realised loan outcomes for Indian borrowers. That data is personal financial information and is not published, so the alternative was not real data but a foreign dataset relabelled.</a:t>
             </a:r>
-            <a:endParaRPr lang="en-US" sz="1200" dirty="0"/>
+            <a:endParaRPr lang="en-US" sz="1150" dirty="0"/>
           </a:p>
         </p:txBody>
       </p:sp>
@@ -23564,8 +23564,8 @@
         </p:nvSpPr>
         <p:spPr>
           <a:xfrm>
-            <a:off x="6528816" y="2414016"/>
-            <a:ext cx="4617720" cy="950976"/>
+            <a:off x="6528816" y="2395728"/>
+            <a:ext cx="4617720" cy="1005840"/>
           </a:xfrm>
           <a:prstGeom prst="rect">
             <a:avLst/>
@@ -23579,12 +23579,12 @@
           <a:p>
             <a:pPr indent="0" marL="0">
               <a:lnSpc>
-                <a:spcPts val="1500"/>
+                <a:spcPts val="1400"/>
               </a:lnSpc>
               <a:buNone/>
             </a:pPr>
             <a:r>
-              <a:rPr lang="en-US" sz="1200" dirty="0">
+              <a:rPr lang="en-US" sz="1150" dirty="0">
                 <a:solidFill>
                   <a:srgbClr val="16232E"/>
                 </a:solidFill>
@@ -23594,7 +23594,7 @@
               </a:rPr>
               <a:t>The same pipeline was run over 30,000 real defaults. The accuracy claim replicated: AUC 0.7711 → 0.7829, bad rate down. Our synthetic difficulty sits between two real datasets, and the fairness claim's precondition is stated precisely enough that a lender could test it against their own book in an afternoon.</a:t>
             </a:r>
-            <a:endParaRPr lang="en-US" sz="1200" dirty="0"/>
+            <a:endParaRPr lang="en-US" sz="1150" dirty="0"/>
           </a:p>
         </p:txBody>
       </p:sp>
@@ -23777,8 +23777,8 @@
         </p:nvSpPr>
         <p:spPr>
           <a:xfrm>
-            <a:off x="1362456" y="4535424"/>
-            <a:ext cx="4892040" cy="950976"/>
+            <a:off x="1362456" y="4517136"/>
+            <a:ext cx="4892040" cy="1005840"/>
           </a:xfrm>
           <a:prstGeom prst="rect">
             <a:avLst/>
@@ -23792,12 +23792,12 @@
           <a:p>
             <a:pPr indent="0" marL="0">
               <a:lnSpc>
-                <a:spcPts val="1500"/>
+                <a:spcPts val="1400"/>
               </a:lnSpc>
               <a:buNone/>
             </a:pPr>
             <a:r>
-              <a:rPr lang="en-US" sz="1200" dirty="0">
+              <a:rPr lang="en-US" sz="1150" dirty="0">
                 <a:solidFill>
                   <a:srgbClr val="3C4E58"/>
                 </a:solidFill>
@@ -23807,7 +23807,7 @@
               </a:rPr>
               <a:t>Every provision is a plain-language summary carrying a citation to the instrument it summarises, labelled as such in the corpus README, the model card and this deck.</a:t>
             </a:r>
-            <a:endParaRPr lang="en-US" sz="1200" dirty="0"/>
+            <a:endParaRPr lang="en-US" sz="1150" dirty="0"/>
           </a:p>
         </p:txBody>
       </p:sp>
@@ -23858,8 +23858,8 @@
         </p:nvSpPr>
         <p:spPr>
           <a:xfrm>
-            <a:off x="6528816" y="4535424"/>
-            <a:ext cx="4617720" cy="950976"/>
+            <a:off x="6528816" y="4517136"/>
+            <a:ext cx="4617720" cy="1005840"/>
           </a:xfrm>
           <a:prstGeom prst="rect">
             <a:avLst/>
@@ -23873,12 +23873,12 @@
           <a:p>
             <a:pPr indent="0" marL="0">
               <a:lnSpc>
-                <a:spcPts val="1500"/>
+                <a:spcPts val="1400"/>
               </a:lnSpc>
               <a:buNone/>
             </a:pPr>
             <a:r>
-              <a:rPr lang="en-US" sz="1200" dirty="0">
+              <a:rPr lang="en-US" sz="1150" dirty="0">
                 <a:solidFill>
                   <a:srgbClr val="16232E"/>
                 </a:solidFill>
@@ -23888,7 +23888,7 @@
               </a:rPr>
               <a:t>That was the deliberate choice, not a shortcut. Seeding a retrieval corpus with invented quotations from RBI circulars would commit precisely the hallucination this architecture exists to prevent, and would not survive a reader who knows the regulations. Production ingests the official texts; the retrieval, chunking, citation and audit machinery is unchanged.</a:t>
             </a:r>
-            <a:endParaRPr lang="en-US" sz="1200" dirty="0"/>
+            <a:endParaRPr lang="en-US" sz="1150" dirty="0"/>
           </a:p>
         </p:txBody>
       </p:sp>

--- a/docs/Pratyaya-Synchrony-Hackathon.pptx
+++ b/docs/Pratyaya-Synchrony-Hackathon.pptx
@@ -4034,12 +4034,12 @@
         </p:nvSpPr>
         <p:spPr>
           <a:xfrm>
-            <a:off x="502920" y="4617720"/>
-            <a:ext cx="11155680" cy="786384"/>
+            <a:off x="502920" y="4517136"/>
+            <a:ext cx="11155680" cy="969264"/>
           </a:xfrm>
           <a:prstGeom prst="roundRect">
             <a:avLst>
-              <a:gd name="adj" fmla="val 11628"/>
+              <a:gd name="adj" fmla="val 9434"/>
             </a:avLst>
           </a:prstGeom>
           <a:solidFill>
@@ -4056,8 +4056,89 @@
         </p:nvSpPr>
         <p:spPr>
           <a:xfrm>
-            <a:off x="777240" y="4617720"/>
-            <a:ext cx="10607040" cy="786384"/>
+            <a:off x="777240" y="5047488"/>
+            <a:ext cx="10607040" cy="329184"/>
+          </a:xfrm>
+          <a:prstGeom prst="rect">
+            <a:avLst/>
+          </a:prstGeom>
+          <a:noFill/>
+          <a:ln/>
+        </p:spPr>
+        <p:txBody>
+          <a:bodyPr wrap="square" lIns="0" tIns="0" rIns="0" bIns="0" rtlCol="0" anchor="ctr"/>
+          <a:lstStyle/>
+          <a:p>
+            <a:pPr indent="0" marL="0">
+              <a:buNone/>
+            </a:pPr>
+            <a:r>
+              <a:rPr lang="en-US" sz="1000" b="1" spc="150" kern="0" dirty="0">
+                <a:solidFill>
+                  <a:srgbClr val="8FD7B8"/>
+                </a:solidFill>
+                <a:latin typeface="Calibri" pitchFamily="34" charset="0"/>
+                <a:ea typeface="Calibri" pitchFamily="34" charset="-122"/>
+                <a:cs typeface="Calibri" pitchFamily="34" charset="-120"/>
+              </a:rPr>
+              <a:t>SIGN IN  </a:t>
+            </a:r>
+            <a:pPr indent="0" marL="0">
+              <a:buNone/>
+            </a:pPr>
+            <a:r>
+              <a:rPr lang="en-US" sz="1200" dirty="0">
+                <a:solidFill>
+                  <a:srgbClr val="C9D4DD"/>
+                </a:solidFill>
+                <a:latin typeface="Calibri" pitchFamily="34" charset="0"/>
+                <a:ea typeface="Calibri" pitchFamily="34" charset="-122"/>
+                <a:cs typeface="Calibri" pitchFamily="34" charset="-120"/>
+              </a:rPr>
+              <a:t>underwriter / demo-underwriter-pw</a:t>
+            </a:r>
+            <a:pPr indent="0" marL="0">
+              <a:buNone/>
+            </a:pPr>
+            <a:r>
+              <a:rPr lang="en-US" sz="1200" dirty="0">
+                <a:solidFill>
+                  <a:srgbClr val="5A6E7C"/>
+                </a:solidFill>
+                <a:latin typeface="Calibri" pitchFamily="34" charset="0"/>
+                <a:ea typeface="Calibri" pitchFamily="34" charset="-122"/>
+                <a:cs typeface="Calibri" pitchFamily="34" charset="-120"/>
+              </a:rPr>
+              <a:t>   ·   </a:t>
+            </a:r>
+            <a:pPr indent="0" marL="0">
+              <a:buNone/>
+            </a:pPr>
+            <a:r>
+              <a:rPr lang="en-US" sz="1200" dirty="0">
+                <a:solidFill>
+                  <a:srgbClr val="C9D4DD"/>
+                </a:solidFill>
+                <a:latin typeface="Calibri" pitchFamily="34" charset="0"/>
+                <a:ea typeface="Calibri" pitchFamily="34" charset="-122"/>
+                <a:cs typeface="Calibri" pitchFamily="34" charset="-120"/>
+              </a:rPr>
+              <a:t>applicant / demo-applicant-pw</a:t>
+            </a:r>
+            <a:endParaRPr lang="en-US" sz="1000" dirty="0"/>
+          </a:p>
+        </p:txBody>
+      </p:sp>
+      <p:sp>
+        <p:nvSpPr>
+          <p:cNvPr id="13" name="Text 11"/>
+          <p:cNvSpPr txBox="1"/>
+          <p:nvPr/>
+        </p:nvSpPr>
+        <p:spPr>
+          <a:xfrm>
+            <a:off x="777240" y="4626864"/>
+            <a:ext cx="10607040" cy="402336"/>
           </a:xfrm>
           <a:prstGeom prst="rect">
             <a:avLst/>
@@ -4145,13 +4226,13 @@
       </p:sp>
       <p:sp>
         <p:nvSpPr>
-          <p:cNvPr id="13" name="Shape 11"/>
+          <p:cNvPr id="14" name="Shape 12"/>
           <p:cNvSpPr/>
           <p:nvPr/>
         </p:nvSpPr>
         <p:spPr>
           <a:xfrm>
-            <a:off x="502920" y="5596128"/>
+            <a:off x="502920" y="5669280"/>
             <a:ext cx="3840480" cy="0"/>
           </a:xfrm>
           <a:prstGeom prst="line">
@@ -4168,14 +4249,14 @@
       </p:sp>
       <p:sp>
         <p:nvSpPr>
-          <p:cNvPr id="14" name="Text 12"/>
-          <p:cNvSpPr txBox="1"/>
-          <p:nvPr/>
-        </p:nvSpPr>
-        <p:spPr>
-          <a:xfrm>
-            <a:off x="502920" y="5760720"/>
-            <a:ext cx="9601200" cy="731520"/>
+          <p:cNvPr id="15" name="Text 13"/>
+          <p:cNvSpPr txBox="1"/>
+          <p:nvPr/>
+        </p:nvSpPr>
+        <p:spPr>
+          <a:xfrm>
+            <a:off x="502920" y="5815584"/>
+            <a:ext cx="9601200" cy="694944"/>
           </a:xfrm>
           <a:prstGeom prst="rect">
             <a:avLst/>
@@ -4189,12 +4270,12 @@
           <a:p>
             <a:pPr indent="0" marL="0">
               <a:lnSpc>
-                <a:spcPts val="1800"/>
+                <a:spcPts val="1700"/>
               </a:lnSpc>
               <a:buNone/>
             </a:pPr>
             <a:r>
-              <a:rPr lang="en-US" sz="1250" i="1" dirty="0">
+              <a:rPr lang="en-US" sz="1200" i="1" dirty="0">
                 <a:solidFill>
                   <a:srgbClr val="FFFFFF"/>
                 </a:solidFill>
@@ -4206,12 +4287,12 @@
             </a:r>
             <a:pPr indent="0" marL="0">
               <a:lnSpc>
-                <a:spcPts val="1800"/>
+                <a:spcPts val="1700"/>
               </a:lnSpc>
               <a:buNone/>
             </a:pPr>
             <a:r>
-              <a:rPr lang="en-US" sz="1250" dirty="0">
+              <a:rPr lang="en-US" sz="1200" dirty="0">
                 <a:solidFill>
                   <a:srgbClr val="93A0AA"/>
                 </a:solidFill>
@@ -4223,12 +4304,12 @@
             </a:r>
             <a:pPr indent="0" marL="0">
               <a:lnSpc>
-                <a:spcPts val="1800"/>
+                <a:spcPts val="1700"/>
               </a:lnSpc>
               <a:buNone/>
             </a:pPr>
             <a:r>
-              <a:rPr lang="en-US" sz="1250" i="1" dirty="0">
+              <a:rPr lang="en-US" sz="1200" i="1" dirty="0">
                 <a:solidFill>
                   <a:srgbClr val="FFFFFF"/>
                 </a:solidFill>
@@ -4240,12 +4321,12 @@
             </a:r>
             <a:pPr indent="0" marL="0">
               <a:lnSpc>
-                <a:spcPts val="1800"/>
+                <a:spcPts val="1700"/>
               </a:lnSpc>
               <a:buNone/>
             </a:pPr>
             <a:r>
-              <a:rPr lang="en-US" sz="1250" dirty="0">
+              <a:rPr lang="en-US" sz="1200" dirty="0">
                 <a:solidFill>
                   <a:srgbClr val="93A0AA"/>
                 </a:solidFill>
@@ -4257,12 +4338,12 @@
             </a:r>
             <a:pPr indent="0" marL="0">
               <a:lnSpc>
-                <a:spcPts val="1800"/>
+                <a:spcPts val="1700"/>
               </a:lnSpc>
               <a:buNone/>
             </a:pPr>
             <a:r>
-              <a:rPr lang="en-US" sz="1250" i="1" dirty="0">
+              <a:rPr lang="en-US" sz="1200" i="1" dirty="0">
                 <a:solidFill>
                   <a:srgbClr val="FFFFFF"/>
                 </a:solidFill>
@@ -4274,12 +4355,12 @@
             </a:r>
             <a:pPr indent="0" marL="0">
               <a:lnSpc>
-                <a:spcPts val="1800"/>
+                <a:spcPts val="1700"/>
               </a:lnSpc>
               <a:buNone/>
             </a:pPr>
             <a:r>
-              <a:rPr lang="en-US" sz="1250" dirty="0">
+              <a:rPr lang="en-US" sz="1200" dirty="0">
                 <a:solidFill>
                   <a:srgbClr val="93A0AA"/>
                 </a:solidFill>
@@ -4289,17 +4370,17 @@
               </a:rPr>
               <a:t>, to believe.</a:t>
             </a:r>
-            <a:endParaRPr lang="en-US" sz="1250" dirty="0"/>
+            <a:endParaRPr lang="en-US" sz="1200" dirty="0"/>
           </a:p>
           <a:p>
             <a:pPr indent="0" marL="0">
               <a:lnSpc>
-                <a:spcPts val="1800"/>
+                <a:spcPts val="1700"/>
               </a:lnSpc>
               <a:buNone/>
             </a:pPr>
             <a:r>
-              <a:rPr lang="en-US" sz="1250" dirty="0">
+              <a:rPr lang="en-US" sz="1200" dirty="0">
                 <a:solidFill>
                   <a:srgbClr val="93A0AA"/>
                 </a:solidFill>
@@ -4309,7 +4390,7 @@
               </a:rPr>
               <a:t>Both name the same thing: a lender's belief that a borrower will repay.</a:t>
             </a:r>
-            <a:endParaRPr lang="en-US" sz="1250" dirty="0"/>
+            <a:endParaRPr lang="en-US" sz="1200" dirty="0"/>
           </a:p>
         </p:txBody>
       </p:sp>
@@ -25750,7 +25831,7 @@
         </p:nvSpPr>
         <p:spPr>
           <a:xfrm>
-            <a:off x="502920" y="4974336"/>
+            <a:off x="502920" y="4919472"/>
             <a:ext cx="2926080" cy="502920"/>
           </a:xfrm>
           <a:prstGeom prst="roundRect">
@@ -25772,7 +25853,7 @@
         </p:nvSpPr>
         <p:spPr>
           <a:xfrm>
-            <a:off x="502920" y="4974336"/>
+            <a:off x="502920" y="4919472"/>
             <a:ext cx="2926080" cy="502920"/>
           </a:xfrm>
           <a:prstGeom prst="rect">
@@ -25811,7 +25892,7 @@
         </p:nvSpPr>
         <p:spPr>
           <a:xfrm>
-            <a:off x="3657600" y="4974336"/>
+            <a:off x="3657600" y="4919472"/>
             <a:ext cx="2926080" cy="502920"/>
           </a:xfrm>
           <a:prstGeom prst="roundRect">
@@ -25833,7 +25914,7 @@
         </p:nvSpPr>
         <p:spPr>
           <a:xfrm>
-            <a:off x="3657600" y="4974336"/>
+            <a:off x="3657600" y="4919472"/>
             <a:ext cx="2926080" cy="502920"/>
           </a:xfrm>
           <a:prstGeom prst="rect">
@@ -25872,7 +25953,7 @@
         </p:nvSpPr>
         <p:spPr>
           <a:xfrm>
-            <a:off x="6812280" y="4974336"/>
+            <a:off x="6812280" y="4919472"/>
             <a:ext cx="2926080" cy="502920"/>
           </a:xfrm>
           <a:prstGeom prst="roundRect">
@@ -25894,7 +25975,7 @@
         </p:nvSpPr>
         <p:spPr>
           <a:xfrm>
-            <a:off x="6812280" y="4974336"/>
+            <a:off x="6812280" y="4919472"/>
             <a:ext cx="2926080" cy="502920"/>
           </a:xfrm>
           <a:prstGeom prst="rect">
@@ -25933,12 +26014,12 @@
         </p:nvSpPr>
         <p:spPr>
           <a:xfrm>
-            <a:off x="502920" y="5650992"/>
-            <a:ext cx="11155680" cy="658368"/>
+            <a:off x="502920" y="5596128"/>
+            <a:ext cx="11155680" cy="914400"/>
           </a:xfrm>
           <a:prstGeom prst="roundRect">
             <a:avLst>
-              <a:gd name="adj" fmla="val 13889"/>
+              <a:gd name="adj" fmla="val 10000"/>
             </a:avLst>
           </a:prstGeom>
           <a:solidFill>
@@ -25955,8 +26036,89 @@
         </p:nvSpPr>
         <p:spPr>
           <a:xfrm>
-            <a:off x="777240" y="5650992"/>
-            <a:ext cx="10607040" cy="658368"/>
+            <a:off x="777240" y="6071616"/>
+            <a:ext cx="10607040" cy="310896"/>
+          </a:xfrm>
+          <a:prstGeom prst="rect">
+            <a:avLst/>
+          </a:prstGeom>
+          <a:noFill/>
+          <a:ln/>
+        </p:spPr>
+        <p:txBody>
+          <a:bodyPr wrap="square" lIns="0" tIns="0" rIns="0" bIns="0" rtlCol="0" anchor="ctr"/>
+          <a:lstStyle/>
+          <a:p>
+            <a:pPr indent="0" marL="0">
+              <a:buNone/>
+            </a:pPr>
+            <a:r>
+              <a:rPr lang="en-US" sz="1000" b="1" spc="150" kern="0" dirty="0">
+                <a:solidFill>
+                  <a:srgbClr val="8FD7B8"/>
+                </a:solidFill>
+                <a:latin typeface="Calibri" pitchFamily="34" charset="0"/>
+                <a:ea typeface="Calibri" pitchFamily="34" charset="-122"/>
+                <a:cs typeface="Calibri" pitchFamily="34" charset="-120"/>
+              </a:rPr>
+              <a:t>SIGN IN  </a:t>
+            </a:r>
+            <a:pPr indent="0" marL="0">
+              <a:buNone/>
+            </a:pPr>
+            <a:r>
+              <a:rPr lang="en-US" sz="1150" dirty="0">
+                <a:solidFill>
+                  <a:srgbClr val="C9D4DD"/>
+                </a:solidFill>
+                <a:latin typeface="Calibri" pitchFamily="34" charset="0"/>
+                <a:ea typeface="Calibri" pitchFamily="34" charset="-122"/>
+                <a:cs typeface="Calibri" pitchFamily="34" charset="-120"/>
+              </a:rPr>
+              <a:t>underwriter / demo-underwriter-pw</a:t>
+            </a:r>
+            <a:pPr indent="0" marL="0">
+              <a:buNone/>
+            </a:pPr>
+            <a:r>
+              <a:rPr lang="en-US" sz="1150" dirty="0">
+                <a:solidFill>
+                  <a:srgbClr val="5A6E7C"/>
+                </a:solidFill>
+                <a:latin typeface="Calibri" pitchFamily="34" charset="0"/>
+                <a:ea typeface="Calibri" pitchFamily="34" charset="-122"/>
+                <a:cs typeface="Calibri" pitchFamily="34" charset="-120"/>
+              </a:rPr>
+              <a:t>   ·   </a:t>
+            </a:r>
+            <a:pPr indent="0" marL="0">
+              <a:buNone/>
+            </a:pPr>
+            <a:r>
+              <a:rPr lang="en-US" sz="1150" dirty="0">
+                <a:solidFill>
+                  <a:srgbClr val="C9D4DD"/>
+                </a:solidFill>
+                <a:latin typeface="Calibri" pitchFamily="34" charset="0"/>
+                <a:ea typeface="Calibri" pitchFamily="34" charset="-122"/>
+                <a:cs typeface="Calibri" pitchFamily="34" charset="-120"/>
+              </a:rPr>
+              <a:t>applicant / demo-applicant-pw</a:t>
+            </a:r>
+            <a:endParaRPr lang="en-US" sz="1000" dirty="0"/>
+          </a:p>
+        </p:txBody>
+      </p:sp>
+      <p:sp>
+        <p:nvSpPr>
+          <p:cNvPr id="27" name="Text 25"/>
+          <p:cNvSpPr txBox="1"/>
+          <p:nvPr/>
+        </p:nvSpPr>
+        <p:spPr>
+          <a:xfrm>
+            <a:off x="777240" y="5687568"/>
+            <a:ext cx="10607040" cy="384048"/>
           </a:xfrm>
           <a:prstGeom prst="rect">
             <a:avLst/>

--- a/docs/Pratyaya-Synchrony-Hackathon.pptx
+++ b/docs/Pratyaya-Synchrony-Hackathon.pptx
@@ -3770,6 +3770,45 @@
         </p:nvSpPr>
         <p:spPr>
           <a:xfrm>
+            <a:off x="502920" y="566928"/>
+            <a:ext cx="11155680" cy="274320"/>
+          </a:xfrm>
+          <a:prstGeom prst="rect">
+            <a:avLst/>
+          </a:prstGeom>
+          <a:noFill/>
+          <a:ln/>
+        </p:spPr>
+        <p:txBody>
+          <a:bodyPr wrap="square" lIns="0" tIns="0" rIns="0" bIns="0" rtlCol="0" anchor="ctr"/>
+          <a:lstStyle/>
+          <a:p>
+            <a:pPr algn="r" indent="0" marL="0">
+              <a:buNone/>
+            </a:pPr>
+            <a:r>
+              <a:rPr lang="en-US" sz="1150" b="1" spc="250" kern="0" dirty="0">
+                <a:solidFill>
+                  <a:srgbClr val="A8B8C4"/>
+                </a:solidFill>
+                <a:latin typeface="Calibri" pitchFamily="34" charset="0"/>
+                <a:ea typeface="Calibri" pitchFamily="34" charset="-122"/>
+                <a:cs typeface="Calibri" pitchFamily="34" charset="-120"/>
+              </a:rPr>
+              <a:t>NISHANT WADHWANI</a:t>
+            </a:r>
+            <a:endParaRPr lang="en-US" sz="1150" dirty="0"/>
+          </a:p>
+        </p:txBody>
+      </p:sp>
+      <p:sp>
+        <p:nvSpPr>
+          <p:cNvPr id="4" name="Text 2"/>
+          <p:cNvSpPr txBox="1"/>
+          <p:nvPr/>
+        </p:nvSpPr>
+        <p:spPr>
+          <a:xfrm>
             <a:off x="502920" y="1371600"/>
             <a:ext cx="11155680" cy="1234440"/>
           </a:xfrm>
@@ -3803,7 +3842,7 @@
       </p:sp>
       <p:sp>
         <p:nvSpPr>
-          <p:cNvPr id="4" name="Text 2"/>
+          <p:cNvPr id="5" name="Text 3"/>
           <p:cNvSpPr txBox="1"/>
           <p:nvPr/>
         </p:nvSpPr>
@@ -3845,7 +3884,7 @@
       </p:sp>
       <p:sp>
         <p:nvSpPr>
-          <p:cNvPr id="5" name="Shape 3"/>
+          <p:cNvPr id="6" name="Shape 4"/>
           <p:cNvSpPr/>
           <p:nvPr/>
         </p:nvSpPr>
@@ -3867,7 +3906,7 @@
       </p:sp>
       <p:sp>
         <p:nvSpPr>
-          <p:cNvPr id="6" name="Text 4"/>
+          <p:cNvPr id="7" name="Text 5"/>
           <p:cNvSpPr txBox="1"/>
           <p:nvPr/>
         </p:nvSpPr>
@@ -3906,7 +3945,7 @@
       </p:sp>
       <p:sp>
         <p:nvSpPr>
-          <p:cNvPr id="7" name="Shape 5"/>
+          <p:cNvPr id="8" name="Shape 6"/>
           <p:cNvSpPr/>
           <p:nvPr/>
         </p:nvSpPr>
@@ -3928,7 +3967,7 @@
       </p:sp>
       <p:sp>
         <p:nvSpPr>
-          <p:cNvPr id="8" name="Text 6"/>
+          <p:cNvPr id="9" name="Text 7"/>
           <p:cNvSpPr txBox="1"/>
           <p:nvPr/>
         </p:nvSpPr>
@@ -3967,7 +4006,7 @@
       </p:sp>
       <p:sp>
         <p:nvSpPr>
-          <p:cNvPr id="9" name="Shape 7"/>
+          <p:cNvPr id="10" name="Shape 8"/>
           <p:cNvSpPr/>
           <p:nvPr/>
         </p:nvSpPr>
@@ -3989,7 +4028,7 @@
       </p:sp>
       <p:sp>
         <p:nvSpPr>
-          <p:cNvPr id="10" name="Text 8"/>
+          <p:cNvPr id="11" name="Text 9"/>
           <p:cNvSpPr txBox="1"/>
           <p:nvPr/>
         </p:nvSpPr>
@@ -4028,7 +4067,7 @@
       </p:sp>
       <p:sp>
         <p:nvSpPr>
-          <p:cNvPr id="11" name="Shape 9"/>
+          <p:cNvPr id="12" name="Shape 10"/>
           <p:cNvSpPr/>
           <p:nvPr/>
         </p:nvSpPr>
@@ -4050,7 +4089,7 @@
       </p:sp>
       <p:sp>
         <p:nvSpPr>
-          <p:cNvPr id="12" name="Text 10"/>
+          <p:cNvPr id="13" name="Text 11"/>
           <p:cNvSpPr txBox="1"/>
           <p:nvPr/>
         </p:nvSpPr>
@@ -4131,7 +4170,7 @@
       </p:sp>
       <p:sp>
         <p:nvSpPr>
-          <p:cNvPr id="13" name="Text 11"/>
+          <p:cNvPr id="14" name="Text 12"/>
           <p:cNvSpPr txBox="1"/>
           <p:nvPr/>
         </p:nvSpPr>
@@ -4226,7 +4265,7 @@
       </p:sp>
       <p:sp>
         <p:nvSpPr>
-          <p:cNvPr id="14" name="Shape 12"/>
+          <p:cNvPr id="15" name="Shape 13"/>
           <p:cNvSpPr/>
           <p:nvPr/>
         </p:nvSpPr>
@@ -4249,7 +4288,7 @@
       </p:sp>
       <p:sp>
         <p:nvSpPr>
-          <p:cNvPr id="15" name="Text 13"/>
+          <p:cNvPr id="16" name="Text 14"/>
           <p:cNvSpPr txBox="1"/>
           <p:nvPr/>
         </p:nvSpPr>
@@ -7843,7 +7882,7 @@
           </p:nvPr>
         </p:nvGraphicFramePr>
         <p:xfrm>
-          <a:off x="502920" y="2377440"/>
+          <a:off x="502920" y="2148840"/>
           <a:ext cx="11155680" cy="914400"/>
         </p:xfrm>
         <a:graphic>
@@ -9921,7 +9960,7 @@
         </p:nvSpPr>
         <p:spPr>
           <a:xfrm>
-            <a:off x="502920" y="2377440"/>
+            <a:off x="502920" y="2148840"/>
             <a:ext cx="11155680" cy="384048"/>
           </a:xfrm>
           <a:prstGeom prst="rect">
@@ -9941,7 +9980,7 @@
         </p:nvSpPr>
         <p:spPr>
           <a:xfrm>
-            <a:off x="640080" y="2377440"/>
+            <a:off x="640080" y="2148840"/>
             <a:ext cx="3566160" cy="384048"/>
           </a:xfrm>
           <a:prstGeom prst="rect">
@@ -9980,7 +10019,7 @@
         </p:nvSpPr>
         <p:spPr>
           <a:xfrm>
-            <a:off x="4251960" y="2377440"/>
+            <a:off x="4251960" y="2148840"/>
             <a:ext cx="1371600" cy="384048"/>
           </a:xfrm>
           <a:prstGeom prst="rect">
@@ -10019,7 +10058,7 @@
         </p:nvSpPr>
         <p:spPr>
           <a:xfrm>
-            <a:off x="5623560" y="2377440"/>
+            <a:off x="5623560" y="2148840"/>
             <a:ext cx="1554480" cy="384048"/>
           </a:xfrm>
           <a:prstGeom prst="rect">
@@ -10058,7 +10097,7 @@
         </p:nvSpPr>
         <p:spPr>
           <a:xfrm>
-            <a:off x="7178040" y="2377440"/>
+            <a:off x="7178040" y="2148840"/>
             <a:ext cx="2194560" cy="384048"/>
           </a:xfrm>
           <a:prstGeom prst="rect">
@@ -10097,7 +10136,7 @@
         </p:nvSpPr>
         <p:spPr>
           <a:xfrm>
-            <a:off x="9372600" y="2377440"/>
+            <a:off x="9372600" y="2148840"/>
             <a:ext cx="2286000" cy="384048"/>
           </a:xfrm>
           <a:prstGeom prst="rect">
@@ -10137,11 +10176,11 @@
         <p:spPr>
           <a:xfrm>
             <a:off x="502920" y="4572000"/>
-            <a:ext cx="11155680" cy="868680"/>
+            <a:ext cx="11155680" cy="804672"/>
           </a:xfrm>
           <a:prstGeom prst="roundRect">
             <a:avLst>
-              <a:gd name="adj" fmla="val 9474"/>
+              <a:gd name="adj" fmla="val 10227"/>
             </a:avLst>
           </a:prstGeom>
           <a:solidFill>
@@ -10166,7 +10205,7 @@
         <p:spPr>
           <a:xfrm>
             <a:off x="777240" y="4690872"/>
-            <a:ext cx="10607040" cy="630936"/>
+            <a:ext cx="10607040" cy="566928"/>
           </a:xfrm>
           <a:prstGeom prst="rect">
             <a:avLst/>
@@ -10207,12 +10246,12 @@
         </p:nvSpPr>
         <p:spPr>
           <a:xfrm>
-            <a:off x="502920" y="5577840"/>
-            <a:ext cx="11155680" cy="868680"/>
+            <a:off x="502920" y="5486400"/>
+            <a:ext cx="11155680" cy="1005840"/>
           </a:xfrm>
           <a:prstGeom prst="roundRect">
             <a:avLst>
-              <a:gd name="adj" fmla="val 9474"/>
+              <a:gd name="adj" fmla="val 8182"/>
             </a:avLst>
           </a:prstGeom>
           <a:solidFill>
@@ -10236,8 +10275,8 @@
         </p:nvSpPr>
         <p:spPr>
           <a:xfrm>
-            <a:off x="777240" y="5696712"/>
-            <a:ext cx="10607040" cy="630936"/>
+            <a:off x="777240" y="5605272"/>
+            <a:ext cx="10607040" cy="768096"/>
           </a:xfrm>
           <a:prstGeom prst="rect">
             <a:avLst/>
@@ -12654,7 +12693,7 @@
                 <a:ea typeface="Calibri" pitchFamily="34" charset="-122"/>
                 <a:cs typeface="Calibri" pitchFamily="34" charset="-120"/>
               </a:rPr>
-              <a:t>⏱</a:t>
+              <a:t>↔</a:t>
             </a:r>
             <a:endParaRPr lang="en-US" sz="1300" dirty="0"/>
           </a:p>
@@ -14546,8 +14585,8 @@
         </p:nvSpPr>
         <p:spPr>
           <a:xfrm>
-            <a:off x="822960" y="2212848"/>
-            <a:ext cx="6583680" cy="3474720"/>
+            <a:off x="822960" y="2194560"/>
+            <a:ext cx="6583680" cy="3611880"/>
           </a:xfrm>
           <a:prstGeom prst="rect">
             <a:avLst/>
@@ -14561,12 +14600,12 @@
           <a:p>
             <a:pPr indent="0" marL="0">
               <a:lnSpc>
-                <a:spcPts val="1900"/>
+                <a:spcPts val="1700"/>
               </a:lnSpc>
               <a:buNone/>
             </a:pPr>
             <a:r>
-              <a:rPr lang="en-US" sz="1300" dirty="0">
+              <a:rPr lang="en-US" sz="1200" dirty="0">
                 <a:solidFill>
                   <a:srgbClr val="16232E"/>
                 </a:solidFill>
@@ -14578,12 +14617,12 @@
             </a:r>
             <a:pPr indent="0" marL="0">
               <a:lnSpc>
-                <a:spcPts val="1900"/>
+                <a:spcPts val="1700"/>
               </a:lnSpc>
               <a:buNone/>
             </a:pPr>
             <a:r>
-              <a:rPr lang="en-US" sz="1300" b="1" dirty="0">
+              <a:rPr lang="en-US" sz="1200" b="1" dirty="0">
                 <a:solidFill>
                   <a:srgbClr val="0E6B4F"/>
                 </a:solidFill>
@@ -14595,12 +14634,12 @@
             </a:r>
             <a:pPr indent="0" marL="0">
               <a:lnSpc>
-                <a:spcPts val="1900"/>
+                <a:spcPts val="1700"/>
               </a:lnSpc>
               <a:buNone/>
             </a:pPr>
             <a:r>
-              <a:rPr lang="en-US" sz="1300" dirty="0">
+              <a:rPr lang="en-US" sz="1200" dirty="0">
                 <a:solidFill>
                   <a:srgbClr val="16232E"/>
                 </a:solidFill>
@@ -14610,26 +14649,26 @@
               </a:rPr>
               <a:t>.</a:t>
             </a:r>
-            <a:endParaRPr lang="en-US" sz="1300" dirty="0"/>
+            <a:endParaRPr lang="en-US" sz="1200" dirty="0"/>
           </a:p>
           <a:p>
             <a:pPr indent="0" marL="0">
               <a:lnSpc>
-                <a:spcPts val="1900"/>
+                <a:spcPts val="1700"/>
               </a:lnSpc>
               <a:buNone/>
             </a:pPr>
-            <a:endParaRPr lang="en-US" sz="1300" dirty="0"/>
+            <a:endParaRPr lang="en-US" sz="1200" dirty="0"/>
           </a:p>
           <a:p>
             <a:pPr indent="0" marL="0">
               <a:lnSpc>
-                <a:spcPts val="1900"/>
+                <a:spcPts val="1700"/>
               </a:lnSpc>
               <a:buNone/>
             </a:pPr>
             <a:r>
-              <a:rPr lang="en-US" sz="1300" dirty="0">
+              <a:rPr lang="en-US" sz="1200" dirty="0">
                 <a:solidFill>
                   <a:srgbClr val="16232E"/>
                 </a:solidFill>
@@ -14639,17 +14678,17 @@
               </a:rPr>
               <a:t>Our assessment identified a few areas that prevented approval. Your monthly instalment amount is currently too high relative to your income of </a:t>
             </a:r>
-            <a:endParaRPr lang="en-US" sz="1300" dirty="0"/>
+            <a:endParaRPr lang="en-US" sz="1200" dirty="0"/>
           </a:p>
           <a:p>
             <a:pPr indent="0" marL="0">
               <a:lnSpc>
-                <a:spcPts val="1900"/>
+                <a:spcPts val="1700"/>
               </a:lnSpc>
               <a:buNone/>
             </a:pPr>
             <a:r>
-              <a:rPr lang="en-US" sz="1300" b="1" dirty="0">
+              <a:rPr lang="en-US" sz="1200" b="1" dirty="0">
                 <a:solidFill>
                   <a:srgbClr val="000000"/>
                 </a:solidFill>
@@ -14661,12 +14700,12 @@
             </a:r>
             <a:pPr indent="0" marL="0">
               <a:lnSpc>
-                <a:spcPts val="1900"/>
+                <a:spcPts val="1700"/>
               </a:lnSpc>
               <a:buNone/>
             </a:pPr>
             <a:r>
-              <a:rPr lang="en-US" sz="1300" dirty="0">
+              <a:rPr lang="en-US" sz="1200" dirty="0">
                 <a:solidFill>
                   <a:srgbClr val="16232E"/>
                 </a:solidFill>
@@ -14676,26 +14715,26 @@
               </a:rPr>
               <a:t>. Additionally, we noted that your utility bills are often paid late and your mobile recharge pattern is irregular.</a:t>
             </a:r>
-            <a:endParaRPr lang="en-US" sz="1300" dirty="0"/>
+            <a:endParaRPr lang="en-US" sz="1200" dirty="0"/>
           </a:p>
           <a:p>
             <a:pPr indent="0" marL="0">
               <a:lnSpc>
-                <a:spcPts val="1900"/>
+                <a:spcPts val="1700"/>
               </a:lnSpc>
               <a:buNone/>
             </a:pPr>
-            <a:endParaRPr lang="en-US" sz="1300" dirty="0"/>
+            <a:endParaRPr lang="en-US" sz="1200" dirty="0"/>
           </a:p>
           <a:p>
             <a:pPr indent="0" marL="0">
               <a:lnSpc>
-                <a:spcPts val="1900"/>
+                <a:spcPts val="1700"/>
               </a:lnSpc>
               <a:buNone/>
             </a:pPr>
             <a:r>
-              <a:rPr lang="en-US" sz="1300" dirty="0">
+              <a:rPr lang="en-US" sz="1200" dirty="0">
                 <a:solidFill>
                   <a:srgbClr val="16232E"/>
                 </a:solidFill>
@@ -14705,17 +14744,17 @@
               </a:rPr>
               <a:t>To improve your chances for future applications, you could request a smaller loan amount, such as </a:t>
             </a:r>
-            <a:endParaRPr lang="en-US" sz="1300" dirty="0"/>
+            <a:endParaRPr lang="en-US" sz="1200" dirty="0"/>
           </a:p>
           <a:p>
             <a:pPr indent="0" marL="0">
               <a:lnSpc>
-                <a:spcPts val="1900"/>
+                <a:spcPts val="1700"/>
               </a:lnSpc>
               <a:buNone/>
             </a:pPr>
             <a:r>
-              <a:rPr lang="en-US" sz="1300" b="1" dirty="0">
+              <a:rPr lang="en-US" sz="1200" b="1" dirty="0">
                 <a:solidFill>
                   <a:srgbClr val="000000"/>
                 </a:solidFill>
@@ -14727,12 +14766,12 @@
             </a:r>
             <a:pPr indent="0" marL="0">
               <a:lnSpc>
-                <a:spcPts val="1900"/>
+                <a:spcPts val="1700"/>
               </a:lnSpc>
               <a:buNone/>
             </a:pPr>
             <a:r>
-              <a:rPr lang="en-US" sz="1300" dirty="0">
+              <a:rPr lang="en-US" sz="1200" dirty="0">
                 <a:solidFill>
                   <a:srgbClr val="16232E"/>
                 </a:solidFill>
@@ -14744,12 +14783,12 @@
             </a:r>
             <a:pPr indent="0" marL="0">
               <a:lnSpc>
-                <a:spcPts val="1900"/>
+                <a:spcPts val="1700"/>
               </a:lnSpc>
               <a:buNone/>
             </a:pPr>
             <a:r>
-              <a:rPr lang="en-US" sz="1300" b="1" dirty="0">
+              <a:rPr lang="en-US" sz="1200" b="1" dirty="0">
                 <a:solidFill>
                   <a:srgbClr val="000000"/>
                 </a:solidFill>
@@ -14761,12 +14800,12 @@
             </a:r>
             <a:pPr indent="0" marL="0">
               <a:lnSpc>
-                <a:spcPts val="1900"/>
+                <a:spcPts val="1700"/>
               </a:lnSpc>
               <a:buNone/>
             </a:pPr>
             <a:r>
-              <a:rPr lang="en-US" sz="1300" dirty="0">
+              <a:rPr lang="en-US" sz="1200" dirty="0">
                 <a:solidFill>
                   <a:srgbClr val="16232E"/>
                 </a:solidFill>
@@ -14776,26 +14815,26 @@
               </a:rPr>
               <a:t>. Both steps would lower your monthly instalment.</a:t>
             </a:r>
-            <a:endParaRPr lang="en-US" sz="1300" dirty="0"/>
+            <a:endParaRPr lang="en-US" sz="1200" dirty="0"/>
           </a:p>
           <a:p>
             <a:pPr indent="0" marL="0">
               <a:lnSpc>
-                <a:spcPts val="1900"/>
+                <a:spcPts val="1700"/>
               </a:lnSpc>
               <a:buNone/>
             </a:pPr>
-            <a:endParaRPr lang="en-US" sz="1300" dirty="0"/>
+            <a:endParaRPr lang="en-US" sz="1200" dirty="0"/>
           </a:p>
           <a:p>
             <a:pPr indent="0" marL="0">
               <a:lnSpc>
-                <a:spcPts val="1900"/>
+                <a:spcPts val="1700"/>
               </a:lnSpc>
               <a:buNone/>
             </a:pPr>
             <a:r>
-              <a:rPr lang="en-US" sz="1300" dirty="0">
+              <a:rPr lang="en-US" sz="1200" dirty="0">
                 <a:solidFill>
                   <a:srgbClr val="16232E"/>
                 </a:solidFill>
@@ -14805,17 +14844,17 @@
               </a:rPr>
               <a:t>In accordance with the RBI Fair Practices Code, we are providing these reasons for your application's decline in writing </a:t>
             </a:r>
-            <a:endParaRPr lang="en-US" sz="1300" dirty="0"/>
+            <a:endParaRPr lang="en-US" sz="1200" dirty="0"/>
           </a:p>
           <a:p>
             <a:pPr indent="0" marL="0">
               <a:lnSpc>
-                <a:spcPts val="1900"/>
+                <a:spcPts val="1700"/>
               </a:lnSpc>
               <a:buNone/>
             </a:pPr>
             <a:r>
-              <a:rPr lang="en-US" sz="1300" b="1" dirty="0">
+              <a:rPr lang="en-US" sz="1200" b="1" dirty="0">
                 <a:solidFill>
                   <a:srgbClr val="0E6B4F"/>
                 </a:solidFill>
@@ -14827,12 +14866,12 @@
             </a:r>
             <a:pPr indent="0" marL="0">
               <a:lnSpc>
-                <a:spcPts val="1900"/>
+                <a:spcPts val="1700"/>
               </a:lnSpc>
               <a:buNone/>
             </a:pPr>
             <a:r>
-              <a:rPr lang="en-US" sz="1300" dirty="0">
+              <a:rPr lang="en-US" sz="1200" dirty="0">
                 <a:solidFill>
                   <a:srgbClr val="16232E"/>
                 </a:solidFill>
@@ -14842,7 +14881,7 @@
               </a:rPr>
               <a:t>.</a:t>
             </a:r>
-            <a:endParaRPr lang="en-US" sz="1300" dirty="0"/>
+            <a:endParaRPr lang="en-US" sz="1200" dirty="0"/>
           </a:p>
         </p:txBody>
       </p:sp>
@@ -18164,7 +18203,7 @@
                 <a:ea typeface="Cambria" pitchFamily="34" charset="-122"/>
                 <a:cs typeface="Cambria" pitchFamily="34" charset="-120"/>
               </a:rPr>
-              <a:t>103</a:t>
+              <a:t>136</a:t>
             </a:r>
             <a:endParaRPr lang="en-US" sz="3400" dirty="0"/>
           </a:p>
@@ -18203,7 +18242,7 @@
                 <a:ea typeface="Calibri" pitchFamily="34" charset="-122"/>
                 <a:cs typeface="Calibri" pitchFamily="34" charset="-120"/>
               </a:rPr>
-              <a:t>Tests, 89% coverage</a:t>
+              <a:t>Tests, 88% coverage</a:t>
             </a:r>
             <a:endParaRPr lang="en-US" sz="1300" dirty="0"/>
           </a:p>
@@ -19951,7 +19990,7 @@
                 <a:ea typeface="Calibri" pitchFamily="34" charset="-122"/>
                 <a:cs typeface="Calibri" pitchFamily="34" charset="-120"/>
               </a:rPr>
-              <a:t>⚿</a:t>
+              <a:t>⊗</a:t>
             </a:r>
             <a:endParaRPr lang="en-US" sz="1300" dirty="0"/>
           </a:p>
@@ -20426,7 +20465,7 @@
               <a:buNone/>
             </a:pPr>
             <a:r>
-              <a:rPr lang="en-US" sz="1000" dirty="0">
+              <a:rPr lang="en-US" sz="1050" dirty="0">
                 <a:solidFill>
                   <a:srgbClr val="5A6570"/>
                 </a:solidFill>
@@ -20434,48 +20473,6 @@
                 <a:ea typeface="Calibri" pitchFamily="34" charset="-122"/>
                 <a:cs typeface="Calibri" pitchFamily="34" charset="-120"/>
               </a:rPr>
-              <a:t>E3F0E9</a:t>
-            </a:r>
-            <a:endParaRPr lang="en-US" sz="1000" dirty="0"/>
-          </a:p>
-        </p:txBody>
-      </p:sp>
-      <p:sp>
-        <p:nvSpPr>
-          <p:cNvPr id="7" name="Text 5"/>
-          <p:cNvSpPr txBox="1"/>
-          <p:nvPr/>
-        </p:nvSpPr>
-        <p:spPr>
-          <a:xfrm>
-            <a:off x="649224" y="1975104"/>
-            <a:ext cx="2208276" cy="566928"/>
-          </a:xfrm>
-          <a:prstGeom prst="rect">
-            <a:avLst/>
-          </a:prstGeom>
-          <a:noFill/>
-          <a:ln/>
-        </p:spPr>
-        <p:txBody>
-          <a:bodyPr wrap="square" lIns="0" tIns="0" rIns="0" bIns="0" rtlCol="0" anchor="ctr"/>
-          <a:lstStyle/>
-          <a:p>
-            <a:pPr indent="0" marL="0">
-              <a:lnSpc>
-                <a:spcPts val="1300"/>
-              </a:lnSpc>
-              <a:buNone/>
-            </a:pPr>
-            <a:r>
-              <a:rPr lang="en-US" sz="1050" dirty="0">
-                <a:solidFill>
-                  <a:srgbClr val="5A6570"/>
-                </a:solidFill>
-                <a:latin typeface="Calibri" pitchFamily="34" charset="0"/>
-                <a:ea typeface="Calibri" pitchFamily="34" charset="-122"/>
-                <a:cs typeface="Calibri" pitchFamily="34" charset="-120"/>
-              </a:rPr>
               <a:t>grants consent, and may revoke it at any time</a:t>
             </a:r>
             <a:endParaRPr lang="en-US" sz="1050" dirty="0"/>
@@ -20484,7 +20481,7 @@
       </p:sp>
       <p:sp>
         <p:nvSpPr>
-          <p:cNvPr id="8" name="Shape 6"/>
+          <p:cNvPr id="7" name="Shape 5"/>
           <p:cNvSpPr/>
           <p:nvPr/>
         </p:nvSpPr>
@@ -20508,7 +20505,7 @@
       </p:sp>
       <p:sp>
         <p:nvSpPr>
-          <p:cNvPr id="9" name="Shape 7"/>
+          <p:cNvPr id="8" name="Shape 6"/>
           <p:cNvSpPr/>
           <p:nvPr/>
         </p:nvSpPr>
@@ -20542,7 +20539,7 @@
       </p:sp>
       <p:sp>
         <p:nvSpPr>
-          <p:cNvPr id="10" name="Text 8"/>
+          <p:cNvPr id="9" name="Text 7"/>
           <p:cNvSpPr txBox="1"/>
           <p:nvPr/>
         </p:nvSpPr>
@@ -20581,7 +20578,7 @@
       </p:sp>
       <p:sp>
         <p:nvSpPr>
-          <p:cNvPr id="11" name="Text 9"/>
+          <p:cNvPr id="10" name="Text 8"/>
           <p:cNvSpPr txBox="1"/>
           <p:nvPr/>
         </p:nvSpPr>
@@ -20607,7 +20604,7 @@
               <a:buNone/>
             </a:pPr>
             <a:r>
-              <a:rPr lang="en-US" sz="1000" dirty="0">
+              <a:rPr lang="en-US" sz="1050" dirty="0">
                 <a:solidFill>
                   <a:srgbClr val="5A6570"/>
                 </a:solidFill>
@@ -20615,48 +20612,6 @@
                 <a:ea typeface="Calibri" pitchFamily="34" charset="-122"/>
                 <a:cs typeface="Calibri" pitchFamily="34" charset="-120"/>
               </a:rPr>
-              <a:t>FFFFFF</a:t>
-            </a:r>
-            <a:endParaRPr lang="en-US" sz="1000" dirty="0"/>
-          </a:p>
-        </p:txBody>
-      </p:sp>
-      <p:sp>
-        <p:nvSpPr>
-          <p:cNvPr id="12" name="Text 10"/>
-          <p:cNvSpPr txBox="1"/>
-          <p:nvPr/>
-        </p:nvSpPr>
-        <p:spPr>
-          <a:xfrm>
-            <a:off x="3534156" y="1975104"/>
-            <a:ext cx="2208276" cy="566928"/>
-          </a:xfrm>
-          <a:prstGeom prst="rect">
-            <a:avLst/>
-          </a:prstGeom>
-          <a:noFill/>
-          <a:ln/>
-        </p:spPr>
-        <p:txBody>
-          <a:bodyPr wrap="square" lIns="0" tIns="0" rIns="0" bIns="0" rtlCol="0" anchor="ctr"/>
-          <a:lstStyle/>
-          <a:p>
-            <a:pPr indent="0" marL="0">
-              <a:lnSpc>
-                <a:spcPts val="1300"/>
-              </a:lnSpc>
-              <a:buNone/>
-            </a:pPr>
-            <a:r>
-              <a:rPr lang="en-US" sz="1050" dirty="0">
-                <a:solidFill>
-                  <a:srgbClr val="5A6570"/>
-                </a:solidFill>
-                <a:latin typeface="Calibri" pitchFamily="34" charset="0"/>
-                <a:ea typeface="Calibri" pitchFamily="34" charset="-122"/>
-                <a:cs typeface="Calibri" pitchFamily="34" charset="-120"/>
-              </a:rPr>
               <a:t>moves the data and may not read, store or resell it</a:t>
             </a:r>
             <a:endParaRPr lang="en-US" sz="1050" dirty="0"/>
@@ -20665,7 +20620,7 @@
       </p:sp>
       <p:sp>
         <p:nvSpPr>
-          <p:cNvPr id="13" name="Shape 11"/>
+          <p:cNvPr id="11" name="Shape 9"/>
           <p:cNvSpPr/>
           <p:nvPr/>
         </p:nvSpPr>
@@ -20689,7 +20644,7 @@
       </p:sp>
       <p:sp>
         <p:nvSpPr>
-          <p:cNvPr id="14" name="Shape 12"/>
+          <p:cNvPr id="12" name="Shape 10"/>
           <p:cNvSpPr/>
           <p:nvPr/>
         </p:nvSpPr>
@@ -20723,7 +20678,7 @@
       </p:sp>
       <p:sp>
         <p:nvSpPr>
-          <p:cNvPr id="15" name="Text 13"/>
+          <p:cNvPr id="13" name="Text 11"/>
           <p:cNvSpPr txBox="1"/>
           <p:nvPr/>
         </p:nvSpPr>
@@ -20762,7 +20717,7 @@
       </p:sp>
       <p:sp>
         <p:nvSpPr>
-          <p:cNvPr id="16" name="Text 14"/>
+          <p:cNvPr id="14" name="Text 12"/>
           <p:cNvSpPr txBox="1"/>
           <p:nvPr/>
         </p:nvSpPr>
@@ -20788,7 +20743,7 @@
               <a:buNone/>
             </a:pPr>
             <a:r>
-              <a:rPr lang="en-US" sz="1000" dirty="0">
+              <a:rPr lang="en-US" sz="1050" dirty="0">
                 <a:solidFill>
                   <a:srgbClr val="5A6570"/>
                 </a:solidFill>
@@ -20796,48 +20751,6 @@
                 <a:ea typeface="Calibri" pitchFamily="34" charset="-122"/>
                 <a:cs typeface="Calibri" pitchFamily="34" charset="-120"/>
               </a:rPr>
-              <a:t>FFFFFF</a:t>
-            </a:r>
-            <a:endParaRPr lang="en-US" sz="1000" dirty="0"/>
-          </a:p>
-        </p:txBody>
-      </p:sp>
-      <p:sp>
-        <p:nvSpPr>
-          <p:cNvPr id="17" name="Text 15"/>
-          <p:cNvSpPr txBox="1"/>
-          <p:nvPr/>
-        </p:nvSpPr>
-        <p:spPr>
-          <a:xfrm>
-            <a:off x="6419088" y="1975104"/>
-            <a:ext cx="2208276" cy="566928"/>
-          </a:xfrm>
-          <a:prstGeom prst="rect">
-            <a:avLst/>
-          </a:prstGeom>
-          <a:noFill/>
-          <a:ln/>
-        </p:spPr>
-        <p:txBody>
-          <a:bodyPr wrap="square" lIns="0" tIns="0" rIns="0" bIns="0" rtlCol="0" anchor="ctr"/>
-          <a:lstStyle/>
-          <a:p>
-            <a:pPr indent="0" marL="0">
-              <a:lnSpc>
-                <a:spcPts val="1300"/>
-              </a:lnSpc>
-              <a:buNone/>
-            </a:pPr>
-            <a:r>
-              <a:rPr lang="en-US" sz="1050" dirty="0">
-                <a:solidFill>
-                  <a:srgbClr val="5A6570"/>
-                </a:solidFill>
-                <a:latin typeface="Calibri" pitchFamily="34" charset="0"/>
-                <a:ea typeface="Calibri" pitchFamily="34" charset="-122"/>
-                <a:cs typeface="Calibri" pitchFamily="34" charset="-120"/>
-              </a:rPr>
               <a:t>release only what the consent artefact names</a:t>
             </a:r>
             <a:endParaRPr lang="en-US" sz="1050" dirty="0"/>
@@ -20846,7 +20759,7 @@
       </p:sp>
       <p:sp>
         <p:nvSpPr>
-          <p:cNvPr id="18" name="Shape 16"/>
+          <p:cNvPr id="15" name="Shape 13"/>
           <p:cNvSpPr/>
           <p:nvPr/>
         </p:nvSpPr>
@@ -20870,7 +20783,7 @@
       </p:sp>
       <p:sp>
         <p:nvSpPr>
-          <p:cNvPr id="19" name="Shape 17"/>
+          <p:cNvPr id="16" name="Shape 14"/>
           <p:cNvSpPr/>
           <p:nvPr/>
         </p:nvSpPr>
@@ -20904,7 +20817,7 @@
       </p:sp>
       <p:sp>
         <p:nvSpPr>
-          <p:cNvPr id="20" name="Text 18"/>
+          <p:cNvPr id="17" name="Text 15"/>
           <p:cNvSpPr txBox="1"/>
           <p:nvPr/>
         </p:nvSpPr>
@@ -20943,7 +20856,7 @@
       </p:sp>
       <p:sp>
         <p:nvSpPr>
-          <p:cNvPr id="21" name="Text 19"/>
+          <p:cNvPr id="18" name="Text 16"/>
           <p:cNvSpPr txBox="1"/>
           <p:nvPr/>
         </p:nvSpPr>
@@ -20969,7 +20882,7 @@
               <a:buNone/>
             </a:pPr>
             <a:r>
-              <a:rPr lang="en-US" sz="1000" dirty="0">
+              <a:rPr lang="en-US" sz="1050" dirty="0">
                 <a:solidFill>
                   <a:srgbClr val="5A6570"/>
                 </a:solidFill>
@@ -20977,48 +20890,6 @@
                 <a:ea typeface="Calibri" pitchFamily="34" charset="-122"/>
                 <a:cs typeface="Calibri" pitchFamily="34" charset="-120"/>
               </a:rPr>
-              <a:t>E3F0E9</a:t>
-            </a:r>
-            <a:endParaRPr lang="en-US" sz="1000" dirty="0"/>
-          </a:p>
-        </p:txBody>
-      </p:sp>
-      <p:sp>
-        <p:nvSpPr>
-          <p:cNvPr id="22" name="Text 20"/>
-          <p:cNvSpPr txBox="1"/>
-          <p:nvPr/>
-        </p:nvSpPr>
-        <p:spPr>
-          <a:xfrm>
-            <a:off x="9304020" y="1975104"/>
-            <a:ext cx="2208276" cy="566928"/>
-          </a:xfrm>
-          <a:prstGeom prst="rect">
-            <a:avLst/>
-          </a:prstGeom>
-          <a:noFill/>
-          <a:ln/>
-        </p:spPr>
-        <p:txBody>
-          <a:bodyPr wrap="square" lIns="0" tIns="0" rIns="0" bIns="0" rtlCol="0" anchor="ctr"/>
-          <a:lstStyle/>
-          <a:p>
-            <a:pPr indent="0" marL="0">
-              <a:lnSpc>
-                <a:spcPts val="1300"/>
-              </a:lnSpc>
-              <a:buNone/>
-            </a:pPr>
-            <a:r>
-              <a:rPr lang="en-US" sz="1050" dirty="0">
-                <a:solidFill>
-                  <a:srgbClr val="5A6570"/>
-                </a:solidFill>
-                <a:latin typeface="Calibri" pitchFamily="34" charset="0"/>
-                <a:ea typeface="Calibri" pitchFamily="34" charset="-122"/>
-                <a:cs typeface="Calibri" pitchFamily="34" charset="-120"/>
-              </a:rPr>
               <a:t>may use it only for the purpose recorded</a:t>
             </a:r>
             <a:endParaRPr lang="en-US" sz="1050" dirty="0"/>
@@ -21027,7 +20898,7 @@
       </p:sp>
       <p:sp>
         <p:nvSpPr>
-          <p:cNvPr id="23" name="Text 21"/>
+          <p:cNvPr id="19" name="Text 17"/>
           <p:cNvSpPr txBox="1"/>
           <p:nvPr/>
         </p:nvSpPr>
@@ -21066,7 +20937,7 @@
       </p:sp>
       <p:sp>
         <p:nvSpPr>
-          <p:cNvPr id="24" name="Shape 22"/>
+          <p:cNvPr id="20" name="Shape 18"/>
           <p:cNvSpPr/>
           <p:nvPr/>
         </p:nvSpPr>
@@ -21100,7 +20971,7 @@
       </p:sp>
       <p:sp>
         <p:nvSpPr>
-          <p:cNvPr id="25" name="Text 23"/>
+          <p:cNvPr id="21" name="Text 19"/>
           <p:cNvSpPr txBox="1"/>
           <p:nvPr/>
         </p:nvSpPr>
@@ -21139,7 +21010,7 @@
       </p:sp>
       <p:sp>
         <p:nvSpPr>
-          <p:cNvPr id="26" name="Text 24"/>
+          <p:cNvPr id="22" name="Text 20"/>
           <p:cNvSpPr txBox="1"/>
           <p:nvPr/>
         </p:nvSpPr>
@@ -21181,7 +21052,7 @@
       </p:sp>
       <p:sp>
         <p:nvSpPr>
-          <p:cNvPr id="27" name="Shape 25"/>
+          <p:cNvPr id="23" name="Shape 21"/>
           <p:cNvSpPr/>
           <p:nvPr/>
         </p:nvSpPr>
@@ -21215,7 +21086,7 @@
       </p:sp>
       <p:sp>
         <p:nvSpPr>
-          <p:cNvPr id="28" name="Text 26"/>
+          <p:cNvPr id="24" name="Text 22"/>
           <p:cNvSpPr txBox="1"/>
           <p:nvPr/>
         </p:nvSpPr>
@@ -21254,7 +21125,7 @@
       </p:sp>
       <p:sp>
         <p:nvSpPr>
-          <p:cNvPr id="29" name="Text 27"/>
+          <p:cNvPr id="25" name="Text 23"/>
           <p:cNvSpPr txBox="1"/>
           <p:nvPr/>
         </p:nvSpPr>
@@ -21296,7 +21167,7 @@
       </p:sp>
       <p:sp>
         <p:nvSpPr>
-          <p:cNvPr id="30" name="Shape 28"/>
+          <p:cNvPr id="26" name="Shape 24"/>
           <p:cNvSpPr/>
           <p:nvPr/>
         </p:nvSpPr>
@@ -21330,7 +21201,7 @@
       </p:sp>
       <p:sp>
         <p:nvSpPr>
-          <p:cNvPr id="31" name="Text 29"/>
+          <p:cNvPr id="27" name="Text 25"/>
           <p:cNvSpPr txBox="1"/>
           <p:nvPr/>
         </p:nvSpPr>
@@ -21369,7 +21240,7 @@
       </p:sp>
       <p:sp>
         <p:nvSpPr>
-          <p:cNvPr id="32" name="Text 30"/>
+          <p:cNvPr id="28" name="Text 26"/>
           <p:cNvSpPr txBox="1"/>
           <p:nvPr/>
         </p:nvSpPr>
@@ -21411,7 +21282,7 @@
       </p:sp>
       <p:sp>
         <p:nvSpPr>
-          <p:cNvPr id="33" name="Shape 31"/>
+          <p:cNvPr id="29" name="Shape 27"/>
           <p:cNvSpPr/>
           <p:nvPr/>
         </p:nvSpPr>
@@ -21445,7 +21316,7 @@
       </p:sp>
       <p:sp>
         <p:nvSpPr>
-          <p:cNvPr id="34" name="Text 32"/>
+          <p:cNvPr id="30" name="Text 28"/>
           <p:cNvSpPr txBox="1"/>
           <p:nvPr/>
         </p:nvSpPr>
@@ -21484,7 +21355,7 @@
       </p:sp>
       <p:sp>
         <p:nvSpPr>
-          <p:cNvPr id="35" name="Text 33"/>
+          <p:cNvPr id="31" name="Text 29"/>
           <p:cNvSpPr txBox="1"/>
           <p:nvPr/>
         </p:nvSpPr>
@@ -21526,7 +21397,7 @@
       </p:sp>
       <p:sp>
         <p:nvSpPr>
-          <p:cNvPr id="36" name="Shape 34"/>
+          <p:cNvPr id="32" name="Shape 30"/>
           <p:cNvSpPr/>
           <p:nvPr/>
         </p:nvSpPr>
@@ -21560,7 +21431,7 @@
       </p:sp>
       <p:sp>
         <p:nvSpPr>
-          <p:cNvPr id="37" name="Text 35"/>
+          <p:cNvPr id="33" name="Text 31"/>
           <p:cNvSpPr txBox="1"/>
           <p:nvPr/>
         </p:nvSpPr>
@@ -21599,7 +21470,7 @@
       </p:sp>
       <p:sp>
         <p:nvSpPr>
-          <p:cNvPr id="38" name="Text 36"/>
+          <p:cNvPr id="34" name="Text 32"/>
           <p:cNvSpPr txBox="1"/>
           <p:nvPr/>
         </p:nvSpPr>
@@ -21641,7 +21512,7 @@
       </p:sp>
       <p:sp>
         <p:nvSpPr>
-          <p:cNvPr id="39" name="Text 37"/>
+          <p:cNvPr id="35" name="Text 33"/>
           <p:cNvSpPr txBox="1"/>
           <p:nvPr/>
         </p:nvSpPr>
@@ -21694,7 +21565,7 @@
       </p:sp>
       <p:sp>
         <p:nvSpPr>
-          <p:cNvPr id="40" name="Shape 38"/>
+          <p:cNvPr id="36" name="Shape 34"/>
           <p:cNvSpPr/>
           <p:nvPr/>
         </p:nvSpPr>
@@ -21717,7 +21588,7 @@
       </p:sp>
       <p:sp>
         <p:nvSpPr>
-          <p:cNvPr id="41" name="Text 39"/>
+          <p:cNvPr id="37" name="Text 35"/>
           <p:cNvSpPr txBox="1"/>
           <p:nvPr/>
         </p:nvSpPr>
@@ -21770,7 +21641,7 @@
       </p:sp>
       <p:sp>
         <p:nvSpPr>
-          <p:cNvPr id="42" name="Shape 40"/>
+          <p:cNvPr id="38" name="Shape 36"/>
           <p:cNvSpPr/>
           <p:nvPr/>
         </p:nvSpPr>
@@ -21793,7 +21664,7 @@
       </p:sp>
       <p:sp>
         <p:nvSpPr>
-          <p:cNvPr id="43" name="Text 41"/>
+          <p:cNvPr id="39" name="Text 37"/>
           <p:cNvSpPr txBox="1"/>
           <p:nvPr/>
         </p:nvSpPr>
@@ -21846,7 +21717,7 @@
       </p:sp>
       <p:sp>
         <p:nvSpPr>
-          <p:cNvPr id="44" name="Shape 42"/>
+          <p:cNvPr id="40" name="Shape 38"/>
           <p:cNvSpPr/>
           <p:nvPr/>
         </p:nvSpPr>
@@ -21869,7 +21740,7 @@
       </p:sp>
       <p:sp>
         <p:nvSpPr>
-          <p:cNvPr id="45" name="Text 43"/>
+          <p:cNvPr id="41" name="Text 39"/>
           <p:cNvSpPr txBox="1"/>
           <p:nvPr/>
         </p:nvSpPr>
@@ -21922,7 +21793,7 @@
       </p:sp>
       <p:sp>
         <p:nvSpPr>
-          <p:cNvPr id="46" name="Shape 44"/>
+          <p:cNvPr id="42" name="Shape 40"/>
           <p:cNvSpPr/>
           <p:nvPr/>
         </p:nvSpPr>
@@ -21945,7 +21816,7 @@
       </p:sp>
       <p:sp>
         <p:nvSpPr>
-          <p:cNvPr id="47" name="Text 45"/>
+          <p:cNvPr id="43" name="Text 41"/>
           <p:cNvSpPr txBox="1"/>
           <p:nvPr/>
         </p:nvSpPr>
@@ -24462,7 +24333,7 @@
                 <a:ea typeface="Calibri" pitchFamily="34" charset="-122"/>
                 <a:cs typeface="Calibri" pitchFamily="34" charset="-120"/>
               </a:rPr>
-              <a:t>Public. 34 commits, CI green on every push, 136 tests, README with setup for the API and the interface, and a model card.</a:t>
+              <a:t>Public. CI green on every push, 136 tests at 88% coverage, README with setup for the API and the interface, and a model card.</a:t>
             </a:r>
             <a:endParaRPr lang="en-US" sz="1250" dirty="0"/>
           </a:p>
@@ -25176,12 +25047,51 @@
           <a:bodyPr wrap="square" lIns="0" tIns="0" rIns="0" bIns="0" rtlCol="0" anchor="ctr"/>
           <a:lstStyle/>
           <a:p>
-            <a:pPr indent="0" marL="0">
+            <a:pPr algn="r" indent="0" marL="0">
               <a:buNone/>
             </a:pPr>
             <a:r>
               <a:rPr lang="en-US" sz="1150" b="1" spc="250" kern="0" dirty="0">
                 <a:solidFill>
+                  <a:srgbClr val="A8B8C4"/>
+                </a:solidFill>
+                <a:latin typeface="Calibri" pitchFamily="34" charset="0"/>
+                <a:ea typeface="Calibri" pitchFamily="34" charset="-122"/>
+                <a:cs typeface="Calibri" pitchFamily="34" charset="-120"/>
+              </a:rPr>
+              <a:t>NISHANT WADHWANI</a:t>
+            </a:r>
+            <a:endParaRPr lang="en-US" sz="1150" dirty="0"/>
+          </a:p>
+        </p:txBody>
+      </p:sp>
+      <p:sp>
+        <p:nvSpPr>
+          <p:cNvPr id="3" name="Text 1"/>
+          <p:cNvSpPr txBox="1"/>
+          <p:nvPr/>
+        </p:nvSpPr>
+        <p:spPr>
+          <a:xfrm>
+            <a:off x="502920" y="502920"/>
+            <a:ext cx="11155680" cy="274320"/>
+          </a:xfrm>
+          <a:prstGeom prst="rect">
+            <a:avLst/>
+          </a:prstGeom>
+          <a:noFill/>
+          <a:ln/>
+        </p:spPr>
+        <p:txBody>
+          <a:bodyPr wrap="square" lIns="0" tIns="0" rIns="0" bIns="0" rtlCol="0" anchor="ctr"/>
+          <a:lstStyle/>
+          <a:p>
+            <a:pPr indent="0" marL="0">
+              <a:buNone/>
+            </a:pPr>
+            <a:r>
+              <a:rPr lang="en-US" sz="1150" b="1" spc="250" kern="0" dirty="0">
+                <a:solidFill>
                   <a:srgbClr val="8FD7B8"/>
                 </a:solidFill>
                 <a:latin typeface="Calibri" pitchFamily="34" charset="0"/>
@@ -25196,7 +25106,7 @@
       </p:sp>
       <p:sp>
         <p:nvSpPr>
-          <p:cNvPr id="3" name="Text 1"/>
+          <p:cNvPr id="4" name="Text 2"/>
           <p:cNvSpPr txBox="1"/>
           <p:nvPr/>
         </p:nvSpPr>
@@ -25235,7 +25145,7 @@
       </p:sp>
       <p:sp>
         <p:nvSpPr>
-          <p:cNvPr id="4" name="Shape 2"/>
+          <p:cNvPr id="5" name="Shape 3"/>
           <p:cNvSpPr/>
           <p:nvPr/>
         </p:nvSpPr>
@@ -25255,7 +25165,7 @@
       </p:sp>
       <p:sp>
         <p:nvSpPr>
-          <p:cNvPr id="5" name="Text 3"/>
+          <p:cNvPr id="6" name="Text 4"/>
           <p:cNvSpPr txBox="1"/>
           <p:nvPr/>
         </p:nvSpPr>
@@ -25294,7 +25204,7 @@
       </p:sp>
       <p:sp>
         <p:nvSpPr>
-          <p:cNvPr id="6" name="Text 4"/>
+          <p:cNvPr id="7" name="Text 5"/>
           <p:cNvSpPr txBox="1"/>
           <p:nvPr/>
         </p:nvSpPr>
@@ -25353,7 +25263,7 @@
       </p:sp>
       <p:sp>
         <p:nvSpPr>
-          <p:cNvPr id="7" name="Shape 5"/>
+          <p:cNvPr id="8" name="Shape 6"/>
           <p:cNvSpPr/>
           <p:nvPr/>
         </p:nvSpPr>
@@ -25373,7 +25283,7 @@
       </p:sp>
       <p:sp>
         <p:nvSpPr>
-          <p:cNvPr id="8" name="Text 6"/>
+          <p:cNvPr id="9" name="Text 7"/>
           <p:cNvSpPr txBox="1"/>
           <p:nvPr/>
         </p:nvSpPr>
@@ -25412,7 +25322,7 @@
       </p:sp>
       <p:sp>
         <p:nvSpPr>
-          <p:cNvPr id="9" name="Text 7"/>
+          <p:cNvPr id="10" name="Text 8"/>
           <p:cNvSpPr txBox="1"/>
           <p:nvPr/>
         </p:nvSpPr>
@@ -25471,7 +25381,7 @@
       </p:sp>
       <p:sp>
         <p:nvSpPr>
-          <p:cNvPr id="10" name="Shape 8"/>
+          <p:cNvPr id="11" name="Shape 9"/>
           <p:cNvSpPr/>
           <p:nvPr/>
         </p:nvSpPr>
@@ -25491,7 +25401,7 @@
       </p:sp>
       <p:sp>
         <p:nvSpPr>
-          <p:cNvPr id="11" name="Text 9"/>
+          <p:cNvPr id="12" name="Text 10"/>
           <p:cNvSpPr txBox="1"/>
           <p:nvPr/>
         </p:nvSpPr>
@@ -25530,7 +25440,7 @@
       </p:sp>
       <p:sp>
         <p:nvSpPr>
-          <p:cNvPr id="12" name="Text 10"/>
+          <p:cNvPr id="13" name="Text 11"/>
           <p:cNvSpPr txBox="1"/>
           <p:nvPr/>
         </p:nvSpPr>
@@ -25589,7 +25499,7 @@
       </p:sp>
       <p:sp>
         <p:nvSpPr>
-          <p:cNvPr id="13" name="Shape 11"/>
+          <p:cNvPr id="14" name="Shape 12"/>
           <p:cNvSpPr/>
           <p:nvPr/>
         </p:nvSpPr>
@@ -25609,7 +25519,7 @@
       </p:sp>
       <p:sp>
         <p:nvSpPr>
-          <p:cNvPr id="14" name="Text 12"/>
+          <p:cNvPr id="15" name="Text 13"/>
           <p:cNvSpPr txBox="1"/>
           <p:nvPr/>
         </p:nvSpPr>
@@ -25648,7 +25558,7 @@
       </p:sp>
       <p:sp>
         <p:nvSpPr>
-          <p:cNvPr id="15" name="Text 13"/>
+          <p:cNvPr id="16" name="Text 14"/>
           <p:cNvSpPr txBox="1"/>
           <p:nvPr/>
         </p:nvSpPr>
@@ -25707,7 +25617,7 @@
       </p:sp>
       <p:sp>
         <p:nvSpPr>
-          <p:cNvPr id="16" name="Shape 14"/>
+          <p:cNvPr id="17" name="Shape 15"/>
           <p:cNvSpPr/>
           <p:nvPr/>
         </p:nvSpPr>
@@ -25727,7 +25637,7 @@
       </p:sp>
       <p:sp>
         <p:nvSpPr>
-          <p:cNvPr id="17" name="Text 15"/>
+          <p:cNvPr id="18" name="Text 16"/>
           <p:cNvSpPr txBox="1"/>
           <p:nvPr/>
         </p:nvSpPr>
@@ -25766,7 +25676,7 @@
       </p:sp>
       <p:sp>
         <p:nvSpPr>
-          <p:cNvPr id="18" name="Text 16"/>
+          <p:cNvPr id="19" name="Text 17"/>
           <p:cNvSpPr txBox="1"/>
           <p:nvPr/>
         </p:nvSpPr>
@@ -25825,7 +25735,7 @@
       </p:sp>
       <p:sp>
         <p:nvSpPr>
-          <p:cNvPr id="19" name="Shape 17"/>
+          <p:cNvPr id="20" name="Shape 18"/>
           <p:cNvSpPr/>
           <p:nvPr/>
         </p:nvSpPr>
@@ -25847,7 +25757,7 @@
       </p:sp>
       <p:sp>
         <p:nvSpPr>
-          <p:cNvPr id="20" name="Text 18"/>
+          <p:cNvPr id="21" name="Text 19"/>
           <p:cNvSpPr txBox="1"/>
           <p:nvPr/>
         </p:nvSpPr>
@@ -25886,7 +25796,7 @@
       </p:sp>
       <p:sp>
         <p:nvSpPr>
-          <p:cNvPr id="21" name="Shape 19"/>
+          <p:cNvPr id="22" name="Shape 20"/>
           <p:cNvSpPr/>
           <p:nvPr/>
         </p:nvSpPr>
@@ -25908,7 +25818,7 @@
       </p:sp>
       <p:sp>
         <p:nvSpPr>
-          <p:cNvPr id="22" name="Text 20"/>
+          <p:cNvPr id="23" name="Text 21"/>
           <p:cNvSpPr txBox="1"/>
           <p:nvPr/>
         </p:nvSpPr>
@@ -25947,7 +25857,7 @@
       </p:sp>
       <p:sp>
         <p:nvSpPr>
-          <p:cNvPr id="23" name="Shape 21"/>
+          <p:cNvPr id="24" name="Shape 22"/>
           <p:cNvSpPr/>
           <p:nvPr/>
         </p:nvSpPr>
@@ -25969,7 +25879,7 @@
       </p:sp>
       <p:sp>
         <p:nvSpPr>
-          <p:cNvPr id="24" name="Text 22"/>
+          <p:cNvPr id="25" name="Text 23"/>
           <p:cNvSpPr txBox="1"/>
           <p:nvPr/>
         </p:nvSpPr>
@@ -26008,7 +25918,7 @@
       </p:sp>
       <p:sp>
         <p:nvSpPr>
-          <p:cNvPr id="25" name="Shape 23"/>
+          <p:cNvPr id="26" name="Shape 24"/>
           <p:cNvSpPr/>
           <p:nvPr/>
         </p:nvSpPr>
@@ -26030,7 +25940,7 @@
       </p:sp>
       <p:sp>
         <p:nvSpPr>
-          <p:cNvPr id="26" name="Text 24"/>
+          <p:cNvPr id="27" name="Text 25"/>
           <p:cNvSpPr txBox="1"/>
           <p:nvPr/>
         </p:nvSpPr>
@@ -26111,7 +26021,7 @@
       </p:sp>
       <p:sp>
         <p:nvSpPr>
-          <p:cNvPr id="27" name="Text 25"/>
+          <p:cNvPr id="28" name="Text 26"/>
           <p:cNvSpPr txBox="1"/>
           <p:nvPr/>
         </p:nvSpPr>
